--- a/tmp-tj/261028_cotiplast_audit-reseaux-sociaux_v1.pptx
+++ b/tmp-tj/261028_cotiplast_audit-reseaux-sociaux_v1.pptx
@@ -174,7 +174,7 @@
             <c:idx val="0"/>
             <c:spPr>
               <a:solidFill>
-                <a:srgbClr val="FD8103"/>
+                <a:srgbClr val="B9B9B9"/>
               </a:solidFill>
             </c:spPr>
           </c:dPt>
@@ -190,7 +190,7 @@
             <c:idx val="2"/>
             <c:spPr>
               <a:solidFill>
-                <a:srgbClr val="B9B9B9"/>
+                <a:srgbClr val="FD8103"/>
               </a:solidFill>
             </c:spPr>
           </c:dPt>
@@ -200,13 +200,13 @@
               <c:strCache>
                 <c:ptCount val="3"/>
                 <c:pt idx="0">
-                  <c:v>COTIPLAST</c:v>
+                  <c:v>SOFEM-CI</c:v>
                 </c:pt>
                 <c:pt idx="1">
                   <c:v>FLEPACI</c:v>
                 </c:pt>
                 <c:pt idx="2">
-                  <c:v>SOFEM-CI</c:v>
+                  <c:v>COTIPLAST</c:v>
                 </c:pt>
               </c:strCache>
             </c:strRef>
@@ -218,13 +218,13 @@
                 <c:formatCode>General</c:formatCode>
                 <c:ptCount val="3"/>
                 <c:pt idx="0">
-                  <c:v>5446</c:v>
+                  <c:v>138</c:v>
                 </c:pt>
                 <c:pt idx="1">
                   <c:v>576</c:v>
                 </c:pt>
                 <c:pt idx="2">
-                  <c:v>138</c:v>
+                  <c:v>5446</c:v>
                 </c:pt>
               </c:numCache>
             </c:numRef>
@@ -257,7 +257,7 @@
       <c:catAx>
         <c:axId val="-2068027336"/>
         <c:scaling>
-          <c:orientation val="maxMin"/>
+          <c:orientation val="minMax"/>
         </c:scaling>
         <c:delete val="0"/>
         <c:axPos val="l"/>
@@ -362,7 +362,7 @@
             <c:idx val="0"/>
             <c:spPr>
               <a:solidFill>
-                <a:srgbClr val="FD8103"/>
+                <a:srgbClr val="B9B9B9"/>
               </a:solidFill>
             </c:spPr>
           </c:dPt>
@@ -386,7 +386,7 @@
             <c:idx val="3"/>
             <c:spPr>
               <a:solidFill>
-                <a:srgbClr val="B9B9B9"/>
+                <a:srgbClr val="FD8103"/>
               </a:solidFill>
             </c:spPr>
           </c:dPt>
@@ -396,16 +396,16 @@
               <c:strCache>
                 <c:ptCount val="4"/>
                 <c:pt idx="0">
-                  <c:v>Vidéos des équipes (2)</c:v>
+                  <c:v>Produits et services (12)</c:v>
                 </c:pt>
                 <c:pt idx="1">
+                  <c:v>Fêtes et causes (4)</c:v>
+                </c:pt>
+                <c:pt idx="2">
                   <c:v>Sondages (2)</c:v>
                 </c:pt>
-                <c:pt idx="2">
-                  <c:v>Fêtes et causes (4)</c:v>
-                </c:pt>
                 <c:pt idx="3">
-                  <c:v>Produits et services (12)</c:v>
+                  <c:v>Vidéos des équipes (2)</c:v>
                 </c:pt>
               </c:strCache>
             </c:strRef>
@@ -417,16 +417,16 @@
                 <c:formatCode>General</c:formatCode>
                 <c:ptCount val="4"/>
                 <c:pt idx="0">
-                  <c:v>65</c:v>
+                  <c:v>6</c:v>
                 </c:pt>
                 <c:pt idx="1">
+                  <c:v>17</c:v>
+                </c:pt>
+                <c:pt idx="2">
                   <c:v>24.5</c:v>
                 </c:pt>
-                <c:pt idx="2">
-                  <c:v>17</c:v>
-                </c:pt>
                 <c:pt idx="3">
-                  <c:v>6</c:v>
+                  <c:v>65</c:v>
                 </c:pt>
               </c:numCache>
             </c:numRef>
@@ -458,7 +458,7 @@
       <c:catAx>
         <c:axId val="-2068027336"/>
         <c:scaling>
-          <c:orientation val="maxMin"/>
+          <c:orientation val="minMax"/>
         </c:scaling>
         <c:delete val="0"/>
         <c:axPos val="l"/>
@@ -10417,7 +10417,7 @@
               </a:lnSpc>
             </a:pPr>
             <a:r>
-              <a:rPr sz="2500" b="1">
+              <a:rPr sz="2100" b="1">
                 <a:solidFill>
                   <a:srgbClr val="111111"/>
                 </a:solidFill>
@@ -10672,8 +10672,8 @@
         </p:nvSpPr>
         <p:spPr>
           <a:xfrm>
-            <a:off x="1836000" y="1943999"/>
-            <a:ext cx="3888000" cy="503999"/>
+            <a:off x="1836000" y="1907998"/>
+            <a:ext cx="3924000" cy="720000"/>
           </a:xfrm>
           <a:prstGeom prst="rect">
             <a:avLst/>
@@ -10692,7 +10692,7 @@
               </a:lnSpc>
             </a:pPr>
             <a:r>
-              <a:rPr sz="1900" b="1">
+              <a:rPr sz="1700" b="1">
                 <a:solidFill>
                   <a:srgbClr val="111111"/>
                 </a:solidFill>
@@ -10711,8 +10711,8 @@
         </p:nvSpPr>
         <p:spPr>
           <a:xfrm>
-            <a:off x="1836000" y="2519999"/>
-            <a:ext cx="3888000" cy="1007999"/>
+            <a:off x="1836000" y="2645999"/>
+            <a:ext cx="3924000" cy="972000"/>
           </a:xfrm>
           <a:prstGeom prst="rect">
             <a:avLst/>
@@ -10731,7 +10731,7 @@
               </a:lnSpc>
             </a:pPr>
             <a:r>
-              <a:rPr sz="1300" b="0">
+              <a:rPr sz="1250" b="0">
                 <a:solidFill>
                   <a:srgbClr val="5A5A5A"/>
                 </a:solidFill>
@@ -10864,8 +10864,8 @@
         </p:nvSpPr>
         <p:spPr>
           <a:xfrm>
-            <a:off x="7452000" y="1943999"/>
-            <a:ext cx="3888000" cy="503999"/>
+            <a:off x="7452000" y="1907998"/>
+            <a:ext cx="3924000" cy="720000"/>
           </a:xfrm>
           <a:prstGeom prst="rect">
             <a:avLst/>
@@ -10884,7 +10884,7 @@
               </a:lnSpc>
             </a:pPr>
             <a:r>
-              <a:rPr sz="1900" b="1">
+              <a:rPr sz="1700" b="1">
                 <a:solidFill>
                   <a:srgbClr val="111111"/>
                 </a:solidFill>
@@ -10903,8 +10903,8 @@
         </p:nvSpPr>
         <p:spPr>
           <a:xfrm>
-            <a:off x="7452000" y="2519999"/>
-            <a:ext cx="3888000" cy="1007999"/>
+            <a:off x="7452000" y="2645999"/>
+            <a:ext cx="3924000" cy="972000"/>
           </a:xfrm>
           <a:prstGeom prst="rect">
             <a:avLst/>
@@ -10923,7 +10923,7 @@
               </a:lnSpc>
             </a:pPr>
             <a:r>
-              <a:rPr sz="1300" b="0">
+              <a:rPr sz="1250" b="0">
                 <a:solidFill>
                   <a:srgbClr val="5A5A5A"/>
                 </a:solidFill>
@@ -11056,8 +11056,8 @@
         </p:nvSpPr>
         <p:spPr>
           <a:xfrm>
-            <a:off x="1836000" y="4211999"/>
-            <a:ext cx="3888000" cy="503999"/>
+            <a:off x="1836000" y="4175998"/>
+            <a:ext cx="3924000" cy="720000"/>
           </a:xfrm>
           <a:prstGeom prst="rect">
             <a:avLst/>
@@ -11076,7 +11076,7 @@
               </a:lnSpc>
             </a:pPr>
             <a:r>
-              <a:rPr sz="1900" b="1">
+              <a:rPr sz="1700" b="1">
                 <a:solidFill>
                   <a:srgbClr val="111111"/>
                 </a:solidFill>
@@ -11095,8 +11095,8 @@
         </p:nvSpPr>
         <p:spPr>
           <a:xfrm>
-            <a:off x="1836000" y="4787999"/>
-            <a:ext cx="3888000" cy="1007999"/>
+            <a:off x="1836000" y="4913999"/>
+            <a:ext cx="3924000" cy="972000"/>
           </a:xfrm>
           <a:prstGeom prst="rect">
             <a:avLst/>
@@ -11115,7 +11115,7 @@
               </a:lnSpc>
             </a:pPr>
             <a:r>
-              <a:rPr sz="1300" b="0">
+              <a:rPr sz="1250" b="0">
                 <a:solidFill>
                   <a:srgbClr val="5A5A5A"/>
                 </a:solidFill>
@@ -11248,8 +11248,8 @@
         </p:nvSpPr>
         <p:spPr>
           <a:xfrm>
-            <a:off x="7452000" y="4211999"/>
-            <a:ext cx="3888000" cy="503999"/>
+            <a:off x="7452000" y="4175998"/>
+            <a:ext cx="3924000" cy="720000"/>
           </a:xfrm>
           <a:prstGeom prst="rect">
             <a:avLst/>
@@ -11268,7 +11268,7 @@
               </a:lnSpc>
             </a:pPr>
             <a:r>
-              <a:rPr sz="1900" b="1">
+              <a:rPr sz="1700" b="1">
                 <a:solidFill>
                   <a:srgbClr val="111111"/>
                 </a:solidFill>
@@ -11287,8 +11287,8 @@
         </p:nvSpPr>
         <p:spPr>
           <a:xfrm>
-            <a:off x="7452000" y="4787999"/>
-            <a:ext cx="3888000" cy="1007999"/>
+            <a:off x="7452000" y="4913999"/>
+            <a:ext cx="3924000" cy="972000"/>
           </a:xfrm>
           <a:prstGeom prst="rect">
             <a:avLst/>
@@ -11307,7 +11307,7 @@
               </a:lnSpc>
             </a:pPr>
             <a:r>
-              <a:rPr sz="1300" b="0">
+              <a:rPr sz="1250" b="0">
                 <a:solidFill>
                   <a:srgbClr val="5A5A5A"/>
                 </a:solidFill>
@@ -17497,7 +17497,7 @@
               </a:lnSpc>
             </a:pPr>
             <a:r>
-              <a:rPr sz="2500" b="1">
+              <a:rPr sz="2100" b="1">
                 <a:solidFill>
                   <a:srgbClr val="111111"/>
                 </a:solidFill>
@@ -20332,7 +20332,7 @@
               </a:lnSpc>
             </a:pPr>
             <a:r>
-              <a:rPr sz="2500" b="1">
+              <a:rPr sz="2100" b="1">
                 <a:solidFill>
                   <a:srgbClr val="111111"/>
                 </a:solidFill>
@@ -22963,7 +22963,7 @@
               </a:lnSpc>
             </a:pPr>
             <a:r>
-              <a:rPr sz="2500" b="1">
+              <a:rPr sz="2100" b="1">
                 <a:solidFill>
                   <a:srgbClr val="111111"/>
                 </a:solidFill>

--- a/tmp-tj/261028_cotiplast_audit-reseaux-sociaux_v1.pptx
+++ b/tmp-tj/261028_cotiplast_audit-reseaux-sociaux_v1.pptx
@@ -25848,7 +25848,7 @@
                 </a:solidFill>
                 <a:latin typeface="Poppins"/>
               </a:rPr>
-              <a:t>Les deux vidéos montrent des personnes dans l’usine ; les deux sondages posent une question à laquelle on répond d’un mot. Ce sont les deux recettes à garder.</a:t>
+              <a:t>Les deux vidéos montrent des personnes dans l’usine ; les deux sondages posent une question à laquelle on répond d’un mot. Ce sont les deux recettes à garder. Attention : la vidéo n°1 s’affiche avec une image d’ouverture noire ; choisir une vignette avant de publier.</a:t>
             </a:r>
           </a:p>
         </p:txBody>

--- a/tmp-tj/261028_cotiplast_audit-reseaux-sociaux_v1.pptx
+++ b/tmp-tj/261028_cotiplast_audit-reseaux-sociaux_v1.pptx
@@ -133,25 +133,7 @@
 <c:chartSpace xmlns:c="http://schemas.openxmlformats.org/drawingml/2006/chart" xmlns:a="http://schemas.openxmlformats.org/drawingml/2006/main" xmlns:r="http://schemas.openxmlformats.org/officeDocument/2006/relationships">
   <c:date1904 val="0"/>
   <c:chart>
-    <c:title>
-      <c:tx>
-        <c:rich>
-          <a:bodyPr/>
-          <a:lstStyle/>
-          <a:p>
-            <a:r>
-              <a:rPr sz="1250" b="1">
-                <a:latin typeface="Poppins"/>
-              </a:rPr>
-              <a:t>Abonnés LinkedIn</a:t>
-            </a:r>
-          </a:p>
-        </c:rich>
-      </c:tx>
-      <c:layout/>
-      <c:overlay val="0"/>
-    </c:title>
-    <c:autoTitleDeleted val="0"/>
+    <c:autoTitleDeleted val="1"/>
     <c:plotArea>
       <c:barChart>
         <c:barDir val="bar"/>
@@ -289,12 +271,19 @@
       </c:catAx>
       <c:valAx>
         <c:axId val="-2113994440"/>
-        <c:scaling/>
+        <c:scaling>
+          <c:min val="0.0"/>
+        </c:scaling>
         <c:delete/>
         <c:axPos val="b"/>
-        <c:majorTickMark val="out"/>
+        <c:majorTickMark val="none"/>
         <c:minorTickMark val="none"/>
-        <c:tickLblPos val="nextTo"/>
+        <c:tickLblPos val="none"/>
+        <c:spPr>
+          <a:ln>
+            <a:noFill/>
+          </a:ln>
+        </c:spPr>
         <c:crossAx val="-2068027336"/>
         <c:crosses val="autoZero"/>
       </c:valAx>
@@ -321,25 +310,7 @@
 <c:chartSpace xmlns:c="http://schemas.openxmlformats.org/drawingml/2006/chart" xmlns:a="http://schemas.openxmlformats.org/drawingml/2006/main" xmlns:r="http://schemas.openxmlformats.org/officeDocument/2006/relationships">
   <c:date1904 val="0"/>
   <c:chart>
-    <c:title>
-      <c:tx>
-        <c:rich>
-          <a:bodyPr/>
-          <a:lstStyle/>
-          <a:p>
-            <a:r>
-              <a:rPr sz="1250" b="1">
-                <a:latin typeface="Poppins"/>
-              </a:rPr>
-              <a:t>J’aime médians par type (nombre de publications)</a:t>
-            </a:r>
-          </a:p>
-        </c:rich>
-      </c:tx>
-      <c:layout/>
-      <c:overlay val="0"/>
-    </c:title>
-    <c:autoTitleDeleted val="0"/>
+    <c:autoTitleDeleted val="1"/>
     <c:plotArea>
       <c:barChart>
         <c:barDir val="bar"/>
@@ -490,12 +461,19 @@
       </c:catAx>
       <c:valAx>
         <c:axId val="-2113994440"/>
-        <c:scaling/>
+        <c:scaling>
+          <c:min val="0.0"/>
+        </c:scaling>
         <c:delete/>
         <c:axPos val="b"/>
-        <c:majorTickMark val="out"/>
+        <c:majorTickMark val="none"/>
         <c:minorTickMark val="none"/>
-        <c:tickLblPos val="nextTo"/>
+        <c:tickLblPos val="none"/>
+        <c:spPr>
+          <a:ln>
+            <a:noFill/>
+          </a:ln>
+        </c:spPr>
         <c:crossAx val="-2068027336"/>
         <c:crosses val="autoZero"/>
       </c:valAx>
@@ -3589,7 +3567,7 @@
       </p:sp>
       <p:pic>
         <p:nvPicPr>
-          <p:cNvPr id="4" name="Picture 3" descr="v_c_equipe.jpg"/>
+          <p:cNvPr id="4" name="Picture 3" descr="w_c_equipe.jpg"/>
           <p:cNvPicPr>
             <a:picLocks noChangeAspect="1"/>
           </p:cNvPicPr>
@@ -6385,8 +6363,8 @@
           <p:nvPr/>
         </p:nvGraphicFramePr>
         <p:xfrm>
-          <a:off x="576000" y="1584000"/>
-          <a:ext cx="5760000" cy="4464000"/>
+          <a:off x="576000" y="1944000"/>
+          <a:ext cx="5760000" cy="4104000"/>
         </p:xfrm>
         <a:graphic>
           <a:graphicData uri="http://schemas.openxmlformats.org/drawingml/2006/chart">
@@ -6397,6 +6375,45 @@
       <p:sp>
         <p:nvSpPr>
           <p:cNvPr id="10" name="TextBox 9"/>
+          <p:cNvSpPr txBox="1"/>
+          <p:nvPr/>
+        </p:nvSpPr>
+        <p:spPr>
+          <a:xfrm>
+            <a:off x="576000" y="1548000"/>
+            <a:ext cx="5760000" cy="360000"/>
+          </a:xfrm>
+          <a:prstGeom prst="rect">
+            <a:avLst/>
+          </a:prstGeom>
+          <a:noFill/>
+        </p:spPr>
+        <p:txBody>
+          <a:bodyPr wrap="square" lIns="36000" rIns="36000" tIns="18000" bIns="18000" anchor="t">
+            <a:spAutoFit/>
+          </a:bodyPr>
+          <a:lstStyle/>
+          <a:p>
+            <a:pPr algn="l">
+              <a:lnSpc>
+                <a:spcPct val="110000"/>
+              </a:lnSpc>
+            </a:pPr>
+            <a:r>
+              <a:rPr sz="1250" b="1">
+                <a:solidFill>
+                  <a:srgbClr val="111111"/>
+                </a:solidFill>
+                <a:latin typeface="Poppins"/>
+              </a:rPr>
+              <a:t>J’aime médians par type (nombre de publications)</a:t>
+            </a:r>
+          </a:p>
+        </p:txBody>
+      </p:sp>
+      <p:sp>
+        <p:nvSpPr>
+          <p:cNvPr id="11" name="TextBox 10"/>
           <p:cNvSpPr txBox="1"/>
           <p:nvPr/>
         </p:nvSpPr>
@@ -6849,7 +6866,7 @@
         </p:nvSpPr>
         <p:spPr>
           <a:xfrm>
-            <a:off x="1260000" y="1872000"/>
+            <a:off x="1260000" y="1835999"/>
             <a:ext cx="720000" cy="720000"/>
           </a:xfrm>
           <a:prstGeom prst="ellipse">
@@ -6901,7 +6918,7 @@
         </p:blipFill>
         <p:spPr>
           <a:xfrm>
-            <a:off x="1418400" y="2030400"/>
+            <a:off x="1418400" y="1994399"/>
             <a:ext cx="403200" cy="403200"/>
           </a:xfrm>
           <a:prstGeom prst="rect">
@@ -6917,8 +6934,47 @@
         </p:nvSpPr>
         <p:spPr>
           <a:xfrm>
-            <a:off x="684000" y="2772000"/>
-            <a:ext cx="1872000" cy="360000"/>
+            <a:off x="684000" y="2664000"/>
+            <a:ext cx="1872000" cy="576000"/>
+          </a:xfrm>
+          <a:prstGeom prst="rect">
+            <a:avLst/>
+          </a:prstGeom>
+          <a:noFill/>
+        </p:spPr>
+        <p:txBody>
+          <a:bodyPr wrap="square" lIns="36000" rIns="36000" tIns="18000" bIns="18000" anchor="ctr">
+            <a:spAutoFit/>
+          </a:bodyPr>
+          <a:lstStyle/>
+          <a:p>
+            <a:pPr algn="ctr">
+              <a:lnSpc>
+                <a:spcPct val="110000"/>
+              </a:lnSpc>
+            </a:pPr>
+            <a:r>
+              <a:rPr sz="1400" b="1">
+                <a:solidFill>
+                  <a:srgbClr val="111111"/>
+                </a:solidFill>
+                <a:latin typeface="Poppins"/>
+              </a:rPr>
+              <a:t>Votre usine</a:t>
+            </a:r>
+          </a:p>
+        </p:txBody>
+      </p:sp>
+      <p:sp>
+        <p:nvSpPr>
+          <p:cNvPr id="13" name="TextBox 12"/>
+          <p:cNvSpPr txBox="1"/>
+          <p:nvPr/>
+        </p:nvSpPr>
+        <p:spPr>
+          <a:xfrm>
+            <a:off x="684000" y="3311999"/>
+            <a:ext cx="1872000" cy="1188000"/>
           </a:xfrm>
           <a:prstGeom prst="rect">
             <a:avLst/>
@@ -6937,46 +6993,7 @@
               </a:lnSpc>
             </a:pPr>
             <a:r>
-              <a:rPr sz="1500" b="1">
-                <a:solidFill>
-                  <a:srgbClr val="111111"/>
-                </a:solidFill>
-                <a:latin typeface="Poppins"/>
-              </a:rPr>
-              <a:t>Votre usine</a:t>
-            </a:r>
-          </a:p>
-        </p:txBody>
-      </p:sp>
-      <p:sp>
-        <p:nvSpPr>
-          <p:cNvPr id="13" name="TextBox 12"/>
-          <p:cNvSpPr txBox="1"/>
-          <p:nvPr/>
-        </p:nvSpPr>
-        <p:spPr>
-          <a:xfrm>
-            <a:off x="684000" y="3168000"/>
-            <a:ext cx="1872000" cy="1296000"/>
-          </a:xfrm>
-          <a:prstGeom prst="rect">
-            <a:avLst/>
-          </a:prstGeom>
-          <a:noFill/>
-        </p:spPr>
-        <p:txBody>
-          <a:bodyPr wrap="square" lIns="36000" rIns="36000" tIns="18000" bIns="18000" anchor="t">
-            <a:spAutoFit/>
-          </a:bodyPr>
-          <a:lstStyle/>
-          <a:p>
-            <a:pPr algn="ctr">
-              <a:lnSpc>
-                <a:spcPct val="110000"/>
-              </a:lnSpc>
-            </a:pPr>
-            <a:r>
-              <a:rPr sz="1150" b="0">
+              <a:rPr sz="1100" b="0">
                 <a:solidFill>
                   <a:srgbClr val="5A5A5A"/>
                 </a:solidFill>
@@ -7041,7 +7058,7 @@
         </p:nvSpPr>
         <p:spPr>
           <a:xfrm>
-            <a:off x="3492000" y="1872000"/>
+            <a:off x="3492000" y="1835999"/>
             <a:ext cx="720000" cy="720000"/>
           </a:xfrm>
           <a:prstGeom prst="ellipse">
@@ -7093,7 +7110,7 @@
         </p:blipFill>
         <p:spPr>
           <a:xfrm>
-            <a:off x="3650400" y="2030400"/>
+            <a:off x="3650400" y="1994399"/>
             <a:ext cx="403200" cy="403200"/>
           </a:xfrm>
           <a:prstGeom prst="rect">
@@ -7109,8 +7126,47 @@
         </p:nvSpPr>
         <p:spPr>
           <a:xfrm>
-            <a:off x="2916000" y="2772000"/>
-            <a:ext cx="1872000" cy="360000"/>
+            <a:off x="2916000" y="2664000"/>
+            <a:ext cx="1872000" cy="576000"/>
+          </a:xfrm>
+          <a:prstGeom prst="rect">
+            <a:avLst/>
+          </a:prstGeom>
+          <a:noFill/>
+        </p:spPr>
+        <p:txBody>
+          <a:bodyPr wrap="square" lIns="36000" rIns="36000" tIns="18000" bIns="18000" anchor="ctr">
+            <a:spAutoFit/>
+          </a:bodyPr>
+          <a:lstStyle/>
+          <a:p>
+            <a:pPr algn="ctr">
+              <a:lnSpc>
+                <a:spcPct val="110000"/>
+              </a:lnSpc>
+            </a:pPr>
+            <a:r>
+              <a:rPr sz="1400" b="1">
+                <a:solidFill>
+                  <a:srgbClr val="111111"/>
+                </a:solidFill>
+                <a:latin typeface="Poppins"/>
+              </a:rPr>
+              <a:t>Une personne</a:t>
+            </a:r>
+          </a:p>
+        </p:txBody>
+      </p:sp>
+      <p:sp>
+        <p:nvSpPr>
+          <p:cNvPr id="18" name="TextBox 17"/>
+          <p:cNvSpPr txBox="1"/>
+          <p:nvPr/>
+        </p:nvSpPr>
+        <p:spPr>
+          <a:xfrm>
+            <a:off x="2916000" y="3311999"/>
+            <a:ext cx="1872000" cy="1188000"/>
           </a:xfrm>
           <a:prstGeom prst="rect">
             <a:avLst/>
@@ -7129,46 +7185,7 @@
               </a:lnSpc>
             </a:pPr>
             <a:r>
-              <a:rPr sz="1500" b="1">
-                <a:solidFill>
-                  <a:srgbClr val="111111"/>
-                </a:solidFill>
-                <a:latin typeface="Poppins"/>
-              </a:rPr>
-              <a:t>Une personne</a:t>
-            </a:r>
-          </a:p>
-        </p:txBody>
-      </p:sp>
-      <p:sp>
-        <p:nvSpPr>
-          <p:cNvPr id="18" name="TextBox 17"/>
-          <p:cNvSpPr txBox="1"/>
-          <p:nvPr/>
-        </p:nvSpPr>
-        <p:spPr>
-          <a:xfrm>
-            <a:off x="2916000" y="3168000"/>
-            <a:ext cx="1872000" cy="1296000"/>
-          </a:xfrm>
-          <a:prstGeom prst="rect">
-            <a:avLst/>
-          </a:prstGeom>
-          <a:noFill/>
-        </p:spPr>
-        <p:txBody>
-          <a:bodyPr wrap="square" lIns="36000" rIns="36000" tIns="18000" bIns="18000" anchor="t">
-            <a:spAutoFit/>
-          </a:bodyPr>
-          <a:lstStyle/>
-          <a:p>
-            <a:pPr algn="ctr">
-              <a:lnSpc>
-                <a:spcPct val="110000"/>
-              </a:lnSpc>
-            </a:pPr>
-            <a:r>
-              <a:rPr sz="1150" b="0">
+              <a:rPr sz="1100" b="0">
                 <a:solidFill>
                   <a:srgbClr val="5A5A5A"/>
                 </a:solidFill>
@@ -7233,7 +7250,7 @@
         </p:nvSpPr>
         <p:spPr>
           <a:xfrm>
-            <a:off x="5724000" y="1872000"/>
+            <a:off x="5724000" y="1835999"/>
             <a:ext cx="720000" cy="720000"/>
           </a:xfrm>
           <a:prstGeom prst="ellipse">
@@ -7285,7 +7302,7 @@
         </p:blipFill>
         <p:spPr>
           <a:xfrm>
-            <a:off x="5882400" y="2030400"/>
+            <a:off x="5882400" y="1994399"/>
             <a:ext cx="403200" cy="403200"/>
           </a:xfrm>
           <a:prstGeom prst="rect">
@@ -7301,8 +7318,47 @@
         </p:nvSpPr>
         <p:spPr>
           <a:xfrm>
-            <a:off x="5148000" y="2772000"/>
-            <a:ext cx="1872000" cy="360000"/>
+            <a:off x="5148000" y="2664000"/>
+            <a:ext cx="1872000" cy="576000"/>
+          </a:xfrm>
+          <a:prstGeom prst="rect">
+            <a:avLst/>
+          </a:prstGeom>
+          <a:noFill/>
+        </p:spPr>
+        <p:txBody>
+          <a:bodyPr wrap="square" lIns="36000" rIns="36000" tIns="18000" bIns="18000" anchor="ctr">
+            <a:spAutoFit/>
+          </a:bodyPr>
+          <a:lstStyle/>
+          <a:p>
+            <a:pPr algn="ctr">
+              <a:lnSpc>
+                <a:spcPct val="110000"/>
+              </a:lnSpc>
+            </a:pPr>
+            <a:r>
+              <a:rPr sz="1400" b="1">
+                <a:solidFill>
+                  <a:srgbClr val="111111"/>
+                </a:solidFill>
+                <a:latin typeface="Poppins"/>
+              </a:rPr>
+              <a:t>Une question d’acheteur</a:t>
+            </a:r>
+          </a:p>
+        </p:txBody>
+      </p:sp>
+      <p:sp>
+        <p:nvSpPr>
+          <p:cNvPr id="23" name="TextBox 22"/>
+          <p:cNvSpPr txBox="1"/>
+          <p:nvPr/>
+        </p:nvSpPr>
+        <p:spPr>
+          <a:xfrm>
+            <a:off x="5148000" y="3311999"/>
+            <a:ext cx="1872000" cy="1188000"/>
           </a:xfrm>
           <a:prstGeom prst="rect">
             <a:avLst/>
@@ -7321,46 +7377,7 @@
               </a:lnSpc>
             </a:pPr>
             <a:r>
-              <a:rPr sz="1500" b="1">
-                <a:solidFill>
-                  <a:srgbClr val="111111"/>
-                </a:solidFill>
-                <a:latin typeface="Poppins"/>
-              </a:rPr>
-              <a:t>Une question d’acheteur</a:t>
-            </a:r>
-          </a:p>
-        </p:txBody>
-      </p:sp>
-      <p:sp>
-        <p:nvSpPr>
-          <p:cNvPr id="23" name="TextBox 22"/>
-          <p:cNvSpPr txBox="1"/>
-          <p:nvPr/>
-        </p:nvSpPr>
-        <p:spPr>
-          <a:xfrm>
-            <a:off x="5148000" y="3168000"/>
-            <a:ext cx="1872000" cy="1296000"/>
-          </a:xfrm>
-          <a:prstGeom prst="rect">
-            <a:avLst/>
-          </a:prstGeom>
-          <a:noFill/>
-        </p:spPr>
-        <p:txBody>
-          <a:bodyPr wrap="square" lIns="36000" rIns="36000" tIns="18000" bIns="18000" anchor="t">
-            <a:spAutoFit/>
-          </a:bodyPr>
-          <a:lstStyle/>
-          <a:p>
-            <a:pPr algn="ctr">
-              <a:lnSpc>
-                <a:spcPct val="110000"/>
-              </a:lnSpc>
-            </a:pPr>
-            <a:r>
-              <a:rPr sz="1150" b="0">
+              <a:rPr sz="1100" b="0">
                 <a:solidFill>
                   <a:srgbClr val="5A5A5A"/>
                 </a:solidFill>
@@ -7425,7 +7442,7 @@
         </p:nvSpPr>
         <p:spPr>
           <a:xfrm>
-            <a:off x="7956000" y="1872000"/>
+            <a:off x="7956000" y="1835999"/>
             <a:ext cx="720000" cy="720000"/>
           </a:xfrm>
           <a:prstGeom prst="ellipse">
@@ -7477,7 +7494,7 @@
         </p:blipFill>
         <p:spPr>
           <a:xfrm>
-            <a:off x="8114400" y="2030400"/>
+            <a:off x="8114400" y="1994399"/>
             <a:ext cx="403200" cy="403200"/>
           </a:xfrm>
           <a:prstGeom prst="rect">
@@ -7493,8 +7510,47 @@
         </p:nvSpPr>
         <p:spPr>
           <a:xfrm>
-            <a:off x="7380000" y="2772000"/>
-            <a:ext cx="1872000" cy="360000"/>
+            <a:off x="7380000" y="2664000"/>
+            <a:ext cx="1872000" cy="576000"/>
+          </a:xfrm>
+          <a:prstGeom prst="rect">
+            <a:avLst/>
+          </a:prstGeom>
+          <a:noFill/>
+        </p:spPr>
+        <p:txBody>
+          <a:bodyPr wrap="square" lIns="36000" rIns="36000" tIns="18000" bIns="18000" anchor="ctr">
+            <a:spAutoFit/>
+          </a:bodyPr>
+          <a:lstStyle/>
+          <a:p>
+            <a:pPr algn="ctr">
+              <a:lnSpc>
+                <a:spcPct val="110000"/>
+              </a:lnSpc>
+            </a:pPr>
+            <a:r>
+              <a:rPr sz="1400" b="1">
+                <a:solidFill>
+                  <a:srgbClr val="111111"/>
+                </a:solidFill>
+                <a:latin typeface="Poppins"/>
+              </a:rPr>
+              <a:t>Un cas concret</a:t>
+            </a:r>
+          </a:p>
+        </p:txBody>
+      </p:sp>
+      <p:sp>
+        <p:nvSpPr>
+          <p:cNvPr id="28" name="TextBox 27"/>
+          <p:cNvSpPr txBox="1"/>
+          <p:nvPr/>
+        </p:nvSpPr>
+        <p:spPr>
+          <a:xfrm>
+            <a:off x="7380000" y="3311999"/>
+            <a:ext cx="1872000" cy="1188000"/>
           </a:xfrm>
           <a:prstGeom prst="rect">
             <a:avLst/>
@@ -7513,46 +7569,7 @@
               </a:lnSpc>
             </a:pPr>
             <a:r>
-              <a:rPr sz="1500" b="1">
-                <a:solidFill>
-                  <a:srgbClr val="111111"/>
-                </a:solidFill>
-                <a:latin typeface="Poppins"/>
-              </a:rPr>
-              <a:t>Un cas concret</a:t>
-            </a:r>
-          </a:p>
-        </p:txBody>
-      </p:sp>
-      <p:sp>
-        <p:nvSpPr>
-          <p:cNvPr id="28" name="TextBox 27"/>
-          <p:cNvSpPr txBox="1"/>
-          <p:nvPr/>
-        </p:nvSpPr>
-        <p:spPr>
-          <a:xfrm>
-            <a:off x="7380000" y="3168000"/>
-            <a:ext cx="1872000" cy="1296000"/>
-          </a:xfrm>
-          <a:prstGeom prst="rect">
-            <a:avLst/>
-          </a:prstGeom>
-          <a:noFill/>
-        </p:spPr>
-        <p:txBody>
-          <a:bodyPr wrap="square" lIns="36000" rIns="36000" tIns="18000" bIns="18000" anchor="t">
-            <a:spAutoFit/>
-          </a:bodyPr>
-          <a:lstStyle/>
-          <a:p>
-            <a:pPr algn="ctr">
-              <a:lnSpc>
-                <a:spcPct val="110000"/>
-              </a:lnSpc>
-            </a:pPr>
-            <a:r>
-              <a:rPr sz="1150" b="0">
+              <a:rPr sz="1100" b="0">
                 <a:solidFill>
                   <a:srgbClr val="5A5A5A"/>
                 </a:solidFill>
@@ -7617,7 +7634,7 @@
         </p:nvSpPr>
         <p:spPr>
           <a:xfrm>
-            <a:off x="10188000" y="1872000"/>
+            <a:off x="10188000" y="1835999"/>
             <a:ext cx="720000" cy="720000"/>
           </a:xfrm>
           <a:prstGeom prst="ellipse">
@@ -7669,7 +7686,7 @@
         </p:blipFill>
         <p:spPr>
           <a:xfrm>
-            <a:off x="10346400" y="2030400"/>
+            <a:off x="10346400" y="1994399"/>
             <a:ext cx="403200" cy="403200"/>
           </a:xfrm>
           <a:prstGeom prst="rect">
@@ -7685,8 +7702,47 @@
         </p:nvSpPr>
         <p:spPr>
           <a:xfrm>
-            <a:off x="9612000" y="2772000"/>
-            <a:ext cx="1872000" cy="360000"/>
+            <a:off x="9612000" y="2664000"/>
+            <a:ext cx="1872000" cy="576000"/>
+          </a:xfrm>
+          <a:prstGeom prst="rect">
+            <a:avLst/>
+          </a:prstGeom>
+          <a:noFill/>
+        </p:spPr>
+        <p:txBody>
+          <a:bodyPr wrap="square" lIns="36000" rIns="36000" tIns="18000" bIns="18000" anchor="ctr">
+            <a:spAutoFit/>
+          </a:bodyPr>
+          <a:lstStyle/>
+          <a:p>
+            <a:pPr algn="ctr">
+              <a:lnSpc>
+                <a:spcPct val="110000"/>
+              </a:lnSpc>
+            </a:pPr>
+            <a:r>
+              <a:rPr sz="1400" b="1">
+                <a:solidFill>
+                  <a:srgbClr val="111111"/>
+                </a:solidFill>
+                <a:latin typeface="Poppins"/>
+              </a:rPr>
+              <a:t>Un seul contact</a:t>
+            </a:r>
+          </a:p>
+        </p:txBody>
+      </p:sp>
+      <p:sp>
+        <p:nvSpPr>
+          <p:cNvPr id="33" name="TextBox 32"/>
+          <p:cNvSpPr txBox="1"/>
+          <p:nvPr/>
+        </p:nvSpPr>
+        <p:spPr>
+          <a:xfrm>
+            <a:off x="9612000" y="3311999"/>
+            <a:ext cx="1872000" cy="1188000"/>
           </a:xfrm>
           <a:prstGeom prst="rect">
             <a:avLst/>
@@ -7705,46 +7761,7 @@
               </a:lnSpc>
             </a:pPr>
             <a:r>
-              <a:rPr sz="1500" b="1">
-                <a:solidFill>
-                  <a:srgbClr val="111111"/>
-                </a:solidFill>
-                <a:latin typeface="Poppins"/>
-              </a:rPr>
-              <a:t>Un seul contact</a:t>
-            </a:r>
-          </a:p>
-        </p:txBody>
-      </p:sp>
-      <p:sp>
-        <p:nvSpPr>
-          <p:cNvPr id="33" name="TextBox 32"/>
-          <p:cNvSpPr txBox="1"/>
-          <p:nvPr/>
-        </p:nvSpPr>
-        <p:spPr>
-          <a:xfrm>
-            <a:off x="9612000" y="3168000"/>
-            <a:ext cx="1872000" cy="1296000"/>
-          </a:xfrm>
-          <a:prstGeom prst="rect">
-            <a:avLst/>
-          </a:prstGeom>
-          <a:noFill/>
-        </p:spPr>
-        <p:txBody>
-          <a:bodyPr wrap="square" lIns="36000" rIns="36000" tIns="18000" bIns="18000" anchor="t">
-            <a:spAutoFit/>
-          </a:bodyPr>
-          <a:lstStyle/>
-          <a:p>
-            <a:pPr algn="ctr">
-              <a:lnSpc>
-                <a:spcPct val="110000"/>
-              </a:lnSpc>
-            </a:pPr>
-            <a:r>
-              <a:rPr sz="1150" b="0">
+              <a:rPr sz="1100" b="0">
                 <a:solidFill>
                   <a:srgbClr val="5A5A5A"/>
                 </a:solidFill>
@@ -8147,7 +8164,7 @@
       </p:sp>
       <p:pic>
         <p:nvPicPr>
-          <p:cNvPr id="9" name="Picture 8" descr="v_c_etiq.jpg"/>
+          <p:cNvPr id="9" name="Picture 8" descr="w_c_etiq.jpg"/>
           <p:cNvPicPr>
             <a:picLocks noChangeAspect="1"/>
           </p:cNvPicPr>
@@ -8161,8 +8178,8 @@
         </p:blipFill>
         <p:spPr>
           <a:xfrm>
-            <a:off x="799200" y="1440000"/>
-            <a:ext cx="1929600" cy="2412000"/>
+            <a:off x="792000" y="1475999"/>
+            <a:ext cx="1944000" cy="2430000"/>
           </a:xfrm>
           <a:prstGeom prst="rect">
             <a:avLst/>
@@ -8171,7 +8188,7 @@
       </p:pic>
       <p:pic>
         <p:nvPicPr>
-          <p:cNvPr id="10" name="Picture 9" descr="v_c_quiz.jpg"/>
+          <p:cNvPr id="10" name="Picture 9" descr="w_c_quiz.jpg"/>
           <p:cNvPicPr>
             <a:picLocks noChangeAspect="1"/>
           </p:cNvPicPr>
@@ -8185,8 +8202,8 @@
         </p:blipFill>
         <p:spPr>
           <a:xfrm>
-            <a:off x="3319200" y="1440000"/>
-            <a:ext cx="1929600" cy="2412000"/>
+            <a:off x="3276000" y="1475999"/>
+            <a:ext cx="1944000" cy="2430000"/>
           </a:xfrm>
           <a:prstGeom prst="rect">
             <a:avLst/>
@@ -8195,7 +8212,7 @@
       </p:pic>
       <p:pic>
         <p:nvPicPr>
-          <p:cNvPr id="11" name="Picture 10" descr="v_c_pack.jpg"/>
+          <p:cNvPr id="11" name="Picture 10" descr="w_c_pack.jpg"/>
           <p:cNvPicPr>
             <a:picLocks noChangeAspect="1"/>
           </p:cNvPicPr>
@@ -8209,8 +8226,8 @@
         </p:blipFill>
         <p:spPr>
           <a:xfrm>
-            <a:off x="5839200" y="1440000"/>
-            <a:ext cx="1929600" cy="2412000"/>
+            <a:off x="5760000" y="1475999"/>
+            <a:ext cx="1944000" cy="2430000"/>
           </a:xfrm>
           <a:prstGeom prst="rect">
             <a:avLst/>
@@ -8219,7 +8236,7 @@
       </p:pic>
       <p:pic>
         <p:nvPicPr>
-          <p:cNvPr id="12" name="Picture 11" descr="v_c_recy.jpg"/>
+          <p:cNvPr id="12" name="Picture 11" descr="w_c_recy.jpg"/>
           <p:cNvPicPr>
             <a:picLocks noChangeAspect="1"/>
           </p:cNvPicPr>
@@ -8233,8 +8250,8 @@
         </p:blipFill>
         <p:spPr>
           <a:xfrm>
-            <a:off x="799200" y="3924000"/>
-            <a:ext cx="1929600" cy="2412000"/>
+            <a:off x="792000" y="3977999"/>
+            <a:ext cx="1944000" cy="2430000"/>
           </a:xfrm>
           <a:prstGeom prst="rect">
             <a:avLst/>
@@ -8243,7 +8260,7 @@
       </p:pic>
       <p:pic>
         <p:nvPicPr>
-          <p:cNvPr id="13" name="Picture 12" descr="v_c_equipe.jpg"/>
+          <p:cNvPr id="13" name="Picture 12" descr="w_c_equipe.jpg"/>
           <p:cNvPicPr>
             <a:picLocks noChangeAspect="1"/>
           </p:cNvPicPr>
@@ -8257,8 +8274,8 @@
         </p:blipFill>
         <p:spPr>
           <a:xfrm>
-            <a:off x="3319200" y="3924000"/>
-            <a:ext cx="1929600" cy="2412000"/>
+            <a:off x="3276000" y="3977999"/>
+            <a:ext cx="1944000" cy="2430000"/>
           </a:xfrm>
           <a:prstGeom prst="rect">
             <a:avLst/>
@@ -8267,7 +8284,7 @@
       </p:pic>
       <p:pic>
         <p:nvPicPr>
-          <p:cNvPr id="14" name="Picture 13" descr="v_c_qualite.jpg"/>
+          <p:cNvPr id="14" name="Picture 13" descr="w_c_qualite.jpg"/>
           <p:cNvPicPr>
             <a:picLocks noChangeAspect="1"/>
           </p:cNvPicPr>
@@ -8281,8 +8298,8 @@
         </p:blipFill>
         <p:spPr>
           <a:xfrm>
-            <a:off x="5839200" y="3924000"/>
-            <a:ext cx="1929600" cy="2412000"/>
+            <a:off x="5760000" y="3977999"/>
+            <a:ext cx="1944000" cy="2430000"/>
           </a:xfrm>
           <a:prstGeom prst="rect">
             <a:avLst/>
@@ -8690,9 +8707,92 @@
           </a:p>
         </p:txBody>
       </p:sp>
+      <p:sp>
+        <p:nvSpPr>
+          <p:cNvPr id="9" name="Rounded Rectangle 8"/>
+          <p:cNvSpPr/>
+          <p:nvPr/>
+        </p:nvSpPr>
+        <p:spPr>
+          <a:xfrm>
+            <a:off x="576000" y="1512000"/>
+            <a:ext cx="3456000" cy="270000"/>
+          </a:xfrm>
+          <a:prstGeom prst="roundRect">
+            <a:avLst/>
+          </a:prstGeom>
+          <a:solidFill>
+            <a:srgbClr val="E2E2E2"/>
+          </a:solidFill>
+          <a:ln>
+            <a:noFill/>
+          </a:ln>
+          <a:effectLst/>
+        </p:spPr>
+        <p:style>
+          <a:lnRef idx="1">
+            <a:schemeClr val="accent1"/>
+          </a:lnRef>
+          <a:fillRef idx="3">
+            <a:schemeClr val="accent1"/>
+          </a:fillRef>
+          <a:effectRef idx="2">
+            <a:schemeClr val="accent1"/>
+          </a:effectRef>
+          <a:fontRef idx="minor">
+            <a:schemeClr val="lt1"/>
+          </a:fontRef>
+        </p:style>
+        <p:txBody>
+          <a:bodyPr rtlCol="0" anchor="ctr"/>
+          <a:lstStyle/>
+          <a:p>
+            <a:pPr algn="ctr"/>
+          </a:p>
+        </p:txBody>
+      </p:sp>
+      <p:sp>
+        <p:nvSpPr>
+          <p:cNvPr id="10" name="TextBox 9"/>
+          <p:cNvSpPr txBox="1"/>
+          <p:nvPr/>
+        </p:nvSpPr>
+        <p:spPr>
+          <a:xfrm>
+            <a:off x="576000" y="1512000"/>
+            <a:ext cx="3456000" cy="270000"/>
+          </a:xfrm>
+          <a:prstGeom prst="rect">
+            <a:avLst/>
+          </a:prstGeom>
+          <a:noFill/>
+        </p:spPr>
+        <p:txBody>
+          <a:bodyPr wrap="square" lIns="36000" rIns="36000" tIns="18000" bIns="18000" anchor="ctr">
+            <a:spAutoFit/>
+          </a:bodyPr>
+          <a:lstStyle/>
+          <a:p>
+            <a:pPr algn="ctr">
+              <a:lnSpc>
+                <a:spcPct val="110000"/>
+              </a:lnSpc>
+            </a:pPr>
+            <a:r>
+              <a:rPr sz="1000" b="1">
+                <a:solidFill>
+                  <a:srgbClr val="5A5A5A"/>
+                </a:solidFill>
+                <a:latin typeface="Poppins"/>
+              </a:rPr>
+              <a:t>AVANT · PUBLIÉ</a:t>
+            </a:r>
+          </a:p>
+        </p:txBody>
+      </p:sp>
       <p:pic>
         <p:nvPicPr>
-          <p:cNvPr id="9" name="Picture 8" descr="cmp_c_etiq.jpg"/>
+          <p:cNvPr id="11" name="Picture 10" descr="b_c_etiq.jpg"/>
           <p:cNvPicPr>
             <a:picLocks noChangeAspect="1"/>
           </p:cNvPicPr>
@@ -8706,14 +8806,720 @@
         </p:blipFill>
         <p:spPr>
           <a:xfrm>
-            <a:off x="1408045" y="1422000"/>
-            <a:ext cx="9351910" cy="4896000"/>
+            <a:off x="576000" y="1879200"/>
+            <a:ext cx="3456000" cy="4449600"/>
           </a:xfrm>
           <a:prstGeom prst="rect">
             <a:avLst/>
           </a:prstGeom>
         </p:spPr>
       </p:pic>
+      <p:sp>
+        <p:nvSpPr>
+          <p:cNvPr id="12" name="Oval 11"/>
+          <p:cNvSpPr/>
+          <p:nvPr/>
+        </p:nvSpPr>
+        <p:spPr>
+          <a:xfrm>
+            <a:off x="4158000" y="3744000"/>
+            <a:ext cx="540000" cy="540000"/>
+          </a:xfrm>
+          <a:prstGeom prst="ellipse">
+            <a:avLst/>
+          </a:prstGeom>
+          <a:solidFill>
+            <a:srgbClr val="FD8103"/>
+          </a:solidFill>
+          <a:ln>
+            <a:noFill/>
+          </a:ln>
+          <a:effectLst/>
+        </p:spPr>
+        <p:style>
+          <a:lnRef idx="1">
+            <a:schemeClr val="accent1"/>
+          </a:lnRef>
+          <a:fillRef idx="3">
+            <a:schemeClr val="accent1"/>
+          </a:fillRef>
+          <a:effectRef idx="2">
+            <a:schemeClr val="accent1"/>
+          </a:effectRef>
+          <a:fontRef idx="minor">
+            <a:schemeClr val="lt1"/>
+          </a:fontRef>
+        </p:style>
+        <p:txBody>
+          <a:bodyPr rtlCol="0" anchor="ctr"/>
+          <a:lstStyle/>
+          <a:p>
+            <a:pPr algn="ctr"/>
+          </a:p>
+        </p:txBody>
+      </p:sp>
+      <p:pic>
+        <p:nvPicPr>
+          <p:cNvPr id="13" name="Picture 12" descr="arrow-right_bl.png"/>
+          <p:cNvPicPr>
+            <a:picLocks noChangeAspect="1"/>
+          </p:cNvPicPr>
+          <p:nvPr/>
+        </p:nvPicPr>
+        <p:blipFill>
+          <a:blip r:embed="rId4"/>
+          <a:stretch>
+            <a:fillRect/>
+          </a:stretch>
+        </p:blipFill>
+        <p:spPr>
+          <a:xfrm>
+            <a:off x="4266000" y="3851999"/>
+            <a:ext cx="324000" cy="324000"/>
+          </a:xfrm>
+          <a:prstGeom prst="rect">
+            <a:avLst/>
+          </a:prstGeom>
+        </p:spPr>
+      </p:pic>
+      <p:sp>
+        <p:nvSpPr>
+          <p:cNvPr id="14" name="Rounded Rectangle 13"/>
+          <p:cNvSpPr/>
+          <p:nvPr/>
+        </p:nvSpPr>
+        <p:spPr>
+          <a:xfrm>
+            <a:off x="4824000" y="1512000"/>
+            <a:ext cx="3816000" cy="270000"/>
+          </a:xfrm>
+          <a:prstGeom prst="roundRect">
+            <a:avLst/>
+          </a:prstGeom>
+          <a:solidFill>
+            <a:srgbClr val="FD8103"/>
+          </a:solidFill>
+          <a:ln>
+            <a:noFill/>
+          </a:ln>
+          <a:effectLst/>
+        </p:spPr>
+        <p:style>
+          <a:lnRef idx="1">
+            <a:schemeClr val="accent1"/>
+          </a:lnRef>
+          <a:fillRef idx="3">
+            <a:schemeClr val="accent1"/>
+          </a:fillRef>
+          <a:effectRef idx="2">
+            <a:schemeClr val="accent1"/>
+          </a:effectRef>
+          <a:fontRef idx="minor">
+            <a:schemeClr val="lt1"/>
+          </a:fontRef>
+        </p:style>
+        <p:txBody>
+          <a:bodyPr rtlCol="0" anchor="ctr"/>
+          <a:lstStyle/>
+          <a:p>
+            <a:pPr algn="ctr"/>
+          </a:p>
+        </p:txBody>
+      </p:sp>
+      <p:sp>
+        <p:nvSpPr>
+          <p:cNvPr id="15" name="TextBox 14"/>
+          <p:cNvSpPr txBox="1"/>
+          <p:nvPr/>
+        </p:nvSpPr>
+        <p:spPr>
+          <a:xfrm>
+            <a:off x="4824000" y="1512000"/>
+            <a:ext cx="3816000" cy="270000"/>
+          </a:xfrm>
+          <a:prstGeom prst="rect">
+            <a:avLst/>
+          </a:prstGeom>
+          <a:noFill/>
+        </p:spPr>
+        <p:txBody>
+          <a:bodyPr wrap="square" lIns="36000" rIns="36000" tIns="18000" bIns="18000" anchor="ctr">
+            <a:spAutoFit/>
+          </a:bodyPr>
+          <a:lstStyle/>
+          <a:p>
+            <a:pPr algn="ctr">
+              <a:lnSpc>
+                <a:spcPct val="110000"/>
+              </a:lnSpc>
+            </a:pPr>
+            <a:r>
+              <a:rPr sz="1000" b="1">
+                <a:solidFill>
+                  <a:srgbClr val="FFFFFF"/>
+                </a:solidFill>
+                <a:latin typeface="Poppins"/>
+              </a:rPr>
+              <a:t>APRÈS · PROPOSÉ</a:t>
+            </a:r>
+          </a:p>
+        </p:txBody>
+      </p:sp>
+      <p:pic>
+        <p:nvPicPr>
+          <p:cNvPr id="16" name="Picture 15" descr="w_c_etiq.jpg"/>
+          <p:cNvPicPr>
+            <a:picLocks noChangeAspect="1"/>
+          </p:cNvPicPr>
+          <p:nvPr/>
+        </p:nvPicPr>
+        <p:blipFill>
+          <a:blip r:embed="rId5"/>
+          <a:stretch>
+            <a:fillRect/>
+          </a:stretch>
+        </p:blipFill>
+        <p:spPr>
+          <a:xfrm>
+            <a:off x="4946400" y="1872000"/>
+            <a:ext cx="3571200" cy="4464000"/>
+          </a:xfrm>
+          <a:prstGeom prst="rect">
+            <a:avLst/>
+          </a:prstGeom>
+        </p:spPr>
+      </p:pic>
+      <p:sp>
+        <p:nvSpPr>
+          <p:cNvPr id="17" name="Rounded Rectangle 16"/>
+          <p:cNvSpPr/>
+          <p:nvPr/>
+        </p:nvSpPr>
+        <p:spPr>
+          <a:xfrm>
+            <a:off x="8820000" y="1512000"/>
+            <a:ext cx="2808000" cy="4824000"/>
+          </a:xfrm>
+          <a:prstGeom prst="roundRect">
+            <a:avLst>
+              <a:gd name="adj" fmla="val 6000"/>
+            </a:avLst>
+          </a:prstGeom>
+          <a:solidFill>
+            <a:srgbClr val="E4F4EC"/>
+          </a:solidFill>
+          <a:ln>
+            <a:noFill/>
+          </a:ln>
+          <a:effectLst/>
+        </p:spPr>
+        <p:style>
+          <a:lnRef idx="1">
+            <a:schemeClr val="accent1"/>
+          </a:lnRef>
+          <a:fillRef idx="3">
+            <a:schemeClr val="accent1"/>
+          </a:fillRef>
+          <a:effectRef idx="2">
+            <a:schemeClr val="accent1"/>
+          </a:effectRef>
+          <a:fontRef idx="minor">
+            <a:schemeClr val="lt1"/>
+          </a:fontRef>
+        </p:style>
+        <p:txBody>
+          <a:bodyPr rtlCol="0" anchor="ctr"/>
+          <a:lstStyle/>
+          <a:p>
+            <a:pPr algn="ctr"/>
+          </a:p>
+        </p:txBody>
+      </p:sp>
+      <p:sp>
+        <p:nvSpPr>
+          <p:cNvPr id="18" name="TextBox 17"/>
+          <p:cNvSpPr txBox="1"/>
+          <p:nvPr/>
+        </p:nvSpPr>
+        <p:spPr>
+          <a:xfrm>
+            <a:off x="9036000" y="1655999"/>
+            <a:ext cx="2448000" cy="324000"/>
+          </a:xfrm>
+          <a:prstGeom prst="rect">
+            <a:avLst/>
+          </a:prstGeom>
+          <a:noFill/>
+        </p:spPr>
+        <p:txBody>
+          <a:bodyPr wrap="square" lIns="36000" rIns="36000" tIns="18000" bIns="18000" anchor="t">
+            <a:spAutoFit/>
+          </a:bodyPr>
+          <a:lstStyle/>
+          <a:p>
+            <a:pPr algn="l">
+              <a:lnSpc>
+                <a:spcPct val="110000"/>
+              </a:lnSpc>
+            </a:pPr>
+            <a:r>
+              <a:rPr sz="1500" b="1">
+                <a:solidFill>
+                  <a:srgbClr val="FD8103"/>
+                </a:solidFill>
+                <a:latin typeface="Poppins"/>
+              </a:rPr>
+              <a:t>Ce qui change</a:t>
+            </a:r>
+          </a:p>
+        </p:txBody>
+      </p:sp>
+      <p:sp>
+        <p:nvSpPr>
+          <p:cNvPr id="19" name="Oval 18"/>
+          <p:cNvSpPr/>
+          <p:nvPr/>
+        </p:nvSpPr>
+        <p:spPr>
+          <a:xfrm>
+            <a:off x="9036000" y="2088000"/>
+            <a:ext cx="342000" cy="342000"/>
+          </a:xfrm>
+          <a:prstGeom prst="ellipse">
+            <a:avLst/>
+          </a:prstGeom>
+          <a:solidFill>
+            <a:srgbClr val="4FB58B"/>
+          </a:solidFill>
+          <a:ln>
+            <a:noFill/>
+          </a:ln>
+          <a:effectLst/>
+        </p:spPr>
+        <p:style>
+          <a:lnRef idx="1">
+            <a:schemeClr val="accent1"/>
+          </a:lnRef>
+          <a:fillRef idx="3">
+            <a:schemeClr val="accent1"/>
+          </a:fillRef>
+          <a:effectRef idx="2">
+            <a:schemeClr val="accent1"/>
+          </a:effectRef>
+          <a:fontRef idx="minor">
+            <a:schemeClr val="lt1"/>
+          </a:fontRef>
+        </p:style>
+        <p:txBody>
+          <a:bodyPr rtlCol="0" anchor="ctr"/>
+          <a:lstStyle/>
+          <a:p>
+            <a:pPr algn="ctr"/>
+          </a:p>
+        </p:txBody>
+      </p:sp>
+      <p:pic>
+        <p:nvPicPr>
+          <p:cNvPr id="20" name="Picture 19" descr="check_bl.png"/>
+          <p:cNvPicPr>
+            <a:picLocks noChangeAspect="1"/>
+          </p:cNvPicPr>
+          <p:nvPr/>
+        </p:nvPicPr>
+        <p:blipFill>
+          <a:blip r:embed="rId6"/>
+          <a:stretch>
+            <a:fillRect/>
+          </a:stretch>
+        </p:blipFill>
+        <p:spPr>
+          <a:xfrm>
+            <a:off x="9097200" y="2149200"/>
+            <a:ext cx="216000" cy="216000"/>
+          </a:xfrm>
+          <a:prstGeom prst="rect">
+            <a:avLst/>
+          </a:prstGeom>
+        </p:spPr>
+      </p:pic>
+      <p:sp>
+        <p:nvSpPr>
+          <p:cNvPr id="21" name="TextBox 20"/>
+          <p:cNvSpPr txBox="1"/>
+          <p:nvPr/>
+        </p:nvSpPr>
+        <p:spPr>
+          <a:xfrm>
+            <a:off x="9468000" y="2052000"/>
+            <a:ext cx="2052000" cy="648000"/>
+          </a:xfrm>
+          <a:prstGeom prst="rect">
+            <a:avLst/>
+          </a:prstGeom>
+          <a:noFill/>
+        </p:spPr>
+        <p:txBody>
+          <a:bodyPr wrap="square" lIns="36000" rIns="36000" tIns="18000" bIns="18000" anchor="t">
+            <a:spAutoFit/>
+          </a:bodyPr>
+          <a:lstStyle/>
+          <a:p>
+            <a:pPr algn="l">
+              <a:lnSpc>
+                <a:spcPct val="110000"/>
+              </a:lnSpc>
+            </a:pPr>
+            <a:r>
+              <a:rPr sz="1100" b="1">
+                <a:solidFill>
+                  <a:srgbClr val="111111"/>
+                </a:solidFill>
+                <a:latin typeface="Poppins"/>
+              </a:rPr>
+              <a:t>Une vraie photo de l’usine, pas un montage</a:t>
+            </a:r>
+          </a:p>
+        </p:txBody>
+      </p:sp>
+      <p:sp>
+        <p:nvSpPr>
+          <p:cNvPr id="22" name="Oval 21"/>
+          <p:cNvSpPr/>
+          <p:nvPr/>
+        </p:nvSpPr>
+        <p:spPr>
+          <a:xfrm>
+            <a:off x="9036000" y="2790000"/>
+            <a:ext cx="342000" cy="342000"/>
+          </a:xfrm>
+          <a:prstGeom prst="ellipse">
+            <a:avLst/>
+          </a:prstGeom>
+          <a:solidFill>
+            <a:srgbClr val="4FB58B"/>
+          </a:solidFill>
+          <a:ln>
+            <a:noFill/>
+          </a:ln>
+          <a:effectLst/>
+        </p:spPr>
+        <p:style>
+          <a:lnRef idx="1">
+            <a:schemeClr val="accent1"/>
+          </a:lnRef>
+          <a:fillRef idx="3">
+            <a:schemeClr val="accent1"/>
+          </a:fillRef>
+          <a:effectRef idx="2">
+            <a:schemeClr val="accent1"/>
+          </a:effectRef>
+          <a:fontRef idx="minor">
+            <a:schemeClr val="lt1"/>
+          </a:fontRef>
+        </p:style>
+        <p:txBody>
+          <a:bodyPr rtlCol="0" anchor="ctr"/>
+          <a:lstStyle/>
+          <a:p>
+            <a:pPr algn="ctr"/>
+          </a:p>
+        </p:txBody>
+      </p:sp>
+      <p:pic>
+        <p:nvPicPr>
+          <p:cNvPr id="23" name="Picture 22" descr="check_bl.png"/>
+          <p:cNvPicPr>
+            <a:picLocks noChangeAspect="1"/>
+          </p:cNvPicPr>
+          <p:nvPr/>
+        </p:nvPicPr>
+        <p:blipFill>
+          <a:blip r:embed="rId6"/>
+          <a:stretch>
+            <a:fillRect/>
+          </a:stretch>
+        </p:blipFill>
+        <p:spPr>
+          <a:xfrm>
+            <a:off x="9097200" y="2851200"/>
+            <a:ext cx="216000" cy="216000"/>
+          </a:xfrm>
+          <a:prstGeom prst="rect">
+            <a:avLst/>
+          </a:prstGeom>
+        </p:spPr>
+      </p:pic>
+      <p:sp>
+        <p:nvSpPr>
+          <p:cNvPr id="24" name="TextBox 23"/>
+          <p:cNvSpPr txBox="1"/>
+          <p:nvPr/>
+        </p:nvSpPr>
+        <p:spPr>
+          <a:xfrm>
+            <a:off x="9468000" y="2754000"/>
+            <a:ext cx="2052000" cy="648000"/>
+          </a:xfrm>
+          <a:prstGeom prst="rect">
+            <a:avLst/>
+          </a:prstGeom>
+          <a:noFill/>
+        </p:spPr>
+        <p:txBody>
+          <a:bodyPr wrap="square" lIns="36000" rIns="36000" tIns="18000" bIns="18000" anchor="t">
+            <a:spAutoFit/>
+          </a:bodyPr>
+          <a:lstStyle/>
+          <a:p>
+            <a:pPr algn="l">
+              <a:lnSpc>
+                <a:spcPct val="110000"/>
+              </a:lnSpc>
+            </a:pPr>
+            <a:r>
+              <a:rPr sz="1100" b="1">
+                <a:solidFill>
+                  <a:srgbClr val="111111"/>
+                </a:solidFill>
+                <a:latin typeface="Poppins"/>
+              </a:rPr>
+              <a:t>Une personne au travail : on la regarde</a:t>
+            </a:r>
+          </a:p>
+        </p:txBody>
+      </p:sp>
+      <p:sp>
+        <p:nvSpPr>
+          <p:cNvPr id="25" name="Oval 24"/>
+          <p:cNvSpPr/>
+          <p:nvPr/>
+        </p:nvSpPr>
+        <p:spPr>
+          <a:xfrm>
+            <a:off x="9036000" y="3492000"/>
+            <a:ext cx="342000" cy="342000"/>
+          </a:xfrm>
+          <a:prstGeom prst="ellipse">
+            <a:avLst/>
+          </a:prstGeom>
+          <a:solidFill>
+            <a:srgbClr val="4FB58B"/>
+          </a:solidFill>
+          <a:ln>
+            <a:noFill/>
+          </a:ln>
+          <a:effectLst/>
+        </p:spPr>
+        <p:style>
+          <a:lnRef idx="1">
+            <a:schemeClr val="accent1"/>
+          </a:lnRef>
+          <a:fillRef idx="3">
+            <a:schemeClr val="accent1"/>
+          </a:fillRef>
+          <a:effectRef idx="2">
+            <a:schemeClr val="accent1"/>
+          </a:effectRef>
+          <a:fontRef idx="minor">
+            <a:schemeClr val="lt1"/>
+          </a:fontRef>
+        </p:style>
+        <p:txBody>
+          <a:bodyPr rtlCol="0" anchor="ctr"/>
+          <a:lstStyle/>
+          <a:p>
+            <a:pPr algn="ctr"/>
+          </a:p>
+        </p:txBody>
+      </p:sp>
+      <p:pic>
+        <p:nvPicPr>
+          <p:cNvPr id="26" name="Picture 25" descr="check_bl.png"/>
+          <p:cNvPicPr>
+            <a:picLocks noChangeAspect="1"/>
+          </p:cNvPicPr>
+          <p:nvPr/>
+        </p:nvPicPr>
+        <p:blipFill>
+          <a:blip r:embed="rId6"/>
+          <a:stretch>
+            <a:fillRect/>
+          </a:stretch>
+        </p:blipFill>
+        <p:spPr>
+          <a:xfrm>
+            <a:off x="9097200" y="3553200"/>
+            <a:ext cx="216000" cy="216000"/>
+          </a:xfrm>
+          <a:prstGeom prst="rect">
+            <a:avLst/>
+          </a:prstGeom>
+        </p:spPr>
+      </p:pic>
+      <p:sp>
+        <p:nvSpPr>
+          <p:cNvPr id="27" name="TextBox 26"/>
+          <p:cNvSpPr txBox="1"/>
+          <p:nvPr/>
+        </p:nvSpPr>
+        <p:spPr>
+          <a:xfrm>
+            <a:off x="9468000" y="3456000"/>
+            <a:ext cx="2052000" cy="648000"/>
+          </a:xfrm>
+          <a:prstGeom prst="rect">
+            <a:avLst/>
+          </a:prstGeom>
+          <a:noFill/>
+        </p:spPr>
+        <p:txBody>
+          <a:bodyPr wrap="square" lIns="36000" rIns="36000" tIns="18000" bIns="18000" anchor="t">
+            <a:spAutoFit/>
+          </a:bodyPr>
+          <a:lstStyle/>
+          <a:p>
+            <a:pPr algn="l">
+              <a:lnSpc>
+                <a:spcPct val="110000"/>
+              </a:lnSpc>
+            </a:pPr>
+            <a:r>
+              <a:rPr sz="1100" b="1">
+                <a:solidFill>
+                  <a:srgbClr val="111111"/>
+                </a:solidFill>
+                <a:latin typeface="Poppins"/>
+              </a:rPr>
+              <a:t>Une question que se pose un acheteur</a:t>
+            </a:r>
+          </a:p>
+        </p:txBody>
+      </p:sp>
+      <p:sp>
+        <p:nvSpPr>
+          <p:cNvPr id="28" name="Rectangle 27"/>
+          <p:cNvSpPr/>
+          <p:nvPr/>
+        </p:nvSpPr>
+        <p:spPr>
+          <a:xfrm>
+            <a:off x="9036000" y="4248000"/>
+            <a:ext cx="2376000" cy="21600"/>
+          </a:xfrm>
+          <a:prstGeom prst="rect">
+            <a:avLst/>
+          </a:prstGeom>
+          <a:solidFill>
+            <a:srgbClr val="E2E2E2"/>
+          </a:solidFill>
+          <a:ln>
+            <a:noFill/>
+          </a:ln>
+          <a:effectLst/>
+        </p:spPr>
+        <p:style>
+          <a:lnRef idx="1">
+            <a:schemeClr val="accent1"/>
+          </a:lnRef>
+          <a:fillRef idx="3">
+            <a:schemeClr val="accent1"/>
+          </a:fillRef>
+          <a:effectRef idx="2">
+            <a:schemeClr val="accent1"/>
+          </a:effectRef>
+          <a:fontRef idx="minor">
+            <a:schemeClr val="lt1"/>
+          </a:fontRef>
+        </p:style>
+        <p:txBody>
+          <a:bodyPr rtlCol="0" anchor="ctr"/>
+          <a:lstStyle/>
+          <a:p>
+            <a:pPr algn="ctr"/>
+          </a:p>
+        </p:txBody>
+      </p:sp>
+      <p:sp>
+        <p:nvSpPr>
+          <p:cNvPr id="29" name="TextBox 28"/>
+          <p:cNvSpPr txBox="1"/>
+          <p:nvPr/>
+        </p:nvSpPr>
+        <p:spPr>
+          <a:xfrm>
+            <a:off x="9036000" y="4320000"/>
+            <a:ext cx="2376000" cy="251999"/>
+          </a:xfrm>
+          <a:prstGeom prst="rect">
+            <a:avLst/>
+          </a:prstGeom>
+          <a:noFill/>
+        </p:spPr>
+        <p:txBody>
+          <a:bodyPr wrap="square" lIns="36000" rIns="36000" tIns="18000" bIns="18000" anchor="t">
+            <a:spAutoFit/>
+          </a:bodyPr>
+          <a:lstStyle/>
+          <a:p>
+            <a:pPr algn="l">
+              <a:lnSpc>
+                <a:spcPct val="110000"/>
+              </a:lnSpc>
+            </a:pPr>
+            <a:r>
+              <a:rPr sz="900" b="1">
+                <a:solidFill>
+                  <a:srgbClr val="5A5A5A"/>
+                </a:solidFill>
+                <a:latin typeface="Poppins"/>
+              </a:rPr>
+              <a:t>LE TEXTE PROPOSÉ</a:t>
+            </a:r>
+          </a:p>
+        </p:txBody>
+      </p:sp>
+      <p:sp>
+        <p:nvSpPr>
+          <p:cNvPr id="30" name="TextBox 29"/>
+          <p:cNvSpPr txBox="1"/>
+          <p:nvPr/>
+        </p:nvSpPr>
+        <p:spPr>
+          <a:xfrm>
+            <a:off x="9036000" y="4536000"/>
+            <a:ext cx="2376000" cy="1764000"/>
+          </a:xfrm>
+          <a:prstGeom prst="rect">
+            <a:avLst/>
+          </a:prstGeom>
+          <a:noFill/>
+        </p:spPr>
+        <p:txBody>
+          <a:bodyPr wrap="square" lIns="36000" rIns="36000" tIns="18000" bIns="18000" anchor="t">
+            <a:spAutoFit/>
+          </a:bodyPr>
+          <a:lstStyle/>
+          <a:p>
+            <a:pPr algn="l">
+              <a:lnSpc>
+                <a:spcPct val="110000"/>
+              </a:lnSpc>
+            </a:pPr>
+            <a:r>
+              <a:rPr sz="950" b="0">
+                <a:solidFill>
+                  <a:srgbClr val="111111"/>
+                </a:solidFill>
+                <a:latin typeface="Poppins"/>
+              </a:rPr>
+              <a:t>Cette étiquette, vous l’avez sûrement déjà vue en rayon.
+Elle est sortie de cette machine, à Abidjan, avant d’arriver sur le pot.
+ Votre étiquette tient-elle encore après un mois au frais ? 
+Devis : +225 27 23 46 64 27</a:t>
+            </a:r>
+          </a:p>
+        </p:txBody>
+      </p:sp>
     </p:spTree>
   </p:cSld>
   <p:clrMapOvr>
@@ -9000,9 +9806,92 @@
           </a:p>
         </p:txBody>
       </p:sp>
+      <p:sp>
+        <p:nvSpPr>
+          <p:cNvPr id="9" name="Rounded Rectangle 8"/>
+          <p:cNvSpPr/>
+          <p:nvPr/>
+        </p:nvSpPr>
+        <p:spPr>
+          <a:xfrm>
+            <a:off x="576000" y="1512000"/>
+            <a:ext cx="3456000" cy="270000"/>
+          </a:xfrm>
+          <a:prstGeom prst="roundRect">
+            <a:avLst/>
+          </a:prstGeom>
+          <a:solidFill>
+            <a:srgbClr val="E2E2E2"/>
+          </a:solidFill>
+          <a:ln>
+            <a:noFill/>
+          </a:ln>
+          <a:effectLst/>
+        </p:spPr>
+        <p:style>
+          <a:lnRef idx="1">
+            <a:schemeClr val="accent1"/>
+          </a:lnRef>
+          <a:fillRef idx="3">
+            <a:schemeClr val="accent1"/>
+          </a:fillRef>
+          <a:effectRef idx="2">
+            <a:schemeClr val="accent1"/>
+          </a:effectRef>
+          <a:fontRef idx="minor">
+            <a:schemeClr val="lt1"/>
+          </a:fontRef>
+        </p:style>
+        <p:txBody>
+          <a:bodyPr rtlCol="0" anchor="ctr"/>
+          <a:lstStyle/>
+          <a:p>
+            <a:pPr algn="ctr"/>
+          </a:p>
+        </p:txBody>
+      </p:sp>
+      <p:sp>
+        <p:nvSpPr>
+          <p:cNvPr id="10" name="TextBox 9"/>
+          <p:cNvSpPr txBox="1"/>
+          <p:nvPr/>
+        </p:nvSpPr>
+        <p:spPr>
+          <a:xfrm>
+            <a:off x="576000" y="1512000"/>
+            <a:ext cx="3456000" cy="270000"/>
+          </a:xfrm>
+          <a:prstGeom prst="rect">
+            <a:avLst/>
+          </a:prstGeom>
+          <a:noFill/>
+        </p:spPr>
+        <p:txBody>
+          <a:bodyPr wrap="square" lIns="36000" rIns="36000" tIns="18000" bIns="18000" anchor="ctr">
+            <a:spAutoFit/>
+          </a:bodyPr>
+          <a:lstStyle/>
+          <a:p>
+            <a:pPr algn="ctr">
+              <a:lnSpc>
+                <a:spcPct val="110000"/>
+              </a:lnSpc>
+            </a:pPr>
+            <a:r>
+              <a:rPr sz="1000" b="1">
+                <a:solidFill>
+                  <a:srgbClr val="5A5A5A"/>
+                </a:solidFill>
+                <a:latin typeface="Poppins"/>
+              </a:rPr>
+              <a:t>AVANT · PUBLIÉ</a:t>
+            </a:r>
+          </a:p>
+        </p:txBody>
+      </p:sp>
       <p:pic>
         <p:nvPicPr>
-          <p:cNvPr id="9" name="Picture 8" descr="cmp_c_quiz.jpg"/>
+          <p:cNvPr id="11" name="Picture 10" descr="b_c_quiz.jpg"/>
           <p:cNvPicPr>
             <a:picLocks noChangeAspect="1"/>
           </p:cNvPicPr>
@@ -9016,14 +9905,719 @@
         </p:blipFill>
         <p:spPr>
           <a:xfrm>
-            <a:off x="1408045" y="1422000"/>
-            <a:ext cx="9351910" cy="4896000"/>
+            <a:off x="576000" y="1949400"/>
+            <a:ext cx="3456000" cy="4309200"/>
           </a:xfrm>
           <a:prstGeom prst="rect">
             <a:avLst/>
           </a:prstGeom>
         </p:spPr>
       </p:pic>
+      <p:sp>
+        <p:nvSpPr>
+          <p:cNvPr id="12" name="Oval 11"/>
+          <p:cNvSpPr/>
+          <p:nvPr/>
+        </p:nvSpPr>
+        <p:spPr>
+          <a:xfrm>
+            <a:off x="4158000" y="3744000"/>
+            <a:ext cx="540000" cy="540000"/>
+          </a:xfrm>
+          <a:prstGeom prst="ellipse">
+            <a:avLst/>
+          </a:prstGeom>
+          <a:solidFill>
+            <a:srgbClr val="FD8103"/>
+          </a:solidFill>
+          <a:ln>
+            <a:noFill/>
+          </a:ln>
+          <a:effectLst/>
+        </p:spPr>
+        <p:style>
+          <a:lnRef idx="1">
+            <a:schemeClr val="accent1"/>
+          </a:lnRef>
+          <a:fillRef idx="3">
+            <a:schemeClr val="accent1"/>
+          </a:fillRef>
+          <a:effectRef idx="2">
+            <a:schemeClr val="accent1"/>
+          </a:effectRef>
+          <a:fontRef idx="minor">
+            <a:schemeClr val="lt1"/>
+          </a:fontRef>
+        </p:style>
+        <p:txBody>
+          <a:bodyPr rtlCol="0" anchor="ctr"/>
+          <a:lstStyle/>
+          <a:p>
+            <a:pPr algn="ctr"/>
+          </a:p>
+        </p:txBody>
+      </p:sp>
+      <p:pic>
+        <p:nvPicPr>
+          <p:cNvPr id="13" name="Picture 12" descr="arrow-right_bl.png"/>
+          <p:cNvPicPr>
+            <a:picLocks noChangeAspect="1"/>
+          </p:cNvPicPr>
+          <p:nvPr/>
+        </p:nvPicPr>
+        <p:blipFill>
+          <a:blip r:embed="rId4"/>
+          <a:stretch>
+            <a:fillRect/>
+          </a:stretch>
+        </p:blipFill>
+        <p:spPr>
+          <a:xfrm>
+            <a:off x="4266000" y="3851999"/>
+            <a:ext cx="324000" cy="324000"/>
+          </a:xfrm>
+          <a:prstGeom prst="rect">
+            <a:avLst/>
+          </a:prstGeom>
+        </p:spPr>
+      </p:pic>
+      <p:sp>
+        <p:nvSpPr>
+          <p:cNvPr id="14" name="Rounded Rectangle 13"/>
+          <p:cNvSpPr/>
+          <p:nvPr/>
+        </p:nvSpPr>
+        <p:spPr>
+          <a:xfrm>
+            <a:off x="4824000" y="1512000"/>
+            <a:ext cx="3816000" cy="270000"/>
+          </a:xfrm>
+          <a:prstGeom prst="roundRect">
+            <a:avLst/>
+          </a:prstGeom>
+          <a:solidFill>
+            <a:srgbClr val="FD8103"/>
+          </a:solidFill>
+          <a:ln>
+            <a:noFill/>
+          </a:ln>
+          <a:effectLst/>
+        </p:spPr>
+        <p:style>
+          <a:lnRef idx="1">
+            <a:schemeClr val="accent1"/>
+          </a:lnRef>
+          <a:fillRef idx="3">
+            <a:schemeClr val="accent1"/>
+          </a:fillRef>
+          <a:effectRef idx="2">
+            <a:schemeClr val="accent1"/>
+          </a:effectRef>
+          <a:fontRef idx="minor">
+            <a:schemeClr val="lt1"/>
+          </a:fontRef>
+        </p:style>
+        <p:txBody>
+          <a:bodyPr rtlCol="0" anchor="ctr"/>
+          <a:lstStyle/>
+          <a:p>
+            <a:pPr algn="ctr"/>
+          </a:p>
+        </p:txBody>
+      </p:sp>
+      <p:sp>
+        <p:nvSpPr>
+          <p:cNvPr id="15" name="TextBox 14"/>
+          <p:cNvSpPr txBox="1"/>
+          <p:nvPr/>
+        </p:nvSpPr>
+        <p:spPr>
+          <a:xfrm>
+            <a:off x="4824000" y="1512000"/>
+            <a:ext cx="3816000" cy="270000"/>
+          </a:xfrm>
+          <a:prstGeom prst="rect">
+            <a:avLst/>
+          </a:prstGeom>
+          <a:noFill/>
+        </p:spPr>
+        <p:txBody>
+          <a:bodyPr wrap="square" lIns="36000" rIns="36000" tIns="18000" bIns="18000" anchor="ctr">
+            <a:spAutoFit/>
+          </a:bodyPr>
+          <a:lstStyle/>
+          <a:p>
+            <a:pPr algn="ctr">
+              <a:lnSpc>
+                <a:spcPct val="110000"/>
+              </a:lnSpc>
+            </a:pPr>
+            <a:r>
+              <a:rPr sz="1000" b="1">
+                <a:solidFill>
+                  <a:srgbClr val="FFFFFF"/>
+                </a:solidFill>
+                <a:latin typeface="Poppins"/>
+              </a:rPr>
+              <a:t>APRÈS · PROPOSÉ</a:t>
+            </a:r>
+          </a:p>
+        </p:txBody>
+      </p:sp>
+      <p:pic>
+        <p:nvPicPr>
+          <p:cNvPr id="16" name="Picture 15" descr="w_c_quiz.jpg"/>
+          <p:cNvPicPr>
+            <a:picLocks noChangeAspect="1"/>
+          </p:cNvPicPr>
+          <p:nvPr/>
+        </p:nvPicPr>
+        <p:blipFill>
+          <a:blip r:embed="rId5"/>
+          <a:stretch>
+            <a:fillRect/>
+          </a:stretch>
+        </p:blipFill>
+        <p:spPr>
+          <a:xfrm>
+            <a:off x="4946400" y="1872000"/>
+            <a:ext cx="3571200" cy="4464000"/>
+          </a:xfrm>
+          <a:prstGeom prst="rect">
+            <a:avLst/>
+          </a:prstGeom>
+        </p:spPr>
+      </p:pic>
+      <p:sp>
+        <p:nvSpPr>
+          <p:cNvPr id="17" name="Rounded Rectangle 16"/>
+          <p:cNvSpPr/>
+          <p:nvPr/>
+        </p:nvSpPr>
+        <p:spPr>
+          <a:xfrm>
+            <a:off x="8820000" y="1512000"/>
+            <a:ext cx="2808000" cy="4824000"/>
+          </a:xfrm>
+          <a:prstGeom prst="roundRect">
+            <a:avLst>
+              <a:gd name="adj" fmla="val 6000"/>
+            </a:avLst>
+          </a:prstGeom>
+          <a:solidFill>
+            <a:srgbClr val="E4F4EC"/>
+          </a:solidFill>
+          <a:ln>
+            <a:noFill/>
+          </a:ln>
+          <a:effectLst/>
+        </p:spPr>
+        <p:style>
+          <a:lnRef idx="1">
+            <a:schemeClr val="accent1"/>
+          </a:lnRef>
+          <a:fillRef idx="3">
+            <a:schemeClr val="accent1"/>
+          </a:fillRef>
+          <a:effectRef idx="2">
+            <a:schemeClr val="accent1"/>
+          </a:effectRef>
+          <a:fontRef idx="minor">
+            <a:schemeClr val="lt1"/>
+          </a:fontRef>
+        </p:style>
+        <p:txBody>
+          <a:bodyPr rtlCol="0" anchor="ctr"/>
+          <a:lstStyle/>
+          <a:p>
+            <a:pPr algn="ctr"/>
+          </a:p>
+        </p:txBody>
+      </p:sp>
+      <p:sp>
+        <p:nvSpPr>
+          <p:cNvPr id="18" name="TextBox 17"/>
+          <p:cNvSpPr txBox="1"/>
+          <p:nvPr/>
+        </p:nvSpPr>
+        <p:spPr>
+          <a:xfrm>
+            <a:off x="9036000" y="1655999"/>
+            <a:ext cx="2448000" cy="324000"/>
+          </a:xfrm>
+          <a:prstGeom prst="rect">
+            <a:avLst/>
+          </a:prstGeom>
+          <a:noFill/>
+        </p:spPr>
+        <p:txBody>
+          <a:bodyPr wrap="square" lIns="36000" rIns="36000" tIns="18000" bIns="18000" anchor="t">
+            <a:spAutoFit/>
+          </a:bodyPr>
+          <a:lstStyle/>
+          <a:p>
+            <a:pPr algn="l">
+              <a:lnSpc>
+                <a:spcPct val="110000"/>
+              </a:lnSpc>
+            </a:pPr>
+            <a:r>
+              <a:rPr sz="1500" b="1">
+                <a:solidFill>
+                  <a:srgbClr val="FD8103"/>
+                </a:solidFill>
+                <a:latin typeface="Poppins"/>
+              </a:rPr>
+              <a:t>Ce qui change</a:t>
+            </a:r>
+          </a:p>
+        </p:txBody>
+      </p:sp>
+      <p:sp>
+        <p:nvSpPr>
+          <p:cNvPr id="19" name="Oval 18"/>
+          <p:cNvSpPr/>
+          <p:nvPr/>
+        </p:nvSpPr>
+        <p:spPr>
+          <a:xfrm>
+            <a:off x="9036000" y="2088000"/>
+            <a:ext cx="342000" cy="342000"/>
+          </a:xfrm>
+          <a:prstGeom prst="ellipse">
+            <a:avLst/>
+          </a:prstGeom>
+          <a:solidFill>
+            <a:srgbClr val="4FB58B"/>
+          </a:solidFill>
+          <a:ln>
+            <a:noFill/>
+          </a:ln>
+          <a:effectLst/>
+        </p:spPr>
+        <p:style>
+          <a:lnRef idx="1">
+            <a:schemeClr val="accent1"/>
+          </a:lnRef>
+          <a:fillRef idx="3">
+            <a:schemeClr val="accent1"/>
+          </a:fillRef>
+          <a:effectRef idx="2">
+            <a:schemeClr val="accent1"/>
+          </a:effectRef>
+          <a:fontRef idx="minor">
+            <a:schemeClr val="lt1"/>
+          </a:fontRef>
+        </p:style>
+        <p:txBody>
+          <a:bodyPr rtlCol="0" anchor="ctr"/>
+          <a:lstStyle/>
+          <a:p>
+            <a:pPr algn="ctr"/>
+          </a:p>
+        </p:txBody>
+      </p:sp>
+      <p:pic>
+        <p:nvPicPr>
+          <p:cNvPr id="20" name="Picture 19" descr="check_bl.png"/>
+          <p:cNvPicPr>
+            <a:picLocks noChangeAspect="1"/>
+          </p:cNvPicPr>
+          <p:nvPr/>
+        </p:nvPicPr>
+        <p:blipFill>
+          <a:blip r:embed="rId6"/>
+          <a:stretch>
+            <a:fillRect/>
+          </a:stretch>
+        </p:blipFill>
+        <p:spPr>
+          <a:xfrm>
+            <a:off x="9097200" y="2149200"/>
+            <a:ext cx="216000" cy="216000"/>
+          </a:xfrm>
+          <a:prstGeom prst="rect">
+            <a:avLst/>
+          </a:prstGeom>
+        </p:spPr>
+      </p:pic>
+      <p:sp>
+        <p:nvSpPr>
+          <p:cNvPr id="21" name="TextBox 20"/>
+          <p:cNvSpPr txBox="1"/>
+          <p:nvPr/>
+        </p:nvSpPr>
+        <p:spPr>
+          <a:xfrm>
+            <a:off x="9468000" y="2052000"/>
+            <a:ext cx="2052000" cy="648000"/>
+          </a:xfrm>
+          <a:prstGeom prst="rect">
+            <a:avLst/>
+          </a:prstGeom>
+          <a:noFill/>
+        </p:spPr>
+        <p:txBody>
+          <a:bodyPr wrap="square" lIns="36000" rIns="36000" tIns="18000" bIns="18000" anchor="t">
+            <a:spAutoFit/>
+          </a:bodyPr>
+          <a:lstStyle/>
+          <a:p>
+            <a:pPr algn="l">
+              <a:lnSpc>
+                <a:spcPct val="110000"/>
+              </a:lnSpc>
+            </a:pPr>
+            <a:r>
+              <a:rPr sz="1100" b="1">
+                <a:solidFill>
+                  <a:srgbClr val="111111"/>
+                </a:solidFill>
+                <a:latin typeface="Poppins"/>
+              </a:rPr>
+              <a:t>Le sondage gardé : c’est ce qui fait commenter</a:t>
+            </a:r>
+          </a:p>
+        </p:txBody>
+      </p:sp>
+      <p:sp>
+        <p:nvSpPr>
+          <p:cNvPr id="22" name="Oval 21"/>
+          <p:cNvSpPr/>
+          <p:nvPr/>
+        </p:nvSpPr>
+        <p:spPr>
+          <a:xfrm>
+            <a:off x="9036000" y="2790000"/>
+            <a:ext cx="342000" cy="342000"/>
+          </a:xfrm>
+          <a:prstGeom prst="ellipse">
+            <a:avLst/>
+          </a:prstGeom>
+          <a:solidFill>
+            <a:srgbClr val="4FB58B"/>
+          </a:solidFill>
+          <a:ln>
+            <a:noFill/>
+          </a:ln>
+          <a:effectLst/>
+        </p:spPr>
+        <p:style>
+          <a:lnRef idx="1">
+            <a:schemeClr val="accent1"/>
+          </a:lnRef>
+          <a:fillRef idx="3">
+            <a:schemeClr val="accent1"/>
+          </a:fillRef>
+          <a:effectRef idx="2">
+            <a:schemeClr val="accent1"/>
+          </a:effectRef>
+          <a:fontRef idx="minor">
+            <a:schemeClr val="lt1"/>
+          </a:fontRef>
+        </p:style>
+        <p:txBody>
+          <a:bodyPr rtlCol="0" anchor="ctr"/>
+          <a:lstStyle/>
+          <a:p>
+            <a:pPr algn="ctr"/>
+          </a:p>
+        </p:txBody>
+      </p:sp>
+      <p:pic>
+        <p:nvPicPr>
+          <p:cNvPr id="23" name="Picture 22" descr="check_bl.png"/>
+          <p:cNvPicPr>
+            <a:picLocks noChangeAspect="1"/>
+          </p:cNvPicPr>
+          <p:nvPr/>
+        </p:nvPicPr>
+        <p:blipFill>
+          <a:blip r:embed="rId6"/>
+          <a:stretch>
+            <a:fillRect/>
+          </a:stretch>
+        </p:blipFill>
+        <p:spPr>
+          <a:xfrm>
+            <a:off x="9097200" y="2851200"/>
+            <a:ext cx="216000" cy="216000"/>
+          </a:xfrm>
+          <a:prstGeom prst="rect">
+            <a:avLst/>
+          </a:prstGeom>
+        </p:spPr>
+      </p:pic>
+      <p:sp>
+        <p:nvSpPr>
+          <p:cNvPr id="24" name="TextBox 23"/>
+          <p:cNvSpPr txBox="1"/>
+          <p:nvPr/>
+        </p:nvSpPr>
+        <p:spPr>
+          <a:xfrm>
+            <a:off x="9468000" y="2754000"/>
+            <a:ext cx="2052000" cy="648000"/>
+          </a:xfrm>
+          <a:prstGeom prst="rect">
+            <a:avLst/>
+          </a:prstGeom>
+          <a:noFill/>
+        </p:spPr>
+        <p:txBody>
+          <a:bodyPr wrap="square" lIns="36000" rIns="36000" tIns="18000" bIns="18000" anchor="t">
+            <a:spAutoFit/>
+          </a:bodyPr>
+          <a:lstStyle/>
+          <a:p>
+            <a:pPr algn="l">
+              <a:lnSpc>
+                <a:spcPct val="110000"/>
+              </a:lnSpc>
+            </a:pPr>
+            <a:r>
+              <a:rPr sz="1100" b="1">
+                <a:solidFill>
+                  <a:srgbClr val="111111"/>
+                </a:solidFill>
+                <a:latin typeface="Poppins"/>
+              </a:rPr>
+              <a:t>Un cas concret, avec un poids et une ville</a:t>
+            </a:r>
+          </a:p>
+        </p:txBody>
+      </p:sp>
+      <p:sp>
+        <p:nvSpPr>
+          <p:cNvPr id="25" name="Oval 24"/>
+          <p:cNvSpPr/>
+          <p:nvPr/>
+        </p:nvSpPr>
+        <p:spPr>
+          <a:xfrm>
+            <a:off x="9036000" y="3492000"/>
+            <a:ext cx="342000" cy="342000"/>
+          </a:xfrm>
+          <a:prstGeom prst="ellipse">
+            <a:avLst/>
+          </a:prstGeom>
+          <a:solidFill>
+            <a:srgbClr val="4FB58B"/>
+          </a:solidFill>
+          <a:ln>
+            <a:noFill/>
+          </a:ln>
+          <a:effectLst/>
+        </p:spPr>
+        <p:style>
+          <a:lnRef idx="1">
+            <a:schemeClr val="accent1"/>
+          </a:lnRef>
+          <a:fillRef idx="3">
+            <a:schemeClr val="accent1"/>
+          </a:fillRef>
+          <a:effectRef idx="2">
+            <a:schemeClr val="accent1"/>
+          </a:effectRef>
+          <a:fontRef idx="minor">
+            <a:schemeClr val="lt1"/>
+          </a:fontRef>
+        </p:style>
+        <p:txBody>
+          <a:bodyPr rtlCol="0" anchor="ctr"/>
+          <a:lstStyle/>
+          <a:p>
+            <a:pPr algn="ctr"/>
+          </a:p>
+        </p:txBody>
+      </p:sp>
+      <p:pic>
+        <p:nvPicPr>
+          <p:cNvPr id="26" name="Picture 25" descr="check_bl.png"/>
+          <p:cNvPicPr>
+            <a:picLocks noChangeAspect="1"/>
+          </p:cNvPicPr>
+          <p:nvPr/>
+        </p:nvPicPr>
+        <p:blipFill>
+          <a:blip r:embed="rId6"/>
+          <a:stretch>
+            <a:fillRect/>
+          </a:stretch>
+        </p:blipFill>
+        <p:spPr>
+          <a:xfrm>
+            <a:off x="9097200" y="3553200"/>
+            <a:ext cx="216000" cy="216000"/>
+          </a:xfrm>
+          <a:prstGeom prst="rect">
+            <a:avLst/>
+          </a:prstGeom>
+        </p:spPr>
+      </p:pic>
+      <p:sp>
+        <p:nvSpPr>
+          <p:cNvPr id="27" name="TextBox 26"/>
+          <p:cNvSpPr txBox="1"/>
+          <p:nvPr/>
+        </p:nvSpPr>
+        <p:spPr>
+          <a:xfrm>
+            <a:off x="9468000" y="3456000"/>
+            <a:ext cx="2052000" cy="648000"/>
+          </a:xfrm>
+          <a:prstGeom prst="rect">
+            <a:avLst/>
+          </a:prstGeom>
+          <a:noFill/>
+        </p:spPr>
+        <p:txBody>
+          <a:bodyPr wrap="square" lIns="36000" rIns="36000" tIns="18000" bIns="18000" anchor="t">
+            <a:spAutoFit/>
+          </a:bodyPr>
+          <a:lstStyle/>
+          <a:p>
+            <a:pPr algn="l">
+              <a:lnSpc>
+                <a:spcPct val="110000"/>
+              </a:lnSpc>
+            </a:pPr>
+            <a:r>
+              <a:rPr sz="1100" b="1">
+                <a:solidFill>
+                  <a:srgbClr val="111111"/>
+                </a:solidFill>
+                <a:latin typeface="Poppins"/>
+              </a:rPr>
+              <a:t>Un rendez-vous pour la réponse</a:t>
+            </a:r>
+          </a:p>
+        </p:txBody>
+      </p:sp>
+      <p:sp>
+        <p:nvSpPr>
+          <p:cNvPr id="28" name="Rectangle 27"/>
+          <p:cNvSpPr/>
+          <p:nvPr/>
+        </p:nvSpPr>
+        <p:spPr>
+          <a:xfrm>
+            <a:off x="9036000" y="4248000"/>
+            <a:ext cx="2376000" cy="21600"/>
+          </a:xfrm>
+          <a:prstGeom prst="rect">
+            <a:avLst/>
+          </a:prstGeom>
+          <a:solidFill>
+            <a:srgbClr val="E2E2E2"/>
+          </a:solidFill>
+          <a:ln>
+            <a:noFill/>
+          </a:ln>
+          <a:effectLst/>
+        </p:spPr>
+        <p:style>
+          <a:lnRef idx="1">
+            <a:schemeClr val="accent1"/>
+          </a:lnRef>
+          <a:fillRef idx="3">
+            <a:schemeClr val="accent1"/>
+          </a:fillRef>
+          <a:effectRef idx="2">
+            <a:schemeClr val="accent1"/>
+          </a:effectRef>
+          <a:fontRef idx="minor">
+            <a:schemeClr val="lt1"/>
+          </a:fontRef>
+        </p:style>
+        <p:txBody>
+          <a:bodyPr rtlCol="0" anchor="ctr"/>
+          <a:lstStyle/>
+          <a:p>
+            <a:pPr algn="ctr"/>
+          </a:p>
+        </p:txBody>
+      </p:sp>
+      <p:sp>
+        <p:nvSpPr>
+          <p:cNvPr id="29" name="TextBox 28"/>
+          <p:cNvSpPr txBox="1"/>
+          <p:nvPr/>
+        </p:nvSpPr>
+        <p:spPr>
+          <a:xfrm>
+            <a:off x="9036000" y="4320000"/>
+            <a:ext cx="2376000" cy="251999"/>
+          </a:xfrm>
+          <a:prstGeom prst="rect">
+            <a:avLst/>
+          </a:prstGeom>
+          <a:noFill/>
+        </p:spPr>
+        <p:txBody>
+          <a:bodyPr wrap="square" lIns="36000" rIns="36000" tIns="18000" bIns="18000" anchor="t">
+            <a:spAutoFit/>
+          </a:bodyPr>
+          <a:lstStyle/>
+          <a:p>
+            <a:pPr algn="l">
+              <a:lnSpc>
+                <a:spcPct val="110000"/>
+              </a:lnSpc>
+            </a:pPr>
+            <a:r>
+              <a:rPr sz="900" b="1">
+                <a:solidFill>
+                  <a:srgbClr val="5A5A5A"/>
+                </a:solidFill>
+                <a:latin typeface="Poppins"/>
+              </a:rPr>
+              <a:t>LE TEXTE PROPOSÉ</a:t>
+            </a:r>
+          </a:p>
+        </p:txBody>
+      </p:sp>
+      <p:sp>
+        <p:nvSpPr>
+          <p:cNvPr id="30" name="TextBox 29"/>
+          <p:cNvSpPr txBox="1"/>
+          <p:nvPr/>
+        </p:nvSpPr>
+        <p:spPr>
+          <a:xfrm>
+            <a:off x="9036000" y="4536000"/>
+            <a:ext cx="2376000" cy="1764000"/>
+          </a:xfrm>
+          <a:prstGeom prst="rect">
+            <a:avLst/>
+          </a:prstGeom>
+          <a:noFill/>
+        </p:spPr>
+        <p:txBody>
+          <a:bodyPr wrap="square" lIns="36000" rIns="36000" tIns="18000" bIns="18000" anchor="t">
+            <a:spAutoFit/>
+          </a:bodyPr>
+          <a:lstStyle/>
+          <a:p>
+            <a:pPr algn="l">
+              <a:lnSpc>
+                <a:spcPct val="110000"/>
+              </a:lnSpc>
+            </a:pPr>
+            <a:r>
+              <a:rPr sz="950" b="0">
+                <a:solidFill>
+                  <a:srgbClr val="111111"/>
+                </a:solidFill>
+                <a:latin typeface="Poppins"/>
+              </a:rPr>
+              <a:t>Une palette de 800 kg part demain pour Bouaké. Vous la protégez avec :
+A. une housse PE · B. du film étirable · C. du film thermo-rétractable
+ Répondez A, B ou C. On donne la réponse vendredi.</a:t>
+            </a:r>
+          </a:p>
+        </p:txBody>
+      </p:sp>
     </p:spTree>
   </p:cSld>
   <p:clrMapOvr>
@@ -9310,9 +10904,92 @@
           </a:p>
         </p:txBody>
       </p:sp>
+      <p:sp>
+        <p:nvSpPr>
+          <p:cNvPr id="9" name="Rounded Rectangle 8"/>
+          <p:cNvSpPr/>
+          <p:nvPr/>
+        </p:nvSpPr>
+        <p:spPr>
+          <a:xfrm>
+            <a:off x="576000" y="1512000"/>
+            <a:ext cx="3456000" cy="270000"/>
+          </a:xfrm>
+          <a:prstGeom prst="roundRect">
+            <a:avLst/>
+          </a:prstGeom>
+          <a:solidFill>
+            <a:srgbClr val="E2E2E2"/>
+          </a:solidFill>
+          <a:ln>
+            <a:noFill/>
+          </a:ln>
+          <a:effectLst/>
+        </p:spPr>
+        <p:style>
+          <a:lnRef idx="1">
+            <a:schemeClr val="accent1"/>
+          </a:lnRef>
+          <a:fillRef idx="3">
+            <a:schemeClr val="accent1"/>
+          </a:fillRef>
+          <a:effectRef idx="2">
+            <a:schemeClr val="accent1"/>
+          </a:effectRef>
+          <a:fontRef idx="minor">
+            <a:schemeClr val="lt1"/>
+          </a:fontRef>
+        </p:style>
+        <p:txBody>
+          <a:bodyPr rtlCol="0" anchor="ctr"/>
+          <a:lstStyle/>
+          <a:p>
+            <a:pPr algn="ctr"/>
+          </a:p>
+        </p:txBody>
+      </p:sp>
+      <p:sp>
+        <p:nvSpPr>
+          <p:cNvPr id="10" name="TextBox 9"/>
+          <p:cNvSpPr txBox="1"/>
+          <p:nvPr/>
+        </p:nvSpPr>
+        <p:spPr>
+          <a:xfrm>
+            <a:off x="576000" y="1512000"/>
+            <a:ext cx="3456000" cy="270000"/>
+          </a:xfrm>
+          <a:prstGeom prst="rect">
+            <a:avLst/>
+          </a:prstGeom>
+          <a:noFill/>
+        </p:spPr>
+        <p:txBody>
+          <a:bodyPr wrap="square" lIns="36000" rIns="36000" tIns="18000" bIns="18000" anchor="ctr">
+            <a:spAutoFit/>
+          </a:bodyPr>
+          <a:lstStyle/>
+          <a:p>
+            <a:pPr algn="ctr">
+              <a:lnSpc>
+                <a:spcPct val="110000"/>
+              </a:lnSpc>
+            </a:pPr>
+            <a:r>
+              <a:rPr sz="1000" b="1">
+                <a:solidFill>
+                  <a:srgbClr val="5A5A5A"/>
+                </a:solidFill>
+                <a:latin typeface="Poppins"/>
+              </a:rPr>
+              <a:t>AVANT · PUBLIÉ</a:t>
+            </a:r>
+          </a:p>
+        </p:txBody>
+      </p:sp>
       <p:pic>
         <p:nvPicPr>
-          <p:cNvPr id="9" name="Picture 8" descr="cmp_c_pack.jpg"/>
+          <p:cNvPr id="11" name="Picture 10" descr="b_c_pack.jpg"/>
           <p:cNvPicPr>
             <a:picLocks noChangeAspect="1"/>
           </p:cNvPicPr>
@@ -9326,14 +11003,719 @@
         </p:blipFill>
         <p:spPr>
           <a:xfrm>
-            <a:off x="1306044" y="1422000"/>
-            <a:ext cx="9555912" cy="4896000"/>
+            <a:off x="576000" y="1949400"/>
+            <a:ext cx="3456000" cy="4309200"/>
           </a:xfrm>
           <a:prstGeom prst="rect">
             <a:avLst/>
           </a:prstGeom>
         </p:spPr>
       </p:pic>
+      <p:sp>
+        <p:nvSpPr>
+          <p:cNvPr id="12" name="Oval 11"/>
+          <p:cNvSpPr/>
+          <p:nvPr/>
+        </p:nvSpPr>
+        <p:spPr>
+          <a:xfrm>
+            <a:off x="4158000" y="3744000"/>
+            <a:ext cx="540000" cy="540000"/>
+          </a:xfrm>
+          <a:prstGeom prst="ellipse">
+            <a:avLst/>
+          </a:prstGeom>
+          <a:solidFill>
+            <a:srgbClr val="FD8103"/>
+          </a:solidFill>
+          <a:ln>
+            <a:noFill/>
+          </a:ln>
+          <a:effectLst/>
+        </p:spPr>
+        <p:style>
+          <a:lnRef idx="1">
+            <a:schemeClr val="accent1"/>
+          </a:lnRef>
+          <a:fillRef idx="3">
+            <a:schemeClr val="accent1"/>
+          </a:fillRef>
+          <a:effectRef idx="2">
+            <a:schemeClr val="accent1"/>
+          </a:effectRef>
+          <a:fontRef idx="minor">
+            <a:schemeClr val="lt1"/>
+          </a:fontRef>
+        </p:style>
+        <p:txBody>
+          <a:bodyPr rtlCol="0" anchor="ctr"/>
+          <a:lstStyle/>
+          <a:p>
+            <a:pPr algn="ctr"/>
+          </a:p>
+        </p:txBody>
+      </p:sp>
+      <p:pic>
+        <p:nvPicPr>
+          <p:cNvPr id="13" name="Picture 12" descr="arrow-right_bl.png"/>
+          <p:cNvPicPr>
+            <a:picLocks noChangeAspect="1"/>
+          </p:cNvPicPr>
+          <p:nvPr/>
+        </p:nvPicPr>
+        <p:blipFill>
+          <a:blip r:embed="rId4"/>
+          <a:stretch>
+            <a:fillRect/>
+          </a:stretch>
+        </p:blipFill>
+        <p:spPr>
+          <a:xfrm>
+            <a:off x="4266000" y="3851999"/>
+            <a:ext cx="324000" cy="324000"/>
+          </a:xfrm>
+          <a:prstGeom prst="rect">
+            <a:avLst/>
+          </a:prstGeom>
+        </p:spPr>
+      </p:pic>
+      <p:sp>
+        <p:nvSpPr>
+          <p:cNvPr id="14" name="Rounded Rectangle 13"/>
+          <p:cNvSpPr/>
+          <p:nvPr/>
+        </p:nvSpPr>
+        <p:spPr>
+          <a:xfrm>
+            <a:off x="4824000" y="1512000"/>
+            <a:ext cx="3816000" cy="270000"/>
+          </a:xfrm>
+          <a:prstGeom prst="roundRect">
+            <a:avLst/>
+          </a:prstGeom>
+          <a:solidFill>
+            <a:srgbClr val="FD8103"/>
+          </a:solidFill>
+          <a:ln>
+            <a:noFill/>
+          </a:ln>
+          <a:effectLst/>
+        </p:spPr>
+        <p:style>
+          <a:lnRef idx="1">
+            <a:schemeClr val="accent1"/>
+          </a:lnRef>
+          <a:fillRef idx="3">
+            <a:schemeClr val="accent1"/>
+          </a:fillRef>
+          <a:effectRef idx="2">
+            <a:schemeClr val="accent1"/>
+          </a:effectRef>
+          <a:fontRef idx="minor">
+            <a:schemeClr val="lt1"/>
+          </a:fontRef>
+        </p:style>
+        <p:txBody>
+          <a:bodyPr rtlCol="0" anchor="ctr"/>
+          <a:lstStyle/>
+          <a:p>
+            <a:pPr algn="ctr"/>
+          </a:p>
+        </p:txBody>
+      </p:sp>
+      <p:sp>
+        <p:nvSpPr>
+          <p:cNvPr id="15" name="TextBox 14"/>
+          <p:cNvSpPr txBox="1"/>
+          <p:nvPr/>
+        </p:nvSpPr>
+        <p:spPr>
+          <a:xfrm>
+            <a:off x="4824000" y="1512000"/>
+            <a:ext cx="3816000" cy="270000"/>
+          </a:xfrm>
+          <a:prstGeom prst="rect">
+            <a:avLst/>
+          </a:prstGeom>
+          <a:noFill/>
+        </p:spPr>
+        <p:txBody>
+          <a:bodyPr wrap="square" lIns="36000" rIns="36000" tIns="18000" bIns="18000" anchor="ctr">
+            <a:spAutoFit/>
+          </a:bodyPr>
+          <a:lstStyle/>
+          <a:p>
+            <a:pPr algn="ctr">
+              <a:lnSpc>
+                <a:spcPct val="110000"/>
+              </a:lnSpc>
+            </a:pPr>
+            <a:r>
+              <a:rPr sz="1000" b="1">
+                <a:solidFill>
+                  <a:srgbClr val="FFFFFF"/>
+                </a:solidFill>
+                <a:latin typeface="Poppins"/>
+              </a:rPr>
+              <a:t>APRÈS · PROPOSÉ</a:t>
+            </a:r>
+          </a:p>
+        </p:txBody>
+      </p:sp>
+      <p:pic>
+        <p:nvPicPr>
+          <p:cNvPr id="16" name="Picture 15" descr="w_c_pack.jpg"/>
+          <p:cNvPicPr>
+            <a:picLocks noChangeAspect="1"/>
+          </p:cNvPicPr>
+          <p:nvPr/>
+        </p:nvPicPr>
+        <p:blipFill>
+          <a:blip r:embed="rId5"/>
+          <a:stretch>
+            <a:fillRect/>
+          </a:stretch>
+        </p:blipFill>
+        <p:spPr>
+          <a:xfrm>
+            <a:off x="4946400" y="1872000"/>
+            <a:ext cx="3571200" cy="4464000"/>
+          </a:xfrm>
+          <a:prstGeom prst="rect">
+            <a:avLst/>
+          </a:prstGeom>
+        </p:spPr>
+      </p:pic>
+      <p:sp>
+        <p:nvSpPr>
+          <p:cNvPr id="17" name="Rounded Rectangle 16"/>
+          <p:cNvSpPr/>
+          <p:nvPr/>
+        </p:nvSpPr>
+        <p:spPr>
+          <a:xfrm>
+            <a:off x="8820000" y="1512000"/>
+            <a:ext cx="2808000" cy="4824000"/>
+          </a:xfrm>
+          <a:prstGeom prst="roundRect">
+            <a:avLst>
+              <a:gd name="adj" fmla="val 6000"/>
+            </a:avLst>
+          </a:prstGeom>
+          <a:solidFill>
+            <a:srgbClr val="E4F4EC"/>
+          </a:solidFill>
+          <a:ln>
+            <a:noFill/>
+          </a:ln>
+          <a:effectLst/>
+        </p:spPr>
+        <p:style>
+          <a:lnRef idx="1">
+            <a:schemeClr val="accent1"/>
+          </a:lnRef>
+          <a:fillRef idx="3">
+            <a:schemeClr val="accent1"/>
+          </a:fillRef>
+          <a:effectRef idx="2">
+            <a:schemeClr val="accent1"/>
+          </a:effectRef>
+          <a:fontRef idx="minor">
+            <a:schemeClr val="lt1"/>
+          </a:fontRef>
+        </p:style>
+        <p:txBody>
+          <a:bodyPr rtlCol="0" anchor="ctr"/>
+          <a:lstStyle/>
+          <a:p>
+            <a:pPr algn="ctr"/>
+          </a:p>
+        </p:txBody>
+      </p:sp>
+      <p:sp>
+        <p:nvSpPr>
+          <p:cNvPr id="18" name="TextBox 17"/>
+          <p:cNvSpPr txBox="1"/>
+          <p:nvPr/>
+        </p:nvSpPr>
+        <p:spPr>
+          <a:xfrm>
+            <a:off x="9036000" y="1655999"/>
+            <a:ext cx="2448000" cy="324000"/>
+          </a:xfrm>
+          <a:prstGeom prst="rect">
+            <a:avLst/>
+          </a:prstGeom>
+          <a:noFill/>
+        </p:spPr>
+        <p:txBody>
+          <a:bodyPr wrap="square" lIns="36000" rIns="36000" tIns="18000" bIns="18000" anchor="t">
+            <a:spAutoFit/>
+          </a:bodyPr>
+          <a:lstStyle/>
+          <a:p>
+            <a:pPr algn="l">
+              <a:lnSpc>
+                <a:spcPct val="110000"/>
+              </a:lnSpc>
+            </a:pPr>
+            <a:r>
+              <a:rPr sz="1500" b="1">
+                <a:solidFill>
+                  <a:srgbClr val="FD8103"/>
+                </a:solidFill>
+                <a:latin typeface="Poppins"/>
+              </a:rPr>
+              <a:t>Ce qui change</a:t>
+            </a:r>
+          </a:p>
+        </p:txBody>
+      </p:sp>
+      <p:sp>
+        <p:nvSpPr>
+          <p:cNvPr id="19" name="Oval 18"/>
+          <p:cNvSpPr/>
+          <p:nvPr/>
+        </p:nvSpPr>
+        <p:spPr>
+          <a:xfrm>
+            <a:off x="9036000" y="2088000"/>
+            <a:ext cx="342000" cy="342000"/>
+          </a:xfrm>
+          <a:prstGeom prst="ellipse">
+            <a:avLst/>
+          </a:prstGeom>
+          <a:solidFill>
+            <a:srgbClr val="4FB58B"/>
+          </a:solidFill>
+          <a:ln>
+            <a:noFill/>
+          </a:ln>
+          <a:effectLst/>
+        </p:spPr>
+        <p:style>
+          <a:lnRef idx="1">
+            <a:schemeClr val="accent1"/>
+          </a:lnRef>
+          <a:fillRef idx="3">
+            <a:schemeClr val="accent1"/>
+          </a:fillRef>
+          <a:effectRef idx="2">
+            <a:schemeClr val="accent1"/>
+          </a:effectRef>
+          <a:fontRef idx="minor">
+            <a:schemeClr val="lt1"/>
+          </a:fontRef>
+        </p:style>
+        <p:txBody>
+          <a:bodyPr rtlCol="0" anchor="ctr"/>
+          <a:lstStyle/>
+          <a:p>
+            <a:pPr algn="ctr"/>
+          </a:p>
+        </p:txBody>
+      </p:sp>
+      <p:pic>
+        <p:nvPicPr>
+          <p:cNvPr id="20" name="Picture 19" descr="check_bl.png"/>
+          <p:cNvPicPr>
+            <a:picLocks noChangeAspect="1"/>
+          </p:cNvPicPr>
+          <p:nvPr/>
+        </p:nvPicPr>
+        <p:blipFill>
+          <a:blip r:embed="rId6"/>
+          <a:stretch>
+            <a:fillRect/>
+          </a:stretch>
+        </p:blipFill>
+        <p:spPr>
+          <a:xfrm>
+            <a:off x="9097200" y="2149200"/>
+            <a:ext cx="216000" cy="216000"/>
+          </a:xfrm>
+          <a:prstGeom prst="rect">
+            <a:avLst/>
+          </a:prstGeom>
+        </p:spPr>
+      </p:pic>
+      <p:sp>
+        <p:nvSpPr>
+          <p:cNvPr id="21" name="TextBox 20"/>
+          <p:cNvSpPr txBox="1"/>
+          <p:nvPr/>
+        </p:nvSpPr>
+        <p:spPr>
+          <a:xfrm>
+            <a:off x="9468000" y="2052000"/>
+            <a:ext cx="2052000" cy="648000"/>
+          </a:xfrm>
+          <a:prstGeom prst="rect">
+            <a:avLst/>
+          </a:prstGeom>
+          <a:noFill/>
+        </p:spPr>
+        <p:txBody>
+          <a:bodyPr wrap="square" lIns="36000" rIns="36000" tIns="18000" bIns="18000" anchor="t">
+            <a:spAutoFit/>
+          </a:bodyPr>
+          <a:lstStyle/>
+          <a:p>
+            <a:pPr algn="l">
+              <a:lnSpc>
+                <a:spcPct val="110000"/>
+              </a:lnSpc>
+            </a:pPr>
+            <a:r>
+              <a:rPr sz="1100" b="1">
+                <a:solidFill>
+                  <a:srgbClr val="111111"/>
+                </a:solidFill>
+                <a:latin typeface="Poppins"/>
+              </a:rPr>
+              <a:t>Le bénéfice raconté par un objet connu</a:t>
+            </a:r>
+          </a:p>
+        </p:txBody>
+      </p:sp>
+      <p:sp>
+        <p:nvSpPr>
+          <p:cNvPr id="22" name="Oval 21"/>
+          <p:cNvSpPr/>
+          <p:nvPr/>
+        </p:nvSpPr>
+        <p:spPr>
+          <a:xfrm>
+            <a:off x="9036000" y="2790000"/>
+            <a:ext cx="342000" cy="342000"/>
+          </a:xfrm>
+          <a:prstGeom prst="ellipse">
+            <a:avLst/>
+          </a:prstGeom>
+          <a:solidFill>
+            <a:srgbClr val="4FB58B"/>
+          </a:solidFill>
+          <a:ln>
+            <a:noFill/>
+          </a:ln>
+          <a:effectLst/>
+        </p:spPr>
+        <p:style>
+          <a:lnRef idx="1">
+            <a:schemeClr val="accent1"/>
+          </a:lnRef>
+          <a:fillRef idx="3">
+            <a:schemeClr val="accent1"/>
+          </a:fillRef>
+          <a:effectRef idx="2">
+            <a:schemeClr val="accent1"/>
+          </a:effectRef>
+          <a:fontRef idx="minor">
+            <a:schemeClr val="lt1"/>
+          </a:fontRef>
+        </p:style>
+        <p:txBody>
+          <a:bodyPr rtlCol="0" anchor="ctr"/>
+          <a:lstStyle/>
+          <a:p>
+            <a:pPr algn="ctr"/>
+          </a:p>
+        </p:txBody>
+      </p:sp>
+      <p:pic>
+        <p:nvPicPr>
+          <p:cNvPr id="23" name="Picture 22" descr="check_bl.png"/>
+          <p:cNvPicPr>
+            <a:picLocks noChangeAspect="1"/>
+          </p:cNvPicPr>
+          <p:nvPr/>
+        </p:nvPicPr>
+        <p:blipFill>
+          <a:blip r:embed="rId6"/>
+          <a:stretch>
+            <a:fillRect/>
+          </a:stretch>
+        </p:blipFill>
+        <p:spPr>
+          <a:xfrm>
+            <a:off x="9097200" y="2851200"/>
+            <a:ext cx="216000" cy="216000"/>
+          </a:xfrm>
+          <a:prstGeom prst="rect">
+            <a:avLst/>
+          </a:prstGeom>
+        </p:spPr>
+      </p:pic>
+      <p:sp>
+        <p:nvSpPr>
+          <p:cNvPr id="24" name="TextBox 23"/>
+          <p:cNvSpPr txBox="1"/>
+          <p:nvPr/>
+        </p:nvSpPr>
+        <p:spPr>
+          <a:xfrm>
+            <a:off x="9468000" y="2754000"/>
+            <a:ext cx="2052000" cy="648000"/>
+          </a:xfrm>
+          <a:prstGeom prst="rect">
+            <a:avLst/>
+          </a:prstGeom>
+          <a:noFill/>
+        </p:spPr>
+        <p:txBody>
+          <a:bodyPr wrap="square" lIns="36000" rIns="36000" tIns="18000" bIns="18000" anchor="t">
+            <a:spAutoFit/>
+          </a:bodyPr>
+          <a:lstStyle/>
+          <a:p>
+            <a:pPr algn="l">
+              <a:lnSpc>
+                <a:spcPct val="110000"/>
+              </a:lnSpc>
+            </a:pPr>
+            <a:r>
+              <a:rPr sz="1100" b="1">
+                <a:solidFill>
+                  <a:srgbClr val="111111"/>
+                </a:solidFill>
+                <a:latin typeface="Poppins"/>
+              </a:rPr>
+              <a:t>La machine en vrai, chez COTIPLAST</a:t>
+            </a:r>
+          </a:p>
+        </p:txBody>
+      </p:sp>
+      <p:sp>
+        <p:nvSpPr>
+          <p:cNvPr id="25" name="Oval 24"/>
+          <p:cNvSpPr/>
+          <p:nvPr/>
+        </p:nvSpPr>
+        <p:spPr>
+          <a:xfrm>
+            <a:off x="9036000" y="3492000"/>
+            <a:ext cx="342000" cy="342000"/>
+          </a:xfrm>
+          <a:prstGeom prst="ellipse">
+            <a:avLst/>
+          </a:prstGeom>
+          <a:solidFill>
+            <a:srgbClr val="4FB58B"/>
+          </a:solidFill>
+          <a:ln>
+            <a:noFill/>
+          </a:ln>
+          <a:effectLst/>
+        </p:spPr>
+        <p:style>
+          <a:lnRef idx="1">
+            <a:schemeClr val="accent1"/>
+          </a:lnRef>
+          <a:fillRef idx="3">
+            <a:schemeClr val="accent1"/>
+          </a:fillRef>
+          <a:effectRef idx="2">
+            <a:schemeClr val="accent1"/>
+          </a:effectRef>
+          <a:fontRef idx="minor">
+            <a:schemeClr val="lt1"/>
+          </a:fontRef>
+        </p:style>
+        <p:txBody>
+          <a:bodyPr rtlCol="0" anchor="ctr"/>
+          <a:lstStyle/>
+          <a:p>
+            <a:pPr algn="ctr"/>
+          </a:p>
+        </p:txBody>
+      </p:sp>
+      <p:pic>
+        <p:nvPicPr>
+          <p:cNvPr id="26" name="Picture 25" descr="check_bl.png"/>
+          <p:cNvPicPr>
+            <a:picLocks noChangeAspect="1"/>
+          </p:cNvPicPr>
+          <p:nvPr/>
+        </p:nvPicPr>
+        <p:blipFill>
+          <a:blip r:embed="rId6"/>
+          <a:stretch>
+            <a:fillRect/>
+          </a:stretch>
+        </p:blipFill>
+        <p:spPr>
+          <a:xfrm>
+            <a:off x="9097200" y="3553200"/>
+            <a:ext cx="216000" cy="216000"/>
+          </a:xfrm>
+          <a:prstGeom prst="rect">
+            <a:avLst/>
+          </a:prstGeom>
+        </p:spPr>
+      </p:pic>
+      <p:sp>
+        <p:nvSpPr>
+          <p:cNvPr id="27" name="TextBox 26"/>
+          <p:cNvSpPr txBox="1"/>
+          <p:nvPr/>
+        </p:nvSpPr>
+        <p:spPr>
+          <a:xfrm>
+            <a:off x="9468000" y="3456000"/>
+            <a:ext cx="2052000" cy="648000"/>
+          </a:xfrm>
+          <a:prstGeom prst="rect">
+            <a:avLst/>
+          </a:prstGeom>
+          <a:noFill/>
+        </p:spPr>
+        <p:txBody>
+          <a:bodyPr wrap="square" lIns="36000" rIns="36000" tIns="18000" bIns="18000" anchor="t">
+            <a:spAutoFit/>
+          </a:bodyPr>
+          <a:lstStyle/>
+          <a:p>
+            <a:pPr algn="l">
+              <a:lnSpc>
+                <a:spcPct val="110000"/>
+              </a:lnSpc>
+            </a:pPr>
+            <a:r>
+              <a:rPr sz="1100" b="1">
+                <a:solidFill>
+                  <a:srgbClr val="111111"/>
+                </a:solidFill>
+                <a:latin typeface="Poppins"/>
+              </a:rPr>
+              <a:t>Une question chiffrée pour l’acheteur</a:t>
+            </a:r>
+          </a:p>
+        </p:txBody>
+      </p:sp>
+      <p:sp>
+        <p:nvSpPr>
+          <p:cNvPr id="28" name="Rectangle 27"/>
+          <p:cNvSpPr/>
+          <p:nvPr/>
+        </p:nvSpPr>
+        <p:spPr>
+          <a:xfrm>
+            <a:off x="9036000" y="4248000"/>
+            <a:ext cx="2376000" cy="21600"/>
+          </a:xfrm>
+          <a:prstGeom prst="rect">
+            <a:avLst/>
+          </a:prstGeom>
+          <a:solidFill>
+            <a:srgbClr val="E2E2E2"/>
+          </a:solidFill>
+          <a:ln>
+            <a:noFill/>
+          </a:ln>
+          <a:effectLst/>
+        </p:spPr>
+        <p:style>
+          <a:lnRef idx="1">
+            <a:schemeClr val="accent1"/>
+          </a:lnRef>
+          <a:fillRef idx="3">
+            <a:schemeClr val="accent1"/>
+          </a:fillRef>
+          <a:effectRef idx="2">
+            <a:schemeClr val="accent1"/>
+          </a:effectRef>
+          <a:fontRef idx="minor">
+            <a:schemeClr val="lt1"/>
+          </a:fontRef>
+        </p:style>
+        <p:txBody>
+          <a:bodyPr rtlCol="0" anchor="ctr"/>
+          <a:lstStyle/>
+          <a:p>
+            <a:pPr algn="ctr"/>
+          </a:p>
+        </p:txBody>
+      </p:sp>
+      <p:sp>
+        <p:nvSpPr>
+          <p:cNvPr id="29" name="TextBox 28"/>
+          <p:cNvSpPr txBox="1"/>
+          <p:nvPr/>
+        </p:nvSpPr>
+        <p:spPr>
+          <a:xfrm>
+            <a:off x="9036000" y="4320000"/>
+            <a:ext cx="2376000" cy="251999"/>
+          </a:xfrm>
+          <a:prstGeom prst="rect">
+            <a:avLst/>
+          </a:prstGeom>
+          <a:noFill/>
+        </p:spPr>
+        <p:txBody>
+          <a:bodyPr wrap="square" lIns="36000" rIns="36000" tIns="18000" bIns="18000" anchor="t">
+            <a:spAutoFit/>
+          </a:bodyPr>
+          <a:lstStyle/>
+          <a:p>
+            <a:pPr algn="l">
+              <a:lnSpc>
+                <a:spcPct val="110000"/>
+              </a:lnSpc>
+            </a:pPr>
+            <a:r>
+              <a:rPr sz="900" b="1">
+                <a:solidFill>
+                  <a:srgbClr val="5A5A5A"/>
+                </a:solidFill>
+                <a:latin typeface="Poppins"/>
+              </a:rPr>
+              <a:t>LE TEXTE PROPOSÉ</a:t>
+            </a:r>
+          </a:p>
+        </p:txBody>
+      </p:sp>
+      <p:sp>
+        <p:nvSpPr>
+          <p:cNvPr id="30" name="TextBox 29"/>
+          <p:cNvSpPr txBox="1"/>
+          <p:nvPr/>
+        </p:nvSpPr>
+        <p:spPr>
+          <a:xfrm>
+            <a:off x="9036000" y="4536000"/>
+            <a:ext cx="2376000" cy="1764000"/>
+          </a:xfrm>
+          <a:prstGeom prst="rect">
+            <a:avLst/>
+          </a:prstGeom>
+          <a:noFill/>
+        </p:spPr>
+        <p:txBody>
+          <a:bodyPr wrap="square" lIns="36000" rIns="36000" tIns="18000" bIns="18000" anchor="t">
+            <a:spAutoFit/>
+          </a:bodyPr>
+          <a:lstStyle/>
+          <a:p>
+            <a:pPr algn="l">
+              <a:lnSpc>
+                <a:spcPct val="110000"/>
+              </a:lnSpc>
+            </a:pPr>
+            <a:r>
+              <a:rPr sz="950" b="0">
+                <a:solidFill>
+                  <a:srgbClr val="111111"/>
+                </a:solidFill>
+                <a:latin typeface="Poppins"/>
+              </a:rPr>
+              <a:t>Un pack d’eau de 6 bouteilles fait des centaines de kilomètres avant le frigo.
+Le film thermo-rétractable le tient serré du camion au rayon.
+ Combien de packs abîmés par livraison chez vous ?</a:t>
+            </a:r>
+          </a:p>
+        </p:txBody>
+      </p:sp>
     </p:spTree>
   </p:cSld>
   <p:clrMapOvr>
@@ -9620,9 +12002,92 @@
           </a:p>
         </p:txBody>
       </p:sp>
+      <p:sp>
+        <p:nvSpPr>
+          <p:cNvPr id="9" name="Rounded Rectangle 8"/>
+          <p:cNvSpPr/>
+          <p:nvPr/>
+        </p:nvSpPr>
+        <p:spPr>
+          <a:xfrm>
+            <a:off x="576000" y="1512000"/>
+            <a:ext cx="3456000" cy="270000"/>
+          </a:xfrm>
+          <a:prstGeom prst="roundRect">
+            <a:avLst/>
+          </a:prstGeom>
+          <a:solidFill>
+            <a:srgbClr val="E2E2E2"/>
+          </a:solidFill>
+          <a:ln>
+            <a:noFill/>
+          </a:ln>
+          <a:effectLst/>
+        </p:spPr>
+        <p:style>
+          <a:lnRef idx="1">
+            <a:schemeClr val="accent1"/>
+          </a:lnRef>
+          <a:fillRef idx="3">
+            <a:schemeClr val="accent1"/>
+          </a:fillRef>
+          <a:effectRef idx="2">
+            <a:schemeClr val="accent1"/>
+          </a:effectRef>
+          <a:fontRef idx="minor">
+            <a:schemeClr val="lt1"/>
+          </a:fontRef>
+        </p:style>
+        <p:txBody>
+          <a:bodyPr rtlCol="0" anchor="ctr"/>
+          <a:lstStyle/>
+          <a:p>
+            <a:pPr algn="ctr"/>
+          </a:p>
+        </p:txBody>
+      </p:sp>
+      <p:sp>
+        <p:nvSpPr>
+          <p:cNvPr id="10" name="TextBox 9"/>
+          <p:cNvSpPr txBox="1"/>
+          <p:nvPr/>
+        </p:nvSpPr>
+        <p:spPr>
+          <a:xfrm>
+            <a:off x="576000" y="1512000"/>
+            <a:ext cx="3456000" cy="270000"/>
+          </a:xfrm>
+          <a:prstGeom prst="rect">
+            <a:avLst/>
+          </a:prstGeom>
+          <a:noFill/>
+        </p:spPr>
+        <p:txBody>
+          <a:bodyPr wrap="square" lIns="36000" rIns="36000" tIns="18000" bIns="18000" anchor="ctr">
+            <a:spAutoFit/>
+          </a:bodyPr>
+          <a:lstStyle/>
+          <a:p>
+            <a:pPr algn="ctr">
+              <a:lnSpc>
+                <a:spcPct val="110000"/>
+              </a:lnSpc>
+            </a:pPr>
+            <a:r>
+              <a:rPr sz="1000" b="1">
+                <a:solidFill>
+                  <a:srgbClr val="5A5A5A"/>
+                </a:solidFill>
+                <a:latin typeface="Poppins"/>
+              </a:rPr>
+              <a:t>AVANT · PUBLIÉ</a:t>
+            </a:r>
+          </a:p>
+        </p:txBody>
+      </p:sp>
       <p:pic>
         <p:nvPicPr>
-          <p:cNvPr id="9" name="Picture 8" descr="cmp_c_recy.jpg"/>
+          <p:cNvPr id="11" name="Picture 10" descr="b_c_recy.jpg"/>
           <p:cNvPicPr>
             <a:picLocks noChangeAspect="1"/>
           </p:cNvPicPr>
@@ -9636,14 +12101,719 @@
         </p:blipFill>
         <p:spPr>
           <a:xfrm>
-            <a:off x="1306044" y="1422000"/>
-            <a:ext cx="9555912" cy="4896000"/>
+            <a:off x="576000" y="1949400"/>
+            <a:ext cx="3456000" cy="4309200"/>
           </a:xfrm>
           <a:prstGeom prst="rect">
             <a:avLst/>
           </a:prstGeom>
         </p:spPr>
       </p:pic>
+      <p:sp>
+        <p:nvSpPr>
+          <p:cNvPr id="12" name="Oval 11"/>
+          <p:cNvSpPr/>
+          <p:nvPr/>
+        </p:nvSpPr>
+        <p:spPr>
+          <a:xfrm>
+            <a:off x="4158000" y="3744000"/>
+            <a:ext cx="540000" cy="540000"/>
+          </a:xfrm>
+          <a:prstGeom prst="ellipse">
+            <a:avLst/>
+          </a:prstGeom>
+          <a:solidFill>
+            <a:srgbClr val="FD8103"/>
+          </a:solidFill>
+          <a:ln>
+            <a:noFill/>
+          </a:ln>
+          <a:effectLst/>
+        </p:spPr>
+        <p:style>
+          <a:lnRef idx="1">
+            <a:schemeClr val="accent1"/>
+          </a:lnRef>
+          <a:fillRef idx="3">
+            <a:schemeClr val="accent1"/>
+          </a:fillRef>
+          <a:effectRef idx="2">
+            <a:schemeClr val="accent1"/>
+          </a:effectRef>
+          <a:fontRef idx="minor">
+            <a:schemeClr val="lt1"/>
+          </a:fontRef>
+        </p:style>
+        <p:txBody>
+          <a:bodyPr rtlCol="0" anchor="ctr"/>
+          <a:lstStyle/>
+          <a:p>
+            <a:pPr algn="ctr"/>
+          </a:p>
+        </p:txBody>
+      </p:sp>
+      <p:pic>
+        <p:nvPicPr>
+          <p:cNvPr id="13" name="Picture 12" descr="arrow-right_bl.png"/>
+          <p:cNvPicPr>
+            <a:picLocks noChangeAspect="1"/>
+          </p:cNvPicPr>
+          <p:nvPr/>
+        </p:nvPicPr>
+        <p:blipFill>
+          <a:blip r:embed="rId4"/>
+          <a:stretch>
+            <a:fillRect/>
+          </a:stretch>
+        </p:blipFill>
+        <p:spPr>
+          <a:xfrm>
+            <a:off x="4266000" y="3851999"/>
+            <a:ext cx="324000" cy="324000"/>
+          </a:xfrm>
+          <a:prstGeom prst="rect">
+            <a:avLst/>
+          </a:prstGeom>
+        </p:spPr>
+      </p:pic>
+      <p:sp>
+        <p:nvSpPr>
+          <p:cNvPr id="14" name="Rounded Rectangle 13"/>
+          <p:cNvSpPr/>
+          <p:nvPr/>
+        </p:nvSpPr>
+        <p:spPr>
+          <a:xfrm>
+            <a:off x="4824000" y="1512000"/>
+            <a:ext cx="3816000" cy="270000"/>
+          </a:xfrm>
+          <a:prstGeom prst="roundRect">
+            <a:avLst/>
+          </a:prstGeom>
+          <a:solidFill>
+            <a:srgbClr val="FD8103"/>
+          </a:solidFill>
+          <a:ln>
+            <a:noFill/>
+          </a:ln>
+          <a:effectLst/>
+        </p:spPr>
+        <p:style>
+          <a:lnRef idx="1">
+            <a:schemeClr val="accent1"/>
+          </a:lnRef>
+          <a:fillRef idx="3">
+            <a:schemeClr val="accent1"/>
+          </a:fillRef>
+          <a:effectRef idx="2">
+            <a:schemeClr val="accent1"/>
+          </a:effectRef>
+          <a:fontRef idx="minor">
+            <a:schemeClr val="lt1"/>
+          </a:fontRef>
+        </p:style>
+        <p:txBody>
+          <a:bodyPr rtlCol="0" anchor="ctr"/>
+          <a:lstStyle/>
+          <a:p>
+            <a:pPr algn="ctr"/>
+          </a:p>
+        </p:txBody>
+      </p:sp>
+      <p:sp>
+        <p:nvSpPr>
+          <p:cNvPr id="15" name="TextBox 14"/>
+          <p:cNvSpPr txBox="1"/>
+          <p:nvPr/>
+        </p:nvSpPr>
+        <p:spPr>
+          <a:xfrm>
+            <a:off x="4824000" y="1512000"/>
+            <a:ext cx="3816000" cy="270000"/>
+          </a:xfrm>
+          <a:prstGeom prst="rect">
+            <a:avLst/>
+          </a:prstGeom>
+          <a:noFill/>
+        </p:spPr>
+        <p:txBody>
+          <a:bodyPr wrap="square" lIns="36000" rIns="36000" tIns="18000" bIns="18000" anchor="ctr">
+            <a:spAutoFit/>
+          </a:bodyPr>
+          <a:lstStyle/>
+          <a:p>
+            <a:pPr algn="ctr">
+              <a:lnSpc>
+                <a:spcPct val="110000"/>
+              </a:lnSpc>
+            </a:pPr>
+            <a:r>
+              <a:rPr sz="1000" b="1">
+                <a:solidFill>
+                  <a:srgbClr val="FFFFFF"/>
+                </a:solidFill>
+                <a:latin typeface="Poppins"/>
+              </a:rPr>
+              <a:t>APRÈS · PROPOSÉ</a:t>
+            </a:r>
+          </a:p>
+        </p:txBody>
+      </p:sp>
+      <p:pic>
+        <p:nvPicPr>
+          <p:cNvPr id="16" name="Picture 15" descr="w_c_recy.jpg"/>
+          <p:cNvPicPr>
+            <a:picLocks noChangeAspect="1"/>
+          </p:cNvPicPr>
+          <p:nvPr/>
+        </p:nvPicPr>
+        <p:blipFill>
+          <a:blip r:embed="rId5"/>
+          <a:stretch>
+            <a:fillRect/>
+          </a:stretch>
+        </p:blipFill>
+        <p:spPr>
+          <a:xfrm>
+            <a:off x="4946400" y="1872000"/>
+            <a:ext cx="3571200" cy="4464000"/>
+          </a:xfrm>
+          <a:prstGeom prst="rect">
+            <a:avLst/>
+          </a:prstGeom>
+        </p:spPr>
+      </p:pic>
+      <p:sp>
+        <p:nvSpPr>
+          <p:cNvPr id="17" name="Rounded Rectangle 16"/>
+          <p:cNvSpPr/>
+          <p:nvPr/>
+        </p:nvSpPr>
+        <p:spPr>
+          <a:xfrm>
+            <a:off x="8820000" y="1512000"/>
+            <a:ext cx="2808000" cy="4824000"/>
+          </a:xfrm>
+          <a:prstGeom prst="roundRect">
+            <a:avLst>
+              <a:gd name="adj" fmla="val 6000"/>
+            </a:avLst>
+          </a:prstGeom>
+          <a:solidFill>
+            <a:srgbClr val="E4F4EC"/>
+          </a:solidFill>
+          <a:ln>
+            <a:noFill/>
+          </a:ln>
+          <a:effectLst/>
+        </p:spPr>
+        <p:style>
+          <a:lnRef idx="1">
+            <a:schemeClr val="accent1"/>
+          </a:lnRef>
+          <a:fillRef idx="3">
+            <a:schemeClr val="accent1"/>
+          </a:fillRef>
+          <a:effectRef idx="2">
+            <a:schemeClr val="accent1"/>
+          </a:effectRef>
+          <a:fontRef idx="minor">
+            <a:schemeClr val="lt1"/>
+          </a:fontRef>
+        </p:style>
+        <p:txBody>
+          <a:bodyPr rtlCol="0" anchor="ctr"/>
+          <a:lstStyle/>
+          <a:p>
+            <a:pPr algn="ctr"/>
+          </a:p>
+        </p:txBody>
+      </p:sp>
+      <p:sp>
+        <p:nvSpPr>
+          <p:cNvPr id="18" name="TextBox 17"/>
+          <p:cNvSpPr txBox="1"/>
+          <p:nvPr/>
+        </p:nvSpPr>
+        <p:spPr>
+          <a:xfrm>
+            <a:off x="9036000" y="1655999"/>
+            <a:ext cx="2448000" cy="324000"/>
+          </a:xfrm>
+          <a:prstGeom prst="rect">
+            <a:avLst/>
+          </a:prstGeom>
+          <a:noFill/>
+        </p:spPr>
+        <p:txBody>
+          <a:bodyPr wrap="square" lIns="36000" rIns="36000" tIns="18000" bIns="18000" anchor="t">
+            <a:spAutoFit/>
+          </a:bodyPr>
+          <a:lstStyle/>
+          <a:p>
+            <a:pPr algn="l">
+              <a:lnSpc>
+                <a:spcPct val="110000"/>
+              </a:lnSpc>
+            </a:pPr>
+            <a:r>
+              <a:rPr sz="1500" b="1">
+                <a:solidFill>
+                  <a:srgbClr val="FD8103"/>
+                </a:solidFill>
+                <a:latin typeface="Poppins"/>
+              </a:rPr>
+              <a:t>Ce qui change</a:t>
+            </a:r>
+          </a:p>
+        </p:txBody>
+      </p:sp>
+      <p:sp>
+        <p:nvSpPr>
+          <p:cNvPr id="19" name="Oval 18"/>
+          <p:cNvSpPr/>
+          <p:nvPr/>
+        </p:nvSpPr>
+        <p:spPr>
+          <a:xfrm>
+            <a:off x="9036000" y="2088000"/>
+            <a:ext cx="342000" cy="342000"/>
+          </a:xfrm>
+          <a:prstGeom prst="ellipse">
+            <a:avLst/>
+          </a:prstGeom>
+          <a:solidFill>
+            <a:srgbClr val="4FB58B"/>
+          </a:solidFill>
+          <a:ln>
+            <a:noFill/>
+          </a:ln>
+          <a:effectLst/>
+        </p:spPr>
+        <p:style>
+          <a:lnRef idx="1">
+            <a:schemeClr val="accent1"/>
+          </a:lnRef>
+          <a:fillRef idx="3">
+            <a:schemeClr val="accent1"/>
+          </a:fillRef>
+          <a:effectRef idx="2">
+            <a:schemeClr val="accent1"/>
+          </a:effectRef>
+          <a:fontRef idx="minor">
+            <a:schemeClr val="lt1"/>
+          </a:fontRef>
+        </p:style>
+        <p:txBody>
+          <a:bodyPr rtlCol="0" anchor="ctr"/>
+          <a:lstStyle/>
+          <a:p>
+            <a:pPr algn="ctr"/>
+          </a:p>
+        </p:txBody>
+      </p:sp>
+      <p:pic>
+        <p:nvPicPr>
+          <p:cNvPr id="20" name="Picture 19" descr="check_bl.png"/>
+          <p:cNvPicPr>
+            <a:picLocks noChangeAspect="1"/>
+          </p:cNvPicPr>
+          <p:nvPr/>
+        </p:nvPicPr>
+        <p:blipFill>
+          <a:blip r:embed="rId6"/>
+          <a:stretch>
+            <a:fillRect/>
+          </a:stretch>
+        </p:blipFill>
+        <p:spPr>
+          <a:xfrm>
+            <a:off x="9097200" y="2149200"/>
+            <a:ext cx="216000" cy="216000"/>
+          </a:xfrm>
+          <a:prstGeom prst="rect">
+            <a:avLst/>
+          </a:prstGeom>
+        </p:spPr>
+      </p:pic>
+      <p:sp>
+        <p:nvSpPr>
+          <p:cNvPr id="21" name="TextBox 20"/>
+          <p:cNvSpPr txBox="1"/>
+          <p:nvPr/>
+        </p:nvSpPr>
+        <p:spPr>
+          <a:xfrm>
+            <a:off x="9468000" y="2052000"/>
+            <a:ext cx="2052000" cy="648000"/>
+          </a:xfrm>
+          <a:prstGeom prst="rect">
+            <a:avLst/>
+          </a:prstGeom>
+          <a:noFill/>
+        </p:spPr>
+        <p:txBody>
+          <a:bodyPr wrap="square" lIns="36000" rIns="36000" tIns="18000" bIns="18000" anchor="t">
+            <a:spAutoFit/>
+          </a:bodyPr>
+          <a:lstStyle/>
+          <a:p>
+            <a:pPr algn="l">
+              <a:lnSpc>
+                <a:spcPct val="110000"/>
+              </a:lnSpc>
+            </a:pPr>
+            <a:r>
+              <a:rPr sz="1100" b="1">
+                <a:solidFill>
+                  <a:srgbClr val="111111"/>
+                </a:solidFill>
+                <a:latin typeface="Poppins"/>
+              </a:rPr>
+              <a:t>L’engagement montré dans l’usine</a:t>
+            </a:r>
+          </a:p>
+        </p:txBody>
+      </p:sp>
+      <p:sp>
+        <p:nvSpPr>
+          <p:cNvPr id="22" name="Oval 21"/>
+          <p:cNvSpPr/>
+          <p:nvPr/>
+        </p:nvSpPr>
+        <p:spPr>
+          <a:xfrm>
+            <a:off x="9036000" y="2790000"/>
+            <a:ext cx="342000" cy="342000"/>
+          </a:xfrm>
+          <a:prstGeom prst="ellipse">
+            <a:avLst/>
+          </a:prstGeom>
+          <a:solidFill>
+            <a:srgbClr val="4FB58B"/>
+          </a:solidFill>
+          <a:ln>
+            <a:noFill/>
+          </a:ln>
+          <a:effectLst/>
+        </p:spPr>
+        <p:style>
+          <a:lnRef idx="1">
+            <a:schemeClr val="accent1"/>
+          </a:lnRef>
+          <a:fillRef idx="3">
+            <a:schemeClr val="accent1"/>
+          </a:fillRef>
+          <a:effectRef idx="2">
+            <a:schemeClr val="accent1"/>
+          </a:effectRef>
+          <a:fontRef idx="minor">
+            <a:schemeClr val="lt1"/>
+          </a:fontRef>
+        </p:style>
+        <p:txBody>
+          <a:bodyPr rtlCol="0" anchor="ctr"/>
+          <a:lstStyle/>
+          <a:p>
+            <a:pPr algn="ctr"/>
+          </a:p>
+        </p:txBody>
+      </p:sp>
+      <p:pic>
+        <p:nvPicPr>
+          <p:cNvPr id="23" name="Picture 22" descr="check_bl.png"/>
+          <p:cNvPicPr>
+            <a:picLocks noChangeAspect="1"/>
+          </p:cNvPicPr>
+          <p:nvPr/>
+        </p:nvPicPr>
+        <p:blipFill>
+          <a:blip r:embed="rId6"/>
+          <a:stretch>
+            <a:fillRect/>
+          </a:stretch>
+        </p:blipFill>
+        <p:spPr>
+          <a:xfrm>
+            <a:off x="9097200" y="2851200"/>
+            <a:ext cx="216000" cy="216000"/>
+          </a:xfrm>
+          <a:prstGeom prst="rect">
+            <a:avLst/>
+          </a:prstGeom>
+        </p:spPr>
+      </p:pic>
+      <p:sp>
+        <p:nvSpPr>
+          <p:cNvPr id="24" name="TextBox 23"/>
+          <p:cNvSpPr txBox="1"/>
+          <p:nvPr/>
+        </p:nvSpPr>
+        <p:spPr>
+          <a:xfrm>
+            <a:off x="9468000" y="2754000"/>
+            <a:ext cx="2052000" cy="648000"/>
+          </a:xfrm>
+          <a:prstGeom prst="rect">
+            <a:avLst/>
+          </a:prstGeom>
+          <a:noFill/>
+        </p:spPr>
+        <p:txBody>
+          <a:bodyPr wrap="square" lIns="36000" rIns="36000" tIns="18000" bIns="18000" anchor="t">
+            <a:spAutoFit/>
+          </a:bodyPr>
+          <a:lstStyle/>
+          <a:p>
+            <a:pPr algn="l">
+              <a:lnSpc>
+                <a:spcPct val="110000"/>
+              </a:lnSpc>
+            </a:pPr>
+            <a:r>
+              <a:rPr sz="1100" b="1">
+                <a:solidFill>
+                  <a:srgbClr val="111111"/>
+                </a:solidFill>
+                <a:latin typeface="Poppins"/>
+              </a:rPr>
+              <a:t>Une suite annoncée : on revient voir</a:t>
+            </a:r>
+          </a:p>
+        </p:txBody>
+      </p:sp>
+      <p:sp>
+        <p:nvSpPr>
+          <p:cNvPr id="25" name="Oval 24"/>
+          <p:cNvSpPr/>
+          <p:nvPr/>
+        </p:nvSpPr>
+        <p:spPr>
+          <a:xfrm>
+            <a:off x="9036000" y="3492000"/>
+            <a:ext cx="342000" cy="342000"/>
+          </a:xfrm>
+          <a:prstGeom prst="ellipse">
+            <a:avLst/>
+          </a:prstGeom>
+          <a:solidFill>
+            <a:srgbClr val="4FB58B"/>
+          </a:solidFill>
+          <a:ln>
+            <a:noFill/>
+          </a:ln>
+          <a:effectLst/>
+        </p:spPr>
+        <p:style>
+          <a:lnRef idx="1">
+            <a:schemeClr val="accent1"/>
+          </a:lnRef>
+          <a:fillRef idx="3">
+            <a:schemeClr val="accent1"/>
+          </a:fillRef>
+          <a:effectRef idx="2">
+            <a:schemeClr val="accent1"/>
+          </a:effectRef>
+          <a:fontRef idx="minor">
+            <a:schemeClr val="lt1"/>
+          </a:fontRef>
+        </p:style>
+        <p:txBody>
+          <a:bodyPr rtlCol="0" anchor="ctr"/>
+          <a:lstStyle/>
+          <a:p>
+            <a:pPr algn="ctr"/>
+          </a:p>
+        </p:txBody>
+      </p:sp>
+      <p:pic>
+        <p:nvPicPr>
+          <p:cNvPr id="26" name="Picture 25" descr="check_bl.png"/>
+          <p:cNvPicPr>
+            <a:picLocks noChangeAspect="1"/>
+          </p:cNvPicPr>
+          <p:nvPr/>
+        </p:nvPicPr>
+        <p:blipFill>
+          <a:blip r:embed="rId6"/>
+          <a:stretch>
+            <a:fillRect/>
+          </a:stretch>
+        </p:blipFill>
+        <p:spPr>
+          <a:xfrm>
+            <a:off x="9097200" y="3553200"/>
+            <a:ext cx="216000" cy="216000"/>
+          </a:xfrm>
+          <a:prstGeom prst="rect">
+            <a:avLst/>
+          </a:prstGeom>
+        </p:spPr>
+      </p:pic>
+      <p:sp>
+        <p:nvSpPr>
+          <p:cNvPr id="27" name="TextBox 26"/>
+          <p:cNvSpPr txBox="1"/>
+          <p:nvPr/>
+        </p:nvSpPr>
+        <p:spPr>
+          <a:xfrm>
+            <a:off x="9468000" y="3456000"/>
+            <a:ext cx="2052000" cy="648000"/>
+          </a:xfrm>
+          <a:prstGeom prst="rect">
+            <a:avLst/>
+          </a:prstGeom>
+          <a:noFill/>
+        </p:spPr>
+        <p:txBody>
+          <a:bodyPr wrap="square" lIns="36000" rIns="36000" tIns="18000" bIns="18000" anchor="t">
+            <a:spAutoFit/>
+          </a:bodyPr>
+          <a:lstStyle/>
+          <a:p>
+            <a:pPr algn="l">
+              <a:lnSpc>
+                <a:spcPct val="110000"/>
+              </a:lnSpc>
+            </a:pPr>
+            <a:r>
+              <a:rPr sz="1100" b="1">
+                <a:solidFill>
+                  <a:srgbClr val="111111"/>
+                </a:solidFill>
+                <a:latin typeface="Poppins"/>
+              </a:rPr>
+              <a:t>Moins de mots, une seule idée</a:t>
+            </a:r>
+          </a:p>
+        </p:txBody>
+      </p:sp>
+      <p:sp>
+        <p:nvSpPr>
+          <p:cNvPr id="28" name="Rectangle 27"/>
+          <p:cNvSpPr/>
+          <p:nvPr/>
+        </p:nvSpPr>
+        <p:spPr>
+          <a:xfrm>
+            <a:off x="9036000" y="4248000"/>
+            <a:ext cx="2376000" cy="21600"/>
+          </a:xfrm>
+          <a:prstGeom prst="rect">
+            <a:avLst/>
+          </a:prstGeom>
+          <a:solidFill>
+            <a:srgbClr val="E2E2E2"/>
+          </a:solidFill>
+          <a:ln>
+            <a:noFill/>
+          </a:ln>
+          <a:effectLst/>
+        </p:spPr>
+        <p:style>
+          <a:lnRef idx="1">
+            <a:schemeClr val="accent1"/>
+          </a:lnRef>
+          <a:fillRef idx="3">
+            <a:schemeClr val="accent1"/>
+          </a:fillRef>
+          <a:effectRef idx="2">
+            <a:schemeClr val="accent1"/>
+          </a:effectRef>
+          <a:fontRef idx="minor">
+            <a:schemeClr val="lt1"/>
+          </a:fontRef>
+        </p:style>
+        <p:txBody>
+          <a:bodyPr rtlCol="0" anchor="ctr"/>
+          <a:lstStyle/>
+          <a:p>
+            <a:pPr algn="ctr"/>
+          </a:p>
+        </p:txBody>
+      </p:sp>
+      <p:sp>
+        <p:nvSpPr>
+          <p:cNvPr id="29" name="TextBox 28"/>
+          <p:cNvSpPr txBox="1"/>
+          <p:nvPr/>
+        </p:nvSpPr>
+        <p:spPr>
+          <a:xfrm>
+            <a:off x="9036000" y="4320000"/>
+            <a:ext cx="2376000" cy="251999"/>
+          </a:xfrm>
+          <a:prstGeom prst="rect">
+            <a:avLst/>
+          </a:prstGeom>
+          <a:noFill/>
+        </p:spPr>
+        <p:txBody>
+          <a:bodyPr wrap="square" lIns="36000" rIns="36000" tIns="18000" bIns="18000" anchor="t">
+            <a:spAutoFit/>
+          </a:bodyPr>
+          <a:lstStyle/>
+          <a:p>
+            <a:pPr algn="l">
+              <a:lnSpc>
+                <a:spcPct val="110000"/>
+              </a:lnSpc>
+            </a:pPr>
+            <a:r>
+              <a:rPr sz="900" b="1">
+                <a:solidFill>
+                  <a:srgbClr val="5A5A5A"/>
+                </a:solidFill>
+                <a:latin typeface="Poppins"/>
+              </a:rPr>
+              <a:t>LE TEXTE PROPOSÉ</a:t>
+            </a:r>
+          </a:p>
+        </p:txBody>
+      </p:sp>
+      <p:sp>
+        <p:nvSpPr>
+          <p:cNvPr id="30" name="TextBox 29"/>
+          <p:cNvSpPr txBox="1"/>
+          <p:nvPr/>
+        </p:nvSpPr>
+        <p:spPr>
+          <a:xfrm>
+            <a:off x="9036000" y="4536000"/>
+            <a:ext cx="2376000" cy="1764000"/>
+          </a:xfrm>
+          <a:prstGeom prst="rect">
+            <a:avLst/>
+          </a:prstGeom>
+          <a:noFill/>
+        </p:spPr>
+        <p:txBody>
+          <a:bodyPr wrap="square" lIns="36000" rIns="36000" tIns="18000" bIns="18000" anchor="t">
+            <a:spAutoFit/>
+          </a:bodyPr>
+          <a:lstStyle/>
+          <a:p>
+            <a:pPr algn="l">
+              <a:lnSpc>
+                <a:spcPct val="110000"/>
+              </a:lnSpc>
+            </a:pPr>
+            <a:r>
+              <a:rPr sz="950" b="0">
+                <a:solidFill>
+                  <a:srgbClr val="111111"/>
+                </a:solidFill>
+                <a:latin typeface="Poppins"/>
+              </a:rPr>
+              <a:t>Ce que deviennent vos chutes de plastique chez COTIPLAST :
+elles sont valorisées pour une seconde vie.
+ Vous voulez voir comment ? On vous fait visiter l’atelier en vidéo la semaine prochaine.</a:t>
+            </a:r>
+          </a:p>
+        </p:txBody>
+      </p:sp>
     </p:spTree>
   </p:cSld>
   <p:clrMapOvr>
@@ -9930,9 +13100,92 @@
           </a:p>
         </p:txBody>
       </p:sp>
+      <p:sp>
+        <p:nvSpPr>
+          <p:cNvPr id="9" name="Rounded Rectangle 8"/>
+          <p:cNvSpPr/>
+          <p:nvPr/>
+        </p:nvSpPr>
+        <p:spPr>
+          <a:xfrm>
+            <a:off x="576000" y="1512000"/>
+            <a:ext cx="3456000" cy="270000"/>
+          </a:xfrm>
+          <a:prstGeom prst="roundRect">
+            <a:avLst/>
+          </a:prstGeom>
+          <a:solidFill>
+            <a:srgbClr val="E2E2E2"/>
+          </a:solidFill>
+          <a:ln>
+            <a:noFill/>
+          </a:ln>
+          <a:effectLst/>
+        </p:spPr>
+        <p:style>
+          <a:lnRef idx="1">
+            <a:schemeClr val="accent1"/>
+          </a:lnRef>
+          <a:fillRef idx="3">
+            <a:schemeClr val="accent1"/>
+          </a:fillRef>
+          <a:effectRef idx="2">
+            <a:schemeClr val="accent1"/>
+          </a:effectRef>
+          <a:fontRef idx="minor">
+            <a:schemeClr val="lt1"/>
+          </a:fontRef>
+        </p:style>
+        <p:txBody>
+          <a:bodyPr rtlCol="0" anchor="ctr"/>
+          <a:lstStyle/>
+          <a:p>
+            <a:pPr algn="ctr"/>
+          </a:p>
+        </p:txBody>
+      </p:sp>
+      <p:sp>
+        <p:nvSpPr>
+          <p:cNvPr id="10" name="TextBox 9"/>
+          <p:cNvSpPr txBox="1"/>
+          <p:nvPr/>
+        </p:nvSpPr>
+        <p:spPr>
+          <a:xfrm>
+            <a:off x="576000" y="1512000"/>
+            <a:ext cx="3456000" cy="270000"/>
+          </a:xfrm>
+          <a:prstGeom prst="rect">
+            <a:avLst/>
+          </a:prstGeom>
+          <a:noFill/>
+        </p:spPr>
+        <p:txBody>
+          <a:bodyPr wrap="square" lIns="36000" rIns="36000" tIns="18000" bIns="18000" anchor="ctr">
+            <a:spAutoFit/>
+          </a:bodyPr>
+          <a:lstStyle/>
+          <a:p>
+            <a:pPr algn="ctr">
+              <a:lnSpc>
+                <a:spcPct val="110000"/>
+              </a:lnSpc>
+            </a:pPr>
+            <a:r>
+              <a:rPr sz="1000" b="1">
+                <a:solidFill>
+                  <a:srgbClr val="5A5A5A"/>
+                </a:solidFill>
+                <a:latin typeface="Poppins"/>
+              </a:rPr>
+              <a:t>AVANT · PUBLIÉ</a:t>
+            </a:r>
+          </a:p>
+        </p:txBody>
+      </p:sp>
       <p:pic>
         <p:nvPicPr>
-          <p:cNvPr id="9" name="Picture 8" descr="cmp_c_equipe.jpg"/>
+          <p:cNvPr id="11" name="Picture 10" descr="b_c_equipe.jpg"/>
           <p:cNvPicPr>
             <a:picLocks noChangeAspect="1"/>
           </p:cNvPicPr>
@@ -9946,14 +13199,719 @@
         </p:blipFill>
         <p:spPr>
           <a:xfrm>
-            <a:off x="1199493" y="1422000"/>
-            <a:ext cx="9769014" cy="4896000"/>
+            <a:off x="576000" y="1949400"/>
+            <a:ext cx="3456000" cy="4309200"/>
           </a:xfrm>
           <a:prstGeom prst="rect">
             <a:avLst/>
           </a:prstGeom>
         </p:spPr>
       </p:pic>
+      <p:sp>
+        <p:nvSpPr>
+          <p:cNvPr id="12" name="Oval 11"/>
+          <p:cNvSpPr/>
+          <p:nvPr/>
+        </p:nvSpPr>
+        <p:spPr>
+          <a:xfrm>
+            <a:off x="4158000" y="3744000"/>
+            <a:ext cx="540000" cy="540000"/>
+          </a:xfrm>
+          <a:prstGeom prst="ellipse">
+            <a:avLst/>
+          </a:prstGeom>
+          <a:solidFill>
+            <a:srgbClr val="FD8103"/>
+          </a:solidFill>
+          <a:ln>
+            <a:noFill/>
+          </a:ln>
+          <a:effectLst/>
+        </p:spPr>
+        <p:style>
+          <a:lnRef idx="1">
+            <a:schemeClr val="accent1"/>
+          </a:lnRef>
+          <a:fillRef idx="3">
+            <a:schemeClr val="accent1"/>
+          </a:fillRef>
+          <a:effectRef idx="2">
+            <a:schemeClr val="accent1"/>
+          </a:effectRef>
+          <a:fontRef idx="minor">
+            <a:schemeClr val="lt1"/>
+          </a:fontRef>
+        </p:style>
+        <p:txBody>
+          <a:bodyPr rtlCol="0" anchor="ctr"/>
+          <a:lstStyle/>
+          <a:p>
+            <a:pPr algn="ctr"/>
+          </a:p>
+        </p:txBody>
+      </p:sp>
+      <p:pic>
+        <p:nvPicPr>
+          <p:cNvPr id="13" name="Picture 12" descr="arrow-right_bl.png"/>
+          <p:cNvPicPr>
+            <a:picLocks noChangeAspect="1"/>
+          </p:cNvPicPr>
+          <p:nvPr/>
+        </p:nvPicPr>
+        <p:blipFill>
+          <a:blip r:embed="rId4"/>
+          <a:stretch>
+            <a:fillRect/>
+          </a:stretch>
+        </p:blipFill>
+        <p:spPr>
+          <a:xfrm>
+            <a:off x="4266000" y="3851999"/>
+            <a:ext cx="324000" cy="324000"/>
+          </a:xfrm>
+          <a:prstGeom prst="rect">
+            <a:avLst/>
+          </a:prstGeom>
+        </p:spPr>
+      </p:pic>
+      <p:sp>
+        <p:nvSpPr>
+          <p:cNvPr id="14" name="Rounded Rectangle 13"/>
+          <p:cNvSpPr/>
+          <p:nvPr/>
+        </p:nvSpPr>
+        <p:spPr>
+          <a:xfrm>
+            <a:off x="4824000" y="1512000"/>
+            <a:ext cx="3816000" cy="270000"/>
+          </a:xfrm>
+          <a:prstGeom prst="roundRect">
+            <a:avLst/>
+          </a:prstGeom>
+          <a:solidFill>
+            <a:srgbClr val="FD8103"/>
+          </a:solidFill>
+          <a:ln>
+            <a:noFill/>
+          </a:ln>
+          <a:effectLst/>
+        </p:spPr>
+        <p:style>
+          <a:lnRef idx="1">
+            <a:schemeClr val="accent1"/>
+          </a:lnRef>
+          <a:fillRef idx="3">
+            <a:schemeClr val="accent1"/>
+          </a:fillRef>
+          <a:effectRef idx="2">
+            <a:schemeClr val="accent1"/>
+          </a:effectRef>
+          <a:fontRef idx="minor">
+            <a:schemeClr val="lt1"/>
+          </a:fontRef>
+        </p:style>
+        <p:txBody>
+          <a:bodyPr rtlCol="0" anchor="ctr"/>
+          <a:lstStyle/>
+          <a:p>
+            <a:pPr algn="ctr"/>
+          </a:p>
+        </p:txBody>
+      </p:sp>
+      <p:sp>
+        <p:nvSpPr>
+          <p:cNvPr id="15" name="TextBox 14"/>
+          <p:cNvSpPr txBox="1"/>
+          <p:nvPr/>
+        </p:nvSpPr>
+        <p:spPr>
+          <a:xfrm>
+            <a:off x="4824000" y="1512000"/>
+            <a:ext cx="3816000" cy="270000"/>
+          </a:xfrm>
+          <a:prstGeom prst="rect">
+            <a:avLst/>
+          </a:prstGeom>
+          <a:noFill/>
+        </p:spPr>
+        <p:txBody>
+          <a:bodyPr wrap="square" lIns="36000" rIns="36000" tIns="18000" bIns="18000" anchor="ctr">
+            <a:spAutoFit/>
+          </a:bodyPr>
+          <a:lstStyle/>
+          <a:p>
+            <a:pPr algn="ctr">
+              <a:lnSpc>
+                <a:spcPct val="110000"/>
+              </a:lnSpc>
+            </a:pPr>
+            <a:r>
+              <a:rPr sz="1000" b="1">
+                <a:solidFill>
+                  <a:srgbClr val="FFFFFF"/>
+                </a:solidFill>
+                <a:latin typeface="Poppins"/>
+              </a:rPr>
+              <a:t>APRÈS · PROPOSÉ</a:t>
+            </a:r>
+          </a:p>
+        </p:txBody>
+      </p:sp>
+      <p:pic>
+        <p:nvPicPr>
+          <p:cNvPr id="16" name="Picture 15" descr="w_c_equipe.jpg"/>
+          <p:cNvPicPr>
+            <a:picLocks noChangeAspect="1"/>
+          </p:cNvPicPr>
+          <p:nvPr/>
+        </p:nvPicPr>
+        <p:blipFill>
+          <a:blip r:embed="rId5"/>
+          <a:stretch>
+            <a:fillRect/>
+          </a:stretch>
+        </p:blipFill>
+        <p:spPr>
+          <a:xfrm>
+            <a:off x="4946400" y="1872000"/>
+            <a:ext cx="3571200" cy="4464000"/>
+          </a:xfrm>
+          <a:prstGeom prst="rect">
+            <a:avLst/>
+          </a:prstGeom>
+        </p:spPr>
+      </p:pic>
+      <p:sp>
+        <p:nvSpPr>
+          <p:cNvPr id="17" name="Rounded Rectangle 16"/>
+          <p:cNvSpPr/>
+          <p:nvPr/>
+        </p:nvSpPr>
+        <p:spPr>
+          <a:xfrm>
+            <a:off x="8820000" y="1512000"/>
+            <a:ext cx="2808000" cy="4824000"/>
+          </a:xfrm>
+          <a:prstGeom prst="roundRect">
+            <a:avLst>
+              <a:gd name="adj" fmla="val 6000"/>
+            </a:avLst>
+          </a:prstGeom>
+          <a:solidFill>
+            <a:srgbClr val="E4F4EC"/>
+          </a:solidFill>
+          <a:ln>
+            <a:noFill/>
+          </a:ln>
+          <a:effectLst/>
+        </p:spPr>
+        <p:style>
+          <a:lnRef idx="1">
+            <a:schemeClr val="accent1"/>
+          </a:lnRef>
+          <a:fillRef idx="3">
+            <a:schemeClr val="accent1"/>
+          </a:fillRef>
+          <a:effectRef idx="2">
+            <a:schemeClr val="accent1"/>
+          </a:effectRef>
+          <a:fontRef idx="minor">
+            <a:schemeClr val="lt1"/>
+          </a:fontRef>
+        </p:style>
+        <p:txBody>
+          <a:bodyPr rtlCol="0" anchor="ctr"/>
+          <a:lstStyle/>
+          <a:p>
+            <a:pPr algn="ctr"/>
+          </a:p>
+        </p:txBody>
+      </p:sp>
+      <p:sp>
+        <p:nvSpPr>
+          <p:cNvPr id="18" name="TextBox 17"/>
+          <p:cNvSpPr txBox="1"/>
+          <p:nvPr/>
+        </p:nvSpPr>
+        <p:spPr>
+          <a:xfrm>
+            <a:off x="9036000" y="1655999"/>
+            <a:ext cx="2448000" cy="324000"/>
+          </a:xfrm>
+          <a:prstGeom prst="rect">
+            <a:avLst/>
+          </a:prstGeom>
+          <a:noFill/>
+        </p:spPr>
+        <p:txBody>
+          <a:bodyPr wrap="square" lIns="36000" rIns="36000" tIns="18000" bIns="18000" anchor="t">
+            <a:spAutoFit/>
+          </a:bodyPr>
+          <a:lstStyle/>
+          <a:p>
+            <a:pPr algn="l">
+              <a:lnSpc>
+                <a:spcPct val="110000"/>
+              </a:lnSpc>
+            </a:pPr>
+            <a:r>
+              <a:rPr sz="1500" b="1">
+                <a:solidFill>
+                  <a:srgbClr val="FD8103"/>
+                </a:solidFill>
+                <a:latin typeface="Poppins"/>
+              </a:rPr>
+              <a:t>Ce qui change</a:t>
+            </a:r>
+          </a:p>
+        </p:txBody>
+      </p:sp>
+      <p:sp>
+        <p:nvSpPr>
+          <p:cNvPr id="19" name="Oval 18"/>
+          <p:cNvSpPr/>
+          <p:nvPr/>
+        </p:nvSpPr>
+        <p:spPr>
+          <a:xfrm>
+            <a:off x="9036000" y="2088000"/>
+            <a:ext cx="342000" cy="342000"/>
+          </a:xfrm>
+          <a:prstGeom prst="ellipse">
+            <a:avLst/>
+          </a:prstGeom>
+          <a:solidFill>
+            <a:srgbClr val="4FB58B"/>
+          </a:solidFill>
+          <a:ln>
+            <a:noFill/>
+          </a:ln>
+          <a:effectLst/>
+        </p:spPr>
+        <p:style>
+          <a:lnRef idx="1">
+            <a:schemeClr val="accent1"/>
+          </a:lnRef>
+          <a:fillRef idx="3">
+            <a:schemeClr val="accent1"/>
+          </a:fillRef>
+          <a:effectRef idx="2">
+            <a:schemeClr val="accent1"/>
+          </a:effectRef>
+          <a:fontRef idx="minor">
+            <a:schemeClr val="lt1"/>
+          </a:fontRef>
+        </p:style>
+        <p:txBody>
+          <a:bodyPr rtlCol="0" anchor="ctr"/>
+          <a:lstStyle/>
+          <a:p>
+            <a:pPr algn="ctr"/>
+          </a:p>
+        </p:txBody>
+      </p:sp>
+      <p:pic>
+        <p:nvPicPr>
+          <p:cNvPr id="20" name="Picture 19" descr="check_bl.png"/>
+          <p:cNvPicPr>
+            <a:picLocks noChangeAspect="1"/>
+          </p:cNvPicPr>
+          <p:nvPr/>
+        </p:nvPicPr>
+        <p:blipFill>
+          <a:blip r:embed="rId6"/>
+          <a:stretch>
+            <a:fillRect/>
+          </a:stretch>
+        </p:blipFill>
+        <p:spPr>
+          <a:xfrm>
+            <a:off x="9097200" y="2149200"/>
+            <a:ext cx="216000" cy="216000"/>
+          </a:xfrm>
+          <a:prstGeom prst="rect">
+            <a:avLst/>
+          </a:prstGeom>
+        </p:spPr>
+      </p:pic>
+      <p:sp>
+        <p:nvSpPr>
+          <p:cNvPr id="21" name="TextBox 20"/>
+          <p:cNvSpPr txBox="1"/>
+          <p:nvPr/>
+        </p:nvSpPr>
+        <p:spPr>
+          <a:xfrm>
+            <a:off x="9468000" y="2052000"/>
+            <a:ext cx="2052000" cy="648000"/>
+          </a:xfrm>
+          <a:prstGeom prst="rect">
+            <a:avLst/>
+          </a:prstGeom>
+          <a:noFill/>
+        </p:spPr>
+        <p:txBody>
+          <a:bodyPr wrap="square" lIns="36000" rIns="36000" tIns="18000" bIns="18000" anchor="t">
+            <a:spAutoFit/>
+          </a:bodyPr>
+          <a:lstStyle/>
+          <a:p>
+            <a:pPr algn="l">
+              <a:lnSpc>
+                <a:spcPct val="110000"/>
+              </a:lnSpc>
+            </a:pPr>
+            <a:r>
+              <a:rPr sz="1100" b="1">
+                <a:solidFill>
+                  <a:srgbClr val="111111"/>
+                </a:solidFill>
+                <a:latin typeface="Poppins"/>
+              </a:rPr>
+              <a:t>Votre meilleur post : vos équipes</a:t>
+            </a:r>
+          </a:p>
+        </p:txBody>
+      </p:sp>
+      <p:sp>
+        <p:nvSpPr>
+          <p:cNvPr id="22" name="Oval 21"/>
+          <p:cNvSpPr/>
+          <p:nvPr/>
+        </p:nvSpPr>
+        <p:spPr>
+          <a:xfrm>
+            <a:off x="9036000" y="2790000"/>
+            <a:ext cx="342000" cy="342000"/>
+          </a:xfrm>
+          <a:prstGeom prst="ellipse">
+            <a:avLst/>
+          </a:prstGeom>
+          <a:solidFill>
+            <a:srgbClr val="4FB58B"/>
+          </a:solidFill>
+          <a:ln>
+            <a:noFill/>
+          </a:ln>
+          <a:effectLst/>
+        </p:spPr>
+        <p:style>
+          <a:lnRef idx="1">
+            <a:schemeClr val="accent1"/>
+          </a:lnRef>
+          <a:fillRef idx="3">
+            <a:schemeClr val="accent1"/>
+          </a:fillRef>
+          <a:effectRef idx="2">
+            <a:schemeClr val="accent1"/>
+          </a:effectRef>
+          <a:fontRef idx="minor">
+            <a:schemeClr val="lt1"/>
+          </a:fontRef>
+        </p:style>
+        <p:txBody>
+          <a:bodyPr rtlCol="0" anchor="ctr"/>
+          <a:lstStyle/>
+          <a:p>
+            <a:pPr algn="ctr"/>
+          </a:p>
+        </p:txBody>
+      </p:sp>
+      <p:pic>
+        <p:nvPicPr>
+          <p:cNvPr id="23" name="Picture 22" descr="check_bl.png"/>
+          <p:cNvPicPr>
+            <a:picLocks noChangeAspect="1"/>
+          </p:cNvPicPr>
+          <p:nvPr/>
+        </p:nvPicPr>
+        <p:blipFill>
+          <a:blip r:embed="rId6"/>
+          <a:stretch>
+            <a:fillRect/>
+          </a:stretch>
+        </p:blipFill>
+        <p:spPr>
+          <a:xfrm>
+            <a:off x="9097200" y="2851200"/>
+            <a:ext cx="216000" cy="216000"/>
+          </a:xfrm>
+          <a:prstGeom prst="rect">
+            <a:avLst/>
+          </a:prstGeom>
+        </p:spPr>
+      </p:pic>
+      <p:sp>
+        <p:nvSpPr>
+          <p:cNvPr id="24" name="TextBox 23"/>
+          <p:cNvSpPr txBox="1"/>
+          <p:nvPr/>
+        </p:nvSpPr>
+        <p:spPr>
+          <a:xfrm>
+            <a:off x="9468000" y="2754000"/>
+            <a:ext cx="2052000" cy="648000"/>
+          </a:xfrm>
+          <a:prstGeom prst="rect">
+            <a:avLst/>
+          </a:prstGeom>
+          <a:noFill/>
+        </p:spPr>
+        <p:txBody>
+          <a:bodyPr wrap="square" lIns="36000" rIns="36000" tIns="18000" bIns="18000" anchor="t">
+            <a:spAutoFit/>
+          </a:bodyPr>
+          <a:lstStyle/>
+          <a:p>
+            <a:pPr algn="l">
+              <a:lnSpc>
+                <a:spcPct val="110000"/>
+              </a:lnSpc>
+            </a:pPr>
+            <a:r>
+              <a:rPr sz="1100" b="1">
+                <a:solidFill>
+                  <a:srgbClr val="111111"/>
+                </a:solidFill>
+                <a:latin typeface="Poppins"/>
+              </a:rPr>
+              <a:t>Des visages, en vrai, dans vos murs</a:t>
+            </a:r>
+          </a:p>
+        </p:txBody>
+      </p:sp>
+      <p:sp>
+        <p:nvSpPr>
+          <p:cNvPr id="25" name="Oval 24"/>
+          <p:cNvSpPr/>
+          <p:nvPr/>
+        </p:nvSpPr>
+        <p:spPr>
+          <a:xfrm>
+            <a:off x="9036000" y="3492000"/>
+            <a:ext cx="342000" cy="342000"/>
+          </a:xfrm>
+          <a:prstGeom prst="ellipse">
+            <a:avLst/>
+          </a:prstGeom>
+          <a:solidFill>
+            <a:srgbClr val="4FB58B"/>
+          </a:solidFill>
+          <a:ln>
+            <a:noFill/>
+          </a:ln>
+          <a:effectLst/>
+        </p:spPr>
+        <p:style>
+          <a:lnRef idx="1">
+            <a:schemeClr val="accent1"/>
+          </a:lnRef>
+          <a:fillRef idx="3">
+            <a:schemeClr val="accent1"/>
+          </a:fillRef>
+          <a:effectRef idx="2">
+            <a:schemeClr val="accent1"/>
+          </a:effectRef>
+          <a:fontRef idx="minor">
+            <a:schemeClr val="lt1"/>
+          </a:fontRef>
+        </p:style>
+        <p:txBody>
+          <a:bodyPr rtlCol="0" anchor="ctr"/>
+          <a:lstStyle/>
+          <a:p>
+            <a:pPr algn="ctr"/>
+          </a:p>
+        </p:txBody>
+      </p:sp>
+      <p:pic>
+        <p:nvPicPr>
+          <p:cNvPr id="26" name="Picture 25" descr="check_bl.png"/>
+          <p:cNvPicPr>
+            <a:picLocks noChangeAspect="1"/>
+          </p:cNvPicPr>
+          <p:nvPr/>
+        </p:nvPicPr>
+        <p:blipFill>
+          <a:blip r:embed="rId6"/>
+          <a:stretch>
+            <a:fillRect/>
+          </a:stretch>
+        </p:blipFill>
+        <p:spPr>
+          <a:xfrm>
+            <a:off x="9097200" y="3553200"/>
+            <a:ext cx="216000" cy="216000"/>
+          </a:xfrm>
+          <a:prstGeom prst="rect">
+            <a:avLst/>
+          </a:prstGeom>
+        </p:spPr>
+      </p:pic>
+      <p:sp>
+        <p:nvSpPr>
+          <p:cNvPr id="27" name="TextBox 26"/>
+          <p:cNvSpPr txBox="1"/>
+          <p:nvPr/>
+        </p:nvSpPr>
+        <p:spPr>
+          <a:xfrm>
+            <a:off x="9468000" y="3456000"/>
+            <a:ext cx="2052000" cy="648000"/>
+          </a:xfrm>
+          <a:prstGeom prst="rect">
+            <a:avLst/>
+          </a:prstGeom>
+          <a:noFill/>
+        </p:spPr>
+        <p:txBody>
+          <a:bodyPr wrap="square" lIns="36000" rIns="36000" tIns="18000" bIns="18000" anchor="t">
+            <a:spAutoFit/>
+          </a:bodyPr>
+          <a:lstStyle/>
+          <a:p>
+            <a:pPr algn="l">
+              <a:lnSpc>
+                <a:spcPct val="110000"/>
+              </a:lnSpc>
+            </a:pPr>
+            <a:r>
+              <a:rPr sz="1100" b="1">
+                <a:solidFill>
+                  <a:srgbClr val="111111"/>
+                </a:solidFill>
+                <a:latin typeface="Poppins"/>
+              </a:rPr>
+              <a:t>L’identification fait voyager le post</a:t>
+            </a:r>
+          </a:p>
+        </p:txBody>
+      </p:sp>
+      <p:sp>
+        <p:nvSpPr>
+          <p:cNvPr id="28" name="Rectangle 27"/>
+          <p:cNvSpPr/>
+          <p:nvPr/>
+        </p:nvSpPr>
+        <p:spPr>
+          <a:xfrm>
+            <a:off x="9036000" y="4248000"/>
+            <a:ext cx="2376000" cy="21600"/>
+          </a:xfrm>
+          <a:prstGeom prst="rect">
+            <a:avLst/>
+          </a:prstGeom>
+          <a:solidFill>
+            <a:srgbClr val="E2E2E2"/>
+          </a:solidFill>
+          <a:ln>
+            <a:noFill/>
+          </a:ln>
+          <a:effectLst/>
+        </p:spPr>
+        <p:style>
+          <a:lnRef idx="1">
+            <a:schemeClr val="accent1"/>
+          </a:lnRef>
+          <a:fillRef idx="3">
+            <a:schemeClr val="accent1"/>
+          </a:fillRef>
+          <a:effectRef idx="2">
+            <a:schemeClr val="accent1"/>
+          </a:effectRef>
+          <a:fontRef idx="minor">
+            <a:schemeClr val="lt1"/>
+          </a:fontRef>
+        </p:style>
+        <p:txBody>
+          <a:bodyPr rtlCol="0" anchor="ctr"/>
+          <a:lstStyle/>
+          <a:p>
+            <a:pPr algn="ctr"/>
+          </a:p>
+        </p:txBody>
+      </p:sp>
+      <p:sp>
+        <p:nvSpPr>
+          <p:cNvPr id="29" name="TextBox 28"/>
+          <p:cNvSpPr txBox="1"/>
+          <p:nvPr/>
+        </p:nvSpPr>
+        <p:spPr>
+          <a:xfrm>
+            <a:off x="9036000" y="4320000"/>
+            <a:ext cx="2376000" cy="251999"/>
+          </a:xfrm>
+          <a:prstGeom prst="rect">
+            <a:avLst/>
+          </a:prstGeom>
+          <a:noFill/>
+        </p:spPr>
+        <p:txBody>
+          <a:bodyPr wrap="square" lIns="36000" rIns="36000" tIns="18000" bIns="18000" anchor="t">
+            <a:spAutoFit/>
+          </a:bodyPr>
+          <a:lstStyle/>
+          <a:p>
+            <a:pPr algn="l">
+              <a:lnSpc>
+                <a:spcPct val="110000"/>
+              </a:lnSpc>
+            </a:pPr>
+            <a:r>
+              <a:rPr sz="900" b="1">
+                <a:solidFill>
+                  <a:srgbClr val="5A5A5A"/>
+                </a:solidFill>
+                <a:latin typeface="Poppins"/>
+              </a:rPr>
+              <a:t>LE TEXTE PROPOSÉ</a:t>
+            </a:r>
+          </a:p>
+        </p:txBody>
+      </p:sp>
+      <p:sp>
+        <p:nvSpPr>
+          <p:cNvPr id="30" name="TextBox 29"/>
+          <p:cNvSpPr txBox="1"/>
+          <p:nvPr/>
+        </p:nvSpPr>
+        <p:spPr>
+          <a:xfrm>
+            <a:off x="9036000" y="4536000"/>
+            <a:ext cx="2376000" cy="1764000"/>
+          </a:xfrm>
+          <a:prstGeom prst="rect">
+            <a:avLst/>
+          </a:prstGeom>
+          <a:noFill/>
+        </p:spPr>
+        <p:txBody>
+          <a:bodyPr wrap="square" lIns="36000" rIns="36000" tIns="18000" bIns="18000" anchor="t">
+            <a:spAutoFit/>
+          </a:bodyPr>
+          <a:lstStyle/>
+          <a:p>
+            <a:pPr algn="l">
+              <a:lnSpc>
+                <a:spcPct val="110000"/>
+              </a:lnSpc>
+            </a:pPr>
+            <a:r>
+              <a:rPr sz="950" b="0">
+                <a:solidFill>
+                  <a:srgbClr val="111111"/>
+                </a:solidFill>
+                <a:latin typeface="Poppins"/>
+              </a:rPr>
+              <a:t>Derrière chaque emballage COTIPLAST, il y a elles. 👏
+Plus de 30 ans de savoir-faire, transmis d’une équipe à l’autre.
+ Identifiez un collègue qui fait tourner votre usine.</a:t>
+            </a:r>
+          </a:p>
+        </p:txBody>
+      </p:sp>
     </p:spTree>
   </p:cSld>
   <p:clrMapOvr>
@@ -10240,9 +14198,92 @@
           </a:p>
         </p:txBody>
       </p:sp>
+      <p:sp>
+        <p:nvSpPr>
+          <p:cNvPr id="9" name="Rounded Rectangle 8"/>
+          <p:cNvSpPr/>
+          <p:nvPr/>
+        </p:nvSpPr>
+        <p:spPr>
+          <a:xfrm>
+            <a:off x="576000" y="1512000"/>
+            <a:ext cx="3456000" cy="270000"/>
+          </a:xfrm>
+          <a:prstGeom prst="roundRect">
+            <a:avLst/>
+          </a:prstGeom>
+          <a:solidFill>
+            <a:srgbClr val="E2E2E2"/>
+          </a:solidFill>
+          <a:ln>
+            <a:noFill/>
+          </a:ln>
+          <a:effectLst/>
+        </p:spPr>
+        <p:style>
+          <a:lnRef idx="1">
+            <a:schemeClr val="accent1"/>
+          </a:lnRef>
+          <a:fillRef idx="3">
+            <a:schemeClr val="accent1"/>
+          </a:fillRef>
+          <a:effectRef idx="2">
+            <a:schemeClr val="accent1"/>
+          </a:effectRef>
+          <a:fontRef idx="minor">
+            <a:schemeClr val="lt1"/>
+          </a:fontRef>
+        </p:style>
+        <p:txBody>
+          <a:bodyPr rtlCol="0" anchor="ctr"/>
+          <a:lstStyle/>
+          <a:p>
+            <a:pPr algn="ctr"/>
+          </a:p>
+        </p:txBody>
+      </p:sp>
+      <p:sp>
+        <p:nvSpPr>
+          <p:cNvPr id="10" name="TextBox 9"/>
+          <p:cNvSpPr txBox="1"/>
+          <p:nvPr/>
+        </p:nvSpPr>
+        <p:spPr>
+          <a:xfrm>
+            <a:off x="576000" y="1512000"/>
+            <a:ext cx="3456000" cy="270000"/>
+          </a:xfrm>
+          <a:prstGeom prst="rect">
+            <a:avLst/>
+          </a:prstGeom>
+          <a:noFill/>
+        </p:spPr>
+        <p:txBody>
+          <a:bodyPr wrap="square" lIns="36000" rIns="36000" tIns="18000" bIns="18000" anchor="ctr">
+            <a:spAutoFit/>
+          </a:bodyPr>
+          <a:lstStyle/>
+          <a:p>
+            <a:pPr algn="ctr">
+              <a:lnSpc>
+                <a:spcPct val="110000"/>
+              </a:lnSpc>
+            </a:pPr>
+            <a:r>
+              <a:rPr sz="1000" b="1">
+                <a:solidFill>
+                  <a:srgbClr val="5A5A5A"/>
+                </a:solidFill>
+                <a:latin typeface="Poppins"/>
+              </a:rPr>
+              <a:t>AVANT · PUBLIÉ</a:t>
+            </a:r>
+          </a:p>
+        </p:txBody>
+      </p:sp>
       <p:pic>
         <p:nvPicPr>
-          <p:cNvPr id="9" name="Picture 8" descr="cmp_c_qualite.jpg"/>
+          <p:cNvPr id="11" name="Picture 10" descr="b_c_qualite.jpg"/>
           <p:cNvPicPr>
             <a:picLocks noChangeAspect="1"/>
           </p:cNvPicPr>
@@ -10256,14 +14297,719 @@
         </p:blipFill>
         <p:spPr>
           <a:xfrm>
-            <a:off x="1199493" y="1422000"/>
-            <a:ext cx="9769014" cy="4896000"/>
+            <a:off x="576000" y="2016900"/>
+            <a:ext cx="3456000" cy="4174200"/>
           </a:xfrm>
           <a:prstGeom prst="rect">
             <a:avLst/>
           </a:prstGeom>
         </p:spPr>
       </p:pic>
+      <p:sp>
+        <p:nvSpPr>
+          <p:cNvPr id="12" name="Oval 11"/>
+          <p:cNvSpPr/>
+          <p:nvPr/>
+        </p:nvSpPr>
+        <p:spPr>
+          <a:xfrm>
+            <a:off x="4158000" y="3744000"/>
+            <a:ext cx="540000" cy="540000"/>
+          </a:xfrm>
+          <a:prstGeom prst="ellipse">
+            <a:avLst/>
+          </a:prstGeom>
+          <a:solidFill>
+            <a:srgbClr val="FD8103"/>
+          </a:solidFill>
+          <a:ln>
+            <a:noFill/>
+          </a:ln>
+          <a:effectLst/>
+        </p:spPr>
+        <p:style>
+          <a:lnRef idx="1">
+            <a:schemeClr val="accent1"/>
+          </a:lnRef>
+          <a:fillRef idx="3">
+            <a:schemeClr val="accent1"/>
+          </a:fillRef>
+          <a:effectRef idx="2">
+            <a:schemeClr val="accent1"/>
+          </a:effectRef>
+          <a:fontRef idx="minor">
+            <a:schemeClr val="lt1"/>
+          </a:fontRef>
+        </p:style>
+        <p:txBody>
+          <a:bodyPr rtlCol="0" anchor="ctr"/>
+          <a:lstStyle/>
+          <a:p>
+            <a:pPr algn="ctr"/>
+          </a:p>
+        </p:txBody>
+      </p:sp>
+      <p:pic>
+        <p:nvPicPr>
+          <p:cNvPr id="13" name="Picture 12" descr="arrow-right_bl.png"/>
+          <p:cNvPicPr>
+            <a:picLocks noChangeAspect="1"/>
+          </p:cNvPicPr>
+          <p:nvPr/>
+        </p:nvPicPr>
+        <p:blipFill>
+          <a:blip r:embed="rId4"/>
+          <a:stretch>
+            <a:fillRect/>
+          </a:stretch>
+        </p:blipFill>
+        <p:spPr>
+          <a:xfrm>
+            <a:off x="4266000" y="3851999"/>
+            <a:ext cx="324000" cy="324000"/>
+          </a:xfrm>
+          <a:prstGeom prst="rect">
+            <a:avLst/>
+          </a:prstGeom>
+        </p:spPr>
+      </p:pic>
+      <p:sp>
+        <p:nvSpPr>
+          <p:cNvPr id="14" name="Rounded Rectangle 13"/>
+          <p:cNvSpPr/>
+          <p:nvPr/>
+        </p:nvSpPr>
+        <p:spPr>
+          <a:xfrm>
+            <a:off x="4824000" y="1512000"/>
+            <a:ext cx="3816000" cy="270000"/>
+          </a:xfrm>
+          <a:prstGeom prst="roundRect">
+            <a:avLst/>
+          </a:prstGeom>
+          <a:solidFill>
+            <a:srgbClr val="FD8103"/>
+          </a:solidFill>
+          <a:ln>
+            <a:noFill/>
+          </a:ln>
+          <a:effectLst/>
+        </p:spPr>
+        <p:style>
+          <a:lnRef idx="1">
+            <a:schemeClr val="accent1"/>
+          </a:lnRef>
+          <a:fillRef idx="3">
+            <a:schemeClr val="accent1"/>
+          </a:fillRef>
+          <a:effectRef idx="2">
+            <a:schemeClr val="accent1"/>
+          </a:effectRef>
+          <a:fontRef idx="minor">
+            <a:schemeClr val="lt1"/>
+          </a:fontRef>
+        </p:style>
+        <p:txBody>
+          <a:bodyPr rtlCol="0" anchor="ctr"/>
+          <a:lstStyle/>
+          <a:p>
+            <a:pPr algn="ctr"/>
+          </a:p>
+        </p:txBody>
+      </p:sp>
+      <p:sp>
+        <p:nvSpPr>
+          <p:cNvPr id="15" name="TextBox 14"/>
+          <p:cNvSpPr txBox="1"/>
+          <p:nvPr/>
+        </p:nvSpPr>
+        <p:spPr>
+          <a:xfrm>
+            <a:off x="4824000" y="1512000"/>
+            <a:ext cx="3816000" cy="270000"/>
+          </a:xfrm>
+          <a:prstGeom prst="rect">
+            <a:avLst/>
+          </a:prstGeom>
+          <a:noFill/>
+        </p:spPr>
+        <p:txBody>
+          <a:bodyPr wrap="square" lIns="36000" rIns="36000" tIns="18000" bIns="18000" anchor="ctr">
+            <a:spAutoFit/>
+          </a:bodyPr>
+          <a:lstStyle/>
+          <a:p>
+            <a:pPr algn="ctr">
+              <a:lnSpc>
+                <a:spcPct val="110000"/>
+              </a:lnSpc>
+            </a:pPr>
+            <a:r>
+              <a:rPr sz="1000" b="1">
+                <a:solidFill>
+                  <a:srgbClr val="FFFFFF"/>
+                </a:solidFill>
+                <a:latin typeface="Poppins"/>
+              </a:rPr>
+              <a:t>APRÈS · PROPOSÉ</a:t>
+            </a:r>
+          </a:p>
+        </p:txBody>
+      </p:sp>
+      <p:pic>
+        <p:nvPicPr>
+          <p:cNvPr id="16" name="Picture 15" descr="w_c_qualite.jpg"/>
+          <p:cNvPicPr>
+            <a:picLocks noChangeAspect="1"/>
+          </p:cNvPicPr>
+          <p:nvPr/>
+        </p:nvPicPr>
+        <p:blipFill>
+          <a:blip r:embed="rId5"/>
+          <a:stretch>
+            <a:fillRect/>
+          </a:stretch>
+        </p:blipFill>
+        <p:spPr>
+          <a:xfrm>
+            <a:off x="4946400" y="1872000"/>
+            <a:ext cx="3571200" cy="4464000"/>
+          </a:xfrm>
+          <a:prstGeom prst="rect">
+            <a:avLst/>
+          </a:prstGeom>
+        </p:spPr>
+      </p:pic>
+      <p:sp>
+        <p:nvSpPr>
+          <p:cNvPr id="17" name="Rounded Rectangle 16"/>
+          <p:cNvSpPr/>
+          <p:nvPr/>
+        </p:nvSpPr>
+        <p:spPr>
+          <a:xfrm>
+            <a:off x="8820000" y="1512000"/>
+            <a:ext cx="2808000" cy="4824000"/>
+          </a:xfrm>
+          <a:prstGeom prst="roundRect">
+            <a:avLst>
+              <a:gd name="adj" fmla="val 6000"/>
+            </a:avLst>
+          </a:prstGeom>
+          <a:solidFill>
+            <a:srgbClr val="E4F4EC"/>
+          </a:solidFill>
+          <a:ln>
+            <a:noFill/>
+          </a:ln>
+          <a:effectLst/>
+        </p:spPr>
+        <p:style>
+          <a:lnRef idx="1">
+            <a:schemeClr val="accent1"/>
+          </a:lnRef>
+          <a:fillRef idx="3">
+            <a:schemeClr val="accent1"/>
+          </a:fillRef>
+          <a:effectRef idx="2">
+            <a:schemeClr val="accent1"/>
+          </a:effectRef>
+          <a:fontRef idx="minor">
+            <a:schemeClr val="lt1"/>
+          </a:fontRef>
+        </p:style>
+        <p:txBody>
+          <a:bodyPr rtlCol="0" anchor="ctr"/>
+          <a:lstStyle/>
+          <a:p>
+            <a:pPr algn="ctr"/>
+          </a:p>
+        </p:txBody>
+      </p:sp>
+      <p:sp>
+        <p:nvSpPr>
+          <p:cNvPr id="18" name="TextBox 17"/>
+          <p:cNvSpPr txBox="1"/>
+          <p:nvPr/>
+        </p:nvSpPr>
+        <p:spPr>
+          <a:xfrm>
+            <a:off x="9036000" y="1655999"/>
+            <a:ext cx="2448000" cy="324000"/>
+          </a:xfrm>
+          <a:prstGeom prst="rect">
+            <a:avLst/>
+          </a:prstGeom>
+          <a:noFill/>
+        </p:spPr>
+        <p:txBody>
+          <a:bodyPr wrap="square" lIns="36000" rIns="36000" tIns="18000" bIns="18000" anchor="t">
+            <a:spAutoFit/>
+          </a:bodyPr>
+          <a:lstStyle/>
+          <a:p>
+            <a:pPr algn="l">
+              <a:lnSpc>
+                <a:spcPct val="110000"/>
+              </a:lnSpc>
+            </a:pPr>
+            <a:r>
+              <a:rPr sz="1500" b="1">
+                <a:solidFill>
+                  <a:srgbClr val="FD8103"/>
+                </a:solidFill>
+                <a:latin typeface="Poppins"/>
+              </a:rPr>
+              <a:t>Ce qui change</a:t>
+            </a:r>
+          </a:p>
+        </p:txBody>
+      </p:sp>
+      <p:sp>
+        <p:nvSpPr>
+          <p:cNvPr id="19" name="Oval 18"/>
+          <p:cNvSpPr/>
+          <p:nvPr/>
+        </p:nvSpPr>
+        <p:spPr>
+          <a:xfrm>
+            <a:off x="9036000" y="2088000"/>
+            <a:ext cx="342000" cy="342000"/>
+          </a:xfrm>
+          <a:prstGeom prst="ellipse">
+            <a:avLst/>
+          </a:prstGeom>
+          <a:solidFill>
+            <a:srgbClr val="4FB58B"/>
+          </a:solidFill>
+          <a:ln>
+            <a:noFill/>
+          </a:ln>
+          <a:effectLst/>
+        </p:spPr>
+        <p:style>
+          <a:lnRef idx="1">
+            <a:schemeClr val="accent1"/>
+          </a:lnRef>
+          <a:fillRef idx="3">
+            <a:schemeClr val="accent1"/>
+          </a:fillRef>
+          <a:effectRef idx="2">
+            <a:schemeClr val="accent1"/>
+          </a:effectRef>
+          <a:fontRef idx="minor">
+            <a:schemeClr val="lt1"/>
+          </a:fontRef>
+        </p:style>
+        <p:txBody>
+          <a:bodyPr rtlCol="0" anchor="ctr"/>
+          <a:lstStyle/>
+          <a:p>
+            <a:pPr algn="ctr"/>
+          </a:p>
+        </p:txBody>
+      </p:sp>
+      <p:pic>
+        <p:nvPicPr>
+          <p:cNvPr id="20" name="Picture 19" descr="check_bl.png"/>
+          <p:cNvPicPr>
+            <a:picLocks noChangeAspect="1"/>
+          </p:cNvPicPr>
+          <p:nvPr/>
+        </p:nvPicPr>
+        <p:blipFill>
+          <a:blip r:embed="rId6"/>
+          <a:stretch>
+            <a:fillRect/>
+          </a:stretch>
+        </p:blipFill>
+        <p:spPr>
+          <a:xfrm>
+            <a:off x="9097200" y="2149200"/>
+            <a:ext cx="216000" cy="216000"/>
+          </a:xfrm>
+          <a:prstGeom prst="rect">
+            <a:avLst/>
+          </a:prstGeom>
+        </p:spPr>
+      </p:pic>
+      <p:sp>
+        <p:nvSpPr>
+          <p:cNvPr id="21" name="TextBox 20"/>
+          <p:cNvSpPr txBox="1"/>
+          <p:nvPr/>
+        </p:nvSpPr>
+        <p:spPr>
+          <a:xfrm>
+            <a:off x="9468000" y="2052000"/>
+            <a:ext cx="2052000" cy="648000"/>
+          </a:xfrm>
+          <a:prstGeom prst="rect">
+            <a:avLst/>
+          </a:prstGeom>
+          <a:noFill/>
+        </p:spPr>
+        <p:txBody>
+          <a:bodyPr wrap="square" lIns="36000" rIns="36000" tIns="18000" bIns="18000" anchor="t">
+            <a:spAutoFit/>
+          </a:bodyPr>
+          <a:lstStyle/>
+          <a:p>
+            <a:pPr algn="l">
+              <a:lnSpc>
+                <a:spcPct val="110000"/>
+              </a:lnSpc>
+            </a:pPr>
+            <a:r>
+              <a:rPr sz="1100" b="1">
+                <a:solidFill>
+                  <a:srgbClr val="111111"/>
+                </a:solidFill>
+                <a:latin typeface="Poppins"/>
+              </a:rPr>
+              <a:t>Une preuve, pas une promesse</a:t>
+            </a:r>
+          </a:p>
+        </p:txBody>
+      </p:sp>
+      <p:sp>
+        <p:nvSpPr>
+          <p:cNvPr id="22" name="Oval 21"/>
+          <p:cNvSpPr/>
+          <p:nvPr/>
+        </p:nvSpPr>
+        <p:spPr>
+          <a:xfrm>
+            <a:off x="9036000" y="2790000"/>
+            <a:ext cx="342000" cy="342000"/>
+          </a:xfrm>
+          <a:prstGeom prst="ellipse">
+            <a:avLst/>
+          </a:prstGeom>
+          <a:solidFill>
+            <a:srgbClr val="4FB58B"/>
+          </a:solidFill>
+          <a:ln>
+            <a:noFill/>
+          </a:ln>
+          <a:effectLst/>
+        </p:spPr>
+        <p:style>
+          <a:lnRef idx="1">
+            <a:schemeClr val="accent1"/>
+          </a:lnRef>
+          <a:fillRef idx="3">
+            <a:schemeClr val="accent1"/>
+          </a:fillRef>
+          <a:effectRef idx="2">
+            <a:schemeClr val="accent1"/>
+          </a:effectRef>
+          <a:fontRef idx="minor">
+            <a:schemeClr val="lt1"/>
+          </a:fontRef>
+        </p:style>
+        <p:txBody>
+          <a:bodyPr rtlCol="0" anchor="ctr"/>
+          <a:lstStyle/>
+          <a:p>
+            <a:pPr algn="ctr"/>
+          </a:p>
+        </p:txBody>
+      </p:sp>
+      <p:pic>
+        <p:nvPicPr>
+          <p:cNvPr id="23" name="Picture 22" descr="check_bl.png"/>
+          <p:cNvPicPr>
+            <a:picLocks noChangeAspect="1"/>
+          </p:cNvPicPr>
+          <p:nvPr/>
+        </p:nvPicPr>
+        <p:blipFill>
+          <a:blip r:embed="rId6"/>
+          <a:stretch>
+            <a:fillRect/>
+          </a:stretch>
+        </p:blipFill>
+        <p:spPr>
+          <a:xfrm>
+            <a:off x="9097200" y="2851200"/>
+            <a:ext cx="216000" cy="216000"/>
+          </a:xfrm>
+          <a:prstGeom prst="rect">
+            <a:avLst/>
+          </a:prstGeom>
+        </p:spPr>
+      </p:pic>
+      <p:sp>
+        <p:nvSpPr>
+          <p:cNvPr id="24" name="TextBox 23"/>
+          <p:cNvSpPr txBox="1"/>
+          <p:nvPr/>
+        </p:nvSpPr>
+        <p:spPr>
+          <a:xfrm>
+            <a:off x="9468000" y="2754000"/>
+            <a:ext cx="2052000" cy="648000"/>
+          </a:xfrm>
+          <a:prstGeom prst="rect">
+            <a:avLst/>
+          </a:prstGeom>
+          <a:noFill/>
+        </p:spPr>
+        <p:txBody>
+          <a:bodyPr wrap="square" lIns="36000" rIns="36000" tIns="18000" bIns="18000" anchor="t">
+            <a:spAutoFit/>
+          </a:bodyPr>
+          <a:lstStyle/>
+          <a:p>
+            <a:pPr algn="l">
+              <a:lnSpc>
+                <a:spcPct val="110000"/>
+              </a:lnSpc>
+            </a:pPr>
+            <a:r>
+              <a:rPr sz="1100" b="1">
+                <a:solidFill>
+                  <a:srgbClr val="111111"/>
+                </a:solidFill>
+                <a:latin typeface="Poppins"/>
+              </a:rPr>
+              <a:t>Le contrôle filmé ou photographié en vrai</a:t>
+            </a:r>
+          </a:p>
+        </p:txBody>
+      </p:sp>
+      <p:sp>
+        <p:nvSpPr>
+          <p:cNvPr id="25" name="Oval 24"/>
+          <p:cNvSpPr/>
+          <p:nvPr/>
+        </p:nvSpPr>
+        <p:spPr>
+          <a:xfrm>
+            <a:off x="9036000" y="3492000"/>
+            <a:ext cx="342000" cy="342000"/>
+          </a:xfrm>
+          <a:prstGeom prst="ellipse">
+            <a:avLst/>
+          </a:prstGeom>
+          <a:solidFill>
+            <a:srgbClr val="4FB58B"/>
+          </a:solidFill>
+          <a:ln>
+            <a:noFill/>
+          </a:ln>
+          <a:effectLst/>
+        </p:spPr>
+        <p:style>
+          <a:lnRef idx="1">
+            <a:schemeClr val="accent1"/>
+          </a:lnRef>
+          <a:fillRef idx="3">
+            <a:schemeClr val="accent1"/>
+          </a:fillRef>
+          <a:effectRef idx="2">
+            <a:schemeClr val="accent1"/>
+          </a:effectRef>
+          <a:fontRef idx="minor">
+            <a:schemeClr val="lt1"/>
+          </a:fontRef>
+        </p:style>
+        <p:txBody>
+          <a:bodyPr rtlCol="0" anchor="ctr"/>
+          <a:lstStyle/>
+          <a:p>
+            <a:pPr algn="ctr"/>
+          </a:p>
+        </p:txBody>
+      </p:sp>
+      <p:pic>
+        <p:nvPicPr>
+          <p:cNvPr id="26" name="Picture 25" descr="check_bl.png"/>
+          <p:cNvPicPr>
+            <a:picLocks noChangeAspect="1"/>
+          </p:cNvPicPr>
+          <p:nvPr/>
+        </p:nvPicPr>
+        <p:blipFill>
+          <a:blip r:embed="rId6"/>
+          <a:stretch>
+            <a:fillRect/>
+          </a:stretch>
+        </p:blipFill>
+        <p:spPr>
+          <a:xfrm>
+            <a:off x="9097200" y="3553200"/>
+            <a:ext cx="216000" cy="216000"/>
+          </a:xfrm>
+          <a:prstGeom prst="rect">
+            <a:avLst/>
+          </a:prstGeom>
+        </p:spPr>
+      </p:pic>
+      <p:sp>
+        <p:nvSpPr>
+          <p:cNvPr id="27" name="TextBox 26"/>
+          <p:cNvSpPr txBox="1"/>
+          <p:nvPr/>
+        </p:nvSpPr>
+        <p:spPr>
+          <a:xfrm>
+            <a:off x="9468000" y="3456000"/>
+            <a:ext cx="2052000" cy="648000"/>
+          </a:xfrm>
+          <a:prstGeom prst="rect">
+            <a:avLst/>
+          </a:prstGeom>
+          <a:noFill/>
+        </p:spPr>
+        <p:txBody>
+          <a:bodyPr wrap="square" lIns="36000" rIns="36000" tIns="18000" bIns="18000" anchor="t">
+            <a:spAutoFit/>
+          </a:bodyPr>
+          <a:lstStyle/>
+          <a:p>
+            <a:pPr algn="l">
+              <a:lnSpc>
+                <a:spcPct val="110000"/>
+              </a:lnSpc>
+            </a:pPr>
+            <a:r>
+              <a:rPr sz="1100" b="1">
+                <a:solidFill>
+                  <a:srgbClr val="111111"/>
+                </a:solidFill>
+                <a:latin typeface="Poppins"/>
+              </a:rPr>
+              <a:t>Une question de métier, entre pros</a:t>
+            </a:r>
+          </a:p>
+        </p:txBody>
+      </p:sp>
+      <p:sp>
+        <p:nvSpPr>
+          <p:cNvPr id="28" name="Rectangle 27"/>
+          <p:cNvSpPr/>
+          <p:nvPr/>
+        </p:nvSpPr>
+        <p:spPr>
+          <a:xfrm>
+            <a:off x="9036000" y="4248000"/>
+            <a:ext cx="2376000" cy="21600"/>
+          </a:xfrm>
+          <a:prstGeom prst="rect">
+            <a:avLst/>
+          </a:prstGeom>
+          <a:solidFill>
+            <a:srgbClr val="E2E2E2"/>
+          </a:solidFill>
+          <a:ln>
+            <a:noFill/>
+          </a:ln>
+          <a:effectLst/>
+        </p:spPr>
+        <p:style>
+          <a:lnRef idx="1">
+            <a:schemeClr val="accent1"/>
+          </a:lnRef>
+          <a:fillRef idx="3">
+            <a:schemeClr val="accent1"/>
+          </a:fillRef>
+          <a:effectRef idx="2">
+            <a:schemeClr val="accent1"/>
+          </a:effectRef>
+          <a:fontRef idx="minor">
+            <a:schemeClr val="lt1"/>
+          </a:fontRef>
+        </p:style>
+        <p:txBody>
+          <a:bodyPr rtlCol="0" anchor="ctr"/>
+          <a:lstStyle/>
+          <a:p>
+            <a:pPr algn="ctr"/>
+          </a:p>
+        </p:txBody>
+      </p:sp>
+      <p:sp>
+        <p:nvSpPr>
+          <p:cNvPr id="29" name="TextBox 28"/>
+          <p:cNvSpPr txBox="1"/>
+          <p:nvPr/>
+        </p:nvSpPr>
+        <p:spPr>
+          <a:xfrm>
+            <a:off x="9036000" y="4320000"/>
+            <a:ext cx="2376000" cy="251999"/>
+          </a:xfrm>
+          <a:prstGeom prst="rect">
+            <a:avLst/>
+          </a:prstGeom>
+          <a:noFill/>
+        </p:spPr>
+        <p:txBody>
+          <a:bodyPr wrap="square" lIns="36000" rIns="36000" tIns="18000" bIns="18000" anchor="t">
+            <a:spAutoFit/>
+          </a:bodyPr>
+          <a:lstStyle/>
+          <a:p>
+            <a:pPr algn="l">
+              <a:lnSpc>
+                <a:spcPct val="110000"/>
+              </a:lnSpc>
+            </a:pPr>
+            <a:r>
+              <a:rPr sz="900" b="1">
+                <a:solidFill>
+                  <a:srgbClr val="5A5A5A"/>
+                </a:solidFill>
+                <a:latin typeface="Poppins"/>
+              </a:rPr>
+              <a:t>LE TEXTE PROPOSÉ</a:t>
+            </a:r>
+          </a:p>
+        </p:txBody>
+      </p:sp>
+      <p:sp>
+        <p:nvSpPr>
+          <p:cNvPr id="30" name="TextBox 29"/>
+          <p:cNvSpPr txBox="1"/>
+          <p:nvPr/>
+        </p:nvSpPr>
+        <p:spPr>
+          <a:xfrm>
+            <a:off x="9036000" y="4536000"/>
+            <a:ext cx="2376000" cy="1764000"/>
+          </a:xfrm>
+          <a:prstGeom prst="rect">
+            <a:avLst/>
+          </a:prstGeom>
+          <a:noFill/>
+        </p:spPr>
+        <p:txBody>
+          <a:bodyPr wrap="square" lIns="36000" rIns="36000" tIns="18000" bIns="18000" anchor="t">
+            <a:spAutoFit/>
+          </a:bodyPr>
+          <a:lstStyle/>
+          <a:p>
+            <a:pPr algn="l">
+              <a:lnSpc>
+                <a:spcPct val="110000"/>
+              </a:lnSpc>
+            </a:pPr>
+            <a:r>
+              <a:rPr sz="950" b="0">
+                <a:solidFill>
+                  <a:srgbClr val="111111"/>
+                </a:solidFill>
+                <a:latin typeface="Poppins"/>
+              </a:rPr>
+              <a:t>Avant de partir chez vous, chaque bobine passe ici. 🔍
+Contrôle qualité à chaque étape : épaisseur, impression, soudure.
+ Qu’est-ce que vous vérifiez en premier à la réception ?</a:t>
+            </a:r>
+          </a:p>
+        </p:txBody>
+      </p:sp>
     </p:spTree>
   </p:cSld>
   <p:clrMapOvr>
@@ -11604,16 +16350,41 @@
           </a:p>
         </p:txBody>
       </p:sp>
-      <p:sp>
-        <p:nvSpPr>
-          <p:cNvPr id="9" name="Rounded Rectangle 8"/>
+      <p:pic>
+        <p:nvPicPr>
+          <p:cNvPr id="9" name="Picture 8" descr="co_2024_10_16_jpg.jpg"/>
+          <p:cNvPicPr>
+            <a:picLocks noChangeAspect="1"/>
+          </p:cNvPicPr>
+          <p:nvPr/>
+        </p:nvPicPr>
+        <p:blipFill>
+          <a:blip r:embed="rId3"/>
+          <a:srcRect l="32235" r="32235"/>
+          <a:stretch>
+            <a:fillRect/>
+          </a:stretch>
+        </p:blipFill>
+        <p:spPr>
+          <a:xfrm>
+            <a:off x="8928000" y="1584000"/>
+            <a:ext cx="2700000" cy="4662000"/>
+          </a:xfrm>
+          <a:prstGeom prst="rect">
+            <a:avLst/>
+          </a:prstGeom>
+        </p:spPr>
+      </p:pic>
+      <p:sp>
+        <p:nvSpPr>
+          <p:cNvPr id="10" name="Rounded Rectangle 9"/>
           <p:cNvSpPr/>
           <p:nvPr/>
         </p:nvSpPr>
         <p:spPr>
           <a:xfrm>
             <a:off x="576000" y="1584000"/>
-            <a:ext cx="11052000" cy="846000"/>
+            <a:ext cx="8136000" cy="846000"/>
           </a:xfrm>
           <a:prstGeom prst="roundRect">
             <a:avLst>
@@ -11621,7 +16392,7 @@
             </a:avLst>
           </a:prstGeom>
           <a:solidFill>
-            <a:srgbClr val="FFFFFF"/>
+            <a:srgbClr val="E4F4EC"/>
           </a:solidFill>
           <a:ln>
             <a:noFill/>
@@ -11652,7 +16423,7 @@
       </p:sp>
       <p:sp>
         <p:nvSpPr>
-          <p:cNvPr id="10" name="Rectangle 9"/>
+          <p:cNvPr id="11" name="Rectangle 10"/>
           <p:cNvSpPr/>
           <p:nvPr/>
         </p:nvSpPr>
@@ -11696,14 +16467,14 @@
       </p:sp>
       <p:sp>
         <p:nvSpPr>
-          <p:cNvPr id="11" name="TextBox 10"/>
+          <p:cNvPr id="12" name="TextBox 11"/>
           <p:cNvSpPr txBox="1"/>
           <p:nvPr/>
         </p:nvSpPr>
         <p:spPr>
           <a:xfrm>
-            <a:off x="792000" y="1584000"/>
-            <a:ext cx="503999" cy="846000"/>
+            <a:off x="756000" y="1584000"/>
+            <a:ext cx="468000" cy="846000"/>
           </a:xfrm>
           <a:prstGeom prst="rect">
             <a:avLst/>
@@ -11735,14 +16506,289 @@
       </p:sp>
       <p:sp>
         <p:nvSpPr>
-          <p:cNvPr id="12" name="Oval 11"/>
+          <p:cNvPr id="13" name="Oval 12"/>
           <p:cNvSpPr/>
           <p:nvPr/>
         </p:nvSpPr>
         <p:spPr>
           <a:xfrm>
-            <a:off x="1404000" y="1709999"/>
-            <a:ext cx="594000" cy="594000"/>
+            <a:off x="1296000" y="1728000"/>
+            <a:ext cx="558000" cy="558000"/>
+          </a:xfrm>
+          <a:prstGeom prst="ellipse">
+            <a:avLst/>
+          </a:prstGeom>
+          <a:solidFill>
+            <a:srgbClr val="FD8103"/>
+          </a:solidFill>
+          <a:ln>
+            <a:noFill/>
+          </a:ln>
+          <a:effectLst/>
+        </p:spPr>
+        <p:style>
+          <a:lnRef idx="1">
+            <a:schemeClr val="accent1"/>
+          </a:lnRef>
+          <a:fillRef idx="3">
+            <a:schemeClr val="accent1"/>
+          </a:fillRef>
+          <a:effectRef idx="2">
+            <a:schemeClr val="accent1"/>
+          </a:effectRef>
+          <a:fontRef idx="minor">
+            <a:schemeClr val="lt1"/>
+          </a:fontRef>
+        </p:style>
+        <p:txBody>
+          <a:bodyPr rtlCol="0" anchor="ctr"/>
+          <a:lstStyle/>
+          <a:p>
+            <a:pPr algn="ctr"/>
+          </a:p>
+        </p:txBody>
+      </p:sp>
+      <p:pic>
+        <p:nvPicPr>
+          <p:cNvPr id="14" name="Picture 13" descr="calendar-event_bl.png"/>
+          <p:cNvPicPr>
+            <a:picLocks noChangeAspect="1"/>
+          </p:cNvPicPr>
+          <p:nvPr/>
+        </p:nvPicPr>
+        <p:blipFill>
+          <a:blip r:embed="rId4"/>
+          <a:stretch>
+            <a:fillRect/>
+          </a:stretch>
+        </p:blipFill>
+        <p:spPr>
+          <a:xfrm>
+            <a:off x="1418760" y="1850760"/>
+            <a:ext cx="312480" cy="312480"/>
+          </a:xfrm>
+          <a:prstGeom prst="rect">
+            <a:avLst/>
+          </a:prstGeom>
+        </p:spPr>
+      </p:pic>
+      <p:sp>
+        <p:nvSpPr>
+          <p:cNvPr id="15" name="TextBox 14"/>
+          <p:cNvSpPr txBox="1"/>
+          <p:nvPr/>
+        </p:nvSpPr>
+        <p:spPr>
+          <a:xfrm>
+            <a:off x="2015999" y="1584000"/>
+            <a:ext cx="2304000" cy="846000"/>
+          </a:xfrm>
+          <a:prstGeom prst="rect">
+            <a:avLst/>
+          </a:prstGeom>
+          <a:noFill/>
+        </p:spPr>
+        <p:txBody>
+          <a:bodyPr wrap="square" lIns="36000" rIns="36000" tIns="18000" bIns="18000" anchor="ctr">
+            <a:spAutoFit/>
+          </a:bodyPr>
+          <a:lstStyle/>
+          <a:p>
+            <a:pPr algn="l">
+              <a:lnSpc>
+                <a:spcPct val="110000"/>
+              </a:lnSpc>
+            </a:pPr>
+            <a:r>
+              <a:rPr sz="1350" b="1">
+                <a:solidFill>
+                  <a:srgbClr val="111111"/>
+                </a:solidFill>
+                <a:latin typeface="Poppins"/>
+              </a:rPr>
+              <a:t>Reprendre dès novembre</a:t>
+            </a:r>
+          </a:p>
+        </p:txBody>
+      </p:sp>
+      <p:sp>
+        <p:nvSpPr>
+          <p:cNvPr id="16" name="TextBox 15"/>
+          <p:cNvSpPr txBox="1"/>
+          <p:nvPr/>
+        </p:nvSpPr>
+        <p:spPr>
+          <a:xfrm>
+            <a:off x="4356000" y="1584000"/>
+            <a:ext cx="4248000" cy="846000"/>
+          </a:xfrm>
+          <a:prstGeom prst="rect">
+            <a:avLst/>
+          </a:prstGeom>
+          <a:noFill/>
+        </p:spPr>
+        <p:txBody>
+          <a:bodyPr wrap="square" lIns="36000" rIns="36000" tIns="18000" bIns="18000" anchor="ctr">
+            <a:spAutoFit/>
+          </a:bodyPr>
+          <a:lstStyle/>
+          <a:p>
+            <a:pPr algn="l">
+              <a:lnSpc>
+                <a:spcPct val="110000"/>
+              </a:lnSpc>
+            </a:pPr>
+            <a:r>
+              <a:rPr sz="1050" b="0">
+                <a:solidFill>
+                  <a:srgbClr val="5A5A5A"/>
+                </a:solidFill>
+                <a:latin typeface="Poppins"/>
+              </a:rPr>
+              <a:t>2 publications par semaine sur LinkedIn, le mardi et le jeudi à 8 h : la régularité d’août, sans l’essoufflement.</a:t>
+            </a:r>
+          </a:p>
+        </p:txBody>
+      </p:sp>
+      <p:sp>
+        <p:nvSpPr>
+          <p:cNvPr id="17" name="Rounded Rectangle 16"/>
+          <p:cNvSpPr/>
+          <p:nvPr/>
+        </p:nvSpPr>
+        <p:spPr>
+          <a:xfrm>
+            <a:off x="576000" y="2538000"/>
+            <a:ext cx="8136000" cy="846000"/>
+          </a:xfrm>
+          <a:prstGeom prst="roundRect">
+            <a:avLst>
+              <a:gd name="adj" fmla="val 6000"/>
+            </a:avLst>
+          </a:prstGeom>
+          <a:solidFill>
+            <a:srgbClr val="F4F4F2"/>
+          </a:solidFill>
+          <a:ln>
+            <a:noFill/>
+          </a:ln>
+          <a:effectLst/>
+        </p:spPr>
+        <p:style>
+          <a:lnRef idx="1">
+            <a:schemeClr val="accent1"/>
+          </a:lnRef>
+          <a:fillRef idx="3">
+            <a:schemeClr val="accent1"/>
+          </a:fillRef>
+          <a:effectRef idx="2">
+            <a:schemeClr val="accent1"/>
+          </a:effectRef>
+          <a:fontRef idx="minor">
+            <a:schemeClr val="lt1"/>
+          </a:fontRef>
+        </p:style>
+        <p:txBody>
+          <a:bodyPr rtlCol="0" anchor="ctr"/>
+          <a:lstStyle/>
+          <a:p>
+            <a:pPr algn="ctr"/>
+          </a:p>
+        </p:txBody>
+      </p:sp>
+      <p:sp>
+        <p:nvSpPr>
+          <p:cNvPr id="18" name="Rectangle 17"/>
+          <p:cNvSpPr/>
+          <p:nvPr/>
+        </p:nvSpPr>
+        <p:spPr>
+          <a:xfrm>
+            <a:off x="576000" y="2538000"/>
+            <a:ext cx="90000" cy="846000"/>
+          </a:xfrm>
+          <a:prstGeom prst="rect">
+            <a:avLst/>
+          </a:prstGeom>
+          <a:solidFill>
+            <a:srgbClr val="FD8103"/>
+          </a:solidFill>
+          <a:ln>
+            <a:noFill/>
+          </a:ln>
+          <a:effectLst/>
+        </p:spPr>
+        <p:style>
+          <a:lnRef idx="1">
+            <a:schemeClr val="accent1"/>
+          </a:lnRef>
+          <a:fillRef idx="3">
+            <a:schemeClr val="accent1"/>
+          </a:fillRef>
+          <a:effectRef idx="2">
+            <a:schemeClr val="accent1"/>
+          </a:effectRef>
+          <a:fontRef idx="minor">
+            <a:schemeClr val="lt1"/>
+          </a:fontRef>
+        </p:style>
+        <p:txBody>
+          <a:bodyPr rtlCol="0" anchor="ctr"/>
+          <a:lstStyle/>
+          <a:p>
+            <a:pPr algn="ctr"/>
+          </a:p>
+        </p:txBody>
+      </p:sp>
+      <p:sp>
+        <p:nvSpPr>
+          <p:cNvPr id="19" name="TextBox 18"/>
+          <p:cNvSpPr txBox="1"/>
+          <p:nvPr/>
+        </p:nvSpPr>
+        <p:spPr>
+          <a:xfrm>
+            <a:off x="756000" y="2538000"/>
+            <a:ext cx="468000" cy="846000"/>
+          </a:xfrm>
+          <a:prstGeom prst="rect">
+            <a:avLst/>
+          </a:prstGeom>
+          <a:noFill/>
+        </p:spPr>
+        <p:txBody>
+          <a:bodyPr wrap="square" lIns="36000" rIns="36000" tIns="18000" bIns="18000" anchor="ctr">
+            <a:spAutoFit/>
+          </a:bodyPr>
+          <a:lstStyle/>
+          <a:p>
+            <a:pPr algn="ctr">
+              <a:lnSpc>
+                <a:spcPct val="110000"/>
+              </a:lnSpc>
+            </a:pPr>
+            <a:r>
+              <a:rPr sz="2400" b="1">
+                <a:solidFill>
+                  <a:srgbClr val="FD8103"/>
+                </a:solidFill>
+                <a:latin typeface="Poppins"/>
+              </a:rPr>
+              <a:t>2</a:t>
+            </a:r>
+          </a:p>
+        </p:txBody>
+      </p:sp>
+      <p:sp>
+        <p:nvSpPr>
+          <p:cNvPr id="20" name="Oval 19"/>
+          <p:cNvSpPr/>
+          <p:nvPr/>
+        </p:nvSpPr>
+        <p:spPr>
+          <a:xfrm>
+            <a:off x="1296000" y="2682000"/>
+            <a:ext cx="558000" cy="558000"/>
           </a:xfrm>
           <a:prstGeom prst="ellipse">
             <a:avLst/>
@@ -11779,22 +16825,22 @@
       </p:sp>
       <p:pic>
         <p:nvPicPr>
-          <p:cNvPr id="13" name="Picture 12" descr="calendar-event_bl.png"/>
+          <p:cNvPr id="21" name="Picture 20" descr="video_bl.png"/>
           <p:cNvPicPr>
             <a:picLocks noChangeAspect="1"/>
           </p:cNvPicPr>
           <p:nvPr/>
         </p:nvPicPr>
         <p:blipFill>
-          <a:blip r:embed="rId3"/>
+          <a:blip r:embed="rId5"/>
           <a:stretch>
             <a:fillRect/>
           </a:stretch>
         </p:blipFill>
         <p:spPr>
           <a:xfrm>
-            <a:off x="1534680" y="1840679"/>
-            <a:ext cx="332640" cy="332640"/>
+            <a:off x="1418760" y="2804760"/>
+            <a:ext cx="312480" cy="312480"/>
           </a:xfrm>
           <a:prstGeom prst="rect">
             <a:avLst/>
@@ -11803,14 +16849,14 @@
       </p:pic>
       <p:sp>
         <p:nvSpPr>
-          <p:cNvPr id="14" name="TextBox 13"/>
+          <p:cNvPr id="22" name="TextBox 21"/>
           <p:cNvSpPr txBox="1"/>
           <p:nvPr/>
         </p:nvSpPr>
         <p:spPr>
           <a:xfrm>
-            <a:off x="2196000" y="1584000"/>
-            <a:ext cx="3060000" cy="846000"/>
+            <a:off x="2015999" y="2538000"/>
+            <a:ext cx="2304000" cy="846000"/>
           </a:xfrm>
           <a:prstGeom prst="rect">
             <a:avLst/>
@@ -11829,27 +16875,27 @@
               </a:lnSpc>
             </a:pPr>
             <a:r>
-              <a:rPr sz="1450" b="1">
+              <a:rPr sz="1350" b="1">
                 <a:solidFill>
                   <a:srgbClr val="111111"/>
                 </a:solidFill>
                 <a:latin typeface="Poppins"/>
               </a:rPr>
-              <a:t>Reprendre dès novembre</a:t>
-            </a:r>
-          </a:p>
-        </p:txBody>
-      </p:sp>
-      <p:sp>
-        <p:nvSpPr>
-          <p:cNvPr id="15" name="TextBox 14"/>
+              <a:t>Une vidéo d’usine par semaine</a:t>
+            </a:r>
+          </a:p>
+        </p:txBody>
+      </p:sp>
+      <p:sp>
+        <p:nvSpPr>
+          <p:cNvPr id="23" name="TextBox 22"/>
           <p:cNvSpPr txBox="1"/>
           <p:nvPr/>
         </p:nvSpPr>
         <p:spPr>
           <a:xfrm>
-            <a:off x="5256000" y="1584000"/>
-            <a:ext cx="6228000" cy="846000"/>
+            <a:off x="4356000" y="2538000"/>
+            <a:ext cx="4248000" cy="846000"/>
           </a:xfrm>
           <a:prstGeom prst="rect">
             <a:avLst/>
@@ -11868,27 +16914,302 @@
               </a:lnSpc>
             </a:pPr>
             <a:r>
-              <a:rPr sz="1200" b="0">
+              <a:rPr sz="1050" b="0">
                 <a:solidFill>
                   <a:srgbClr val="5A5A5A"/>
                 </a:solidFill>
                 <a:latin typeface="Poppins"/>
               </a:rPr>
-              <a:t>2 publications par semaine sur LinkedIn, le mardi et le jeudi à 8 h : la régularité d’août, sans l’essoufflement.</a:t>
-            </a:r>
-          </a:p>
-        </p:txBody>
-      </p:sp>
-      <p:sp>
-        <p:nvSpPr>
-          <p:cNvPr id="16" name="Rounded Rectangle 15"/>
+              <a:t>Une machine, un geste, une équipe : 30 secondes filmées au téléphone suffisent.</a:t>
+            </a:r>
+          </a:p>
+        </p:txBody>
+      </p:sp>
+      <p:sp>
+        <p:nvSpPr>
+          <p:cNvPr id="24" name="Rounded Rectangle 23"/>
           <p:cNvSpPr/>
           <p:nvPr/>
         </p:nvSpPr>
         <p:spPr>
           <a:xfrm>
-            <a:off x="576000" y="2538000"/>
-            <a:ext cx="11052000" cy="846000"/>
+            <a:off x="576000" y="3492000"/>
+            <a:ext cx="8136000" cy="846000"/>
+          </a:xfrm>
+          <a:prstGeom prst="roundRect">
+            <a:avLst>
+              <a:gd name="adj" fmla="val 6000"/>
+            </a:avLst>
+          </a:prstGeom>
+          <a:solidFill>
+            <a:srgbClr val="E4F4EC"/>
+          </a:solidFill>
+          <a:ln>
+            <a:noFill/>
+          </a:ln>
+          <a:effectLst/>
+        </p:spPr>
+        <p:style>
+          <a:lnRef idx="1">
+            <a:schemeClr val="accent1"/>
+          </a:lnRef>
+          <a:fillRef idx="3">
+            <a:schemeClr val="accent1"/>
+          </a:fillRef>
+          <a:effectRef idx="2">
+            <a:schemeClr val="accent1"/>
+          </a:effectRef>
+          <a:fontRef idx="minor">
+            <a:schemeClr val="lt1"/>
+          </a:fontRef>
+        </p:style>
+        <p:txBody>
+          <a:bodyPr rtlCol="0" anchor="ctr"/>
+          <a:lstStyle/>
+          <a:p>
+            <a:pPr algn="ctr"/>
+          </a:p>
+        </p:txBody>
+      </p:sp>
+      <p:sp>
+        <p:nvSpPr>
+          <p:cNvPr id="25" name="Rectangle 24"/>
+          <p:cNvSpPr/>
+          <p:nvPr/>
+        </p:nvSpPr>
+        <p:spPr>
+          <a:xfrm>
+            <a:off x="576000" y="3492000"/>
+            <a:ext cx="90000" cy="846000"/>
+          </a:xfrm>
+          <a:prstGeom prst="rect">
+            <a:avLst/>
+          </a:prstGeom>
+          <a:solidFill>
+            <a:srgbClr val="FD8103"/>
+          </a:solidFill>
+          <a:ln>
+            <a:noFill/>
+          </a:ln>
+          <a:effectLst/>
+        </p:spPr>
+        <p:style>
+          <a:lnRef idx="1">
+            <a:schemeClr val="accent1"/>
+          </a:lnRef>
+          <a:fillRef idx="3">
+            <a:schemeClr val="accent1"/>
+          </a:fillRef>
+          <a:effectRef idx="2">
+            <a:schemeClr val="accent1"/>
+          </a:effectRef>
+          <a:fontRef idx="minor">
+            <a:schemeClr val="lt1"/>
+          </a:fontRef>
+        </p:style>
+        <p:txBody>
+          <a:bodyPr rtlCol="0" anchor="ctr"/>
+          <a:lstStyle/>
+          <a:p>
+            <a:pPr algn="ctr"/>
+          </a:p>
+        </p:txBody>
+      </p:sp>
+      <p:sp>
+        <p:nvSpPr>
+          <p:cNvPr id="26" name="TextBox 25"/>
+          <p:cNvSpPr txBox="1"/>
+          <p:nvPr/>
+        </p:nvSpPr>
+        <p:spPr>
+          <a:xfrm>
+            <a:off x="756000" y="3492000"/>
+            <a:ext cx="468000" cy="846000"/>
+          </a:xfrm>
+          <a:prstGeom prst="rect">
+            <a:avLst/>
+          </a:prstGeom>
+          <a:noFill/>
+        </p:spPr>
+        <p:txBody>
+          <a:bodyPr wrap="square" lIns="36000" rIns="36000" tIns="18000" bIns="18000" anchor="ctr">
+            <a:spAutoFit/>
+          </a:bodyPr>
+          <a:lstStyle/>
+          <a:p>
+            <a:pPr algn="ctr">
+              <a:lnSpc>
+                <a:spcPct val="110000"/>
+              </a:lnSpc>
+            </a:pPr>
+            <a:r>
+              <a:rPr sz="2400" b="1">
+                <a:solidFill>
+                  <a:srgbClr val="FD8103"/>
+                </a:solidFill>
+                <a:latin typeface="Poppins"/>
+              </a:rPr>
+              <a:t>3</a:t>
+            </a:r>
+          </a:p>
+        </p:txBody>
+      </p:sp>
+      <p:sp>
+        <p:nvSpPr>
+          <p:cNvPr id="27" name="Oval 26"/>
+          <p:cNvSpPr/>
+          <p:nvPr/>
+        </p:nvSpPr>
+        <p:spPr>
+          <a:xfrm>
+            <a:off x="1296000" y="3636000"/>
+            <a:ext cx="558000" cy="558000"/>
+          </a:xfrm>
+          <a:prstGeom prst="ellipse">
+            <a:avLst/>
+          </a:prstGeom>
+          <a:solidFill>
+            <a:srgbClr val="FD8103"/>
+          </a:solidFill>
+          <a:ln>
+            <a:noFill/>
+          </a:ln>
+          <a:effectLst/>
+        </p:spPr>
+        <p:style>
+          <a:lnRef idx="1">
+            <a:schemeClr val="accent1"/>
+          </a:lnRef>
+          <a:fillRef idx="3">
+            <a:schemeClr val="accent1"/>
+          </a:fillRef>
+          <a:effectRef idx="2">
+            <a:schemeClr val="accent1"/>
+          </a:effectRef>
+          <a:fontRef idx="minor">
+            <a:schemeClr val="lt1"/>
+          </a:fontRef>
+        </p:style>
+        <p:txBody>
+          <a:bodyPr rtlCol="0" anchor="ctr"/>
+          <a:lstStyle/>
+          <a:p>
+            <a:pPr algn="ctr"/>
+          </a:p>
+        </p:txBody>
+      </p:sp>
+      <p:pic>
+        <p:nvPicPr>
+          <p:cNvPr id="28" name="Picture 27" descr="message-circle_bl.png"/>
+          <p:cNvPicPr>
+            <a:picLocks noChangeAspect="1"/>
+          </p:cNvPicPr>
+          <p:nvPr/>
+        </p:nvPicPr>
+        <p:blipFill>
+          <a:blip r:embed="rId6"/>
+          <a:stretch>
+            <a:fillRect/>
+          </a:stretch>
+        </p:blipFill>
+        <p:spPr>
+          <a:xfrm>
+            <a:off x="1418760" y="3758760"/>
+            <a:ext cx="312480" cy="312480"/>
+          </a:xfrm>
+          <a:prstGeom prst="rect">
+            <a:avLst/>
+          </a:prstGeom>
+        </p:spPr>
+      </p:pic>
+      <p:sp>
+        <p:nvSpPr>
+          <p:cNvPr id="29" name="TextBox 28"/>
+          <p:cNvSpPr txBox="1"/>
+          <p:nvPr/>
+        </p:nvSpPr>
+        <p:spPr>
+          <a:xfrm>
+            <a:off x="2015999" y="3492000"/>
+            <a:ext cx="2304000" cy="846000"/>
+          </a:xfrm>
+          <a:prstGeom prst="rect">
+            <a:avLst/>
+          </a:prstGeom>
+          <a:noFill/>
+        </p:spPr>
+        <p:txBody>
+          <a:bodyPr wrap="square" lIns="36000" rIns="36000" tIns="18000" bIns="18000" anchor="ctr">
+            <a:spAutoFit/>
+          </a:bodyPr>
+          <a:lstStyle/>
+          <a:p>
+            <a:pPr algn="l">
+              <a:lnSpc>
+                <a:spcPct val="110000"/>
+              </a:lnSpc>
+            </a:pPr>
+            <a:r>
+              <a:rPr sz="1350" b="1">
+                <a:solidFill>
+                  <a:srgbClr val="111111"/>
+                </a:solidFill>
+                <a:latin typeface="Poppins"/>
+              </a:rPr>
+              <a:t>Un sondage tous les 15 jours</a:t>
+            </a:r>
+          </a:p>
+        </p:txBody>
+      </p:sp>
+      <p:sp>
+        <p:nvSpPr>
+          <p:cNvPr id="30" name="TextBox 29"/>
+          <p:cNvSpPr txBox="1"/>
+          <p:nvPr/>
+        </p:nvSpPr>
+        <p:spPr>
+          <a:xfrm>
+            <a:off x="4356000" y="3492000"/>
+            <a:ext cx="4248000" cy="846000"/>
+          </a:xfrm>
+          <a:prstGeom prst="rect">
+            <a:avLst/>
+          </a:prstGeom>
+          <a:noFill/>
+        </p:spPr>
+        <p:txBody>
+          <a:bodyPr wrap="square" lIns="36000" rIns="36000" tIns="18000" bIns="18000" anchor="ctr">
+            <a:spAutoFit/>
+          </a:bodyPr>
+          <a:lstStyle/>
+          <a:p>
+            <a:pPr algn="l">
+              <a:lnSpc>
+                <a:spcPct val="110000"/>
+              </a:lnSpc>
+            </a:pPr>
+            <a:r>
+              <a:rPr sz="1050" b="0">
+                <a:solidFill>
+                  <a:srgbClr val="5A5A5A"/>
+                </a:solidFill>
+                <a:latin typeface="Poppins"/>
+              </a:rPr>
+              <a:t>Vos meilleures discussions : on pose la question, on donne la réponse le vendredi.</a:t>
+            </a:r>
+          </a:p>
+        </p:txBody>
+      </p:sp>
+      <p:sp>
+        <p:nvSpPr>
+          <p:cNvPr id="31" name="Rounded Rectangle 30"/>
+          <p:cNvSpPr/>
+          <p:nvPr/>
+        </p:nvSpPr>
+        <p:spPr>
+          <a:xfrm>
+            <a:off x="576000" y="4446000"/>
+            <a:ext cx="8136000" cy="846000"/>
           </a:xfrm>
           <a:prstGeom prst="roundRect">
             <a:avLst>
@@ -11927,13 +17248,13 @@
       </p:sp>
       <p:sp>
         <p:nvSpPr>
-          <p:cNvPr id="17" name="Rectangle 16"/>
+          <p:cNvPr id="32" name="Rectangle 31"/>
           <p:cNvSpPr/>
           <p:nvPr/>
         </p:nvSpPr>
         <p:spPr>
           <a:xfrm>
-            <a:off x="576000" y="2538000"/>
+            <a:off x="576000" y="4446000"/>
             <a:ext cx="90000" cy="846000"/>
           </a:xfrm>
           <a:prstGeom prst="rect">
@@ -11971,14 +17292,14 @@
       </p:sp>
       <p:sp>
         <p:nvSpPr>
-          <p:cNvPr id="18" name="TextBox 17"/>
+          <p:cNvPr id="33" name="TextBox 32"/>
           <p:cNvSpPr txBox="1"/>
           <p:nvPr/>
         </p:nvSpPr>
         <p:spPr>
           <a:xfrm>
-            <a:off x="792000" y="2538000"/>
-            <a:ext cx="503999" cy="846000"/>
+            <a:off x="756000" y="4446000"/>
+            <a:ext cx="468000" cy="846000"/>
           </a:xfrm>
           <a:prstGeom prst="rect">
             <a:avLst/>
@@ -12003,21 +17324,21 @@
                 </a:solidFill>
                 <a:latin typeface="Poppins"/>
               </a:rPr>
-              <a:t>2</a:t>
-            </a:r>
-          </a:p>
-        </p:txBody>
-      </p:sp>
-      <p:sp>
-        <p:nvSpPr>
-          <p:cNvPr id="19" name="Oval 18"/>
+              <a:t>4</a:t>
+            </a:r>
+          </a:p>
+        </p:txBody>
+      </p:sp>
+      <p:sp>
+        <p:nvSpPr>
+          <p:cNvPr id="34" name="Oval 33"/>
           <p:cNvSpPr/>
           <p:nvPr/>
         </p:nvSpPr>
         <p:spPr>
           <a:xfrm>
-            <a:off x="1404000" y="2663999"/>
-            <a:ext cx="594000" cy="594000"/>
+            <a:off x="1296000" y="4590000"/>
+            <a:ext cx="558000" cy="558000"/>
           </a:xfrm>
           <a:prstGeom prst="ellipse">
             <a:avLst/>
@@ -12054,22 +17375,22 @@
       </p:sp>
       <p:pic>
         <p:nvPicPr>
-          <p:cNvPr id="20" name="Picture 19" descr="video_bl.png"/>
+          <p:cNvPr id="35" name="Picture 34" descr="briefcase_bl.png"/>
           <p:cNvPicPr>
             <a:picLocks noChangeAspect="1"/>
           </p:cNvPicPr>
           <p:nvPr/>
         </p:nvPicPr>
         <p:blipFill>
-          <a:blip r:embed="rId4"/>
+          <a:blip r:embed="rId7"/>
           <a:stretch>
             <a:fillRect/>
           </a:stretch>
         </p:blipFill>
         <p:spPr>
           <a:xfrm>
-            <a:off x="1534680" y="2794679"/>
-            <a:ext cx="332640" cy="332640"/>
+            <a:off x="1418760" y="4712760"/>
+            <a:ext cx="312480" cy="312480"/>
           </a:xfrm>
           <a:prstGeom prst="rect">
             <a:avLst/>
@@ -12078,14 +17399,14 @@
       </p:pic>
       <p:sp>
         <p:nvSpPr>
-          <p:cNvPr id="21" name="TextBox 20"/>
+          <p:cNvPr id="36" name="TextBox 35"/>
           <p:cNvSpPr txBox="1"/>
           <p:nvPr/>
         </p:nvSpPr>
         <p:spPr>
           <a:xfrm>
-            <a:off x="2196000" y="2538000"/>
-            <a:ext cx="3060000" cy="846000"/>
+            <a:off x="2015999" y="4446000"/>
+            <a:ext cx="2304000" cy="846000"/>
           </a:xfrm>
           <a:prstGeom prst="rect">
             <a:avLst/>
@@ -12104,27 +17425,27 @@
               </a:lnSpc>
             </a:pPr>
             <a:r>
-              <a:rPr sz="1450" b="1">
+              <a:rPr sz="1350" b="1">
                 <a:solidFill>
                   <a:srgbClr val="111111"/>
                 </a:solidFill>
                 <a:latin typeface="Poppins"/>
               </a:rPr>
-              <a:t>Une vidéo d’usine par semaine</a:t>
-            </a:r>
-          </a:p>
-        </p:txBody>
-      </p:sp>
-      <p:sp>
-        <p:nvSpPr>
-          <p:cNvPr id="22" name="TextBox 21"/>
+              <a:t>Une adresse à votre nom</a:t>
+            </a:r>
+          </a:p>
+        </p:txBody>
+      </p:sp>
+      <p:sp>
+        <p:nvSpPr>
+          <p:cNvPr id="37" name="TextBox 36"/>
           <p:cNvSpPr txBox="1"/>
           <p:nvPr/>
         </p:nvSpPr>
         <p:spPr>
           <a:xfrm>
-            <a:off x="5256000" y="2538000"/>
-            <a:ext cx="6228000" cy="846000"/>
+            <a:off x="4356000" y="4446000"/>
+            <a:ext cx="4248000" cy="846000"/>
           </a:xfrm>
           <a:prstGeom prst="rect">
             <a:avLst/>
@@ -12143,27 +17464,27 @@
               </a:lnSpc>
             </a:pPr>
             <a:r>
-              <a:rPr sz="1200" b="0">
+              <a:rPr sz="1050" b="0">
                 <a:solidFill>
                   <a:srgbClr val="5A5A5A"/>
                 </a:solidFill>
                 <a:latin typeface="Poppins"/>
               </a:rPr>
-              <a:t>Une machine, un geste, une équipe : 30 secondes filmées au téléphone suffisent.</a:t>
-            </a:r>
-          </a:p>
-        </p:txBody>
-      </p:sp>
-      <p:sp>
-        <p:nvSpPr>
-          <p:cNvPr id="23" name="Rounded Rectangle 22"/>
+              <a:t>Remplacer l’adresse Gmail par une adresse @cotiplast, et un seul numéro de devis.</a:t>
+            </a:r>
+          </a:p>
+        </p:txBody>
+      </p:sp>
+      <p:sp>
+        <p:nvSpPr>
+          <p:cNvPr id="38" name="Rounded Rectangle 37"/>
           <p:cNvSpPr/>
           <p:nvPr/>
         </p:nvSpPr>
         <p:spPr>
           <a:xfrm>
-            <a:off x="576000" y="3492000"/>
-            <a:ext cx="11052000" cy="846000"/>
+            <a:off x="576000" y="5400000"/>
+            <a:ext cx="8136000" cy="846000"/>
           </a:xfrm>
           <a:prstGeom prst="roundRect">
             <a:avLst>
@@ -12171,7 +17492,7 @@
             </a:avLst>
           </a:prstGeom>
           <a:solidFill>
-            <a:srgbClr val="FFFFFF"/>
+            <a:srgbClr val="E4F4EC"/>
           </a:solidFill>
           <a:ln>
             <a:noFill/>
@@ -12202,13 +17523,13 @@
       </p:sp>
       <p:sp>
         <p:nvSpPr>
-          <p:cNvPr id="24" name="Rectangle 23"/>
+          <p:cNvPr id="39" name="Rectangle 38"/>
           <p:cNvSpPr/>
           <p:nvPr/>
         </p:nvSpPr>
         <p:spPr>
           <a:xfrm>
-            <a:off x="576000" y="3492000"/>
+            <a:off x="576000" y="5400000"/>
             <a:ext cx="90000" cy="846000"/>
           </a:xfrm>
           <a:prstGeom prst="rect">
@@ -12246,14 +17567,14 @@
       </p:sp>
       <p:sp>
         <p:nvSpPr>
-          <p:cNvPr id="25" name="TextBox 24"/>
+          <p:cNvPr id="40" name="TextBox 39"/>
           <p:cNvSpPr txBox="1"/>
           <p:nvPr/>
         </p:nvSpPr>
         <p:spPr>
           <a:xfrm>
-            <a:off x="792000" y="3492000"/>
-            <a:ext cx="503999" cy="846000"/>
+            <a:off x="756000" y="5400000"/>
+            <a:ext cx="468000" cy="846000"/>
           </a:xfrm>
           <a:prstGeom prst="rect">
             <a:avLst/>
@@ -12278,215 +17599,23 @@
                 </a:solidFill>
                 <a:latin typeface="Poppins"/>
               </a:rPr>
-              <a:t>3</a:t>
-            </a:r>
-          </a:p>
-        </p:txBody>
-      </p:sp>
-      <p:sp>
-        <p:nvSpPr>
-          <p:cNvPr id="26" name="Oval 25"/>
+              <a:t>5</a:t>
+            </a:r>
+          </a:p>
+        </p:txBody>
+      </p:sp>
+      <p:sp>
+        <p:nvSpPr>
+          <p:cNvPr id="41" name="Oval 40"/>
           <p:cNvSpPr/>
           <p:nvPr/>
         </p:nvSpPr>
         <p:spPr>
           <a:xfrm>
-            <a:off x="1404000" y="3617999"/>
-            <a:ext cx="594000" cy="594000"/>
+            <a:off x="1296000" y="5544000"/>
+            <a:ext cx="558000" cy="558000"/>
           </a:xfrm>
           <a:prstGeom prst="ellipse">
-            <a:avLst/>
-          </a:prstGeom>
-          <a:solidFill>
-            <a:srgbClr val="4FB58B"/>
-          </a:solidFill>
-          <a:ln>
-            <a:noFill/>
-          </a:ln>
-          <a:effectLst/>
-        </p:spPr>
-        <p:style>
-          <a:lnRef idx="1">
-            <a:schemeClr val="accent1"/>
-          </a:lnRef>
-          <a:fillRef idx="3">
-            <a:schemeClr val="accent1"/>
-          </a:fillRef>
-          <a:effectRef idx="2">
-            <a:schemeClr val="accent1"/>
-          </a:effectRef>
-          <a:fontRef idx="minor">
-            <a:schemeClr val="lt1"/>
-          </a:fontRef>
-        </p:style>
-        <p:txBody>
-          <a:bodyPr rtlCol="0" anchor="ctr"/>
-          <a:lstStyle/>
-          <a:p>
-            <a:pPr algn="ctr"/>
-          </a:p>
-        </p:txBody>
-      </p:sp>
-      <p:pic>
-        <p:nvPicPr>
-          <p:cNvPr id="27" name="Picture 26" descr="message-circle_bl.png"/>
-          <p:cNvPicPr>
-            <a:picLocks noChangeAspect="1"/>
-          </p:cNvPicPr>
-          <p:nvPr/>
-        </p:nvPicPr>
-        <p:blipFill>
-          <a:blip r:embed="rId5"/>
-          <a:stretch>
-            <a:fillRect/>
-          </a:stretch>
-        </p:blipFill>
-        <p:spPr>
-          <a:xfrm>
-            <a:off x="1534680" y="3748679"/>
-            <a:ext cx="332640" cy="332640"/>
-          </a:xfrm>
-          <a:prstGeom prst="rect">
-            <a:avLst/>
-          </a:prstGeom>
-        </p:spPr>
-      </p:pic>
-      <p:sp>
-        <p:nvSpPr>
-          <p:cNvPr id="28" name="TextBox 27"/>
-          <p:cNvSpPr txBox="1"/>
-          <p:nvPr/>
-        </p:nvSpPr>
-        <p:spPr>
-          <a:xfrm>
-            <a:off x="2196000" y="3492000"/>
-            <a:ext cx="3060000" cy="846000"/>
-          </a:xfrm>
-          <a:prstGeom prst="rect">
-            <a:avLst/>
-          </a:prstGeom>
-          <a:noFill/>
-        </p:spPr>
-        <p:txBody>
-          <a:bodyPr wrap="square" lIns="36000" rIns="36000" tIns="18000" bIns="18000" anchor="ctr">
-            <a:spAutoFit/>
-          </a:bodyPr>
-          <a:lstStyle/>
-          <a:p>
-            <a:pPr algn="l">
-              <a:lnSpc>
-                <a:spcPct val="110000"/>
-              </a:lnSpc>
-            </a:pPr>
-            <a:r>
-              <a:rPr sz="1450" b="1">
-                <a:solidFill>
-                  <a:srgbClr val="111111"/>
-                </a:solidFill>
-                <a:latin typeface="Poppins"/>
-              </a:rPr>
-              <a:t>Un sondage tous les 15 jours</a:t>
-            </a:r>
-          </a:p>
-        </p:txBody>
-      </p:sp>
-      <p:sp>
-        <p:nvSpPr>
-          <p:cNvPr id="29" name="TextBox 28"/>
-          <p:cNvSpPr txBox="1"/>
-          <p:nvPr/>
-        </p:nvSpPr>
-        <p:spPr>
-          <a:xfrm>
-            <a:off x="5256000" y="3492000"/>
-            <a:ext cx="6228000" cy="846000"/>
-          </a:xfrm>
-          <a:prstGeom prst="rect">
-            <a:avLst/>
-          </a:prstGeom>
-          <a:noFill/>
-        </p:spPr>
-        <p:txBody>
-          <a:bodyPr wrap="square" lIns="36000" rIns="36000" tIns="18000" bIns="18000" anchor="ctr">
-            <a:spAutoFit/>
-          </a:bodyPr>
-          <a:lstStyle/>
-          <a:p>
-            <a:pPr algn="l">
-              <a:lnSpc>
-                <a:spcPct val="110000"/>
-              </a:lnSpc>
-            </a:pPr>
-            <a:r>
-              <a:rPr sz="1200" b="0">
-                <a:solidFill>
-                  <a:srgbClr val="5A5A5A"/>
-                </a:solidFill>
-                <a:latin typeface="Poppins"/>
-              </a:rPr>
-              <a:t>Vos meilleures discussions : on pose la question, on donne la réponse le vendredi.</a:t>
-            </a:r>
-          </a:p>
-        </p:txBody>
-      </p:sp>
-      <p:sp>
-        <p:nvSpPr>
-          <p:cNvPr id="30" name="Rounded Rectangle 29"/>
-          <p:cNvSpPr/>
-          <p:nvPr/>
-        </p:nvSpPr>
-        <p:spPr>
-          <a:xfrm>
-            <a:off x="576000" y="4446000"/>
-            <a:ext cx="11052000" cy="846000"/>
-          </a:xfrm>
-          <a:prstGeom prst="roundRect">
-            <a:avLst>
-              <a:gd name="adj" fmla="val 6000"/>
-            </a:avLst>
-          </a:prstGeom>
-          <a:solidFill>
-            <a:srgbClr val="F4F4F2"/>
-          </a:solidFill>
-          <a:ln>
-            <a:noFill/>
-          </a:ln>
-          <a:effectLst/>
-        </p:spPr>
-        <p:style>
-          <a:lnRef idx="1">
-            <a:schemeClr val="accent1"/>
-          </a:lnRef>
-          <a:fillRef idx="3">
-            <a:schemeClr val="accent1"/>
-          </a:fillRef>
-          <a:effectRef idx="2">
-            <a:schemeClr val="accent1"/>
-          </a:effectRef>
-          <a:fontRef idx="minor">
-            <a:schemeClr val="lt1"/>
-          </a:fontRef>
-        </p:style>
-        <p:txBody>
-          <a:bodyPr rtlCol="0" anchor="ctr"/>
-          <a:lstStyle/>
-          <a:p>
-            <a:pPr algn="ctr"/>
-          </a:p>
-        </p:txBody>
-      </p:sp>
-      <p:sp>
-        <p:nvSpPr>
-          <p:cNvPr id="31" name="Rectangle 30"/>
-          <p:cNvSpPr/>
-          <p:nvPr/>
-        </p:nvSpPr>
-        <p:spPr>
-          <a:xfrm>
-            <a:off x="576000" y="4446000"/>
-            <a:ext cx="90000" cy="846000"/>
-          </a:xfrm>
-          <a:prstGeom prst="rect">
             <a:avLst/>
           </a:prstGeom>
           <a:solidFill>
@@ -12519,107 +17648,24 @@
           </a:p>
         </p:txBody>
       </p:sp>
-      <p:sp>
-        <p:nvSpPr>
-          <p:cNvPr id="32" name="TextBox 31"/>
-          <p:cNvSpPr txBox="1"/>
-          <p:nvPr/>
-        </p:nvSpPr>
-        <p:spPr>
-          <a:xfrm>
-            <a:off x="792000" y="4446000"/>
-            <a:ext cx="503999" cy="846000"/>
-          </a:xfrm>
-          <a:prstGeom prst="rect">
-            <a:avLst/>
-          </a:prstGeom>
-          <a:noFill/>
-        </p:spPr>
-        <p:txBody>
-          <a:bodyPr wrap="square" lIns="36000" rIns="36000" tIns="18000" bIns="18000" anchor="ctr">
-            <a:spAutoFit/>
-          </a:bodyPr>
-          <a:lstStyle/>
-          <a:p>
-            <a:pPr algn="ctr">
-              <a:lnSpc>
-                <a:spcPct val="110000"/>
-              </a:lnSpc>
-            </a:pPr>
-            <a:r>
-              <a:rPr sz="2400" b="1">
-                <a:solidFill>
-                  <a:srgbClr val="FD8103"/>
-                </a:solidFill>
-                <a:latin typeface="Poppins"/>
-              </a:rPr>
-              <a:t>4</a:t>
-            </a:r>
-          </a:p>
-        </p:txBody>
-      </p:sp>
-      <p:sp>
-        <p:nvSpPr>
-          <p:cNvPr id="33" name="Oval 32"/>
-          <p:cNvSpPr/>
-          <p:nvPr/>
-        </p:nvSpPr>
-        <p:spPr>
-          <a:xfrm>
-            <a:off x="1404000" y="4571999"/>
-            <a:ext cx="594000" cy="594000"/>
-          </a:xfrm>
-          <a:prstGeom prst="ellipse">
-            <a:avLst/>
-          </a:prstGeom>
-          <a:solidFill>
-            <a:srgbClr val="4FB58B"/>
-          </a:solidFill>
-          <a:ln>
-            <a:noFill/>
-          </a:ln>
-          <a:effectLst/>
-        </p:spPr>
-        <p:style>
-          <a:lnRef idx="1">
-            <a:schemeClr val="accent1"/>
-          </a:lnRef>
-          <a:fillRef idx="3">
-            <a:schemeClr val="accent1"/>
-          </a:fillRef>
-          <a:effectRef idx="2">
-            <a:schemeClr val="accent1"/>
-          </a:effectRef>
-          <a:fontRef idx="minor">
-            <a:schemeClr val="lt1"/>
-          </a:fontRef>
-        </p:style>
-        <p:txBody>
-          <a:bodyPr rtlCol="0" anchor="ctr"/>
-          <a:lstStyle/>
-          <a:p>
-            <a:pPr algn="ctr"/>
-          </a:p>
-        </p:txBody>
-      </p:sp>
       <p:pic>
         <p:nvPicPr>
-          <p:cNvPr id="34" name="Picture 33" descr="briefcase_bl.png"/>
+          <p:cNvPr id="42" name="Picture 41" descr="brand-facebook_bl.png"/>
           <p:cNvPicPr>
             <a:picLocks noChangeAspect="1"/>
           </p:cNvPicPr>
           <p:nvPr/>
         </p:nvPicPr>
         <p:blipFill>
-          <a:blip r:embed="rId6"/>
+          <a:blip r:embed="rId8"/>
           <a:stretch>
             <a:fillRect/>
           </a:stretch>
         </p:blipFill>
         <p:spPr>
           <a:xfrm>
-            <a:off x="1534680" y="4702679"/>
-            <a:ext cx="332640" cy="332640"/>
+            <a:off x="1418760" y="5666760"/>
+            <a:ext cx="312480" cy="312480"/>
           </a:xfrm>
           <a:prstGeom prst="rect">
             <a:avLst/>
@@ -12628,14 +17674,14 @@
       </p:pic>
       <p:sp>
         <p:nvSpPr>
-          <p:cNvPr id="35" name="TextBox 34"/>
+          <p:cNvPr id="43" name="TextBox 42"/>
           <p:cNvSpPr txBox="1"/>
           <p:nvPr/>
         </p:nvSpPr>
         <p:spPr>
           <a:xfrm>
-            <a:off x="2196000" y="4446000"/>
-            <a:ext cx="3060000" cy="846000"/>
+            <a:off x="2015999" y="5400000"/>
+            <a:ext cx="2304000" cy="846000"/>
           </a:xfrm>
           <a:prstGeom prst="rect">
             <a:avLst/>
@@ -12654,27 +17700,27 @@
               </a:lnSpc>
             </a:pPr>
             <a:r>
-              <a:rPr sz="1450" b="1">
+              <a:rPr sz="1350" b="1">
                 <a:solidFill>
                   <a:srgbClr val="111111"/>
                 </a:solidFill>
                 <a:latin typeface="Poppins"/>
               </a:rPr>
-              <a:t>Une adresse à votre nom</a:t>
-            </a:r>
-          </a:p>
-        </p:txBody>
-      </p:sp>
-      <p:sp>
-        <p:nvSpPr>
-          <p:cNvPr id="36" name="TextBox 35"/>
+              <a:t>Faire le ménage</a:t>
+            </a:r>
+          </a:p>
+        </p:txBody>
+      </p:sp>
+      <p:sp>
+        <p:nvSpPr>
+          <p:cNvPr id="44" name="TextBox 43"/>
           <p:cNvSpPr txBox="1"/>
           <p:nvPr/>
         </p:nvSpPr>
         <p:spPr>
           <a:xfrm>
-            <a:off x="5256000" y="4446000"/>
-            <a:ext cx="6228000" cy="846000"/>
+            <a:off x="4356000" y="5400000"/>
+            <a:ext cx="4248000" cy="846000"/>
           </a:xfrm>
           <a:prstGeom prst="rect">
             <a:avLst/>
@@ -12693,282 +17739,7 @@
               </a:lnSpc>
             </a:pPr>
             <a:r>
-              <a:rPr sz="1200" b="0">
-                <a:solidFill>
-                  <a:srgbClr val="5A5A5A"/>
-                </a:solidFill>
-                <a:latin typeface="Poppins"/>
-              </a:rPr>
-              <a:t>Remplacer l’adresse Gmail par une adresse @cotiplast, et un seul numéro de devis.</a:t>
-            </a:r>
-          </a:p>
-        </p:txBody>
-      </p:sp>
-      <p:sp>
-        <p:nvSpPr>
-          <p:cNvPr id="37" name="Rounded Rectangle 36"/>
-          <p:cNvSpPr/>
-          <p:nvPr/>
-        </p:nvSpPr>
-        <p:spPr>
-          <a:xfrm>
-            <a:off x="576000" y="5400000"/>
-            <a:ext cx="11052000" cy="846000"/>
-          </a:xfrm>
-          <a:prstGeom prst="roundRect">
-            <a:avLst>
-              <a:gd name="adj" fmla="val 6000"/>
-            </a:avLst>
-          </a:prstGeom>
-          <a:solidFill>
-            <a:srgbClr val="FFFFFF"/>
-          </a:solidFill>
-          <a:ln>
-            <a:noFill/>
-          </a:ln>
-          <a:effectLst/>
-        </p:spPr>
-        <p:style>
-          <a:lnRef idx="1">
-            <a:schemeClr val="accent1"/>
-          </a:lnRef>
-          <a:fillRef idx="3">
-            <a:schemeClr val="accent1"/>
-          </a:fillRef>
-          <a:effectRef idx="2">
-            <a:schemeClr val="accent1"/>
-          </a:effectRef>
-          <a:fontRef idx="minor">
-            <a:schemeClr val="lt1"/>
-          </a:fontRef>
-        </p:style>
-        <p:txBody>
-          <a:bodyPr rtlCol="0" anchor="ctr"/>
-          <a:lstStyle/>
-          <a:p>
-            <a:pPr algn="ctr"/>
-          </a:p>
-        </p:txBody>
-      </p:sp>
-      <p:sp>
-        <p:nvSpPr>
-          <p:cNvPr id="38" name="Rectangle 37"/>
-          <p:cNvSpPr/>
-          <p:nvPr/>
-        </p:nvSpPr>
-        <p:spPr>
-          <a:xfrm>
-            <a:off x="576000" y="5400000"/>
-            <a:ext cx="90000" cy="846000"/>
-          </a:xfrm>
-          <a:prstGeom prst="rect">
-            <a:avLst/>
-          </a:prstGeom>
-          <a:solidFill>
-            <a:srgbClr val="FD8103"/>
-          </a:solidFill>
-          <a:ln>
-            <a:noFill/>
-          </a:ln>
-          <a:effectLst/>
-        </p:spPr>
-        <p:style>
-          <a:lnRef idx="1">
-            <a:schemeClr val="accent1"/>
-          </a:lnRef>
-          <a:fillRef idx="3">
-            <a:schemeClr val="accent1"/>
-          </a:fillRef>
-          <a:effectRef idx="2">
-            <a:schemeClr val="accent1"/>
-          </a:effectRef>
-          <a:fontRef idx="minor">
-            <a:schemeClr val="lt1"/>
-          </a:fontRef>
-        </p:style>
-        <p:txBody>
-          <a:bodyPr rtlCol="0" anchor="ctr"/>
-          <a:lstStyle/>
-          <a:p>
-            <a:pPr algn="ctr"/>
-          </a:p>
-        </p:txBody>
-      </p:sp>
-      <p:sp>
-        <p:nvSpPr>
-          <p:cNvPr id="39" name="TextBox 38"/>
-          <p:cNvSpPr txBox="1"/>
-          <p:nvPr/>
-        </p:nvSpPr>
-        <p:spPr>
-          <a:xfrm>
-            <a:off x="792000" y="5400000"/>
-            <a:ext cx="503999" cy="846000"/>
-          </a:xfrm>
-          <a:prstGeom prst="rect">
-            <a:avLst/>
-          </a:prstGeom>
-          <a:noFill/>
-        </p:spPr>
-        <p:txBody>
-          <a:bodyPr wrap="square" lIns="36000" rIns="36000" tIns="18000" bIns="18000" anchor="ctr">
-            <a:spAutoFit/>
-          </a:bodyPr>
-          <a:lstStyle/>
-          <a:p>
-            <a:pPr algn="ctr">
-              <a:lnSpc>
-                <a:spcPct val="110000"/>
-              </a:lnSpc>
-            </a:pPr>
-            <a:r>
-              <a:rPr sz="2400" b="1">
-                <a:solidFill>
-                  <a:srgbClr val="FD8103"/>
-                </a:solidFill>
-                <a:latin typeface="Poppins"/>
-              </a:rPr>
-              <a:t>5</a:t>
-            </a:r>
-          </a:p>
-        </p:txBody>
-      </p:sp>
-      <p:sp>
-        <p:nvSpPr>
-          <p:cNvPr id="40" name="Oval 39"/>
-          <p:cNvSpPr/>
-          <p:nvPr/>
-        </p:nvSpPr>
-        <p:spPr>
-          <a:xfrm>
-            <a:off x="1404000" y="5525999"/>
-            <a:ext cx="594000" cy="594000"/>
-          </a:xfrm>
-          <a:prstGeom prst="ellipse">
-            <a:avLst/>
-          </a:prstGeom>
-          <a:solidFill>
-            <a:srgbClr val="4FB58B"/>
-          </a:solidFill>
-          <a:ln>
-            <a:noFill/>
-          </a:ln>
-          <a:effectLst/>
-        </p:spPr>
-        <p:style>
-          <a:lnRef idx="1">
-            <a:schemeClr val="accent1"/>
-          </a:lnRef>
-          <a:fillRef idx="3">
-            <a:schemeClr val="accent1"/>
-          </a:fillRef>
-          <a:effectRef idx="2">
-            <a:schemeClr val="accent1"/>
-          </a:effectRef>
-          <a:fontRef idx="minor">
-            <a:schemeClr val="lt1"/>
-          </a:fontRef>
-        </p:style>
-        <p:txBody>
-          <a:bodyPr rtlCol="0" anchor="ctr"/>
-          <a:lstStyle/>
-          <a:p>
-            <a:pPr algn="ctr"/>
-          </a:p>
-        </p:txBody>
-      </p:sp>
-      <p:pic>
-        <p:nvPicPr>
-          <p:cNvPr id="41" name="Picture 40" descr="brand-facebook_bl.png"/>
-          <p:cNvPicPr>
-            <a:picLocks noChangeAspect="1"/>
-          </p:cNvPicPr>
-          <p:nvPr/>
-        </p:nvPicPr>
-        <p:blipFill>
-          <a:blip r:embed="rId7"/>
-          <a:stretch>
-            <a:fillRect/>
-          </a:stretch>
-        </p:blipFill>
-        <p:spPr>
-          <a:xfrm>
-            <a:off x="1534680" y="5656679"/>
-            <a:ext cx="332640" cy="332640"/>
-          </a:xfrm>
-          <a:prstGeom prst="rect">
-            <a:avLst/>
-          </a:prstGeom>
-        </p:spPr>
-      </p:pic>
-      <p:sp>
-        <p:nvSpPr>
-          <p:cNvPr id="42" name="TextBox 41"/>
-          <p:cNvSpPr txBox="1"/>
-          <p:nvPr/>
-        </p:nvSpPr>
-        <p:spPr>
-          <a:xfrm>
-            <a:off x="2196000" y="5400000"/>
-            <a:ext cx="3060000" cy="846000"/>
-          </a:xfrm>
-          <a:prstGeom prst="rect">
-            <a:avLst/>
-          </a:prstGeom>
-          <a:noFill/>
-        </p:spPr>
-        <p:txBody>
-          <a:bodyPr wrap="square" lIns="36000" rIns="36000" tIns="18000" bIns="18000" anchor="ctr">
-            <a:spAutoFit/>
-          </a:bodyPr>
-          <a:lstStyle/>
-          <a:p>
-            <a:pPr algn="l">
-              <a:lnSpc>
-                <a:spcPct val="110000"/>
-              </a:lnSpc>
-            </a:pPr>
-            <a:r>
-              <a:rPr sz="1450" b="1">
-                <a:solidFill>
-                  <a:srgbClr val="111111"/>
-                </a:solidFill>
-                <a:latin typeface="Poppins"/>
-              </a:rPr>
-              <a:t>Faire le ménage</a:t>
-            </a:r>
-          </a:p>
-        </p:txBody>
-      </p:sp>
-      <p:sp>
-        <p:nvSpPr>
-          <p:cNvPr id="43" name="TextBox 42"/>
-          <p:cNvSpPr txBox="1"/>
-          <p:nvPr/>
-        </p:nvSpPr>
-        <p:spPr>
-          <a:xfrm>
-            <a:off x="5256000" y="5400000"/>
-            <a:ext cx="6228000" cy="846000"/>
-          </a:xfrm>
-          <a:prstGeom prst="rect">
-            <a:avLst/>
-          </a:prstGeom>
-          <a:noFill/>
-        </p:spPr>
-        <p:txBody>
-          <a:bodyPr wrap="square" lIns="36000" rIns="36000" tIns="18000" bIns="18000" anchor="ctr">
-            <a:spAutoFit/>
-          </a:bodyPr>
-          <a:lstStyle/>
-          <a:p>
-            <a:pPr algn="l">
-              <a:lnSpc>
-                <a:spcPct val="110000"/>
-              </a:lnSpc>
-            </a:pPr>
-            <a:r>
-              <a:rPr sz="1200" b="0">
+              <a:rPr sz="1050" b="0">
                 <a:solidFill>
                   <a:srgbClr val="5A5A5A"/>
                 </a:solidFill>
@@ -15675,16 +20446,41 @@
           </a:p>
         </p:txBody>
       </p:sp>
-      <p:sp>
-        <p:nvSpPr>
-          <p:cNvPr id="9" name="Rounded Rectangle 8"/>
+      <p:pic>
+        <p:nvPicPr>
+          <p:cNvPr id="9" name="Picture 8" descr="co_2024_10_5_jpg.jpg"/>
+          <p:cNvPicPr>
+            <a:picLocks noChangeAspect="1"/>
+          </p:cNvPicPr>
+          <p:nvPr/>
+        </p:nvPicPr>
+        <p:blipFill>
+          <a:blip r:embed="rId3"/>
+          <a:srcRect l="32166" r="32166"/>
+          <a:stretch>
+            <a:fillRect/>
+          </a:stretch>
+        </p:blipFill>
+        <p:spPr>
+          <a:xfrm>
+            <a:off x="8928000" y="1584000"/>
+            <a:ext cx="2700000" cy="4644000"/>
+          </a:xfrm>
+          <a:prstGeom prst="rect">
+            <a:avLst/>
+          </a:prstGeom>
+        </p:spPr>
+      </p:pic>
+      <p:sp>
+        <p:nvSpPr>
+          <p:cNvPr id="10" name="Rounded Rectangle 9"/>
           <p:cNvSpPr/>
           <p:nvPr/>
         </p:nvSpPr>
         <p:spPr>
           <a:xfrm>
-            <a:off x="576000" y="1655999"/>
-            <a:ext cx="3528000" cy="3420000"/>
+            <a:off x="576000" y="1584000"/>
+            <a:ext cx="2628000" cy="3671999"/>
           </a:xfrm>
           <a:prstGeom prst="roundRect">
             <a:avLst>
@@ -15723,14 +20519,14 @@
       </p:sp>
       <p:sp>
         <p:nvSpPr>
-          <p:cNvPr id="10" name="Oval 9"/>
+          <p:cNvPr id="11" name="Oval 10"/>
           <p:cNvSpPr/>
           <p:nvPr/>
         </p:nvSpPr>
         <p:spPr>
           <a:xfrm>
-            <a:off x="864000" y="1944000"/>
-            <a:ext cx="792000" cy="792000"/>
+            <a:off x="827999" y="1835999"/>
+            <a:ext cx="720000" cy="720000"/>
           </a:xfrm>
           <a:prstGeom prst="ellipse">
             <a:avLst/>
@@ -15767,22 +20563,22 @@
       </p:sp>
       <p:pic>
         <p:nvPicPr>
-          <p:cNvPr id="11" name="Picture 10" descr="eye_bl.png"/>
+          <p:cNvPr id="12" name="Picture 11" descr="eye_bl.png"/>
           <p:cNvPicPr>
             <a:picLocks noChangeAspect="1"/>
           </p:cNvPicPr>
           <p:nvPr/>
         </p:nvPicPr>
         <p:blipFill>
-          <a:blip r:embed="rId3"/>
+          <a:blip r:embed="rId4"/>
           <a:stretch>
             <a:fillRect/>
           </a:stretch>
         </p:blipFill>
         <p:spPr>
           <a:xfrm>
-            <a:off x="1038240" y="2118240"/>
-            <a:ext cx="443520" cy="443520"/>
+            <a:off x="986399" y="1994399"/>
+            <a:ext cx="403200" cy="403200"/>
           </a:xfrm>
           <a:prstGeom prst="rect">
             <a:avLst/>
@@ -15791,14 +20587,14 @@
       </p:pic>
       <p:sp>
         <p:nvSpPr>
-          <p:cNvPr id="12" name="TextBox 11"/>
+          <p:cNvPr id="13" name="TextBox 12"/>
           <p:cNvSpPr txBox="1"/>
           <p:nvPr/>
         </p:nvSpPr>
         <p:spPr>
           <a:xfrm>
-            <a:off x="864000" y="2951999"/>
-            <a:ext cx="3024000" cy="432000"/>
+            <a:off x="827999" y="2736000"/>
+            <a:ext cx="2196000" cy="576000"/>
           </a:xfrm>
           <a:prstGeom prst="rect">
             <a:avLst/>
@@ -15817,7 +20613,7 @@
               </a:lnSpc>
             </a:pPr>
             <a:r>
-              <a:rPr sz="1700" b="1">
+              <a:rPr sz="1500" b="1">
                 <a:solidFill>
                   <a:srgbClr val="111111"/>
                 </a:solidFill>
@@ -15830,14 +20626,14 @@
       </p:sp>
       <p:sp>
         <p:nvSpPr>
-          <p:cNvPr id="13" name="TextBox 12"/>
+          <p:cNvPr id="14" name="TextBox 13"/>
           <p:cNvSpPr txBox="1"/>
           <p:nvPr/>
         </p:nvSpPr>
         <p:spPr>
           <a:xfrm>
-            <a:off x="864000" y="3456000"/>
-            <a:ext cx="3024000" cy="1512000"/>
+            <a:off x="827999" y="3348000"/>
+            <a:ext cx="2196000" cy="1800000"/>
           </a:xfrm>
           <a:prstGeom prst="rect">
             <a:avLst/>
@@ -15856,7 +20652,7 @@
               </a:lnSpc>
             </a:pPr>
             <a:r>
-              <a:rPr sz="1250" b="0">
+              <a:rPr sz="1150" b="0">
                 <a:solidFill>
                   <a:srgbClr val="5A5A5A"/>
                 </a:solidFill>
@@ -15869,14 +20665,14 @@
       </p:sp>
       <p:sp>
         <p:nvSpPr>
-          <p:cNvPr id="14" name="Rounded Rectangle 13"/>
+          <p:cNvPr id="15" name="Rounded Rectangle 14"/>
           <p:cNvSpPr/>
           <p:nvPr/>
         </p:nvSpPr>
         <p:spPr>
           <a:xfrm>
-            <a:off x="4320000" y="1655999"/>
-            <a:ext cx="3528000" cy="3420000"/>
+            <a:off x="3366000" y="1584000"/>
+            <a:ext cx="2628000" cy="3671999"/>
           </a:xfrm>
           <a:prstGeom prst="roundRect">
             <a:avLst>
@@ -15915,14 +20711,14 @@
       </p:sp>
       <p:sp>
         <p:nvSpPr>
-          <p:cNvPr id="15" name="Oval 14"/>
+          <p:cNvPr id="16" name="Oval 15"/>
           <p:cNvSpPr/>
           <p:nvPr/>
         </p:nvSpPr>
         <p:spPr>
           <a:xfrm>
-            <a:off x="4608000" y="1944000"/>
-            <a:ext cx="792000" cy="792000"/>
+            <a:off x="3617999" y="1835999"/>
+            <a:ext cx="720000" cy="720000"/>
           </a:xfrm>
           <a:prstGeom prst="ellipse">
             <a:avLst/>
@@ -15959,22 +20755,22 @@
       </p:sp>
       <p:pic>
         <p:nvPicPr>
-          <p:cNvPr id="16" name="Picture 15" descr="camera_bl.png"/>
+          <p:cNvPr id="17" name="Picture 16" descr="camera_bl.png"/>
           <p:cNvPicPr>
             <a:picLocks noChangeAspect="1"/>
           </p:cNvPicPr>
           <p:nvPr/>
         </p:nvPicPr>
         <p:blipFill>
-          <a:blip r:embed="rId4"/>
+          <a:blip r:embed="rId5"/>
           <a:stretch>
             <a:fillRect/>
           </a:stretch>
         </p:blipFill>
         <p:spPr>
           <a:xfrm>
-            <a:off x="4782240" y="2118240"/>
-            <a:ext cx="443520" cy="443520"/>
+            <a:off x="3776399" y="1994399"/>
+            <a:ext cx="403200" cy="403200"/>
           </a:xfrm>
           <a:prstGeom prst="rect">
             <a:avLst/>
@@ -15983,14 +20779,14 @@
       </p:pic>
       <p:sp>
         <p:nvSpPr>
-          <p:cNvPr id="17" name="TextBox 16"/>
+          <p:cNvPr id="18" name="TextBox 17"/>
           <p:cNvSpPr txBox="1"/>
           <p:nvPr/>
         </p:nvSpPr>
         <p:spPr>
           <a:xfrm>
-            <a:off x="4608000" y="2951999"/>
-            <a:ext cx="3024000" cy="432000"/>
+            <a:off x="3617999" y="2736000"/>
+            <a:ext cx="2196000" cy="576000"/>
           </a:xfrm>
           <a:prstGeom prst="rect">
             <a:avLst/>
@@ -16009,7 +20805,7 @@
               </a:lnSpc>
             </a:pPr>
             <a:r>
-              <a:rPr sz="1700" b="1">
+              <a:rPr sz="1500" b="1">
                 <a:solidFill>
                   <a:srgbClr val="111111"/>
                 </a:solidFill>
@@ -16022,14 +20818,14 @@
       </p:sp>
       <p:sp>
         <p:nvSpPr>
-          <p:cNvPr id="18" name="TextBox 17"/>
+          <p:cNvPr id="19" name="TextBox 18"/>
           <p:cNvSpPr txBox="1"/>
           <p:nvPr/>
         </p:nvSpPr>
         <p:spPr>
           <a:xfrm>
-            <a:off x="4608000" y="3456000"/>
-            <a:ext cx="3024000" cy="1512000"/>
+            <a:off x="3617999" y="3348000"/>
+            <a:ext cx="2196000" cy="1800000"/>
           </a:xfrm>
           <a:prstGeom prst="rect">
             <a:avLst/>
@@ -16048,7 +20844,7 @@
               </a:lnSpc>
             </a:pPr>
             <a:r>
-              <a:rPr sz="1250" b="0">
+              <a:rPr sz="1150" b="0">
                 <a:solidFill>
                   <a:srgbClr val="5A5A5A"/>
                 </a:solidFill>
@@ -16061,14 +20857,14 @@
       </p:sp>
       <p:sp>
         <p:nvSpPr>
-          <p:cNvPr id="19" name="Rounded Rectangle 18"/>
+          <p:cNvPr id="20" name="Rounded Rectangle 19"/>
           <p:cNvSpPr/>
           <p:nvPr/>
         </p:nvSpPr>
         <p:spPr>
           <a:xfrm>
-            <a:off x="8064000" y="1655999"/>
-            <a:ext cx="3528000" cy="3420000"/>
+            <a:off x="6156000" y="1584000"/>
+            <a:ext cx="2628000" cy="3671999"/>
           </a:xfrm>
           <a:prstGeom prst="roundRect">
             <a:avLst>
@@ -16107,14 +20903,14 @@
       </p:sp>
       <p:sp>
         <p:nvSpPr>
-          <p:cNvPr id="20" name="Oval 19"/>
+          <p:cNvPr id="21" name="Oval 20"/>
           <p:cNvSpPr/>
           <p:nvPr/>
         </p:nvSpPr>
         <p:spPr>
           <a:xfrm>
-            <a:off x="8352000" y="1944000"/>
-            <a:ext cx="792000" cy="792000"/>
+            <a:off x="6407999" y="1835999"/>
+            <a:ext cx="720000" cy="720000"/>
           </a:xfrm>
           <a:prstGeom prst="ellipse">
             <a:avLst/>
@@ -16151,22 +20947,22 @@
       </p:sp>
       <p:pic>
         <p:nvPicPr>
-          <p:cNvPr id="21" name="Picture 20" descr="circle-check_bl.png"/>
+          <p:cNvPr id="22" name="Picture 21" descr="circle-check_bl.png"/>
           <p:cNvPicPr>
             <a:picLocks noChangeAspect="1"/>
           </p:cNvPicPr>
           <p:nvPr/>
         </p:nvPicPr>
         <p:blipFill>
-          <a:blip r:embed="rId5"/>
+          <a:blip r:embed="rId6"/>
           <a:stretch>
             <a:fillRect/>
           </a:stretch>
         </p:blipFill>
         <p:spPr>
           <a:xfrm>
-            <a:off x="8526240" y="2118240"/>
-            <a:ext cx="443520" cy="443520"/>
+            <a:off x="6566399" y="1994399"/>
+            <a:ext cx="403200" cy="403200"/>
           </a:xfrm>
           <a:prstGeom prst="rect">
             <a:avLst/>
@@ -16175,14 +20971,14 @@
       </p:pic>
       <p:sp>
         <p:nvSpPr>
-          <p:cNvPr id="22" name="TextBox 21"/>
+          <p:cNvPr id="23" name="TextBox 22"/>
           <p:cNvSpPr txBox="1"/>
           <p:nvPr/>
         </p:nvSpPr>
         <p:spPr>
           <a:xfrm>
-            <a:off x="8352000" y="2951999"/>
-            <a:ext cx="3024000" cy="432000"/>
+            <a:off x="6407999" y="2736000"/>
+            <a:ext cx="2196000" cy="576000"/>
           </a:xfrm>
           <a:prstGeom prst="rect">
             <a:avLst/>
@@ -16201,7 +20997,7 @@
               </a:lnSpc>
             </a:pPr>
             <a:r>
-              <a:rPr sz="1700" b="1">
+              <a:rPr sz="1500" b="1">
                 <a:solidFill>
                   <a:srgbClr val="111111"/>
                 </a:solidFill>
@@ -16214,14 +21010,14 @@
       </p:sp>
       <p:sp>
         <p:nvSpPr>
-          <p:cNvPr id="23" name="TextBox 22"/>
+          <p:cNvPr id="24" name="TextBox 23"/>
           <p:cNvSpPr txBox="1"/>
           <p:nvPr/>
         </p:nvSpPr>
         <p:spPr>
           <a:xfrm>
-            <a:off x="8352000" y="3456000"/>
-            <a:ext cx="3024000" cy="1512000"/>
+            <a:off x="6407999" y="3348000"/>
+            <a:ext cx="2196000" cy="1800000"/>
           </a:xfrm>
           <a:prstGeom prst="rect">
             <a:avLst/>
@@ -16240,7 +21036,7 @@
               </a:lnSpc>
             </a:pPr>
             <a:r>
-              <a:rPr sz="1250" b="0">
+              <a:rPr sz="1150" b="0">
                 <a:solidFill>
                   <a:srgbClr val="5A5A5A"/>
                 </a:solidFill>
@@ -16253,14 +21049,14 @@
       </p:sp>
       <p:sp>
         <p:nvSpPr>
-          <p:cNvPr id="24" name="TextBox 23"/>
+          <p:cNvPr id="25" name="TextBox 24"/>
           <p:cNvSpPr txBox="1"/>
           <p:nvPr/>
         </p:nvSpPr>
         <p:spPr>
           <a:xfrm>
-            <a:off x="576000" y="5400000"/>
-            <a:ext cx="11052000" cy="720000"/>
+            <a:off x="576000" y="5436000"/>
+            <a:ext cx="8136000" cy="792000"/>
           </a:xfrm>
           <a:prstGeom prst="rect">
             <a:avLst/>
@@ -16279,7 +21075,7 @@
               </a:lnSpc>
             </a:pPr>
             <a:r>
-              <a:rPr sz="1200" b="0">
+              <a:rPr sz="1100" b="0">
                 <a:solidFill>
                   <a:srgbClr val="5A5A5A"/>
                 </a:solidFill>
@@ -16698,8 +21494,47 @@
         </p:nvSpPr>
         <p:spPr>
           <a:xfrm>
-            <a:off x="827999" y="2879999"/>
-            <a:ext cx="2160000" cy="648000"/>
+            <a:off x="827999" y="2843999"/>
+            <a:ext cx="2160000" cy="684000"/>
+          </a:xfrm>
+          <a:prstGeom prst="rect">
+            <a:avLst/>
+          </a:prstGeom>
+          <a:noFill/>
+        </p:spPr>
+        <p:txBody>
+          <a:bodyPr wrap="square" lIns="36000" rIns="36000" tIns="18000" bIns="18000" anchor="ctr">
+            <a:spAutoFit/>
+          </a:bodyPr>
+          <a:lstStyle/>
+          <a:p>
+            <a:pPr algn="l">
+              <a:lnSpc>
+                <a:spcPct val="110000"/>
+              </a:lnSpc>
+            </a:pPr>
+            <a:r>
+              <a:rPr sz="1500" b="1">
+                <a:solidFill>
+                  <a:srgbClr val="111111"/>
+                </a:solidFill>
+                <a:latin typeface="Poppins"/>
+              </a:rPr>
+              <a:t>Pages publiques</a:t>
+            </a:r>
+          </a:p>
+        </p:txBody>
+      </p:sp>
+      <p:sp>
+        <p:nvSpPr>
+          <p:cNvPr id="13" name="TextBox 12"/>
+          <p:cNvSpPr txBox="1"/>
+          <p:nvPr/>
+        </p:nvSpPr>
+        <p:spPr>
+          <a:xfrm>
+            <a:off x="827999" y="3635999"/>
+            <a:ext cx="2160000" cy="2160000"/>
           </a:xfrm>
           <a:prstGeom prst="rect">
             <a:avLst/>
@@ -16718,46 +21553,7 @@
               </a:lnSpc>
             </a:pPr>
             <a:r>
-              <a:rPr sz="1550" b="1">
-                <a:solidFill>
-                  <a:srgbClr val="111111"/>
-                </a:solidFill>
-                <a:latin typeface="Poppins"/>
-              </a:rPr>
-              <a:t>Pages publiques</a:t>
-            </a:r>
-          </a:p>
-        </p:txBody>
-      </p:sp>
-      <p:sp>
-        <p:nvSpPr>
-          <p:cNvPr id="13" name="TextBox 12"/>
-          <p:cNvSpPr txBox="1"/>
-          <p:nvPr/>
-        </p:nvSpPr>
-        <p:spPr>
-          <a:xfrm>
-            <a:off x="827999" y="3599999"/>
-            <a:ext cx="2160000" cy="2160000"/>
-          </a:xfrm>
-          <a:prstGeom prst="rect">
-            <a:avLst/>
-          </a:prstGeom>
-          <a:noFill/>
-        </p:spPr>
-        <p:txBody>
-          <a:bodyPr wrap="square" lIns="36000" rIns="36000" tIns="18000" bIns="18000" anchor="t">
-            <a:spAutoFit/>
-          </a:bodyPr>
-          <a:lstStyle/>
-          <a:p>
-            <a:pPr algn="l">
-              <a:lnSpc>
-                <a:spcPct val="110000"/>
-              </a:lnSpc>
-            </a:pPr>
-            <a:r>
-              <a:rPr sz="1250" b="0">
+              <a:rPr sz="1200" b="0">
                 <a:solidFill>
                   <a:srgbClr val="5A5A5A"/>
                 </a:solidFill>
@@ -16890,8 +21686,47 @@
         </p:nvSpPr>
         <p:spPr>
           <a:xfrm>
-            <a:off x="3635999" y="2879999"/>
-            <a:ext cx="2160000" cy="648000"/>
+            <a:off x="3635999" y="2843999"/>
+            <a:ext cx="2160000" cy="684000"/>
+          </a:xfrm>
+          <a:prstGeom prst="rect">
+            <a:avLst/>
+          </a:prstGeom>
+          <a:noFill/>
+        </p:spPr>
+        <p:txBody>
+          <a:bodyPr wrap="square" lIns="36000" rIns="36000" tIns="18000" bIns="18000" anchor="ctr">
+            <a:spAutoFit/>
+          </a:bodyPr>
+          <a:lstStyle/>
+          <a:p>
+            <a:pPr algn="l">
+              <a:lnSpc>
+                <a:spcPct val="110000"/>
+              </a:lnSpc>
+            </a:pPr>
+            <a:r>
+              <a:rPr sz="1500" b="1">
+                <a:solidFill>
+                  <a:srgbClr val="111111"/>
+                </a:solidFill>
+                <a:latin typeface="Poppins"/>
+              </a:rPr>
+              <a:t>20 publications par marque</a:t>
+            </a:r>
+          </a:p>
+        </p:txBody>
+      </p:sp>
+      <p:sp>
+        <p:nvSpPr>
+          <p:cNvPr id="18" name="TextBox 17"/>
+          <p:cNvSpPr txBox="1"/>
+          <p:nvPr/>
+        </p:nvSpPr>
+        <p:spPr>
+          <a:xfrm>
+            <a:off x="3635999" y="3635999"/>
+            <a:ext cx="2160000" cy="2160000"/>
           </a:xfrm>
           <a:prstGeom prst="rect">
             <a:avLst/>
@@ -16910,46 +21745,7 @@
               </a:lnSpc>
             </a:pPr>
             <a:r>
-              <a:rPr sz="1550" b="1">
-                <a:solidFill>
-                  <a:srgbClr val="111111"/>
-                </a:solidFill>
-                <a:latin typeface="Poppins"/>
-              </a:rPr>
-              <a:t>20 publications par marque</a:t>
-            </a:r>
-          </a:p>
-        </p:txBody>
-      </p:sp>
-      <p:sp>
-        <p:nvSpPr>
-          <p:cNvPr id="18" name="TextBox 17"/>
-          <p:cNvSpPr txBox="1"/>
-          <p:nvPr/>
-        </p:nvSpPr>
-        <p:spPr>
-          <a:xfrm>
-            <a:off x="3635999" y="3599999"/>
-            <a:ext cx="2160000" cy="2160000"/>
-          </a:xfrm>
-          <a:prstGeom prst="rect">
-            <a:avLst/>
-          </a:prstGeom>
-          <a:noFill/>
-        </p:spPr>
-        <p:txBody>
-          <a:bodyPr wrap="square" lIns="36000" rIns="36000" tIns="18000" bIns="18000" anchor="t">
-            <a:spAutoFit/>
-          </a:bodyPr>
-          <a:lstStyle/>
-          <a:p>
-            <a:pPr algn="l">
-              <a:lnSpc>
-                <a:spcPct val="110000"/>
-              </a:lnSpc>
-            </a:pPr>
-            <a:r>
-              <a:rPr sz="1250" b="0">
+              <a:rPr sz="1200" b="0">
                 <a:solidFill>
                   <a:srgbClr val="5A5A5A"/>
                 </a:solidFill>
@@ -17082,8 +21878,47 @@
         </p:nvSpPr>
         <p:spPr>
           <a:xfrm>
-            <a:off x="6443999" y="2879999"/>
-            <a:ext cx="2160000" cy="648000"/>
+            <a:off x="6443999" y="2843999"/>
+            <a:ext cx="2160000" cy="684000"/>
+          </a:xfrm>
+          <a:prstGeom prst="rect">
+            <a:avLst/>
+          </a:prstGeom>
+          <a:noFill/>
+        </p:spPr>
+        <p:txBody>
+          <a:bodyPr wrap="square" lIns="36000" rIns="36000" tIns="18000" bIns="18000" anchor="ctr">
+            <a:spAutoFit/>
+          </a:bodyPr>
+          <a:lstStyle/>
+          <a:p>
+            <a:pPr algn="l">
+              <a:lnSpc>
+                <a:spcPct val="110000"/>
+              </a:lnSpc>
+            </a:pPr>
+            <a:r>
+              <a:rPr sz="1500" b="1">
+                <a:solidFill>
+                  <a:srgbClr val="111111"/>
+                </a:solidFill>
+                <a:latin typeface="Poppins"/>
+              </a:rPr>
+              <a:t>Médianes</a:t>
+            </a:r>
+          </a:p>
+        </p:txBody>
+      </p:sp>
+      <p:sp>
+        <p:nvSpPr>
+          <p:cNvPr id="23" name="TextBox 22"/>
+          <p:cNvSpPr txBox="1"/>
+          <p:nvPr/>
+        </p:nvSpPr>
+        <p:spPr>
+          <a:xfrm>
+            <a:off x="6443999" y="3635999"/>
+            <a:ext cx="2160000" cy="2160000"/>
           </a:xfrm>
           <a:prstGeom prst="rect">
             <a:avLst/>
@@ -17102,46 +21937,7 @@
               </a:lnSpc>
             </a:pPr>
             <a:r>
-              <a:rPr sz="1550" b="1">
-                <a:solidFill>
-                  <a:srgbClr val="111111"/>
-                </a:solidFill>
-                <a:latin typeface="Poppins"/>
-              </a:rPr>
-              <a:t>Médianes</a:t>
-            </a:r>
-          </a:p>
-        </p:txBody>
-      </p:sp>
-      <p:sp>
-        <p:nvSpPr>
-          <p:cNvPr id="23" name="TextBox 22"/>
-          <p:cNvSpPr txBox="1"/>
-          <p:nvPr/>
-        </p:nvSpPr>
-        <p:spPr>
-          <a:xfrm>
-            <a:off x="6443999" y="3599999"/>
-            <a:ext cx="2160000" cy="2160000"/>
-          </a:xfrm>
-          <a:prstGeom prst="rect">
-            <a:avLst/>
-          </a:prstGeom>
-          <a:noFill/>
-        </p:spPr>
-        <p:txBody>
-          <a:bodyPr wrap="square" lIns="36000" rIns="36000" tIns="18000" bIns="18000" anchor="t">
-            <a:spAutoFit/>
-          </a:bodyPr>
-          <a:lstStyle/>
-          <a:p>
-            <a:pPr algn="l">
-              <a:lnSpc>
-                <a:spcPct val="110000"/>
-              </a:lnSpc>
-            </a:pPr>
-            <a:r>
-              <a:rPr sz="1250" b="0">
+              <a:rPr sz="1200" b="0">
                 <a:solidFill>
                   <a:srgbClr val="5A5A5A"/>
                 </a:solidFill>
@@ -17274,8 +22070,47 @@
         </p:nvSpPr>
         <p:spPr>
           <a:xfrm>
-            <a:off x="9251999" y="2879999"/>
-            <a:ext cx="2160000" cy="648000"/>
+            <a:off x="9251999" y="2843999"/>
+            <a:ext cx="2160000" cy="684000"/>
+          </a:xfrm>
+          <a:prstGeom prst="rect">
+            <a:avLst/>
+          </a:prstGeom>
+          <a:noFill/>
+        </p:spPr>
+        <p:txBody>
+          <a:bodyPr wrap="square" lIns="36000" rIns="36000" tIns="18000" bIns="18000" anchor="ctr">
+            <a:spAutoFit/>
+          </a:bodyPr>
+          <a:lstStyle/>
+          <a:p>
+            <a:pPr algn="l">
+              <a:lnSpc>
+                <a:spcPct val="110000"/>
+              </a:lnSpc>
+            </a:pPr>
+            <a:r>
+              <a:rPr sz="1500" b="1">
+                <a:solidFill>
+                  <a:srgbClr val="111111"/>
+                </a:solidFill>
+                <a:latin typeface="Poppins"/>
+              </a:rPr>
+              <a:t>Hors de vue</a:t>
+            </a:r>
+          </a:p>
+        </p:txBody>
+      </p:sp>
+      <p:sp>
+        <p:nvSpPr>
+          <p:cNvPr id="28" name="TextBox 27"/>
+          <p:cNvSpPr txBox="1"/>
+          <p:nvPr/>
+        </p:nvSpPr>
+        <p:spPr>
+          <a:xfrm>
+            <a:off x="9251999" y="3635999"/>
+            <a:ext cx="2160000" cy="2160000"/>
           </a:xfrm>
           <a:prstGeom prst="rect">
             <a:avLst/>
@@ -17294,46 +22129,7 @@
               </a:lnSpc>
             </a:pPr>
             <a:r>
-              <a:rPr sz="1550" b="1">
-                <a:solidFill>
-                  <a:srgbClr val="111111"/>
-                </a:solidFill>
-                <a:latin typeface="Poppins"/>
-              </a:rPr>
-              <a:t>Hors de vue</a:t>
-            </a:r>
-          </a:p>
-        </p:txBody>
-      </p:sp>
-      <p:sp>
-        <p:nvSpPr>
-          <p:cNvPr id="28" name="TextBox 27"/>
-          <p:cNvSpPr txBox="1"/>
-          <p:nvPr/>
-        </p:nvSpPr>
-        <p:spPr>
-          <a:xfrm>
-            <a:off x="9251999" y="3599999"/>
-            <a:ext cx="2160000" cy="2160000"/>
-          </a:xfrm>
-          <a:prstGeom prst="rect">
-            <a:avLst/>
-          </a:prstGeom>
-          <a:noFill/>
-        </p:spPr>
-        <p:txBody>
-          <a:bodyPr wrap="square" lIns="36000" rIns="36000" tIns="18000" bIns="18000" anchor="t">
-            <a:spAutoFit/>
-          </a:bodyPr>
-          <a:lstStyle/>
-          <a:p>
-            <a:pPr algn="l">
-              <a:lnSpc>
-                <a:spcPct val="110000"/>
-              </a:lnSpc>
-            </a:pPr>
-            <a:r>
-              <a:rPr sz="1250" b="0">
+              <a:rPr sz="1200" b="0">
                 <a:solidFill>
                   <a:srgbClr val="5A5A5A"/>
                 </a:solidFill>
@@ -19514,7 +24310,7 @@
         </p:nvSpPr>
         <p:spPr>
           <a:xfrm>
-            <a:off x="792000" y="3419999"/>
+            <a:off x="792000" y="3401998"/>
             <a:ext cx="3132000" cy="576000"/>
           </a:xfrm>
           <a:prstGeom prst="rect">
@@ -19534,7 +24330,7 @@
               </a:lnSpc>
             </a:pPr>
             <a:r>
-              <a:rPr sz="1050" b="0">
+              <a:rPr sz="1000" b="0">
                 <a:solidFill>
                   <a:srgbClr val="5A5A5A"/>
                 </a:solidFill>
@@ -19745,7 +24541,7 @@
         </p:nvSpPr>
         <p:spPr>
           <a:xfrm>
-            <a:off x="4536000" y="3419999"/>
+            <a:off x="4536000" y="3401998"/>
             <a:ext cx="3132000" cy="576000"/>
           </a:xfrm>
           <a:prstGeom prst="rect">
@@ -19765,7 +24561,7 @@
               </a:lnSpc>
             </a:pPr>
             <a:r>
-              <a:rPr sz="1050" b="0">
+              <a:rPr sz="1000" b="0">
                 <a:solidFill>
                   <a:srgbClr val="5A5A5A"/>
                 </a:solidFill>
@@ -19976,7 +24772,7 @@
         </p:nvSpPr>
         <p:spPr>
           <a:xfrm>
-            <a:off x="8279999" y="3419999"/>
+            <a:off x="8279999" y="3401998"/>
             <a:ext cx="3132000" cy="576000"/>
           </a:xfrm>
           <a:prstGeom prst="rect">
@@ -19996,7 +24792,7 @@
               </a:lnSpc>
             </a:pPr>
             <a:r>
-              <a:rPr sz="1050" b="0">
+              <a:rPr sz="1000" b="0">
                 <a:solidFill>
                   <a:srgbClr val="5A5A5A"/>
                 </a:solidFill>
@@ -20474,8 +25270,8 @@
           <p:nvPr/>
         </p:nvGraphicFramePr>
         <p:xfrm>
-          <a:off x="576000" y="1584000"/>
-          <a:ext cx="5256000" cy="4176000"/>
+          <a:off x="576000" y="1944000"/>
+          <a:ext cx="5256000" cy="3816000"/>
         </p:xfrm>
         <a:graphic>
           <a:graphicData uri="http://schemas.openxmlformats.org/drawingml/2006/chart">
@@ -20483,9 +25279,48 @@
           </a:graphicData>
         </a:graphic>
       </p:graphicFrame>
+      <p:sp>
+        <p:nvSpPr>
+          <p:cNvPr id="10" name="TextBox 9"/>
+          <p:cNvSpPr txBox="1"/>
+          <p:nvPr/>
+        </p:nvSpPr>
+        <p:spPr>
+          <a:xfrm>
+            <a:off x="576000" y="1548000"/>
+            <a:ext cx="5256000" cy="360000"/>
+          </a:xfrm>
+          <a:prstGeom prst="rect">
+            <a:avLst/>
+          </a:prstGeom>
+          <a:noFill/>
+        </p:spPr>
+        <p:txBody>
+          <a:bodyPr wrap="square" lIns="36000" rIns="36000" tIns="18000" bIns="18000" anchor="t">
+            <a:spAutoFit/>
+          </a:bodyPr>
+          <a:lstStyle/>
+          <a:p>
+            <a:pPr algn="l">
+              <a:lnSpc>
+                <a:spcPct val="110000"/>
+              </a:lnSpc>
+            </a:pPr>
+            <a:r>
+              <a:rPr sz="1250" b="1">
+                <a:solidFill>
+                  <a:srgbClr val="111111"/>
+                </a:solidFill>
+                <a:latin typeface="Poppins"/>
+              </a:rPr>
+              <a:t>Abonnés LinkedIn</a:t>
+            </a:r>
+          </a:p>
+        </p:txBody>
+      </p:sp>
       <p:graphicFrame>
         <p:nvGraphicFramePr>
-          <p:cNvPr id="10" name="Table 9"/>
+          <p:cNvPr id="11" name="Table 10"/>
           <p:cNvGraphicFramePr>
             <a:graphicFrameLocks noGrp="1"/>
           </p:cNvGraphicFramePr>
@@ -21263,7 +26098,7 @@
       </p:graphicFrame>
       <p:sp>
         <p:nvSpPr>
-          <p:cNvPr id="11" name="TextBox 10"/>
+          <p:cNvPr id="12" name="TextBox 11"/>
           <p:cNvSpPr txBox="1"/>
           <p:nvPr/>
         </p:nvSpPr>

--- a/tmp-tj/261028_cotiplast_audit-reseaux-sociaux_v1.pptx
+++ b/tmp-tj/261028_cotiplast_audit-reseaux-sociaux_v1.pptx
@@ -127,373 +127,6 @@
     </a:lvl9pPr>
   </p:defaultTextStyle>
 </p:presentation>
-</file>
-
-<file path=ppt/charts/chart1.xml><?xml version="1.0" encoding="utf-8"?>
-<c:chartSpace xmlns:c="http://schemas.openxmlformats.org/drawingml/2006/chart" xmlns:a="http://schemas.openxmlformats.org/drawingml/2006/main" xmlns:r="http://schemas.openxmlformats.org/officeDocument/2006/relationships">
-  <c:date1904 val="0"/>
-  <c:chart>
-    <c:autoTitleDeleted val="1"/>
-    <c:plotArea>
-      <c:barChart>
-        <c:barDir val="bar"/>
-        <c:grouping val="clustered"/>
-        <c:ser>
-          <c:idx val="0"/>
-          <c:order val="0"/>
-          <c:tx>
-            <c:strRef>
-              <c:f>Sheet1!$B$1</c:f>
-              <c:strCache>
-                <c:ptCount val="1"/>
-                <c:pt idx="0">
-                  <c:v>Abonnés LinkedIn</c:v>
-                </c:pt>
-              </c:strCache>
-            </c:strRef>
-          </c:tx>
-          <c:dPt>
-            <c:idx val="0"/>
-            <c:spPr>
-              <a:solidFill>
-                <a:srgbClr val="B9B9B9"/>
-              </a:solidFill>
-            </c:spPr>
-          </c:dPt>
-          <c:dPt>
-            <c:idx val="1"/>
-            <c:spPr>
-              <a:solidFill>
-                <a:srgbClr val="B9B9B9"/>
-              </a:solidFill>
-            </c:spPr>
-          </c:dPt>
-          <c:dPt>
-            <c:idx val="2"/>
-            <c:spPr>
-              <a:solidFill>
-                <a:srgbClr val="FD8103"/>
-              </a:solidFill>
-            </c:spPr>
-          </c:dPt>
-          <c:cat>
-            <c:strRef>
-              <c:f>Sheet1!$A$2:$A$4</c:f>
-              <c:strCache>
-                <c:ptCount val="3"/>
-                <c:pt idx="0">
-                  <c:v>SOFEM-CI</c:v>
-                </c:pt>
-                <c:pt idx="1">
-                  <c:v>FLEPACI</c:v>
-                </c:pt>
-                <c:pt idx="2">
-                  <c:v>COTIPLAST</c:v>
-                </c:pt>
-              </c:strCache>
-            </c:strRef>
-          </c:cat>
-          <c:val>
-            <c:numRef>
-              <c:f>Sheet1!$B$2:$B$4</c:f>
-              <c:numCache>
-                <c:formatCode>General</c:formatCode>
-                <c:ptCount val="3"/>
-                <c:pt idx="0">
-                  <c:v>138</c:v>
-                </c:pt>
-                <c:pt idx="1">
-                  <c:v>576</c:v>
-                </c:pt>
-                <c:pt idx="2">
-                  <c:v>5446</c:v>
-                </c:pt>
-              </c:numCache>
-            </c:numRef>
-          </c:val>
-        </c:ser>
-        <c:dLbls>
-          <c:numFmt formatCode="# ##0" sourceLinked="0"/>
-          <c:txPr>
-            <a:bodyPr/>
-            <a:lstStyle/>
-            <a:p>
-              <a:pPr>
-                <a:defRPr sz="1300" b="1"/>
-              </a:pPr>
-            </a:p>
-          </c:txPr>
-          <c:dLblPos val="outEnd"/>
-          <c:showLegendKey val="0"/>
-          <c:showVal val="1"/>
-          <c:showCatName val="0"/>
-          <c:showSerName val="0"/>
-          <c:showPercent val="0"/>
-          <c:showBubbleSize val="0"/>
-          <c:showLeaderLines val="1"/>
-        </c:dLbls>
-        <c:gapWidth val="55"/>
-        <c:axId val="-2068027336"/>
-        <c:axId val="-2113994440"/>
-      </c:barChart>
-      <c:catAx>
-        <c:axId val="-2068027336"/>
-        <c:scaling>
-          <c:orientation val="minMax"/>
-        </c:scaling>
-        <c:delete val="0"/>
-        <c:axPos val="l"/>
-        <c:majorTickMark val="out"/>
-        <c:minorTickMark val="none"/>
-        <c:tickLblPos val="nextTo"/>
-        <c:spPr>
-          <a:ln>
-            <a:noFill/>
-          </a:ln>
-        </c:spPr>
-        <c:txPr>
-          <a:bodyPr/>
-          <a:lstStyle/>
-          <a:p>
-            <a:pPr>
-              <a:defRPr sz="1200">
-                <a:latin typeface="Poppins"/>
-              </a:defRPr>
-            </a:pPr>
-          </a:p>
-        </c:txPr>
-        <c:crossAx val="-2113994440"/>
-        <c:crosses val="autoZero"/>
-        <c:auto val="1"/>
-        <c:lblAlgn val="ctr"/>
-        <c:lblOffset val="100"/>
-        <c:noMultiLvlLbl val="0"/>
-      </c:catAx>
-      <c:valAx>
-        <c:axId val="-2113994440"/>
-        <c:scaling>
-          <c:min val="0.0"/>
-        </c:scaling>
-        <c:delete/>
-        <c:axPos val="b"/>
-        <c:majorTickMark val="none"/>
-        <c:minorTickMark val="none"/>
-        <c:tickLblPos val="none"/>
-        <c:spPr>
-          <a:ln>
-            <a:noFill/>
-          </a:ln>
-        </c:spPr>
-        <c:crossAx val="-2068027336"/>
-        <c:crosses val="autoZero"/>
-      </c:valAx>
-    </c:plotArea>
-    <c:dispBlanksAs val="gap"/>
-  </c:chart>
-  <c:txPr>
-    <a:bodyPr/>
-    <a:lstStyle/>
-    <a:p>
-      <a:pPr>
-        <a:defRPr sz="1800"/>
-      </a:pPr>
-      <a:endParaRPr lang="en-US"/>
-    </a:p>
-  </c:txPr>
-  <c:externalData r:id="rId1">
-    <c:autoUpdate val="0"/>
-  </c:externalData>
-</c:chartSpace>
-</file>
-
-<file path=ppt/charts/chart2.xml><?xml version="1.0" encoding="utf-8"?>
-<c:chartSpace xmlns:c="http://schemas.openxmlformats.org/drawingml/2006/chart" xmlns:a="http://schemas.openxmlformats.org/drawingml/2006/main" xmlns:r="http://schemas.openxmlformats.org/officeDocument/2006/relationships">
-  <c:date1904 val="0"/>
-  <c:chart>
-    <c:autoTitleDeleted val="1"/>
-    <c:plotArea>
-      <c:barChart>
-        <c:barDir val="bar"/>
-        <c:grouping val="clustered"/>
-        <c:ser>
-          <c:idx val="0"/>
-          <c:order val="0"/>
-          <c:tx>
-            <c:strRef>
-              <c:f>Sheet1!$B$1</c:f>
-              <c:strCache>
-                <c:ptCount val="1"/>
-                <c:pt idx="0">
-                  <c:v>J’aime médians par type (nombre de publications)</c:v>
-                </c:pt>
-              </c:strCache>
-            </c:strRef>
-          </c:tx>
-          <c:dPt>
-            <c:idx val="0"/>
-            <c:spPr>
-              <a:solidFill>
-                <a:srgbClr val="B9B9B9"/>
-              </a:solidFill>
-            </c:spPr>
-          </c:dPt>
-          <c:dPt>
-            <c:idx val="1"/>
-            <c:spPr>
-              <a:solidFill>
-                <a:srgbClr val="B9B9B9"/>
-              </a:solidFill>
-            </c:spPr>
-          </c:dPt>
-          <c:dPt>
-            <c:idx val="2"/>
-            <c:spPr>
-              <a:solidFill>
-                <a:srgbClr val="B9B9B9"/>
-              </a:solidFill>
-            </c:spPr>
-          </c:dPt>
-          <c:dPt>
-            <c:idx val="3"/>
-            <c:spPr>
-              <a:solidFill>
-                <a:srgbClr val="FD8103"/>
-              </a:solidFill>
-            </c:spPr>
-          </c:dPt>
-          <c:cat>
-            <c:strRef>
-              <c:f>Sheet1!$A$2:$A$5</c:f>
-              <c:strCache>
-                <c:ptCount val="4"/>
-                <c:pt idx="0">
-                  <c:v>Produits et services (12)</c:v>
-                </c:pt>
-                <c:pt idx="1">
-                  <c:v>Fêtes et causes (4)</c:v>
-                </c:pt>
-                <c:pt idx="2">
-                  <c:v>Sondages (2)</c:v>
-                </c:pt>
-                <c:pt idx="3">
-                  <c:v>Vidéos des équipes (2)</c:v>
-                </c:pt>
-              </c:strCache>
-            </c:strRef>
-          </c:cat>
-          <c:val>
-            <c:numRef>
-              <c:f>Sheet1!$B$2:$B$5</c:f>
-              <c:numCache>
-                <c:formatCode>General</c:formatCode>
-                <c:ptCount val="4"/>
-                <c:pt idx="0">
-                  <c:v>6</c:v>
-                </c:pt>
-                <c:pt idx="1">
-                  <c:v>17</c:v>
-                </c:pt>
-                <c:pt idx="2">
-                  <c:v>24.5</c:v>
-                </c:pt>
-                <c:pt idx="3">
-                  <c:v>65</c:v>
-                </c:pt>
-              </c:numCache>
-            </c:numRef>
-          </c:val>
-        </c:ser>
-        <c:dLbls>
-          <c:txPr>
-            <a:bodyPr/>
-            <a:lstStyle/>
-            <a:p>
-              <a:pPr>
-                <a:defRPr sz="1300" b="1"/>
-              </a:pPr>
-            </a:p>
-          </c:txPr>
-          <c:dLblPos val="outEnd"/>
-          <c:showLegendKey val="0"/>
-          <c:showVal val="1"/>
-          <c:showCatName val="0"/>
-          <c:showSerName val="0"/>
-          <c:showPercent val="0"/>
-          <c:showBubbleSize val="0"/>
-          <c:showLeaderLines val="1"/>
-        </c:dLbls>
-        <c:gapWidth val="55"/>
-        <c:axId val="-2068027336"/>
-        <c:axId val="-2113994440"/>
-      </c:barChart>
-      <c:catAx>
-        <c:axId val="-2068027336"/>
-        <c:scaling>
-          <c:orientation val="minMax"/>
-        </c:scaling>
-        <c:delete val="0"/>
-        <c:axPos val="l"/>
-        <c:majorTickMark val="out"/>
-        <c:minorTickMark val="none"/>
-        <c:tickLblPos val="nextTo"/>
-        <c:spPr>
-          <a:ln>
-            <a:noFill/>
-          </a:ln>
-        </c:spPr>
-        <c:txPr>
-          <a:bodyPr/>
-          <a:lstStyle/>
-          <a:p>
-            <a:pPr>
-              <a:defRPr sz="1200">
-                <a:latin typeface="Poppins"/>
-              </a:defRPr>
-            </a:pPr>
-          </a:p>
-        </c:txPr>
-        <c:crossAx val="-2113994440"/>
-        <c:crosses val="autoZero"/>
-        <c:auto val="1"/>
-        <c:lblAlgn val="ctr"/>
-        <c:lblOffset val="100"/>
-        <c:noMultiLvlLbl val="0"/>
-      </c:catAx>
-      <c:valAx>
-        <c:axId val="-2113994440"/>
-        <c:scaling>
-          <c:min val="0.0"/>
-        </c:scaling>
-        <c:delete/>
-        <c:axPos val="b"/>
-        <c:majorTickMark val="none"/>
-        <c:minorTickMark val="none"/>
-        <c:tickLblPos val="none"/>
-        <c:spPr>
-          <a:ln>
-            <a:noFill/>
-          </a:ln>
-        </c:spPr>
-        <c:crossAx val="-2068027336"/>
-        <c:crosses val="autoZero"/>
-      </c:valAx>
-    </c:plotArea>
-    <c:dispBlanksAs val="gap"/>
-  </c:chart>
-  <c:txPr>
-    <a:bodyPr/>
-    <a:lstStyle/>
-    <a:p>
-      <a:pPr>
-        <a:defRPr sz="1800"/>
-      </a:pPr>
-      <a:endParaRPr lang="en-US"/>
-    </a:p>
-  </c:txPr>
-  <c:externalData r:id="rId1">
-    <c:autoUpdate val="0"/>
-  </c:externalData>
-</c:chartSpace>
 </file>
 
 <file path=ppt/slideLayouts/slideLayout1.xml><?xml version="1.0" encoding="utf-8"?>
@@ -6354,24 +5987,45 @@
           </a:p>
         </p:txBody>
       </p:sp>
-      <p:graphicFrame>
-        <p:nvGraphicFramePr>
-          <p:cNvPr id="9" name="Chart 8"/>
-          <p:cNvGraphicFramePr>
-            <a:graphicFrameLocks noGrp="1"/>
-          </p:cNvGraphicFramePr>
-          <p:nvPr/>
-        </p:nvGraphicFramePr>
-        <p:xfrm>
-          <a:off x="576000" y="1944000"/>
-          <a:ext cx="5760000" cy="4104000"/>
-        </p:xfrm>
-        <a:graphic>
-          <a:graphicData uri="http://schemas.openxmlformats.org/drawingml/2006/chart">
-            <c:chart xmlns:c="http://schemas.openxmlformats.org/drawingml/2006/chart" r:id="rId3"/>
-          </a:graphicData>
-        </a:graphic>
-      </p:graphicFrame>
+      <p:sp>
+        <p:nvSpPr>
+          <p:cNvPr id="9" name="TextBox 8"/>
+          <p:cNvSpPr txBox="1"/>
+          <p:nvPr/>
+        </p:nvSpPr>
+        <p:spPr>
+          <a:xfrm>
+            <a:off x="576000" y="1548000"/>
+            <a:ext cx="5760000" cy="360000"/>
+          </a:xfrm>
+          <a:prstGeom prst="rect">
+            <a:avLst/>
+          </a:prstGeom>
+          <a:noFill/>
+        </p:spPr>
+        <p:txBody>
+          <a:bodyPr wrap="square" lIns="36000" rIns="36000" tIns="18000" bIns="18000" anchor="t">
+            <a:spAutoFit/>
+          </a:bodyPr>
+          <a:lstStyle/>
+          <a:p>
+            <a:pPr algn="l">
+              <a:lnSpc>
+                <a:spcPct val="110000"/>
+              </a:lnSpc>
+            </a:pPr>
+            <a:r>
+              <a:rPr sz="1250" b="1">
+                <a:solidFill>
+                  <a:srgbClr val="111111"/>
+                </a:solidFill>
+                <a:latin typeface="Poppins"/>
+              </a:rPr>
+              <a:t>J’aime médians par type (nombre de publications)</a:t>
+            </a:r>
+          </a:p>
+        </p:txBody>
+      </p:sp>
       <p:sp>
         <p:nvSpPr>
           <p:cNvPr id="10" name="TextBox 9"/>
@@ -6380,8 +6034,8 @@
         </p:nvSpPr>
         <p:spPr>
           <a:xfrm>
-            <a:off x="576000" y="1548000"/>
-            <a:ext cx="5760000" cy="360000"/>
+            <a:off x="576000" y="2016000"/>
+            <a:ext cx="1583999" cy="1008000"/>
           </a:xfrm>
           <a:prstGeom prst="rect">
             <a:avLst/>
@@ -6389,7 +6043,7 @@
           <a:noFill/>
         </p:spPr>
         <p:txBody>
-          <a:bodyPr wrap="square" lIns="36000" rIns="36000" tIns="18000" bIns="18000" anchor="t">
+          <a:bodyPr wrap="square" lIns="36000" rIns="36000" tIns="18000" bIns="18000" anchor="ctr">
             <a:spAutoFit/>
           </a:bodyPr>
           <a:lstStyle/>
@@ -6400,20 +6054,645 @@
               </a:lnSpc>
             </a:pPr>
             <a:r>
+              <a:rPr sz="1150" b="1">
+                <a:solidFill>
+                  <a:srgbClr val="111111"/>
+                </a:solidFill>
+                <a:latin typeface="Poppins"/>
+              </a:rPr>
+              <a:t>Vidéos des équipes (2)</a:t>
+            </a:r>
+          </a:p>
+        </p:txBody>
+      </p:sp>
+      <p:sp>
+        <p:nvSpPr>
+          <p:cNvPr id="11" name="Rounded Rectangle 10"/>
+          <p:cNvSpPr/>
+          <p:nvPr/>
+        </p:nvSpPr>
+        <p:spPr>
+          <a:xfrm>
+            <a:off x="2231999" y="2286000"/>
+            <a:ext cx="3204001" cy="468000"/>
+          </a:xfrm>
+          <a:prstGeom prst="roundRect">
+            <a:avLst/>
+          </a:prstGeom>
+          <a:solidFill>
+            <a:srgbClr val="F0F0F0"/>
+          </a:solidFill>
+          <a:ln>
+            <a:noFill/>
+          </a:ln>
+          <a:effectLst/>
+        </p:spPr>
+        <p:style>
+          <a:lnRef idx="1">
+            <a:schemeClr val="accent1"/>
+          </a:lnRef>
+          <a:fillRef idx="3">
+            <a:schemeClr val="accent1"/>
+          </a:fillRef>
+          <a:effectRef idx="2">
+            <a:schemeClr val="accent1"/>
+          </a:effectRef>
+          <a:fontRef idx="minor">
+            <a:schemeClr val="lt1"/>
+          </a:fontRef>
+        </p:style>
+        <p:txBody>
+          <a:bodyPr rtlCol="0" anchor="ctr"/>
+          <a:lstStyle/>
+          <a:p>
+            <a:pPr algn="ctr"/>
+          </a:p>
+        </p:txBody>
+      </p:sp>
+      <p:sp>
+        <p:nvSpPr>
+          <p:cNvPr id="12" name="Rounded Rectangle 11"/>
+          <p:cNvSpPr/>
+          <p:nvPr/>
+        </p:nvSpPr>
+        <p:spPr>
+          <a:xfrm>
+            <a:off x="2231999" y="2286000"/>
+            <a:ext cx="3204001" cy="468000"/>
+          </a:xfrm>
+          <a:prstGeom prst="roundRect">
+            <a:avLst/>
+          </a:prstGeom>
+          <a:solidFill>
+            <a:srgbClr val="FD8103"/>
+          </a:solidFill>
+          <a:ln>
+            <a:noFill/>
+          </a:ln>
+          <a:effectLst/>
+        </p:spPr>
+        <p:style>
+          <a:lnRef idx="1">
+            <a:schemeClr val="accent1"/>
+          </a:lnRef>
+          <a:fillRef idx="3">
+            <a:schemeClr val="accent1"/>
+          </a:fillRef>
+          <a:effectRef idx="2">
+            <a:schemeClr val="accent1"/>
+          </a:effectRef>
+          <a:fontRef idx="minor">
+            <a:schemeClr val="lt1"/>
+          </a:fontRef>
+        </p:style>
+        <p:txBody>
+          <a:bodyPr rtlCol="0" anchor="ctr"/>
+          <a:lstStyle/>
+          <a:p>
+            <a:pPr algn="ctr"/>
+          </a:p>
+        </p:txBody>
+      </p:sp>
+      <p:sp>
+        <p:nvSpPr>
+          <p:cNvPr id="13" name="TextBox 12"/>
+          <p:cNvSpPr txBox="1"/>
+          <p:nvPr/>
+        </p:nvSpPr>
+        <p:spPr>
+          <a:xfrm>
+            <a:off x="5508000" y="2016000"/>
+            <a:ext cx="792000" cy="1008000"/>
+          </a:xfrm>
+          <a:prstGeom prst="rect">
+            <a:avLst/>
+          </a:prstGeom>
+          <a:noFill/>
+        </p:spPr>
+        <p:txBody>
+          <a:bodyPr wrap="square" lIns="36000" rIns="36000" tIns="18000" bIns="18000" anchor="ctr">
+            <a:spAutoFit/>
+          </a:bodyPr>
+          <a:lstStyle/>
+          <a:p>
+            <a:pPr algn="l">
+              <a:lnSpc>
+                <a:spcPct val="110000"/>
+              </a:lnSpc>
+            </a:pPr>
+            <a:r>
               <a:rPr sz="1250" b="1">
                 <a:solidFill>
+                  <a:srgbClr val="FD8103"/>
+                </a:solidFill>
+                <a:latin typeface="Poppins"/>
+              </a:rPr>
+              <a:t>65</a:t>
+            </a:r>
+          </a:p>
+        </p:txBody>
+      </p:sp>
+      <p:sp>
+        <p:nvSpPr>
+          <p:cNvPr id="14" name="TextBox 13"/>
+          <p:cNvSpPr txBox="1"/>
+          <p:nvPr/>
+        </p:nvSpPr>
+        <p:spPr>
+          <a:xfrm>
+            <a:off x="576000" y="3024000"/>
+            <a:ext cx="1583999" cy="1008000"/>
+          </a:xfrm>
+          <a:prstGeom prst="rect">
+            <a:avLst/>
+          </a:prstGeom>
+          <a:noFill/>
+        </p:spPr>
+        <p:txBody>
+          <a:bodyPr wrap="square" lIns="36000" rIns="36000" tIns="18000" bIns="18000" anchor="ctr">
+            <a:spAutoFit/>
+          </a:bodyPr>
+          <a:lstStyle/>
+          <a:p>
+            <a:pPr algn="l">
+              <a:lnSpc>
+                <a:spcPct val="110000"/>
+              </a:lnSpc>
+            </a:pPr>
+            <a:r>
+              <a:rPr sz="1150" b="0">
+                <a:solidFill>
                   <a:srgbClr val="111111"/>
                 </a:solidFill>
                 <a:latin typeface="Poppins"/>
               </a:rPr>
-              <a:t>J’aime médians par type (nombre de publications)</a:t>
-            </a:r>
-          </a:p>
-        </p:txBody>
-      </p:sp>
-      <p:sp>
-        <p:nvSpPr>
-          <p:cNvPr id="11" name="TextBox 10"/>
+              <a:t>Sondages (2)</a:t>
+            </a:r>
+          </a:p>
+        </p:txBody>
+      </p:sp>
+      <p:sp>
+        <p:nvSpPr>
+          <p:cNvPr id="15" name="Rounded Rectangle 14"/>
+          <p:cNvSpPr/>
+          <p:nvPr/>
+        </p:nvSpPr>
+        <p:spPr>
+          <a:xfrm>
+            <a:off x="2231999" y="3294000"/>
+            <a:ext cx="3204001" cy="468000"/>
+          </a:xfrm>
+          <a:prstGeom prst="roundRect">
+            <a:avLst/>
+          </a:prstGeom>
+          <a:solidFill>
+            <a:srgbClr val="F0F0F0"/>
+          </a:solidFill>
+          <a:ln>
+            <a:noFill/>
+          </a:ln>
+          <a:effectLst/>
+        </p:spPr>
+        <p:style>
+          <a:lnRef idx="1">
+            <a:schemeClr val="accent1"/>
+          </a:lnRef>
+          <a:fillRef idx="3">
+            <a:schemeClr val="accent1"/>
+          </a:fillRef>
+          <a:effectRef idx="2">
+            <a:schemeClr val="accent1"/>
+          </a:effectRef>
+          <a:fontRef idx="minor">
+            <a:schemeClr val="lt1"/>
+          </a:fontRef>
+        </p:style>
+        <p:txBody>
+          <a:bodyPr rtlCol="0" anchor="ctr"/>
+          <a:lstStyle/>
+          <a:p>
+            <a:pPr algn="ctr"/>
+          </a:p>
+        </p:txBody>
+      </p:sp>
+      <p:sp>
+        <p:nvSpPr>
+          <p:cNvPr id="16" name="Rounded Rectangle 15"/>
+          <p:cNvSpPr/>
+          <p:nvPr/>
+        </p:nvSpPr>
+        <p:spPr>
+          <a:xfrm>
+            <a:off x="2231999" y="3294000"/>
+            <a:ext cx="1207661" cy="468000"/>
+          </a:xfrm>
+          <a:prstGeom prst="roundRect">
+            <a:avLst/>
+          </a:prstGeom>
+          <a:solidFill>
+            <a:srgbClr val="B9B9B9"/>
+          </a:solidFill>
+          <a:ln>
+            <a:noFill/>
+          </a:ln>
+          <a:effectLst/>
+        </p:spPr>
+        <p:style>
+          <a:lnRef idx="1">
+            <a:schemeClr val="accent1"/>
+          </a:lnRef>
+          <a:fillRef idx="3">
+            <a:schemeClr val="accent1"/>
+          </a:fillRef>
+          <a:effectRef idx="2">
+            <a:schemeClr val="accent1"/>
+          </a:effectRef>
+          <a:fontRef idx="minor">
+            <a:schemeClr val="lt1"/>
+          </a:fontRef>
+        </p:style>
+        <p:txBody>
+          <a:bodyPr rtlCol="0" anchor="ctr"/>
+          <a:lstStyle/>
+          <a:p>
+            <a:pPr algn="ctr"/>
+          </a:p>
+        </p:txBody>
+      </p:sp>
+      <p:sp>
+        <p:nvSpPr>
+          <p:cNvPr id="17" name="TextBox 16"/>
+          <p:cNvSpPr txBox="1"/>
+          <p:nvPr/>
+        </p:nvSpPr>
+        <p:spPr>
+          <a:xfrm>
+            <a:off x="5508000" y="3024000"/>
+            <a:ext cx="792000" cy="1008000"/>
+          </a:xfrm>
+          <a:prstGeom prst="rect">
+            <a:avLst/>
+          </a:prstGeom>
+          <a:noFill/>
+        </p:spPr>
+        <p:txBody>
+          <a:bodyPr wrap="square" lIns="36000" rIns="36000" tIns="18000" bIns="18000" anchor="ctr">
+            <a:spAutoFit/>
+          </a:bodyPr>
+          <a:lstStyle/>
+          <a:p>
+            <a:pPr algn="l">
+              <a:lnSpc>
+                <a:spcPct val="110000"/>
+              </a:lnSpc>
+            </a:pPr>
+            <a:r>
+              <a:rPr sz="1250" b="1">
+                <a:solidFill>
+                  <a:srgbClr val="111111"/>
+                </a:solidFill>
+                <a:latin typeface="Poppins"/>
+              </a:rPr>
+              <a:t>24,5</a:t>
+            </a:r>
+          </a:p>
+        </p:txBody>
+      </p:sp>
+      <p:sp>
+        <p:nvSpPr>
+          <p:cNvPr id="18" name="TextBox 17"/>
+          <p:cNvSpPr txBox="1"/>
+          <p:nvPr/>
+        </p:nvSpPr>
+        <p:spPr>
+          <a:xfrm>
+            <a:off x="576000" y="4032000"/>
+            <a:ext cx="1583999" cy="1008000"/>
+          </a:xfrm>
+          <a:prstGeom prst="rect">
+            <a:avLst/>
+          </a:prstGeom>
+          <a:noFill/>
+        </p:spPr>
+        <p:txBody>
+          <a:bodyPr wrap="square" lIns="36000" rIns="36000" tIns="18000" bIns="18000" anchor="ctr">
+            <a:spAutoFit/>
+          </a:bodyPr>
+          <a:lstStyle/>
+          <a:p>
+            <a:pPr algn="l">
+              <a:lnSpc>
+                <a:spcPct val="110000"/>
+              </a:lnSpc>
+            </a:pPr>
+            <a:r>
+              <a:rPr sz="1150" b="0">
+                <a:solidFill>
+                  <a:srgbClr val="111111"/>
+                </a:solidFill>
+                <a:latin typeface="Poppins"/>
+              </a:rPr>
+              <a:t>Fêtes et causes (4)</a:t>
+            </a:r>
+          </a:p>
+        </p:txBody>
+      </p:sp>
+      <p:sp>
+        <p:nvSpPr>
+          <p:cNvPr id="19" name="Rounded Rectangle 18"/>
+          <p:cNvSpPr/>
+          <p:nvPr/>
+        </p:nvSpPr>
+        <p:spPr>
+          <a:xfrm>
+            <a:off x="2231999" y="4302000"/>
+            <a:ext cx="3204001" cy="468000"/>
+          </a:xfrm>
+          <a:prstGeom prst="roundRect">
+            <a:avLst/>
+          </a:prstGeom>
+          <a:solidFill>
+            <a:srgbClr val="F0F0F0"/>
+          </a:solidFill>
+          <a:ln>
+            <a:noFill/>
+          </a:ln>
+          <a:effectLst/>
+        </p:spPr>
+        <p:style>
+          <a:lnRef idx="1">
+            <a:schemeClr val="accent1"/>
+          </a:lnRef>
+          <a:fillRef idx="3">
+            <a:schemeClr val="accent1"/>
+          </a:fillRef>
+          <a:effectRef idx="2">
+            <a:schemeClr val="accent1"/>
+          </a:effectRef>
+          <a:fontRef idx="minor">
+            <a:schemeClr val="lt1"/>
+          </a:fontRef>
+        </p:style>
+        <p:txBody>
+          <a:bodyPr rtlCol="0" anchor="ctr"/>
+          <a:lstStyle/>
+          <a:p>
+            <a:pPr algn="ctr"/>
+          </a:p>
+        </p:txBody>
+      </p:sp>
+      <p:sp>
+        <p:nvSpPr>
+          <p:cNvPr id="20" name="Rounded Rectangle 19"/>
+          <p:cNvSpPr/>
+          <p:nvPr/>
+        </p:nvSpPr>
+        <p:spPr>
+          <a:xfrm>
+            <a:off x="2231999" y="4302000"/>
+            <a:ext cx="837969" cy="468000"/>
+          </a:xfrm>
+          <a:prstGeom prst="roundRect">
+            <a:avLst/>
+          </a:prstGeom>
+          <a:solidFill>
+            <a:srgbClr val="B9B9B9"/>
+          </a:solidFill>
+          <a:ln>
+            <a:noFill/>
+          </a:ln>
+          <a:effectLst/>
+        </p:spPr>
+        <p:style>
+          <a:lnRef idx="1">
+            <a:schemeClr val="accent1"/>
+          </a:lnRef>
+          <a:fillRef idx="3">
+            <a:schemeClr val="accent1"/>
+          </a:fillRef>
+          <a:effectRef idx="2">
+            <a:schemeClr val="accent1"/>
+          </a:effectRef>
+          <a:fontRef idx="minor">
+            <a:schemeClr val="lt1"/>
+          </a:fontRef>
+        </p:style>
+        <p:txBody>
+          <a:bodyPr rtlCol="0" anchor="ctr"/>
+          <a:lstStyle/>
+          <a:p>
+            <a:pPr algn="ctr"/>
+          </a:p>
+        </p:txBody>
+      </p:sp>
+      <p:sp>
+        <p:nvSpPr>
+          <p:cNvPr id="21" name="TextBox 20"/>
+          <p:cNvSpPr txBox="1"/>
+          <p:nvPr/>
+        </p:nvSpPr>
+        <p:spPr>
+          <a:xfrm>
+            <a:off x="5508000" y="4032000"/>
+            <a:ext cx="792000" cy="1008000"/>
+          </a:xfrm>
+          <a:prstGeom prst="rect">
+            <a:avLst/>
+          </a:prstGeom>
+          <a:noFill/>
+        </p:spPr>
+        <p:txBody>
+          <a:bodyPr wrap="square" lIns="36000" rIns="36000" tIns="18000" bIns="18000" anchor="ctr">
+            <a:spAutoFit/>
+          </a:bodyPr>
+          <a:lstStyle/>
+          <a:p>
+            <a:pPr algn="l">
+              <a:lnSpc>
+                <a:spcPct val="110000"/>
+              </a:lnSpc>
+            </a:pPr>
+            <a:r>
+              <a:rPr sz="1250" b="1">
+                <a:solidFill>
+                  <a:srgbClr val="111111"/>
+                </a:solidFill>
+                <a:latin typeface="Poppins"/>
+              </a:rPr>
+              <a:t>17</a:t>
+            </a:r>
+          </a:p>
+        </p:txBody>
+      </p:sp>
+      <p:sp>
+        <p:nvSpPr>
+          <p:cNvPr id="22" name="TextBox 21"/>
+          <p:cNvSpPr txBox="1"/>
+          <p:nvPr/>
+        </p:nvSpPr>
+        <p:spPr>
+          <a:xfrm>
+            <a:off x="576000" y="5040000"/>
+            <a:ext cx="1583999" cy="1008000"/>
+          </a:xfrm>
+          <a:prstGeom prst="rect">
+            <a:avLst/>
+          </a:prstGeom>
+          <a:noFill/>
+        </p:spPr>
+        <p:txBody>
+          <a:bodyPr wrap="square" lIns="36000" rIns="36000" tIns="18000" bIns="18000" anchor="ctr">
+            <a:spAutoFit/>
+          </a:bodyPr>
+          <a:lstStyle/>
+          <a:p>
+            <a:pPr algn="l">
+              <a:lnSpc>
+                <a:spcPct val="110000"/>
+              </a:lnSpc>
+            </a:pPr>
+            <a:r>
+              <a:rPr sz="1150" b="0">
+                <a:solidFill>
+                  <a:srgbClr val="111111"/>
+                </a:solidFill>
+                <a:latin typeface="Poppins"/>
+              </a:rPr>
+              <a:t>Produits et services (12)</a:t>
+            </a:r>
+          </a:p>
+        </p:txBody>
+      </p:sp>
+      <p:sp>
+        <p:nvSpPr>
+          <p:cNvPr id="23" name="Rounded Rectangle 22"/>
+          <p:cNvSpPr/>
+          <p:nvPr/>
+        </p:nvSpPr>
+        <p:spPr>
+          <a:xfrm>
+            <a:off x="2231999" y="5310000"/>
+            <a:ext cx="3204001" cy="468000"/>
+          </a:xfrm>
+          <a:prstGeom prst="roundRect">
+            <a:avLst/>
+          </a:prstGeom>
+          <a:solidFill>
+            <a:srgbClr val="F0F0F0"/>
+          </a:solidFill>
+          <a:ln>
+            <a:noFill/>
+          </a:ln>
+          <a:effectLst/>
+        </p:spPr>
+        <p:style>
+          <a:lnRef idx="1">
+            <a:schemeClr val="accent1"/>
+          </a:lnRef>
+          <a:fillRef idx="3">
+            <a:schemeClr val="accent1"/>
+          </a:fillRef>
+          <a:effectRef idx="2">
+            <a:schemeClr val="accent1"/>
+          </a:effectRef>
+          <a:fontRef idx="minor">
+            <a:schemeClr val="lt1"/>
+          </a:fontRef>
+        </p:style>
+        <p:txBody>
+          <a:bodyPr rtlCol="0" anchor="ctr"/>
+          <a:lstStyle/>
+          <a:p>
+            <a:pPr algn="ctr"/>
+          </a:p>
+        </p:txBody>
+      </p:sp>
+      <p:sp>
+        <p:nvSpPr>
+          <p:cNvPr id="24" name="Rounded Rectangle 23"/>
+          <p:cNvSpPr/>
+          <p:nvPr/>
+        </p:nvSpPr>
+        <p:spPr>
+          <a:xfrm>
+            <a:off x="2231999" y="5310000"/>
+            <a:ext cx="295753" cy="468000"/>
+          </a:xfrm>
+          <a:prstGeom prst="roundRect">
+            <a:avLst/>
+          </a:prstGeom>
+          <a:solidFill>
+            <a:srgbClr val="B9B9B9"/>
+          </a:solidFill>
+          <a:ln>
+            <a:noFill/>
+          </a:ln>
+          <a:effectLst/>
+        </p:spPr>
+        <p:style>
+          <a:lnRef idx="1">
+            <a:schemeClr val="accent1"/>
+          </a:lnRef>
+          <a:fillRef idx="3">
+            <a:schemeClr val="accent1"/>
+          </a:fillRef>
+          <a:effectRef idx="2">
+            <a:schemeClr val="accent1"/>
+          </a:effectRef>
+          <a:fontRef idx="minor">
+            <a:schemeClr val="lt1"/>
+          </a:fontRef>
+        </p:style>
+        <p:txBody>
+          <a:bodyPr rtlCol="0" anchor="ctr"/>
+          <a:lstStyle/>
+          <a:p>
+            <a:pPr algn="ctr"/>
+          </a:p>
+        </p:txBody>
+      </p:sp>
+      <p:sp>
+        <p:nvSpPr>
+          <p:cNvPr id="25" name="TextBox 24"/>
+          <p:cNvSpPr txBox="1"/>
+          <p:nvPr/>
+        </p:nvSpPr>
+        <p:spPr>
+          <a:xfrm>
+            <a:off x="5508000" y="5040000"/>
+            <a:ext cx="792000" cy="1008000"/>
+          </a:xfrm>
+          <a:prstGeom prst="rect">
+            <a:avLst/>
+          </a:prstGeom>
+          <a:noFill/>
+        </p:spPr>
+        <p:txBody>
+          <a:bodyPr wrap="square" lIns="36000" rIns="36000" tIns="18000" bIns="18000" anchor="ctr">
+            <a:spAutoFit/>
+          </a:bodyPr>
+          <a:lstStyle/>
+          <a:p>
+            <a:pPr algn="l">
+              <a:lnSpc>
+                <a:spcPct val="110000"/>
+              </a:lnSpc>
+            </a:pPr>
+            <a:r>
+              <a:rPr sz="1250" b="1">
+                <a:solidFill>
+                  <a:srgbClr val="111111"/>
+                </a:solidFill>
+                <a:latin typeface="Poppins"/>
+              </a:rPr>
+              <a:t>6</a:t>
+            </a:r>
+          </a:p>
+        </p:txBody>
+      </p:sp>
+      <p:sp>
+        <p:nvSpPr>
+          <p:cNvPr id="26" name="TextBox 25"/>
           <p:cNvSpPr txBox="1"/>
           <p:nvPr/>
         </p:nvSpPr>
@@ -25261,66 +25540,546 @@
           </a:p>
         </p:txBody>
       </p:sp>
+      <p:sp>
+        <p:nvSpPr>
+          <p:cNvPr id="9" name="TextBox 8"/>
+          <p:cNvSpPr txBox="1"/>
+          <p:nvPr/>
+        </p:nvSpPr>
+        <p:spPr>
+          <a:xfrm>
+            <a:off x="576000" y="1548000"/>
+            <a:ext cx="5256000" cy="360000"/>
+          </a:xfrm>
+          <a:prstGeom prst="rect">
+            <a:avLst/>
+          </a:prstGeom>
+          <a:noFill/>
+        </p:spPr>
+        <p:txBody>
+          <a:bodyPr wrap="square" lIns="36000" rIns="36000" tIns="18000" bIns="18000" anchor="t">
+            <a:spAutoFit/>
+          </a:bodyPr>
+          <a:lstStyle/>
+          <a:p>
+            <a:pPr algn="l">
+              <a:lnSpc>
+                <a:spcPct val="110000"/>
+              </a:lnSpc>
+            </a:pPr>
+            <a:r>
+              <a:rPr sz="1250" b="1">
+                <a:solidFill>
+                  <a:srgbClr val="111111"/>
+                </a:solidFill>
+                <a:latin typeface="Poppins"/>
+              </a:rPr>
+              <a:t>Abonnés LinkedIn</a:t>
+            </a:r>
+          </a:p>
+        </p:txBody>
+      </p:sp>
+      <p:sp>
+        <p:nvSpPr>
+          <p:cNvPr id="10" name="TextBox 9"/>
+          <p:cNvSpPr txBox="1"/>
+          <p:nvPr/>
+        </p:nvSpPr>
+        <p:spPr>
+          <a:xfrm>
+            <a:off x="576000" y="2016000"/>
+            <a:ext cx="1583999" cy="1248000"/>
+          </a:xfrm>
+          <a:prstGeom prst="rect">
+            <a:avLst/>
+          </a:prstGeom>
+          <a:noFill/>
+        </p:spPr>
+        <p:txBody>
+          <a:bodyPr wrap="square" lIns="36000" rIns="36000" tIns="18000" bIns="18000" anchor="ctr">
+            <a:spAutoFit/>
+          </a:bodyPr>
+          <a:lstStyle/>
+          <a:p>
+            <a:pPr algn="l">
+              <a:lnSpc>
+                <a:spcPct val="110000"/>
+              </a:lnSpc>
+            </a:pPr>
+            <a:r>
+              <a:rPr sz="1150" b="1">
+                <a:solidFill>
+                  <a:srgbClr val="111111"/>
+                </a:solidFill>
+                <a:latin typeface="Poppins"/>
+              </a:rPr>
+              <a:t>COTIPLAST</a:t>
+            </a:r>
+          </a:p>
+        </p:txBody>
+      </p:sp>
+      <p:sp>
+        <p:nvSpPr>
+          <p:cNvPr id="11" name="Rounded Rectangle 10"/>
+          <p:cNvSpPr/>
+          <p:nvPr/>
+        </p:nvSpPr>
+        <p:spPr>
+          <a:xfrm>
+            <a:off x="2231999" y="2406000"/>
+            <a:ext cx="2700001" cy="468000"/>
+          </a:xfrm>
+          <a:prstGeom prst="roundRect">
+            <a:avLst/>
+          </a:prstGeom>
+          <a:solidFill>
+            <a:srgbClr val="F0F0F0"/>
+          </a:solidFill>
+          <a:ln>
+            <a:noFill/>
+          </a:ln>
+          <a:effectLst/>
+        </p:spPr>
+        <p:style>
+          <a:lnRef idx="1">
+            <a:schemeClr val="accent1"/>
+          </a:lnRef>
+          <a:fillRef idx="3">
+            <a:schemeClr val="accent1"/>
+          </a:fillRef>
+          <a:effectRef idx="2">
+            <a:schemeClr val="accent1"/>
+          </a:effectRef>
+          <a:fontRef idx="minor">
+            <a:schemeClr val="lt1"/>
+          </a:fontRef>
+        </p:style>
+        <p:txBody>
+          <a:bodyPr rtlCol="0" anchor="ctr"/>
+          <a:lstStyle/>
+          <a:p>
+            <a:pPr algn="ctr"/>
+          </a:p>
+        </p:txBody>
+      </p:sp>
+      <p:sp>
+        <p:nvSpPr>
+          <p:cNvPr id="12" name="Rounded Rectangle 11"/>
+          <p:cNvSpPr/>
+          <p:nvPr/>
+        </p:nvSpPr>
+        <p:spPr>
+          <a:xfrm>
+            <a:off x="2231999" y="2406000"/>
+            <a:ext cx="2700001" cy="468000"/>
+          </a:xfrm>
+          <a:prstGeom prst="roundRect">
+            <a:avLst/>
+          </a:prstGeom>
+          <a:solidFill>
+            <a:srgbClr val="FD8103"/>
+          </a:solidFill>
+          <a:ln>
+            <a:noFill/>
+          </a:ln>
+          <a:effectLst/>
+        </p:spPr>
+        <p:style>
+          <a:lnRef idx="1">
+            <a:schemeClr val="accent1"/>
+          </a:lnRef>
+          <a:fillRef idx="3">
+            <a:schemeClr val="accent1"/>
+          </a:fillRef>
+          <a:effectRef idx="2">
+            <a:schemeClr val="accent1"/>
+          </a:effectRef>
+          <a:fontRef idx="minor">
+            <a:schemeClr val="lt1"/>
+          </a:fontRef>
+        </p:style>
+        <p:txBody>
+          <a:bodyPr rtlCol="0" anchor="ctr"/>
+          <a:lstStyle/>
+          <a:p>
+            <a:pPr algn="ctr"/>
+          </a:p>
+        </p:txBody>
+      </p:sp>
+      <p:sp>
+        <p:nvSpPr>
+          <p:cNvPr id="13" name="TextBox 12"/>
+          <p:cNvSpPr txBox="1"/>
+          <p:nvPr/>
+        </p:nvSpPr>
+        <p:spPr>
+          <a:xfrm>
+            <a:off x="5004000" y="2016000"/>
+            <a:ext cx="792000" cy="1248000"/>
+          </a:xfrm>
+          <a:prstGeom prst="rect">
+            <a:avLst/>
+          </a:prstGeom>
+          <a:noFill/>
+        </p:spPr>
+        <p:txBody>
+          <a:bodyPr wrap="square" lIns="36000" rIns="36000" tIns="18000" bIns="18000" anchor="ctr">
+            <a:spAutoFit/>
+          </a:bodyPr>
+          <a:lstStyle/>
+          <a:p>
+            <a:pPr algn="l">
+              <a:lnSpc>
+                <a:spcPct val="110000"/>
+              </a:lnSpc>
+            </a:pPr>
+            <a:r>
+              <a:rPr sz="1250" b="1">
+                <a:solidFill>
+                  <a:srgbClr val="FD8103"/>
+                </a:solidFill>
+                <a:latin typeface="Poppins"/>
+              </a:rPr>
+              <a:t>5 446</a:t>
+            </a:r>
+          </a:p>
+        </p:txBody>
+      </p:sp>
+      <p:sp>
+        <p:nvSpPr>
+          <p:cNvPr id="14" name="TextBox 13"/>
+          <p:cNvSpPr txBox="1"/>
+          <p:nvPr/>
+        </p:nvSpPr>
+        <p:spPr>
+          <a:xfrm>
+            <a:off x="576000" y="3264000"/>
+            <a:ext cx="1583999" cy="1248000"/>
+          </a:xfrm>
+          <a:prstGeom prst="rect">
+            <a:avLst/>
+          </a:prstGeom>
+          <a:noFill/>
+        </p:spPr>
+        <p:txBody>
+          <a:bodyPr wrap="square" lIns="36000" rIns="36000" tIns="18000" bIns="18000" anchor="ctr">
+            <a:spAutoFit/>
+          </a:bodyPr>
+          <a:lstStyle/>
+          <a:p>
+            <a:pPr algn="l">
+              <a:lnSpc>
+                <a:spcPct val="110000"/>
+              </a:lnSpc>
+            </a:pPr>
+            <a:r>
+              <a:rPr sz="1150" b="0">
+                <a:solidFill>
+                  <a:srgbClr val="111111"/>
+                </a:solidFill>
+                <a:latin typeface="Poppins"/>
+              </a:rPr>
+              <a:t>FLEPACI</a:t>
+            </a:r>
+          </a:p>
+        </p:txBody>
+      </p:sp>
+      <p:sp>
+        <p:nvSpPr>
+          <p:cNvPr id="15" name="Rounded Rectangle 14"/>
+          <p:cNvSpPr/>
+          <p:nvPr/>
+        </p:nvSpPr>
+        <p:spPr>
+          <a:xfrm>
+            <a:off x="2231999" y="3654000"/>
+            <a:ext cx="2700001" cy="468000"/>
+          </a:xfrm>
+          <a:prstGeom prst="roundRect">
+            <a:avLst/>
+          </a:prstGeom>
+          <a:solidFill>
+            <a:srgbClr val="F0F0F0"/>
+          </a:solidFill>
+          <a:ln>
+            <a:noFill/>
+          </a:ln>
+          <a:effectLst/>
+        </p:spPr>
+        <p:style>
+          <a:lnRef idx="1">
+            <a:schemeClr val="accent1"/>
+          </a:lnRef>
+          <a:fillRef idx="3">
+            <a:schemeClr val="accent1"/>
+          </a:fillRef>
+          <a:effectRef idx="2">
+            <a:schemeClr val="accent1"/>
+          </a:effectRef>
+          <a:fontRef idx="minor">
+            <a:schemeClr val="lt1"/>
+          </a:fontRef>
+        </p:style>
+        <p:txBody>
+          <a:bodyPr rtlCol="0" anchor="ctr"/>
+          <a:lstStyle/>
+          <a:p>
+            <a:pPr algn="ctr"/>
+          </a:p>
+        </p:txBody>
+      </p:sp>
+      <p:sp>
+        <p:nvSpPr>
+          <p:cNvPr id="16" name="Rounded Rectangle 15"/>
+          <p:cNvSpPr/>
+          <p:nvPr/>
+        </p:nvSpPr>
+        <p:spPr>
+          <a:xfrm>
+            <a:off x="2231999" y="3654000"/>
+            <a:ext cx="285567" cy="468000"/>
+          </a:xfrm>
+          <a:prstGeom prst="roundRect">
+            <a:avLst/>
+          </a:prstGeom>
+          <a:solidFill>
+            <a:srgbClr val="B9B9B9"/>
+          </a:solidFill>
+          <a:ln>
+            <a:noFill/>
+          </a:ln>
+          <a:effectLst/>
+        </p:spPr>
+        <p:style>
+          <a:lnRef idx="1">
+            <a:schemeClr val="accent1"/>
+          </a:lnRef>
+          <a:fillRef idx="3">
+            <a:schemeClr val="accent1"/>
+          </a:fillRef>
+          <a:effectRef idx="2">
+            <a:schemeClr val="accent1"/>
+          </a:effectRef>
+          <a:fontRef idx="minor">
+            <a:schemeClr val="lt1"/>
+          </a:fontRef>
+        </p:style>
+        <p:txBody>
+          <a:bodyPr rtlCol="0" anchor="ctr"/>
+          <a:lstStyle/>
+          <a:p>
+            <a:pPr algn="ctr"/>
+          </a:p>
+        </p:txBody>
+      </p:sp>
+      <p:sp>
+        <p:nvSpPr>
+          <p:cNvPr id="17" name="TextBox 16"/>
+          <p:cNvSpPr txBox="1"/>
+          <p:nvPr/>
+        </p:nvSpPr>
+        <p:spPr>
+          <a:xfrm>
+            <a:off x="5004000" y="3264000"/>
+            <a:ext cx="792000" cy="1248000"/>
+          </a:xfrm>
+          <a:prstGeom prst="rect">
+            <a:avLst/>
+          </a:prstGeom>
+          <a:noFill/>
+        </p:spPr>
+        <p:txBody>
+          <a:bodyPr wrap="square" lIns="36000" rIns="36000" tIns="18000" bIns="18000" anchor="ctr">
+            <a:spAutoFit/>
+          </a:bodyPr>
+          <a:lstStyle/>
+          <a:p>
+            <a:pPr algn="l">
+              <a:lnSpc>
+                <a:spcPct val="110000"/>
+              </a:lnSpc>
+            </a:pPr>
+            <a:r>
+              <a:rPr sz="1250" b="1">
+                <a:solidFill>
+                  <a:srgbClr val="111111"/>
+                </a:solidFill>
+                <a:latin typeface="Poppins"/>
+              </a:rPr>
+              <a:t>576</a:t>
+            </a:r>
+          </a:p>
+        </p:txBody>
+      </p:sp>
+      <p:sp>
+        <p:nvSpPr>
+          <p:cNvPr id="18" name="TextBox 17"/>
+          <p:cNvSpPr txBox="1"/>
+          <p:nvPr/>
+        </p:nvSpPr>
+        <p:spPr>
+          <a:xfrm>
+            <a:off x="576000" y="4512000"/>
+            <a:ext cx="1583999" cy="1248000"/>
+          </a:xfrm>
+          <a:prstGeom prst="rect">
+            <a:avLst/>
+          </a:prstGeom>
+          <a:noFill/>
+        </p:spPr>
+        <p:txBody>
+          <a:bodyPr wrap="square" lIns="36000" rIns="36000" tIns="18000" bIns="18000" anchor="ctr">
+            <a:spAutoFit/>
+          </a:bodyPr>
+          <a:lstStyle/>
+          <a:p>
+            <a:pPr algn="l">
+              <a:lnSpc>
+                <a:spcPct val="110000"/>
+              </a:lnSpc>
+            </a:pPr>
+            <a:r>
+              <a:rPr sz="1150" b="0">
+                <a:solidFill>
+                  <a:srgbClr val="111111"/>
+                </a:solidFill>
+                <a:latin typeface="Poppins"/>
+              </a:rPr>
+              <a:t>SOFEM-CI</a:t>
+            </a:r>
+          </a:p>
+        </p:txBody>
+      </p:sp>
+      <p:sp>
+        <p:nvSpPr>
+          <p:cNvPr id="19" name="Rounded Rectangle 18"/>
+          <p:cNvSpPr/>
+          <p:nvPr/>
+        </p:nvSpPr>
+        <p:spPr>
+          <a:xfrm>
+            <a:off x="2231999" y="4902000"/>
+            <a:ext cx="2700001" cy="468000"/>
+          </a:xfrm>
+          <a:prstGeom prst="roundRect">
+            <a:avLst/>
+          </a:prstGeom>
+          <a:solidFill>
+            <a:srgbClr val="F0F0F0"/>
+          </a:solidFill>
+          <a:ln>
+            <a:noFill/>
+          </a:ln>
+          <a:effectLst/>
+        </p:spPr>
+        <p:style>
+          <a:lnRef idx="1">
+            <a:schemeClr val="accent1"/>
+          </a:lnRef>
+          <a:fillRef idx="3">
+            <a:schemeClr val="accent1"/>
+          </a:fillRef>
+          <a:effectRef idx="2">
+            <a:schemeClr val="accent1"/>
+          </a:effectRef>
+          <a:fontRef idx="minor">
+            <a:schemeClr val="lt1"/>
+          </a:fontRef>
+        </p:style>
+        <p:txBody>
+          <a:bodyPr rtlCol="0" anchor="ctr"/>
+          <a:lstStyle/>
+          <a:p>
+            <a:pPr algn="ctr"/>
+          </a:p>
+        </p:txBody>
+      </p:sp>
+      <p:sp>
+        <p:nvSpPr>
+          <p:cNvPr id="20" name="Rounded Rectangle 19"/>
+          <p:cNvSpPr/>
+          <p:nvPr/>
+        </p:nvSpPr>
+        <p:spPr>
+          <a:xfrm>
+            <a:off x="2231999" y="4902000"/>
+            <a:ext cx="90000" cy="468000"/>
+          </a:xfrm>
+          <a:prstGeom prst="roundRect">
+            <a:avLst/>
+          </a:prstGeom>
+          <a:solidFill>
+            <a:srgbClr val="B9B9B9"/>
+          </a:solidFill>
+          <a:ln>
+            <a:noFill/>
+          </a:ln>
+          <a:effectLst/>
+        </p:spPr>
+        <p:style>
+          <a:lnRef idx="1">
+            <a:schemeClr val="accent1"/>
+          </a:lnRef>
+          <a:fillRef idx="3">
+            <a:schemeClr val="accent1"/>
+          </a:fillRef>
+          <a:effectRef idx="2">
+            <a:schemeClr val="accent1"/>
+          </a:effectRef>
+          <a:fontRef idx="minor">
+            <a:schemeClr val="lt1"/>
+          </a:fontRef>
+        </p:style>
+        <p:txBody>
+          <a:bodyPr rtlCol="0" anchor="ctr"/>
+          <a:lstStyle/>
+          <a:p>
+            <a:pPr algn="ctr"/>
+          </a:p>
+        </p:txBody>
+      </p:sp>
+      <p:sp>
+        <p:nvSpPr>
+          <p:cNvPr id="21" name="TextBox 20"/>
+          <p:cNvSpPr txBox="1"/>
+          <p:nvPr/>
+        </p:nvSpPr>
+        <p:spPr>
+          <a:xfrm>
+            <a:off x="5004000" y="4512000"/>
+            <a:ext cx="792000" cy="1248000"/>
+          </a:xfrm>
+          <a:prstGeom prst="rect">
+            <a:avLst/>
+          </a:prstGeom>
+          <a:noFill/>
+        </p:spPr>
+        <p:txBody>
+          <a:bodyPr wrap="square" lIns="36000" rIns="36000" tIns="18000" bIns="18000" anchor="ctr">
+            <a:spAutoFit/>
+          </a:bodyPr>
+          <a:lstStyle/>
+          <a:p>
+            <a:pPr algn="l">
+              <a:lnSpc>
+                <a:spcPct val="110000"/>
+              </a:lnSpc>
+            </a:pPr>
+            <a:r>
+              <a:rPr sz="1250" b="1">
+                <a:solidFill>
+                  <a:srgbClr val="111111"/>
+                </a:solidFill>
+                <a:latin typeface="Poppins"/>
+              </a:rPr>
+              <a:t>138</a:t>
+            </a:r>
+          </a:p>
+        </p:txBody>
+      </p:sp>
       <p:graphicFrame>
         <p:nvGraphicFramePr>
-          <p:cNvPr id="9" name="Chart 8"/>
-          <p:cNvGraphicFramePr>
-            <a:graphicFrameLocks noGrp="1"/>
-          </p:cNvGraphicFramePr>
-          <p:nvPr/>
-        </p:nvGraphicFramePr>
-        <p:xfrm>
-          <a:off x="576000" y="1944000"/>
-          <a:ext cx="5256000" cy="3816000"/>
-        </p:xfrm>
-        <a:graphic>
-          <a:graphicData uri="http://schemas.openxmlformats.org/drawingml/2006/chart">
-            <c:chart xmlns:c="http://schemas.openxmlformats.org/drawingml/2006/chart" r:id="rId3"/>
-          </a:graphicData>
-        </a:graphic>
-      </p:graphicFrame>
-      <p:sp>
-        <p:nvSpPr>
-          <p:cNvPr id="10" name="TextBox 9"/>
-          <p:cNvSpPr txBox="1"/>
-          <p:nvPr/>
-        </p:nvSpPr>
-        <p:spPr>
-          <a:xfrm>
-            <a:off x="576000" y="1548000"/>
-            <a:ext cx="5256000" cy="360000"/>
-          </a:xfrm>
-          <a:prstGeom prst="rect">
-            <a:avLst/>
-          </a:prstGeom>
-          <a:noFill/>
-        </p:spPr>
-        <p:txBody>
-          <a:bodyPr wrap="square" lIns="36000" rIns="36000" tIns="18000" bIns="18000" anchor="t">
-            <a:spAutoFit/>
-          </a:bodyPr>
-          <a:lstStyle/>
-          <a:p>
-            <a:pPr algn="l">
-              <a:lnSpc>
-                <a:spcPct val="110000"/>
-              </a:lnSpc>
-            </a:pPr>
-            <a:r>
-              <a:rPr sz="1250" b="1">
-                <a:solidFill>
-                  <a:srgbClr val="111111"/>
-                </a:solidFill>
-                <a:latin typeface="Poppins"/>
-              </a:rPr>
-              <a:t>Abonnés LinkedIn</a:t>
-            </a:r>
-          </a:p>
-        </p:txBody>
-      </p:sp>
-      <p:graphicFrame>
-        <p:nvGraphicFramePr>
-          <p:cNvPr id="11" name="Table 10"/>
+          <p:cNvPr id="22" name="Table 21"/>
           <p:cNvGraphicFramePr>
             <a:graphicFrameLocks noGrp="1"/>
           </p:cNvGraphicFramePr>
@@ -26098,7 +26857,7 @@
       </p:graphicFrame>
       <p:sp>
         <p:nvSpPr>
-          <p:cNvPr id="12" name="TextBox 11"/>
+          <p:cNvPr id="23" name="TextBox 22"/>
           <p:cNvSpPr txBox="1"/>
           <p:nvPr/>
         </p:nvSpPr>

--- a/tmp-tj/261028_cotiplast_audit-reseaux-sociaux_v1.pptx
+++ b/tmp-tj/261028_cotiplast_audit-reseaux-sociaux_v1.pptx
@@ -28,6 +28,8 @@
     <p:sldId id="276" r:id="rId27"/>
     <p:sldId id="277" r:id="rId28"/>
     <p:sldId id="278" r:id="rId29"/>
+    <p:sldId id="279" r:id="rId30"/>
+    <p:sldId id="280" r:id="rId31"/>
   </p:sldIdLst>
   <p:sldSz cx="12192119" cy="6858000" type="screen4x3"/>
   <p:notesSz cx="6858000" cy="9144000"/>
@@ -18149,7 +18151,7 @@
                 </a:solidFill>
                 <a:latin typeface="Poppins"/>
               </a:rPr>
-              <a:t>PLAN 30 JOURS</a:t>
+              <a:t>NOUVELLE LIGNE DE FLYERS · 1 SUR 2</a:t>
             </a:r>
           </a:p>
         </p:txBody>
@@ -18182,13 +18184,13 @@
               </a:lnSpc>
             </a:pPr>
             <a:r>
-              <a:rPr sz="2500" b="1">
+              <a:rPr sz="2100" b="1">
                 <a:solidFill>
                   <a:srgbClr val="111111"/>
                 </a:solidFill>
                 <a:latin typeface="Poppins"/>
               </a:rPr>
-              <a:t>Le premier mois, semaine par semaine</a:t>
+              <a:t>Une nouvelle ligne : trois styles, votre usine au centre</a:t>
             </a:r>
           </a:p>
         </p:txBody>
@@ -18315,53 +18317,9 @@
           </a:p>
         </p:txBody>
       </p:sp>
-      <p:sp>
-        <p:nvSpPr>
-          <p:cNvPr id="9" name="Rounded Rectangle 8"/>
-          <p:cNvSpPr/>
-          <p:nvPr/>
-        </p:nvSpPr>
-        <p:spPr>
-          <a:xfrm>
-            <a:off x="576000" y="1584000"/>
-            <a:ext cx="2628000" cy="576000"/>
-          </a:xfrm>
-          <a:prstGeom prst="roundRect">
-            <a:avLst/>
-          </a:prstGeom>
-          <a:solidFill>
-            <a:srgbClr val="FD8103"/>
-          </a:solidFill>
-          <a:ln>
-            <a:noFill/>
-          </a:ln>
-          <a:effectLst/>
-        </p:spPr>
-        <p:style>
-          <a:lnRef idx="1">
-            <a:schemeClr val="accent1"/>
-          </a:lnRef>
-          <a:fillRef idx="3">
-            <a:schemeClr val="accent1"/>
-          </a:fillRef>
-          <a:effectRef idx="2">
-            <a:schemeClr val="accent1"/>
-          </a:effectRef>
-          <a:fontRef idx="minor">
-            <a:schemeClr val="lt1"/>
-          </a:fontRef>
-        </p:style>
-        <p:txBody>
-          <a:bodyPr rtlCol="0" anchor="ctr"/>
-          <a:lstStyle/>
-          <a:p>
-            <a:pPr algn="ctr"/>
-          </a:p>
-        </p:txBody>
-      </p:sp>
       <p:pic>
         <p:nvPicPr>
-          <p:cNvPr id="10" name="Picture 9" descr="calendar-event_bl.png"/>
+          <p:cNvPr id="9" name="Picture 8" descr="n_c1.jpg"/>
           <p:cNvPicPr>
             <a:picLocks noChangeAspect="1"/>
           </p:cNvPicPr>
@@ -18375,8 +18333,8 @@
         </p:blipFill>
         <p:spPr>
           <a:xfrm>
-            <a:off x="720000" y="1710000"/>
-            <a:ext cx="324000" cy="324000"/>
+            <a:off x="576000" y="1512000"/>
+            <a:ext cx="3528000" cy="4410000"/>
           </a:xfrm>
           <a:prstGeom prst="rect">
             <a:avLst/>
@@ -18385,61 +18343,20 @@
       </p:pic>
       <p:sp>
         <p:nvSpPr>
-          <p:cNvPr id="11" name="TextBox 10"/>
-          <p:cNvSpPr txBox="1"/>
-          <p:nvPr/>
-        </p:nvSpPr>
-        <p:spPr>
-          <a:xfrm>
-            <a:off x="1116000" y="1584000"/>
-            <a:ext cx="2015999" cy="576000"/>
-          </a:xfrm>
-          <a:prstGeom prst="rect">
-            <a:avLst/>
-          </a:prstGeom>
-          <a:noFill/>
-        </p:spPr>
-        <p:txBody>
-          <a:bodyPr wrap="square" lIns="36000" rIns="36000" tIns="18000" bIns="18000" anchor="ctr">
-            <a:spAutoFit/>
-          </a:bodyPr>
-          <a:lstStyle/>
-          <a:p>
-            <a:pPr algn="l">
-              <a:lnSpc>
-                <a:spcPct val="110000"/>
-              </a:lnSpc>
-            </a:pPr>
-            <a:r>
-              <a:rPr sz="1500" b="1">
-                <a:solidFill>
-                  <a:srgbClr val="FFFFFF"/>
-                </a:solidFill>
-                <a:latin typeface="Poppins"/>
-              </a:rPr>
-              <a:t>Semaine 1</a:t>
-            </a:r>
-          </a:p>
-        </p:txBody>
-      </p:sp>
-      <p:sp>
-        <p:nvSpPr>
-          <p:cNvPr id="12" name="Rounded Rectangle 11"/>
+          <p:cNvPr id="10" name="Rounded Rectangle 9"/>
           <p:cNvSpPr/>
           <p:nvPr/>
         </p:nvSpPr>
         <p:spPr>
           <a:xfrm>
-            <a:off x="576000" y="2304000"/>
-            <a:ext cx="2628000" cy="2880000"/>
+            <a:off x="576000" y="6012000"/>
+            <a:ext cx="3528000" cy="306000"/>
           </a:xfrm>
           <a:prstGeom prst="roundRect">
-            <a:avLst>
-              <a:gd name="adj" fmla="val 6000"/>
-            </a:avLst>
+            <a:avLst/>
           </a:prstGeom>
           <a:solidFill>
-            <a:srgbClr val="F4F4F2"/>
+            <a:srgbClr val="E4F4EC"/>
           </a:solidFill>
           <a:ln>
             <a:noFill/>
@@ -18470,149 +18387,46 @@
       </p:sp>
       <p:sp>
         <p:nvSpPr>
-          <p:cNvPr id="13" name="TextBox 12"/>
-          <p:cNvSpPr txBox="1"/>
-          <p:nvPr/>
-        </p:nvSpPr>
-        <p:spPr>
-          <a:xfrm>
-            <a:off x="720000" y="2448000"/>
-            <a:ext cx="2376000" cy="2664000"/>
-          </a:xfrm>
-          <a:prstGeom prst="rect">
-            <a:avLst/>
-          </a:prstGeom>
-          <a:noFill/>
-        </p:spPr>
-        <p:txBody>
-          <a:bodyPr wrap="square">
-            <a:spAutoFit/>
-          </a:bodyPr>
-          <a:lstStyle/>
-          <a:p>
-            <a:pPr>
-              <a:spcAft>
-                <a:spcPts val="700"/>
-              </a:spcAft>
-            </a:pPr>
-            <a:r>
-              <a:rPr sz="800">
+          <p:cNvPr id="11" name="TextBox 10"/>
+          <p:cNvSpPr txBox="1"/>
+          <p:nvPr/>
+        </p:nvSpPr>
+        <p:spPr>
+          <a:xfrm>
+            <a:off x="576000" y="6012000"/>
+            <a:ext cx="3528000" cy="306000"/>
+          </a:xfrm>
+          <a:prstGeom prst="rect">
+            <a:avLst/>
+          </a:prstGeom>
+          <a:noFill/>
+        </p:spPr>
+        <p:txBody>
+          <a:bodyPr wrap="square" lIns="36000" rIns="36000" tIns="18000" bIns="18000" anchor="ctr">
+            <a:spAutoFit/>
+          </a:bodyPr>
+          <a:lstStyle/>
+          <a:p>
+            <a:pPr algn="ctr">
+              <a:lnSpc>
+                <a:spcPct val="110000"/>
+              </a:lnSpc>
+            </a:pPr>
+            <a:r>
+              <a:rPr sz="1100" b="1">
                 <a:solidFill>
                   <a:srgbClr val="FD8103"/>
                 </a:solidFill>
                 <a:latin typeface="Poppins"/>
               </a:rPr>
-              <a:t>■  </a:t>
-            </a:r>
-            <a:r>
-              <a:rPr sz="1200">
-                <a:solidFill>
-                  <a:srgbClr val="111111"/>
-                </a:solidFill>
-                <a:latin typeface="Poppins"/>
-              </a:rPr>
-              <a:t>Valider les 6 publications refaites</a:t>
-            </a:r>
-          </a:p>
-          <a:p>
-            <a:pPr>
-              <a:spcAft>
-                <a:spcPts val="700"/>
-              </a:spcAft>
-            </a:pPr>
-            <a:r>
-              <a:rPr sz="800">
-                <a:solidFill>
-                  <a:srgbClr val="FD8103"/>
-                </a:solidFill>
-                <a:latin typeface="Poppins"/>
-              </a:rPr>
-              <a:t>■  </a:t>
-            </a:r>
-            <a:r>
-              <a:rPr sz="1200">
-                <a:solidFill>
-                  <a:srgbClr val="111111"/>
-                </a:solidFill>
-                <a:latin typeface="Poppins"/>
-              </a:rPr>
-              <a:t>Choisir la page Facebook à garder</a:t>
-            </a:r>
-          </a:p>
-          <a:p>
-            <a:pPr>
-              <a:spcAft>
-                <a:spcPts val="700"/>
-              </a:spcAft>
-            </a:pPr>
-            <a:r>
-              <a:rPr sz="800">
-                <a:solidFill>
-                  <a:srgbClr val="FD8103"/>
-                </a:solidFill>
-                <a:latin typeface="Poppins"/>
-              </a:rPr>
-              <a:t>■  </a:t>
-            </a:r>
-            <a:r>
-              <a:rPr sz="1200">
-                <a:solidFill>
-                  <a:srgbClr val="111111"/>
-                </a:solidFill>
-                <a:latin typeface="Poppins"/>
-              </a:rPr>
-              <a:t>Lister 10 photos d’usine récentes</a:t>
-            </a:r>
-          </a:p>
-        </p:txBody>
-      </p:sp>
-      <p:sp>
-        <p:nvSpPr>
-          <p:cNvPr id="14" name="Rounded Rectangle 13"/>
-          <p:cNvSpPr/>
-          <p:nvPr/>
-        </p:nvSpPr>
-        <p:spPr>
-          <a:xfrm>
-            <a:off x="3384000" y="1584000"/>
-            <a:ext cx="2628000" cy="576000"/>
-          </a:xfrm>
-          <a:prstGeom prst="roundRect">
-            <a:avLst/>
-          </a:prstGeom>
-          <a:solidFill>
-            <a:srgbClr val="4FB58B"/>
-          </a:solidFill>
-          <a:ln>
-            <a:noFill/>
-          </a:ln>
-          <a:effectLst/>
-        </p:spPr>
-        <p:style>
-          <a:lnRef idx="1">
-            <a:schemeClr val="accent1"/>
-          </a:lnRef>
-          <a:fillRef idx="3">
-            <a:schemeClr val="accent1"/>
-          </a:fillRef>
-          <a:effectRef idx="2">
-            <a:schemeClr val="accent1"/>
-          </a:effectRef>
-          <a:fontRef idx="minor">
-            <a:schemeClr val="lt1"/>
-          </a:fontRef>
-        </p:style>
-        <p:txBody>
-          <a:bodyPr rtlCol="0" anchor="ctr"/>
-          <a:lstStyle/>
-          <a:p>
-            <a:pPr algn="ctr"/>
+              <a:t>Style éditorial</a:t>
+            </a:r>
           </a:p>
         </p:txBody>
       </p:sp>
       <p:pic>
         <p:nvPicPr>
-          <p:cNvPr id="15" name="Picture 14" descr="pencil_bl.png"/>
+          <p:cNvPr id="12" name="Picture 11" descr="n_c2.jpg"/>
           <p:cNvPicPr>
             <a:picLocks noChangeAspect="1"/>
           </p:cNvPicPr>
@@ -18626,8 +18440,8 @@
         </p:blipFill>
         <p:spPr>
           <a:xfrm>
-            <a:off x="3528000" y="1710000"/>
-            <a:ext cx="324000" cy="324000"/>
+            <a:off x="4320000" y="1512000"/>
+            <a:ext cx="3528000" cy="4410000"/>
           </a:xfrm>
           <a:prstGeom prst="rect">
             <a:avLst/>
@@ -18636,61 +18450,20 @@
       </p:pic>
       <p:sp>
         <p:nvSpPr>
-          <p:cNvPr id="16" name="TextBox 15"/>
-          <p:cNvSpPr txBox="1"/>
-          <p:nvPr/>
-        </p:nvSpPr>
-        <p:spPr>
-          <a:xfrm>
-            <a:off x="3924000" y="1584000"/>
-            <a:ext cx="2015999" cy="576000"/>
-          </a:xfrm>
-          <a:prstGeom prst="rect">
-            <a:avLst/>
-          </a:prstGeom>
-          <a:noFill/>
-        </p:spPr>
-        <p:txBody>
-          <a:bodyPr wrap="square" lIns="36000" rIns="36000" tIns="18000" bIns="18000" anchor="ctr">
-            <a:spAutoFit/>
-          </a:bodyPr>
-          <a:lstStyle/>
-          <a:p>
-            <a:pPr algn="l">
-              <a:lnSpc>
-                <a:spcPct val="110000"/>
-              </a:lnSpc>
-            </a:pPr>
-            <a:r>
-              <a:rPr sz="1500" b="1">
-                <a:solidFill>
-                  <a:srgbClr val="FFFFFF"/>
-                </a:solidFill>
-                <a:latin typeface="Poppins"/>
-              </a:rPr>
-              <a:t>Semaine 2</a:t>
-            </a:r>
-          </a:p>
-        </p:txBody>
-      </p:sp>
-      <p:sp>
-        <p:nvSpPr>
-          <p:cNvPr id="17" name="Rounded Rectangle 16"/>
+          <p:cNvPr id="13" name="Rounded Rectangle 12"/>
           <p:cNvSpPr/>
           <p:nvPr/>
         </p:nvSpPr>
         <p:spPr>
           <a:xfrm>
-            <a:off x="3384000" y="2304000"/>
-            <a:ext cx="2628000" cy="2880000"/>
+            <a:off x="4320000" y="6012000"/>
+            <a:ext cx="3528000" cy="306000"/>
           </a:xfrm>
           <a:prstGeom prst="roundRect">
-            <a:avLst>
-              <a:gd name="adj" fmla="val 6000"/>
-            </a:avLst>
+            <a:avLst/>
           </a:prstGeom>
           <a:solidFill>
-            <a:srgbClr val="F4F4F2"/>
+            <a:srgbClr val="E4F4EC"/>
           </a:solidFill>
           <a:ln>
             <a:noFill/>
@@ -18721,149 +18494,46 @@
       </p:sp>
       <p:sp>
         <p:nvSpPr>
-          <p:cNvPr id="18" name="TextBox 17"/>
-          <p:cNvSpPr txBox="1"/>
-          <p:nvPr/>
-        </p:nvSpPr>
-        <p:spPr>
-          <a:xfrm>
-            <a:off x="3528000" y="2448000"/>
-            <a:ext cx="2376000" cy="2664000"/>
-          </a:xfrm>
-          <a:prstGeom prst="rect">
-            <a:avLst/>
-          </a:prstGeom>
-          <a:noFill/>
-        </p:spPr>
-        <p:txBody>
-          <a:bodyPr wrap="square">
-            <a:spAutoFit/>
-          </a:bodyPr>
-          <a:lstStyle/>
-          <a:p>
-            <a:pPr>
-              <a:spcAft>
-                <a:spcPts val="700"/>
-              </a:spcAft>
-            </a:pPr>
-            <a:r>
-              <a:rPr sz="800">
+          <p:cNvPr id="14" name="TextBox 13"/>
+          <p:cNvSpPr txBox="1"/>
+          <p:nvPr/>
+        </p:nvSpPr>
+        <p:spPr>
+          <a:xfrm>
+            <a:off x="4320000" y="6012000"/>
+            <a:ext cx="3528000" cy="306000"/>
+          </a:xfrm>
+          <a:prstGeom prst="rect">
+            <a:avLst/>
+          </a:prstGeom>
+          <a:noFill/>
+        </p:spPr>
+        <p:txBody>
+          <a:bodyPr wrap="square" lIns="36000" rIns="36000" tIns="18000" bIns="18000" anchor="ctr">
+            <a:spAutoFit/>
+          </a:bodyPr>
+          <a:lstStyle/>
+          <a:p>
+            <a:pPr algn="ctr">
+              <a:lnSpc>
+                <a:spcPct val="110000"/>
+              </a:lnSpc>
+            </a:pPr>
+            <a:r>
+              <a:rPr sz="1100" b="1">
                 <a:solidFill>
                   <a:srgbClr val="FD8103"/>
                 </a:solidFill>
                 <a:latin typeface="Poppins"/>
               </a:rPr>
-              <a:t>■  </a:t>
-            </a:r>
-            <a:r>
-              <a:rPr sz="1200">
-                <a:solidFill>
-                  <a:srgbClr val="111111"/>
-                </a:solidFill>
-                <a:latin typeface="Poppins"/>
-              </a:rPr>
-              <a:t>Publier 2 avant / après</a:t>
-            </a:r>
-          </a:p>
-          <a:p>
-            <a:pPr>
-              <a:spcAft>
-                <a:spcPts val="700"/>
-              </a:spcAft>
-            </a:pPr>
-            <a:r>
-              <a:rPr sz="800">
-                <a:solidFill>
-                  <a:srgbClr val="FD8103"/>
-                </a:solidFill>
-                <a:latin typeface="Poppins"/>
-              </a:rPr>
-              <a:t>■  </a:t>
-            </a:r>
-            <a:r>
-              <a:rPr sz="1200">
-                <a:solidFill>
-                  <a:srgbClr val="111111"/>
-                </a:solidFill>
-                <a:latin typeface="Poppins"/>
-              </a:rPr>
-              <a:t>Répondre à chaque commentaire</a:t>
-            </a:r>
-          </a:p>
-          <a:p>
-            <a:pPr>
-              <a:spcAft>
-                <a:spcPts val="700"/>
-              </a:spcAft>
-            </a:pPr>
-            <a:r>
-              <a:rPr sz="800">
-                <a:solidFill>
-                  <a:srgbClr val="FD8103"/>
-                </a:solidFill>
-                <a:latin typeface="Poppins"/>
-              </a:rPr>
-              <a:t>■  </a:t>
-            </a:r>
-            <a:r>
-              <a:rPr sz="1200">
-                <a:solidFill>
-                  <a:srgbClr val="111111"/>
-                </a:solidFill>
-                <a:latin typeface="Poppins"/>
-              </a:rPr>
-              <a:t>Premier sondage</a:t>
-            </a:r>
-          </a:p>
-        </p:txBody>
-      </p:sp>
-      <p:sp>
-        <p:nvSpPr>
-          <p:cNvPr id="19" name="Rounded Rectangle 18"/>
-          <p:cNvSpPr/>
-          <p:nvPr/>
-        </p:nvSpPr>
-        <p:spPr>
-          <a:xfrm>
-            <a:off x="6192000" y="1584000"/>
-            <a:ext cx="2628000" cy="576000"/>
-          </a:xfrm>
-          <a:prstGeom prst="roundRect">
-            <a:avLst/>
-          </a:prstGeom>
-          <a:solidFill>
-            <a:srgbClr val="FD8103"/>
-          </a:solidFill>
-          <a:ln>
-            <a:noFill/>
-          </a:ln>
-          <a:effectLst/>
-        </p:spPr>
-        <p:style>
-          <a:lnRef idx="1">
-            <a:schemeClr val="accent1"/>
-          </a:lnRef>
-          <a:fillRef idx="3">
-            <a:schemeClr val="accent1"/>
-          </a:fillRef>
-          <a:effectRef idx="2">
-            <a:schemeClr val="accent1"/>
-          </a:effectRef>
-          <a:fontRef idx="minor">
-            <a:schemeClr val="lt1"/>
-          </a:fontRef>
-        </p:style>
-        <p:txBody>
-          <a:bodyPr rtlCol="0" anchor="ctr"/>
-          <a:lstStyle/>
-          <a:p>
-            <a:pPr algn="ctr"/>
+              <a:t>Style aplat couleur</a:t>
+            </a:r>
           </a:p>
         </p:txBody>
       </p:sp>
       <p:pic>
         <p:nvPicPr>
-          <p:cNvPr id="20" name="Picture 19" descr="video_bl.png"/>
+          <p:cNvPr id="15" name="Picture 14" descr="n_c3.jpg"/>
           <p:cNvPicPr>
             <a:picLocks noChangeAspect="1"/>
           </p:cNvPicPr>
@@ -18877,8 +18547,8 @@
         </p:blipFill>
         <p:spPr>
           <a:xfrm>
-            <a:off x="6336000" y="1710000"/>
-            <a:ext cx="324000" cy="324000"/>
+            <a:off x="8064000" y="1512000"/>
+            <a:ext cx="3528000" cy="4410000"/>
           </a:xfrm>
           <a:prstGeom prst="rect">
             <a:avLst/>
@@ -18887,61 +18557,20 @@
       </p:pic>
       <p:sp>
         <p:nvSpPr>
-          <p:cNvPr id="21" name="TextBox 20"/>
-          <p:cNvSpPr txBox="1"/>
-          <p:nvPr/>
-        </p:nvSpPr>
-        <p:spPr>
-          <a:xfrm>
-            <a:off x="6732000" y="1584000"/>
-            <a:ext cx="2015999" cy="576000"/>
-          </a:xfrm>
-          <a:prstGeom prst="rect">
-            <a:avLst/>
-          </a:prstGeom>
-          <a:noFill/>
-        </p:spPr>
-        <p:txBody>
-          <a:bodyPr wrap="square" lIns="36000" rIns="36000" tIns="18000" bIns="18000" anchor="ctr">
-            <a:spAutoFit/>
-          </a:bodyPr>
-          <a:lstStyle/>
-          <a:p>
-            <a:pPr algn="l">
-              <a:lnSpc>
-                <a:spcPct val="110000"/>
-              </a:lnSpc>
-            </a:pPr>
-            <a:r>
-              <a:rPr sz="1500" b="1">
-                <a:solidFill>
-                  <a:srgbClr val="FFFFFF"/>
-                </a:solidFill>
-                <a:latin typeface="Poppins"/>
-              </a:rPr>
-              <a:t>Semaine 3</a:t>
-            </a:r>
-          </a:p>
-        </p:txBody>
-      </p:sp>
-      <p:sp>
-        <p:nvSpPr>
-          <p:cNvPr id="22" name="Rounded Rectangle 21"/>
+          <p:cNvPr id="16" name="Rounded Rectangle 15"/>
           <p:cNvSpPr/>
           <p:nvPr/>
         </p:nvSpPr>
         <p:spPr>
           <a:xfrm>
-            <a:off x="6192000" y="2304000"/>
-            <a:ext cx="2628000" cy="2880000"/>
+            <a:off x="8064000" y="6012000"/>
+            <a:ext cx="3528000" cy="306000"/>
           </a:xfrm>
           <a:prstGeom prst="roundRect">
-            <a:avLst>
-              <a:gd name="adj" fmla="val 6000"/>
-            </a:avLst>
+            <a:avLst/>
           </a:prstGeom>
           <a:solidFill>
-            <a:srgbClr val="F4F4F2"/>
+            <a:srgbClr val="E4F4EC"/>
           </a:solidFill>
           <a:ln>
             <a:noFill/>
@@ -18972,458 +18601,39 @@
       </p:sp>
       <p:sp>
         <p:nvSpPr>
-          <p:cNvPr id="23" name="TextBox 22"/>
-          <p:cNvSpPr txBox="1"/>
-          <p:nvPr/>
-        </p:nvSpPr>
-        <p:spPr>
-          <a:xfrm>
-            <a:off x="6336000" y="2448000"/>
-            <a:ext cx="2376000" cy="2664000"/>
-          </a:xfrm>
-          <a:prstGeom prst="rect">
-            <a:avLst/>
-          </a:prstGeom>
-          <a:noFill/>
-        </p:spPr>
-        <p:txBody>
-          <a:bodyPr wrap="square">
-            <a:spAutoFit/>
-          </a:bodyPr>
-          <a:lstStyle/>
-          <a:p>
-            <a:pPr>
-              <a:spcAft>
-                <a:spcPts val="700"/>
-              </a:spcAft>
-            </a:pPr>
-            <a:r>
-              <a:rPr sz="800">
+          <p:cNvPr id="17" name="TextBox 16"/>
+          <p:cNvSpPr txBox="1"/>
+          <p:nvPr/>
+        </p:nvSpPr>
+        <p:spPr>
+          <a:xfrm>
+            <a:off x="8064000" y="6012000"/>
+            <a:ext cx="3528000" cy="306000"/>
+          </a:xfrm>
+          <a:prstGeom prst="rect">
+            <a:avLst/>
+          </a:prstGeom>
+          <a:noFill/>
+        </p:spPr>
+        <p:txBody>
+          <a:bodyPr wrap="square" lIns="36000" rIns="36000" tIns="18000" bIns="18000" anchor="ctr">
+            <a:spAutoFit/>
+          </a:bodyPr>
+          <a:lstStyle/>
+          <a:p>
+            <a:pPr algn="ctr">
+              <a:lnSpc>
+                <a:spcPct val="110000"/>
+              </a:lnSpc>
+            </a:pPr>
+            <a:r>
+              <a:rPr sz="1100" b="1">
                 <a:solidFill>
                   <a:srgbClr val="FD8103"/>
                 </a:solidFill>
                 <a:latin typeface="Poppins"/>
               </a:rPr>
-              <a:t>■  </a:t>
-            </a:r>
-            <a:r>
-              <a:rPr sz="1200">
-                <a:solidFill>
-                  <a:srgbClr val="111111"/>
-                </a:solidFill>
-                <a:latin typeface="Poppins"/>
-              </a:rPr>
-              <a:t>Tourner 2 vidéos à l’usine</a:t>
-            </a:r>
-          </a:p>
-          <a:p>
-            <a:pPr>
-              <a:spcAft>
-                <a:spcPts val="700"/>
-              </a:spcAft>
-            </a:pPr>
-            <a:r>
-              <a:rPr sz="800">
-                <a:solidFill>
-                  <a:srgbClr val="FD8103"/>
-                </a:solidFill>
-                <a:latin typeface="Poppins"/>
-              </a:rPr>
-              <a:t>■  </a:t>
-            </a:r>
-            <a:r>
-              <a:rPr sz="1200">
-                <a:solidFill>
-                  <a:srgbClr val="111111"/>
-                </a:solidFill>
-                <a:latin typeface="Poppins"/>
-              </a:rPr>
-              <a:t>Publier la réponse du sondage</a:t>
-            </a:r>
-          </a:p>
-          <a:p>
-            <a:pPr>
-              <a:spcAft>
-                <a:spcPts val="700"/>
-              </a:spcAft>
-            </a:pPr>
-            <a:r>
-              <a:rPr sz="800">
-                <a:solidFill>
-                  <a:srgbClr val="FD8103"/>
-                </a:solidFill>
-                <a:latin typeface="Poppins"/>
-              </a:rPr>
-              <a:t>■  </a:t>
-            </a:r>
-            <a:r>
-              <a:rPr sz="1200">
-                <a:solidFill>
-                  <a:srgbClr val="111111"/>
-                </a:solidFill>
-                <a:latin typeface="Poppins"/>
-              </a:rPr>
-              <a:t>Publier 2 avant / après</a:t>
-            </a:r>
-          </a:p>
-        </p:txBody>
-      </p:sp>
-      <p:sp>
-        <p:nvSpPr>
-          <p:cNvPr id="24" name="Rounded Rectangle 23"/>
-          <p:cNvSpPr/>
-          <p:nvPr/>
-        </p:nvSpPr>
-        <p:spPr>
-          <a:xfrm>
-            <a:off x="9000000" y="1584000"/>
-            <a:ext cx="2628000" cy="576000"/>
-          </a:xfrm>
-          <a:prstGeom prst="roundRect">
-            <a:avLst/>
-          </a:prstGeom>
-          <a:solidFill>
-            <a:srgbClr val="4FB58B"/>
-          </a:solidFill>
-          <a:ln>
-            <a:noFill/>
-          </a:ln>
-          <a:effectLst/>
-        </p:spPr>
-        <p:style>
-          <a:lnRef idx="1">
-            <a:schemeClr val="accent1"/>
-          </a:lnRef>
-          <a:fillRef idx="3">
-            <a:schemeClr val="accent1"/>
-          </a:fillRef>
-          <a:effectRef idx="2">
-            <a:schemeClr val="accent1"/>
-          </a:effectRef>
-          <a:fontRef idx="minor">
-            <a:schemeClr val="lt1"/>
-          </a:fontRef>
-        </p:style>
-        <p:txBody>
-          <a:bodyPr rtlCol="0" anchor="ctr"/>
-          <a:lstStyle/>
-          <a:p>
-            <a:pPr algn="ctr"/>
-          </a:p>
-        </p:txBody>
-      </p:sp>
-      <p:pic>
-        <p:nvPicPr>
-          <p:cNvPr id="25" name="Picture 24" descr="trending-up_bl.png"/>
-          <p:cNvPicPr>
-            <a:picLocks noChangeAspect="1"/>
-          </p:cNvPicPr>
-          <p:nvPr/>
-        </p:nvPicPr>
-        <p:blipFill>
-          <a:blip r:embed="rId6"/>
-          <a:stretch>
-            <a:fillRect/>
-          </a:stretch>
-        </p:blipFill>
-        <p:spPr>
-          <a:xfrm>
-            <a:off x="9144000" y="1710000"/>
-            <a:ext cx="324000" cy="324000"/>
-          </a:xfrm>
-          <a:prstGeom prst="rect">
-            <a:avLst/>
-          </a:prstGeom>
-        </p:spPr>
-      </p:pic>
-      <p:sp>
-        <p:nvSpPr>
-          <p:cNvPr id="26" name="TextBox 25"/>
-          <p:cNvSpPr txBox="1"/>
-          <p:nvPr/>
-        </p:nvSpPr>
-        <p:spPr>
-          <a:xfrm>
-            <a:off x="9540000" y="1584000"/>
-            <a:ext cx="2015999" cy="576000"/>
-          </a:xfrm>
-          <a:prstGeom prst="rect">
-            <a:avLst/>
-          </a:prstGeom>
-          <a:noFill/>
-        </p:spPr>
-        <p:txBody>
-          <a:bodyPr wrap="square" lIns="36000" rIns="36000" tIns="18000" bIns="18000" anchor="ctr">
-            <a:spAutoFit/>
-          </a:bodyPr>
-          <a:lstStyle/>
-          <a:p>
-            <a:pPr algn="l">
-              <a:lnSpc>
-                <a:spcPct val="110000"/>
-              </a:lnSpc>
-            </a:pPr>
-            <a:r>
-              <a:rPr sz="1500" b="1">
-                <a:solidFill>
-                  <a:srgbClr val="FFFFFF"/>
-                </a:solidFill>
-                <a:latin typeface="Poppins"/>
-              </a:rPr>
-              <a:t>Semaine 4</a:t>
-            </a:r>
-          </a:p>
-        </p:txBody>
-      </p:sp>
-      <p:sp>
-        <p:nvSpPr>
-          <p:cNvPr id="27" name="Rounded Rectangle 26"/>
-          <p:cNvSpPr/>
-          <p:nvPr/>
-        </p:nvSpPr>
-        <p:spPr>
-          <a:xfrm>
-            <a:off x="9000000" y="2304000"/>
-            <a:ext cx="2628000" cy="2880000"/>
-          </a:xfrm>
-          <a:prstGeom prst="roundRect">
-            <a:avLst>
-              <a:gd name="adj" fmla="val 6000"/>
-            </a:avLst>
-          </a:prstGeom>
-          <a:solidFill>
-            <a:srgbClr val="F4F4F2"/>
-          </a:solidFill>
-          <a:ln>
-            <a:noFill/>
-          </a:ln>
-          <a:effectLst/>
-        </p:spPr>
-        <p:style>
-          <a:lnRef idx="1">
-            <a:schemeClr val="accent1"/>
-          </a:lnRef>
-          <a:fillRef idx="3">
-            <a:schemeClr val="accent1"/>
-          </a:fillRef>
-          <a:effectRef idx="2">
-            <a:schemeClr val="accent1"/>
-          </a:effectRef>
-          <a:fontRef idx="minor">
-            <a:schemeClr val="lt1"/>
-          </a:fontRef>
-        </p:style>
-        <p:txBody>
-          <a:bodyPr rtlCol="0" anchor="ctr"/>
-          <a:lstStyle/>
-          <a:p>
-            <a:pPr algn="ctr"/>
-          </a:p>
-        </p:txBody>
-      </p:sp>
-      <p:sp>
-        <p:nvSpPr>
-          <p:cNvPr id="28" name="TextBox 27"/>
-          <p:cNvSpPr txBox="1"/>
-          <p:nvPr/>
-        </p:nvSpPr>
-        <p:spPr>
-          <a:xfrm>
-            <a:off x="9144000" y="2448000"/>
-            <a:ext cx="2376000" cy="2664000"/>
-          </a:xfrm>
-          <a:prstGeom prst="rect">
-            <a:avLst/>
-          </a:prstGeom>
-          <a:noFill/>
-        </p:spPr>
-        <p:txBody>
-          <a:bodyPr wrap="square">
-            <a:spAutoFit/>
-          </a:bodyPr>
-          <a:lstStyle/>
-          <a:p>
-            <a:pPr>
-              <a:spcAft>
-                <a:spcPts val="700"/>
-              </a:spcAft>
-            </a:pPr>
-            <a:r>
-              <a:rPr sz="800">
-                <a:solidFill>
-                  <a:srgbClr val="FD8103"/>
-                </a:solidFill>
-                <a:latin typeface="Poppins"/>
-              </a:rPr>
-              <a:t>■  </a:t>
-            </a:r>
-            <a:r>
-              <a:rPr sz="1200">
-                <a:solidFill>
-                  <a:srgbClr val="111111"/>
-                </a:solidFill>
-                <a:latin typeface="Poppins"/>
-              </a:rPr>
-              <a:t>Comparer aux 8 J’aime de départ</a:t>
-            </a:r>
-          </a:p>
-          <a:p>
-            <a:pPr>
-              <a:spcAft>
-                <a:spcPts val="700"/>
-              </a:spcAft>
-            </a:pPr>
-            <a:r>
-              <a:rPr sz="800">
-                <a:solidFill>
-                  <a:srgbClr val="FD8103"/>
-                </a:solidFill>
-                <a:latin typeface="Poppins"/>
-              </a:rPr>
-              <a:t>■  </a:t>
-            </a:r>
-            <a:r>
-              <a:rPr sz="1200">
-                <a:solidFill>
-                  <a:srgbClr val="111111"/>
-                </a:solidFill>
-                <a:latin typeface="Poppins"/>
-              </a:rPr>
-              <a:t>Compter les demandes de devis</a:t>
-            </a:r>
-          </a:p>
-          <a:p>
-            <a:pPr>
-              <a:spcAft>
-                <a:spcPts val="700"/>
-              </a:spcAft>
-            </a:pPr>
-            <a:r>
-              <a:rPr sz="800">
-                <a:solidFill>
-                  <a:srgbClr val="FD8103"/>
-                </a:solidFill>
-                <a:latin typeface="Poppins"/>
-              </a:rPr>
-              <a:t>■  </a:t>
-            </a:r>
-            <a:r>
-              <a:rPr sz="1200">
-                <a:solidFill>
-                  <a:srgbClr val="111111"/>
-                </a:solidFill>
-                <a:latin typeface="Poppins"/>
-              </a:rPr>
-              <a:t>Préparer décembre</a:t>
-            </a:r>
-          </a:p>
-        </p:txBody>
-      </p:sp>
-      <p:sp>
-        <p:nvSpPr>
-          <p:cNvPr id="29" name="Rounded Rectangle 28"/>
-          <p:cNvSpPr/>
-          <p:nvPr/>
-        </p:nvSpPr>
-        <p:spPr>
-          <a:xfrm>
-            <a:off x="576000" y="5364000"/>
-            <a:ext cx="11052000" cy="864000"/>
-          </a:xfrm>
-          <a:prstGeom prst="roundRect">
-            <a:avLst>
-              <a:gd name="adj" fmla="val 6000"/>
-            </a:avLst>
-          </a:prstGeom>
-          <a:solidFill>
-            <a:srgbClr val="14251C"/>
-          </a:solidFill>
-          <a:ln>
-            <a:noFill/>
-          </a:ln>
-          <a:effectLst/>
-        </p:spPr>
-        <p:style>
-          <a:lnRef idx="1">
-            <a:schemeClr val="accent1"/>
-          </a:lnRef>
-          <a:fillRef idx="3">
-            <a:schemeClr val="accent1"/>
-          </a:fillRef>
-          <a:effectRef idx="2">
-            <a:schemeClr val="accent1"/>
-          </a:effectRef>
-          <a:fontRef idx="minor">
-            <a:schemeClr val="lt1"/>
-          </a:fontRef>
-        </p:style>
-        <p:txBody>
-          <a:bodyPr rtlCol="0" anchor="ctr"/>
-          <a:lstStyle/>
-          <a:p>
-            <a:pPr algn="ctr"/>
-          </a:p>
-        </p:txBody>
-      </p:sp>
-      <p:pic>
-        <p:nvPicPr>
-          <p:cNvPr id="30" name="Picture 29" descr="target-arrow_bl.png"/>
-          <p:cNvPicPr>
-            <a:picLocks noChangeAspect="1"/>
-          </p:cNvPicPr>
-          <p:nvPr/>
-        </p:nvPicPr>
-        <p:blipFill>
-          <a:blip r:embed="rId7"/>
-          <a:stretch>
-            <a:fillRect/>
-          </a:stretch>
-        </p:blipFill>
-        <p:spPr>
-          <a:xfrm>
-            <a:off x="792000" y="5544000"/>
-            <a:ext cx="503999" cy="503999"/>
-          </a:xfrm>
-          <a:prstGeom prst="rect">
-            <a:avLst/>
-          </a:prstGeom>
-        </p:spPr>
-      </p:pic>
-      <p:sp>
-        <p:nvSpPr>
-          <p:cNvPr id="31" name="TextBox 30"/>
-          <p:cNvSpPr txBox="1"/>
-          <p:nvPr/>
-        </p:nvSpPr>
-        <p:spPr>
-          <a:xfrm>
-            <a:off x="1440000" y="5364000"/>
-            <a:ext cx="10008000" cy="864000"/>
-          </a:xfrm>
-          <a:prstGeom prst="rect">
-            <a:avLst/>
-          </a:prstGeom>
-          <a:noFill/>
-        </p:spPr>
-        <p:txBody>
-          <a:bodyPr wrap="square" lIns="36000" rIns="36000" tIns="18000" bIns="18000" anchor="ctr">
-            <a:spAutoFit/>
-          </a:bodyPr>
-          <a:lstStyle/>
-          <a:p>
-            <a:pPr algn="l">
-              <a:lnSpc>
-                <a:spcPct val="110000"/>
-              </a:lnSpc>
-            </a:pPr>
-            <a:r>
-              <a:rPr sz="1300" b="1">
-                <a:solidFill>
-                  <a:srgbClr val="FFFFFF"/>
-                </a:solidFill>
-                <a:latin typeface="Poppins"/>
-              </a:rPr>
-              <a:t>Objectif proposé à 30 jours : passer de 8 à 20 J’aime médians sur LinkedIn, et compter chaque demande de devis venue des réseaux.</a:t>
+              <a:t>Style fiche sombre</a:t>
             </a:r>
           </a:p>
         </p:txBody>
@@ -19548,7 +18758,7 @@
                 </a:solidFill>
                 <a:latin typeface="Poppins"/>
               </a:rPr>
-              <a:t>TABLEAU DE BORD</a:t>
+              <a:t>NOUVELLE LIGNE DE FLYERS · 2 SUR 2</a:t>
             </a:r>
           </a:p>
         </p:txBody>
@@ -19587,7 +18797,7 @@
                 </a:solidFill>
                 <a:latin typeface="Poppins"/>
               </a:rPr>
-              <a:t>Les chiffres à suivre chaque semaine</a:t>
+              <a:t>Trois styles qui alternent pour un fil varié</a:t>
             </a:r>
           </a:p>
         </p:txBody>
@@ -19671,6 +18881,2012 @@
                 <a:latin typeface="Poppins"/>
               </a:rPr>
               <a:t>22 / 23</a:t>
+            </a:r>
+          </a:p>
+        </p:txBody>
+      </p:sp>
+      <p:sp>
+        <p:nvSpPr>
+          <p:cNvPr id="8" name="TextBox 7"/>
+          <p:cNvSpPr txBox="1"/>
+          <p:nvPr/>
+        </p:nvSpPr>
+        <p:spPr>
+          <a:xfrm>
+            <a:off x="576000" y="6498000"/>
+            <a:ext cx="7920000" cy="216000"/>
+          </a:xfrm>
+          <a:prstGeom prst="rect">
+            <a:avLst/>
+          </a:prstGeom>
+          <a:noFill/>
+        </p:spPr>
+        <p:txBody>
+          <a:bodyPr wrap="square" lIns="36000" rIns="36000" tIns="18000" bIns="18000" anchor="t">
+            <a:spAutoFit/>
+          </a:bodyPr>
+          <a:lstStyle/>
+          <a:p>
+            <a:pPr algn="l">
+              <a:lnSpc>
+                <a:spcPct val="110000"/>
+              </a:lnSpc>
+            </a:pPr>
+            <a:r>
+              <a:rPr sz="900" b="0">
+                <a:solidFill>
+                  <a:srgbClr val="5A5A5A"/>
+                </a:solidFill>
+                <a:latin typeface="Poppins"/>
+              </a:rPr>
+              <a:t>COTIPLAST · Audit réseaux sociaux · relevé du 28/10/2026</a:t>
+            </a:r>
+          </a:p>
+        </p:txBody>
+      </p:sp>
+      <p:pic>
+        <p:nvPicPr>
+          <p:cNvPr id="9" name="Picture 8" descr="n_c4.jpg"/>
+          <p:cNvPicPr>
+            <a:picLocks noChangeAspect="1"/>
+          </p:cNvPicPr>
+          <p:nvPr/>
+        </p:nvPicPr>
+        <p:blipFill>
+          <a:blip r:embed="rId3"/>
+          <a:stretch>
+            <a:fillRect/>
+          </a:stretch>
+        </p:blipFill>
+        <p:spPr>
+          <a:xfrm>
+            <a:off x="576000" y="1512000"/>
+            <a:ext cx="3528000" cy="4410000"/>
+          </a:xfrm>
+          <a:prstGeom prst="rect">
+            <a:avLst/>
+          </a:prstGeom>
+        </p:spPr>
+      </p:pic>
+      <p:sp>
+        <p:nvSpPr>
+          <p:cNvPr id="10" name="Rounded Rectangle 9"/>
+          <p:cNvSpPr/>
+          <p:nvPr/>
+        </p:nvSpPr>
+        <p:spPr>
+          <a:xfrm>
+            <a:off x="576000" y="6012000"/>
+            <a:ext cx="3528000" cy="306000"/>
+          </a:xfrm>
+          <a:prstGeom prst="roundRect">
+            <a:avLst/>
+          </a:prstGeom>
+          <a:solidFill>
+            <a:srgbClr val="E4F4EC"/>
+          </a:solidFill>
+          <a:ln>
+            <a:noFill/>
+          </a:ln>
+          <a:effectLst/>
+        </p:spPr>
+        <p:style>
+          <a:lnRef idx="1">
+            <a:schemeClr val="accent1"/>
+          </a:lnRef>
+          <a:fillRef idx="3">
+            <a:schemeClr val="accent1"/>
+          </a:fillRef>
+          <a:effectRef idx="2">
+            <a:schemeClr val="accent1"/>
+          </a:effectRef>
+          <a:fontRef idx="minor">
+            <a:schemeClr val="lt1"/>
+          </a:fontRef>
+        </p:style>
+        <p:txBody>
+          <a:bodyPr rtlCol="0" anchor="ctr"/>
+          <a:lstStyle/>
+          <a:p>
+            <a:pPr algn="ctr"/>
+          </a:p>
+        </p:txBody>
+      </p:sp>
+      <p:sp>
+        <p:nvSpPr>
+          <p:cNvPr id="11" name="TextBox 10"/>
+          <p:cNvSpPr txBox="1"/>
+          <p:nvPr/>
+        </p:nvSpPr>
+        <p:spPr>
+          <a:xfrm>
+            <a:off x="576000" y="6012000"/>
+            <a:ext cx="3528000" cy="306000"/>
+          </a:xfrm>
+          <a:prstGeom prst="rect">
+            <a:avLst/>
+          </a:prstGeom>
+          <a:noFill/>
+        </p:spPr>
+        <p:txBody>
+          <a:bodyPr wrap="square" lIns="36000" rIns="36000" tIns="18000" bIns="18000" anchor="ctr">
+            <a:spAutoFit/>
+          </a:bodyPr>
+          <a:lstStyle/>
+          <a:p>
+            <a:pPr algn="ctr">
+              <a:lnSpc>
+                <a:spcPct val="110000"/>
+              </a:lnSpc>
+            </a:pPr>
+            <a:r>
+              <a:rPr sz="1100" b="1">
+                <a:solidFill>
+                  <a:srgbClr val="FD8103"/>
+                </a:solidFill>
+                <a:latin typeface="Poppins"/>
+              </a:rPr>
+              <a:t>Style éditorial</a:t>
+            </a:r>
+          </a:p>
+        </p:txBody>
+      </p:sp>
+      <p:pic>
+        <p:nvPicPr>
+          <p:cNvPr id="12" name="Picture 11" descr="n_c5.jpg"/>
+          <p:cNvPicPr>
+            <a:picLocks noChangeAspect="1"/>
+          </p:cNvPicPr>
+          <p:nvPr/>
+        </p:nvPicPr>
+        <p:blipFill>
+          <a:blip r:embed="rId4"/>
+          <a:stretch>
+            <a:fillRect/>
+          </a:stretch>
+        </p:blipFill>
+        <p:spPr>
+          <a:xfrm>
+            <a:off x="4320000" y="1512000"/>
+            <a:ext cx="3528000" cy="4410000"/>
+          </a:xfrm>
+          <a:prstGeom prst="rect">
+            <a:avLst/>
+          </a:prstGeom>
+        </p:spPr>
+      </p:pic>
+      <p:sp>
+        <p:nvSpPr>
+          <p:cNvPr id="13" name="Rounded Rectangle 12"/>
+          <p:cNvSpPr/>
+          <p:nvPr/>
+        </p:nvSpPr>
+        <p:spPr>
+          <a:xfrm>
+            <a:off x="4320000" y="6012000"/>
+            <a:ext cx="3528000" cy="306000"/>
+          </a:xfrm>
+          <a:prstGeom prst="roundRect">
+            <a:avLst/>
+          </a:prstGeom>
+          <a:solidFill>
+            <a:srgbClr val="E4F4EC"/>
+          </a:solidFill>
+          <a:ln>
+            <a:noFill/>
+          </a:ln>
+          <a:effectLst/>
+        </p:spPr>
+        <p:style>
+          <a:lnRef idx="1">
+            <a:schemeClr val="accent1"/>
+          </a:lnRef>
+          <a:fillRef idx="3">
+            <a:schemeClr val="accent1"/>
+          </a:fillRef>
+          <a:effectRef idx="2">
+            <a:schemeClr val="accent1"/>
+          </a:effectRef>
+          <a:fontRef idx="minor">
+            <a:schemeClr val="lt1"/>
+          </a:fontRef>
+        </p:style>
+        <p:txBody>
+          <a:bodyPr rtlCol="0" anchor="ctr"/>
+          <a:lstStyle/>
+          <a:p>
+            <a:pPr algn="ctr"/>
+          </a:p>
+        </p:txBody>
+      </p:sp>
+      <p:sp>
+        <p:nvSpPr>
+          <p:cNvPr id="14" name="TextBox 13"/>
+          <p:cNvSpPr txBox="1"/>
+          <p:nvPr/>
+        </p:nvSpPr>
+        <p:spPr>
+          <a:xfrm>
+            <a:off x="4320000" y="6012000"/>
+            <a:ext cx="3528000" cy="306000"/>
+          </a:xfrm>
+          <a:prstGeom prst="rect">
+            <a:avLst/>
+          </a:prstGeom>
+          <a:noFill/>
+        </p:spPr>
+        <p:txBody>
+          <a:bodyPr wrap="square" lIns="36000" rIns="36000" tIns="18000" bIns="18000" anchor="ctr">
+            <a:spAutoFit/>
+          </a:bodyPr>
+          <a:lstStyle/>
+          <a:p>
+            <a:pPr algn="ctr">
+              <a:lnSpc>
+                <a:spcPct val="110000"/>
+              </a:lnSpc>
+            </a:pPr>
+            <a:r>
+              <a:rPr sz="1100" b="1">
+                <a:solidFill>
+                  <a:srgbClr val="FD8103"/>
+                </a:solidFill>
+                <a:latin typeface="Poppins"/>
+              </a:rPr>
+              <a:t>Style aplat couleur</a:t>
+            </a:r>
+          </a:p>
+        </p:txBody>
+      </p:sp>
+      <p:pic>
+        <p:nvPicPr>
+          <p:cNvPr id="15" name="Picture 14" descr="n_c6.jpg"/>
+          <p:cNvPicPr>
+            <a:picLocks noChangeAspect="1"/>
+          </p:cNvPicPr>
+          <p:nvPr/>
+        </p:nvPicPr>
+        <p:blipFill>
+          <a:blip r:embed="rId5"/>
+          <a:stretch>
+            <a:fillRect/>
+          </a:stretch>
+        </p:blipFill>
+        <p:spPr>
+          <a:xfrm>
+            <a:off x="8064000" y="1512000"/>
+            <a:ext cx="3528000" cy="4410000"/>
+          </a:xfrm>
+          <a:prstGeom prst="rect">
+            <a:avLst/>
+          </a:prstGeom>
+        </p:spPr>
+      </p:pic>
+      <p:sp>
+        <p:nvSpPr>
+          <p:cNvPr id="16" name="Rounded Rectangle 15"/>
+          <p:cNvSpPr/>
+          <p:nvPr/>
+        </p:nvSpPr>
+        <p:spPr>
+          <a:xfrm>
+            <a:off x="8064000" y="6012000"/>
+            <a:ext cx="3528000" cy="306000"/>
+          </a:xfrm>
+          <a:prstGeom prst="roundRect">
+            <a:avLst/>
+          </a:prstGeom>
+          <a:solidFill>
+            <a:srgbClr val="E4F4EC"/>
+          </a:solidFill>
+          <a:ln>
+            <a:noFill/>
+          </a:ln>
+          <a:effectLst/>
+        </p:spPr>
+        <p:style>
+          <a:lnRef idx="1">
+            <a:schemeClr val="accent1"/>
+          </a:lnRef>
+          <a:fillRef idx="3">
+            <a:schemeClr val="accent1"/>
+          </a:fillRef>
+          <a:effectRef idx="2">
+            <a:schemeClr val="accent1"/>
+          </a:effectRef>
+          <a:fontRef idx="minor">
+            <a:schemeClr val="lt1"/>
+          </a:fontRef>
+        </p:style>
+        <p:txBody>
+          <a:bodyPr rtlCol="0" anchor="ctr"/>
+          <a:lstStyle/>
+          <a:p>
+            <a:pPr algn="ctr"/>
+          </a:p>
+        </p:txBody>
+      </p:sp>
+      <p:sp>
+        <p:nvSpPr>
+          <p:cNvPr id="17" name="TextBox 16"/>
+          <p:cNvSpPr txBox="1"/>
+          <p:nvPr/>
+        </p:nvSpPr>
+        <p:spPr>
+          <a:xfrm>
+            <a:off x="8064000" y="6012000"/>
+            <a:ext cx="3528000" cy="306000"/>
+          </a:xfrm>
+          <a:prstGeom prst="rect">
+            <a:avLst/>
+          </a:prstGeom>
+          <a:noFill/>
+        </p:spPr>
+        <p:txBody>
+          <a:bodyPr wrap="square" lIns="36000" rIns="36000" tIns="18000" bIns="18000" anchor="ctr">
+            <a:spAutoFit/>
+          </a:bodyPr>
+          <a:lstStyle/>
+          <a:p>
+            <a:pPr algn="ctr">
+              <a:lnSpc>
+                <a:spcPct val="110000"/>
+              </a:lnSpc>
+            </a:pPr>
+            <a:r>
+              <a:rPr sz="1100" b="1">
+                <a:solidFill>
+                  <a:srgbClr val="FD8103"/>
+                </a:solidFill>
+                <a:latin typeface="Poppins"/>
+              </a:rPr>
+              <a:t>Style fiche sombre</a:t>
+            </a:r>
+          </a:p>
+        </p:txBody>
+      </p:sp>
+    </p:spTree>
+  </p:cSld>
+  <p:clrMapOvr>
+    <a:masterClrMapping/>
+  </p:clrMapOvr>
+</p:sld>
+</file>
+
+<file path=ppt/slides/slide23.xml><?xml version="1.0" encoding="utf-8"?>
+<p:sld xmlns:a="http://schemas.openxmlformats.org/drawingml/2006/main" xmlns:p="http://schemas.openxmlformats.org/presentationml/2006/main" xmlns:r="http://schemas.openxmlformats.org/officeDocument/2006/relationships">
+  <p:cSld>
+    <p:spTree>
+      <p:nvGrpSpPr>
+        <p:cNvPr id="1" name=""/>
+        <p:cNvGrpSpPr/>
+        <p:nvPr/>
+      </p:nvGrpSpPr>
+      <p:grpSpPr/>
+      <p:sp>
+        <p:nvSpPr>
+          <p:cNvPr id="2" name="Rectangle 1"/>
+          <p:cNvSpPr/>
+          <p:nvPr/>
+        </p:nvSpPr>
+        <p:spPr>
+          <a:xfrm>
+            <a:off x="0" y="0"/>
+            <a:ext cx="180000" cy="6858000"/>
+          </a:xfrm>
+          <a:prstGeom prst="rect">
+            <a:avLst/>
+          </a:prstGeom>
+          <a:solidFill>
+            <a:srgbClr val="FD8103"/>
+          </a:solidFill>
+          <a:ln>
+            <a:noFill/>
+          </a:ln>
+          <a:effectLst/>
+        </p:spPr>
+        <p:style>
+          <a:lnRef idx="1">
+            <a:schemeClr val="accent1"/>
+          </a:lnRef>
+          <a:fillRef idx="3">
+            <a:schemeClr val="accent1"/>
+          </a:fillRef>
+          <a:effectRef idx="2">
+            <a:schemeClr val="accent1"/>
+          </a:effectRef>
+          <a:fontRef idx="minor">
+            <a:schemeClr val="lt1"/>
+          </a:fontRef>
+        </p:style>
+        <p:txBody>
+          <a:bodyPr rtlCol="0" anchor="ctr"/>
+          <a:lstStyle/>
+          <a:p>
+            <a:pPr algn="ctr"/>
+          </a:p>
+        </p:txBody>
+      </p:sp>
+      <p:pic>
+        <p:nvPicPr>
+          <p:cNvPr id="3" name="Picture 2" descr="logo-cotiplast.png"/>
+          <p:cNvPicPr>
+            <a:picLocks noChangeAspect="1"/>
+          </p:cNvPicPr>
+          <p:nvPr/>
+        </p:nvPicPr>
+        <p:blipFill>
+          <a:blip r:embed="rId2"/>
+          <a:stretch>
+            <a:fillRect/>
+          </a:stretch>
+        </p:blipFill>
+        <p:spPr>
+          <a:xfrm>
+            <a:off x="10593875" y="216000"/>
+            <a:ext cx="820489" cy="576000"/>
+          </a:xfrm>
+          <a:prstGeom prst="rect">
+            <a:avLst/>
+          </a:prstGeom>
+        </p:spPr>
+      </p:pic>
+      <p:sp>
+        <p:nvSpPr>
+          <p:cNvPr id="4" name="TextBox 3"/>
+          <p:cNvSpPr txBox="1"/>
+          <p:nvPr/>
+        </p:nvSpPr>
+        <p:spPr>
+          <a:xfrm>
+            <a:off x="576000" y="324000"/>
+            <a:ext cx="8640000" cy="288000"/>
+          </a:xfrm>
+          <a:prstGeom prst="rect">
+            <a:avLst/>
+          </a:prstGeom>
+          <a:noFill/>
+        </p:spPr>
+        <p:txBody>
+          <a:bodyPr wrap="square" lIns="36000" rIns="36000" tIns="18000" bIns="18000" anchor="t">
+            <a:spAutoFit/>
+          </a:bodyPr>
+          <a:lstStyle/>
+          <a:p>
+            <a:pPr algn="l">
+              <a:lnSpc>
+                <a:spcPct val="110000"/>
+              </a:lnSpc>
+            </a:pPr>
+            <a:r>
+              <a:rPr sz="1100" b="1">
+                <a:solidFill>
+                  <a:srgbClr val="FD8103"/>
+                </a:solidFill>
+                <a:latin typeface="Poppins"/>
+              </a:rPr>
+              <a:t>PLAN 30 JOURS</a:t>
+            </a:r>
+          </a:p>
+        </p:txBody>
+      </p:sp>
+      <p:sp>
+        <p:nvSpPr>
+          <p:cNvPr id="5" name="TextBox 4"/>
+          <p:cNvSpPr txBox="1"/>
+          <p:nvPr/>
+        </p:nvSpPr>
+        <p:spPr>
+          <a:xfrm>
+            <a:off x="576000" y="576000"/>
+            <a:ext cx="9180000" cy="720000"/>
+          </a:xfrm>
+          <a:prstGeom prst="rect">
+            <a:avLst/>
+          </a:prstGeom>
+          <a:noFill/>
+        </p:spPr>
+        <p:txBody>
+          <a:bodyPr wrap="square" lIns="36000" rIns="36000" tIns="18000" bIns="18000" anchor="t">
+            <a:spAutoFit/>
+          </a:bodyPr>
+          <a:lstStyle/>
+          <a:p>
+            <a:pPr algn="l">
+              <a:lnSpc>
+                <a:spcPct val="110000"/>
+              </a:lnSpc>
+            </a:pPr>
+            <a:r>
+              <a:rPr sz="2500" b="1">
+                <a:solidFill>
+                  <a:srgbClr val="111111"/>
+                </a:solidFill>
+                <a:latin typeface="Poppins"/>
+              </a:rPr>
+              <a:t>Le premier mois, semaine par semaine</a:t>
+            </a:r>
+          </a:p>
+        </p:txBody>
+      </p:sp>
+      <p:sp>
+        <p:nvSpPr>
+          <p:cNvPr id="6" name="Rectangle 5"/>
+          <p:cNvSpPr/>
+          <p:nvPr/>
+        </p:nvSpPr>
+        <p:spPr>
+          <a:xfrm>
+            <a:off x="576000" y="1278000"/>
+            <a:ext cx="792000" cy="50400"/>
+          </a:xfrm>
+          <a:prstGeom prst="rect">
+            <a:avLst/>
+          </a:prstGeom>
+          <a:solidFill>
+            <a:srgbClr val="4FB58B"/>
+          </a:solidFill>
+          <a:ln>
+            <a:noFill/>
+          </a:ln>
+          <a:effectLst/>
+        </p:spPr>
+        <p:style>
+          <a:lnRef idx="1">
+            <a:schemeClr val="accent1"/>
+          </a:lnRef>
+          <a:fillRef idx="3">
+            <a:schemeClr val="accent1"/>
+          </a:fillRef>
+          <a:effectRef idx="2">
+            <a:schemeClr val="accent1"/>
+          </a:effectRef>
+          <a:fontRef idx="minor">
+            <a:schemeClr val="lt1"/>
+          </a:fontRef>
+        </p:style>
+        <p:txBody>
+          <a:bodyPr rtlCol="0" anchor="ctr"/>
+          <a:lstStyle/>
+          <a:p>
+            <a:pPr algn="ctr"/>
+          </a:p>
+        </p:txBody>
+      </p:sp>
+      <p:sp>
+        <p:nvSpPr>
+          <p:cNvPr id="7" name="TextBox 6"/>
+          <p:cNvSpPr txBox="1"/>
+          <p:nvPr/>
+        </p:nvSpPr>
+        <p:spPr>
+          <a:xfrm>
+            <a:off x="10572119" y="6498000"/>
+            <a:ext cx="1296000" cy="216000"/>
+          </a:xfrm>
+          <a:prstGeom prst="rect">
+            <a:avLst/>
+          </a:prstGeom>
+          <a:noFill/>
+        </p:spPr>
+        <p:txBody>
+          <a:bodyPr wrap="square" lIns="36000" rIns="36000" tIns="18000" bIns="18000" anchor="t">
+            <a:spAutoFit/>
+          </a:bodyPr>
+          <a:lstStyle/>
+          <a:p>
+            <a:pPr algn="r">
+              <a:lnSpc>
+                <a:spcPct val="110000"/>
+              </a:lnSpc>
+            </a:pPr>
+            <a:r>
+              <a:rPr sz="900" b="0">
+                <a:solidFill>
+                  <a:srgbClr val="5A5A5A"/>
+                </a:solidFill>
+                <a:latin typeface="Poppins"/>
+              </a:rPr>
+              <a:t>23 / 23</a:t>
+            </a:r>
+          </a:p>
+        </p:txBody>
+      </p:sp>
+      <p:sp>
+        <p:nvSpPr>
+          <p:cNvPr id="8" name="TextBox 7"/>
+          <p:cNvSpPr txBox="1"/>
+          <p:nvPr/>
+        </p:nvSpPr>
+        <p:spPr>
+          <a:xfrm>
+            <a:off x="576000" y="6498000"/>
+            <a:ext cx="7920000" cy="216000"/>
+          </a:xfrm>
+          <a:prstGeom prst="rect">
+            <a:avLst/>
+          </a:prstGeom>
+          <a:noFill/>
+        </p:spPr>
+        <p:txBody>
+          <a:bodyPr wrap="square" lIns="36000" rIns="36000" tIns="18000" bIns="18000" anchor="t">
+            <a:spAutoFit/>
+          </a:bodyPr>
+          <a:lstStyle/>
+          <a:p>
+            <a:pPr algn="l">
+              <a:lnSpc>
+                <a:spcPct val="110000"/>
+              </a:lnSpc>
+            </a:pPr>
+            <a:r>
+              <a:rPr sz="900" b="0">
+                <a:solidFill>
+                  <a:srgbClr val="5A5A5A"/>
+                </a:solidFill>
+                <a:latin typeface="Poppins"/>
+              </a:rPr>
+              <a:t>COTIPLAST · Audit réseaux sociaux · relevé du 28/10/2026</a:t>
+            </a:r>
+          </a:p>
+        </p:txBody>
+      </p:sp>
+      <p:sp>
+        <p:nvSpPr>
+          <p:cNvPr id="9" name="Rounded Rectangle 8"/>
+          <p:cNvSpPr/>
+          <p:nvPr/>
+        </p:nvSpPr>
+        <p:spPr>
+          <a:xfrm>
+            <a:off x="576000" y="1584000"/>
+            <a:ext cx="2628000" cy="576000"/>
+          </a:xfrm>
+          <a:prstGeom prst="roundRect">
+            <a:avLst/>
+          </a:prstGeom>
+          <a:solidFill>
+            <a:srgbClr val="FD8103"/>
+          </a:solidFill>
+          <a:ln>
+            <a:noFill/>
+          </a:ln>
+          <a:effectLst/>
+        </p:spPr>
+        <p:style>
+          <a:lnRef idx="1">
+            <a:schemeClr val="accent1"/>
+          </a:lnRef>
+          <a:fillRef idx="3">
+            <a:schemeClr val="accent1"/>
+          </a:fillRef>
+          <a:effectRef idx="2">
+            <a:schemeClr val="accent1"/>
+          </a:effectRef>
+          <a:fontRef idx="minor">
+            <a:schemeClr val="lt1"/>
+          </a:fontRef>
+        </p:style>
+        <p:txBody>
+          <a:bodyPr rtlCol="0" anchor="ctr"/>
+          <a:lstStyle/>
+          <a:p>
+            <a:pPr algn="ctr"/>
+          </a:p>
+        </p:txBody>
+      </p:sp>
+      <p:pic>
+        <p:nvPicPr>
+          <p:cNvPr id="10" name="Picture 9" descr="calendar-event_bl.png"/>
+          <p:cNvPicPr>
+            <a:picLocks noChangeAspect="1"/>
+          </p:cNvPicPr>
+          <p:nvPr/>
+        </p:nvPicPr>
+        <p:blipFill>
+          <a:blip r:embed="rId3"/>
+          <a:stretch>
+            <a:fillRect/>
+          </a:stretch>
+        </p:blipFill>
+        <p:spPr>
+          <a:xfrm>
+            <a:off x="720000" y="1710000"/>
+            <a:ext cx="324000" cy="324000"/>
+          </a:xfrm>
+          <a:prstGeom prst="rect">
+            <a:avLst/>
+          </a:prstGeom>
+        </p:spPr>
+      </p:pic>
+      <p:sp>
+        <p:nvSpPr>
+          <p:cNvPr id="11" name="TextBox 10"/>
+          <p:cNvSpPr txBox="1"/>
+          <p:nvPr/>
+        </p:nvSpPr>
+        <p:spPr>
+          <a:xfrm>
+            <a:off x="1116000" y="1584000"/>
+            <a:ext cx="2015999" cy="576000"/>
+          </a:xfrm>
+          <a:prstGeom prst="rect">
+            <a:avLst/>
+          </a:prstGeom>
+          <a:noFill/>
+        </p:spPr>
+        <p:txBody>
+          <a:bodyPr wrap="square" lIns="36000" rIns="36000" tIns="18000" bIns="18000" anchor="ctr">
+            <a:spAutoFit/>
+          </a:bodyPr>
+          <a:lstStyle/>
+          <a:p>
+            <a:pPr algn="l">
+              <a:lnSpc>
+                <a:spcPct val="110000"/>
+              </a:lnSpc>
+            </a:pPr>
+            <a:r>
+              <a:rPr sz="1500" b="1">
+                <a:solidFill>
+                  <a:srgbClr val="FFFFFF"/>
+                </a:solidFill>
+                <a:latin typeface="Poppins"/>
+              </a:rPr>
+              <a:t>Semaine 1</a:t>
+            </a:r>
+          </a:p>
+        </p:txBody>
+      </p:sp>
+      <p:sp>
+        <p:nvSpPr>
+          <p:cNvPr id="12" name="Rounded Rectangle 11"/>
+          <p:cNvSpPr/>
+          <p:nvPr/>
+        </p:nvSpPr>
+        <p:spPr>
+          <a:xfrm>
+            <a:off x="576000" y="2304000"/>
+            <a:ext cx="2628000" cy="2880000"/>
+          </a:xfrm>
+          <a:prstGeom prst="roundRect">
+            <a:avLst>
+              <a:gd name="adj" fmla="val 6000"/>
+            </a:avLst>
+          </a:prstGeom>
+          <a:solidFill>
+            <a:srgbClr val="F4F4F2"/>
+          </a:solidFill>
+          <a:ln>
+            <a:noFill/>
+          </a:ln>
+          <a:effectLst/>
+        </p:spPr>
+        <p:style>
+          <a:lnRef idx="1">
+            <a:schemeClr val="accent1"/>
+          </a:lnRef>
+          <a:fillRef idx="3">
+            <a:schemeClr val="accent1"/>
+          </a:fillRef>
+          <a:effectRef idx="2">
+            <a:schemeClr val="accent1"/>
+          </a:effectRef>
+          <a:fontRef idx="minor">
+            <a:schemeClr val="lt1"/>
+          </a:fontRef>
+        </p:style>
+        <p:txBody>
+          <a:bodyPr rtlCol="0" anchor="ctr"/>
+          <a:lstStyle/>
+          <a:p>
+            <a:pPr algn="ctr"/>
+          </a:p>
+        </p:txBody>
+      </p:sp>
+      <p:sp>
+        <p:nvSpPr>
+          <p:cNvPr id="13" name="TextBox 12"/>
+          <p:cNvSpPr txBox="1"/>
+          <p:nvPr/>
+        </p:nvSpPr>
+        <p:spPr>
+          <a:xfrm>
+            <a:off x="720000" y="2448000"/>
+            <a:ext cx="2376000" cy="2664000"/>
+          </a:xfrm>
+          <a:prstGeom prst="rect">
+            <a:avLst/>
+          </a:prstGeom>
+          <a:noFill/>
+        </p:spPr>
+        <p:txBody>
+          <a:bodyPr wrap="square">
+            <a:spAutoFit/>
+          </a:bodyPr>
+          <a:lstStyle/>
+          <a:p>
+            <a:pPr>
+              <a:spcAft>
+                <a:spcPts val="700"/>
+              </a:spcAft>
+            </a:pPr>
+            <a:r>
+              <a:rPr sz="800">
+                <a:solidFill>
+                  <a:srgbClr val="FD8103"/>
+                </a:solidFill>
+                <a:latin typeface="Poppins"/>
+              </a:rPr>
+              <a:t>■  </a:t>
+            </a:r>
+            <a:r>
+              <a:rPr sz="1200">
+                <a:solidFill>
+                  <a:srgbClr val="111111"/>
+                </a:solidFill>
+                <a:latin typeface="Poppins"/>
+              </a:rPr>
+              <a:t>Valider les 6 publications refaites</a:t>
+            </a:r>
+          </a:p>
+          <a:p>
+            <a:pPr>
+              <a:spcAft>
+                <a:spcPts val="700"/>
+              </a:spcAft>
+            </a:pPr>
+            <a:r>
+              <a:rPr sz="800">
+                <a:solidFill>
+                  <a:srgbClr val="FD8103"/>
+                </a:solidFill>
+                <a:latin typeface="Poppins"/>
+              </a:rPr>
+              <a:t>■  </a:t>
+            </a:r>
+            <a:r>
+              <a:rPr sz="1200">
+                <a:solidFill>
+                  <a:srgbClr val="111111"/>
+                </a:solidFill>
+                <a:latin typeface="Poppins"/>
+              </a:rPr>
+              <a:t>Choisir la page Facebook à garder</a:t>
+            </a:r>
+          </a:p>
+          <a:p>
+            <a:pPr>
+              <a:spcAft>
+                <a:spcPts val="700"/>
+              </a:spcAft>
+            </a:pPr>
+            <a:r>
+              <a:rPr sz="800">
+                <a:solidFill>
+                  <a:srgbClr val="FD8103"/>
+                </a:solidFill>
+                <a:latin typeface="Poppins"/>
+              </a:rPr>
+              <a:t>■  </a:t>
+            </a:r>
+            <a:r>
+              <a:rPr sz="1200">
+                <a:solidFill>
+                  <a:srgbClr val="111111"/>
+                </a:solidFill>
+                <a:latin typeface="Poppins"/>
+              </a:rPr>
+              <a:t>Lister 10 photos d’usine récentes</a:t>
+            </a:r>
+          </a:p>
+        </p:txBody>
+      </p:sp>
+      <p:sp>
+        <p:nvSpPr>
+          <p:cNvPr id="14" name="Rounded Rectangle 13"/>
+          <p:cNvSpPr/>
+          <p:nvPr/>
+        </p:nvSpPr>
+        <p:spPr>
+          <a:xfrm>
+            <a:off x="3384000" y="1584000"/>
+            <a:ext cx="2628000" cy="576000"/>
+          </a:xfrm>
+          <a:prstGeom prst="roundRect">
+            <a:avLst/>
+          </a:prstGeom>
+          <a:solidFill>
+            <a:srgbClr val="4FB58B"/>
+          </a:solidFill>
+          <a:ln>
+            <a:noFill/>
+          </a:ln>
+          <a:effectLst/>
+        </p:spPr>
+        <p:style>
+          <a:lnRef idx="1">
+            <a:schemeClr val="accent1"/>
+          </a:lnRef>
+          <a:fillRef idx="3">
+            <a:schemeClr val="accent1"/>
+          </a:fillRef>
+          <a:effectRef idx="2">
+            <a:schemeClr val="accent1"/>
+          </a:effectRef>
+          <a:fontRef idx="minor">
+            <a:schemeClr val="lt1"/>
+          </a:fontRef>
+        </p:style>
+        <p:txBody>
+          <a:bodyPr rtlCol="0" anchor="ctr"/>
+          <a:lstStyle/>
+          <a:p>
+            <a:pPr algn="ctr"/>
+          </a:p>
+        </p:txBody>
+      </p:sp>
+      <p:pic>
+        <p:nvPicPr>
+          <p:cNvPr id="15" name="Picture 14" descr="pencil_bl.png"/>
+          <p:cNvPicPr>
+            <a:picLocks noChangeAspect="1"/>
+          </p:cNvPicPr>
+          <p:nvPr/>
+        </p:nvPicPr>
+        <p:blipFill>
+          <a:blip r:embed="rId4"/>
+          <a:stretch>
+            <a:fillRect/>
+          </a:stretch>
+        </p:blipFill>
+        <p:spPr>
+          <a:xfrm>
+            <a:off x="3528000" y="1710000"/>
+            <a:ext cx="324000" cy="324000"/>
+          </a:xfrm>
+          <a:prstGeom prst="rect">
+            <a:avLst/>
+          </a:prstGeom>
+        </p:spPr>
+      </p:pic>
+      <p:sp>
+        <p:nvSpPr>
+          <p:cNvPr id="16" name="TextBox 15"/>
+          <p:cNvSpPr txBox="1"/>
+          <p:nvPr/>
+        </p:nvSpPr>
+        <p:spPr>
+          <a:xfrm>
+            <a:off x="3924000" y="1584000"/>
+            <a:ext cx="2015999" cy="576000"/>
+          </a:xfrm>
+          <a:prstGeom prst="rect">
+            <a:avLst/>
+          </a:prstGeom>
+          <a:noFill/>
+        </p:spPr>
+        <p:txBody>
+          <a:bodyPr wrap="square" lIns="36000" rIns="36000" tIns="18000" bIns="18000" anchor="ctr">
+            <a:spAutoFit/>
+          </a:bodyPr>
+          <a:lstStyle/>
+          <a:p>
+            <a:pPr algn="l">
+              <a:lnSpc>
+                <a:spcPct val="110000"/>
+              </a:lnSpc>
+            </a:pPr>
+            <a:r>
+              <a:rPr sz="1500" b="1">
+                <a:solidFill>
+                  <a:srgbClr val="FFFFFF"/>
+                </a:solidFill>
+                <a:latin typeface="Poppins"/>
+              </a:rPr>
+              <a:t>Semaine 2</a:t>
+            </a:r>
+          </a:p>
+        </p:txBody>
+      </p:sp>
+      <p:sp>
+        <p:nvSpPr>
+          <p:cNvPr id="17" name="Rounded Rectangle 16"/>
+          <p:cNvSpPr/>
+          <p:nvPr/>
+        </p:nvSpPr>
+        <p:spPr>
+          <a:xfrm>
+            <a:off x="3384000" y="2304000"/>
+            <a:ext cx="2628000" cy="2880000"/>
+          </a:xfrm>
+          <a:prstGeom prst="roundRect">
+            <a:avLst>
+              <a:gd name="adj" fmla="val 6000"/>
+            </a:avLst>
+          </a:prstGeom>
+          <a:solidFill>
+            <a:srgbClr val="F4F4F2"/>
+          </a:solidFill>
+          <a:ln>
+            <a:noFill/>
+          </a:ln>
+          <a:effectLst/>
+        </p:spPr>
+        <p:style>
+          <a:lnRef idx="1">
+            <a:schemeClr val="accent1"/>
+          </a:lnRef>
+          <a:fillRef idx="3">
+            <a:schemeClr val="accent1"/>
+          </a:fillRef>
+          <a:effectRef idx="2">
+            <a:schemeClr val="accent1"/>
+          </a:effectRef>
+          <a:fontRef idx="minor">
+            <a:schemeClr val="lt1"/>
+          </a:fontRef>
+        </p:style>
+        <p:txBody>
+          <a:bodyPr rtlCol="0" anchor="ctr"/>
+          <a:lstStyle/>
+          <a:p>
+            <a:pPr algn="ctr"/>
+          </a:p>
+        </p:txBody>
+      </p:sp>
+      <p:sp>
+        <p:nvSpPr>
+          <p:cNvPr id="18" name="TextBox 17"/>
+          <p:cNvSpPr txBox="1"/>
+          <p:nvPr/>
+        </p:nvSpPr>
+        <p:spPr>
+          <a:xfrm>
+            <a:off x="3528000" y="2448000"/>
+            <a:ext cx="2376000" cy="2664000"/>
+          </a:xfrm>
+          <a:prstGeom prst="rect">
+            <a:avLst/>
+          </a:prstGeom>
+          <a:noFill/>
+        </p:spPr>
+        <p:txBody>
+          <a:bodyPr wrap="square">
+            <a:spAutoFit/>
+          </a:bodyPr>
+          <a:lstStyle/>
+          <a:p>
+            <a:pPr>
+              <a:spcAft>
+                <a:spcPts val="700"/>
+              </a:spcAft>
+            </a:pPr>
+            <a:r>
+              <a:rPr sz="800">
+                <a:solidFill>
+                  <a:srgbClr val="FD8103"/>
+                </a:solidFill>
+                <a:latin typeface="Poppins"/>
+              </a:rPr>
+              <a:t>■  </a:t>
+            </a:r>
+            <a:r>
+              <a:rPr sz="1200">
+                <a:solidFill>
+                  <a:srgbClr val="111111"/>
+                </a:solidFill>
+                <a:latin typeface="Poppins"/>
+              </a:rPr>
+              <a:t>Publier 2 avant / après</a:t>
+            </a:r>
+          </a:p>
+          <a:p>
+            <a:pPr>
+              <a:spcAft>
+                <a:spcPts val="700"/>
+              </a:spcAft>
+            </a:pPr>
+            <a:r>
+              <a:rPr sz="800">
+                <a:solidFill>
+                  <a:srgbClr val="FD8103"/>
+                </a:solidFill>
+                <a:latin typeface="Poppins"/>
+              </a:rPr>
+              <a:t>■  </a:t>
+            </a:r>
+            <a:r>
+              <a:rPr sz="1200">
+                <a:solidFill>
+                  <a:srgbClr val="111111"/>
+                </a:solidFill>
+                <a:latin typeface="Poppins"/>
+              </a:rPr>
+              <a:t>Répondre à chaque commentaire</a:t>
+            </a:r>
+          </a:p>
+          <a:p>
+            <a:pPr>
+              <a:spcAft>
+                <a:spcPts val="700"/>
+              </a:spcAft>
+            </a:pPr>
+            <a:r>
+              <a:rPr sz="800">
+                <a:solidFill>
+                  <a:srgbClr val="FD8103"/>
+                </a:solidFill>
+                <a:latin typeface="Poppins"/>
+              </a:rPr>
+              <a:t>■  </a:t>
+            </a:r>
+            <a:r>
+              <a:rPr sz="1200">
+                <a:solidFill>
+                  <a:srgbClr val="111111"/>
+                </a:solidFill>
+                <a:latin typeface="Poppins"/>
+              </a:rPr>
+              <a:t>Premier sondage</a:t>
+            </a:r>
+          </a:p>
+        </p:txBody>
+      </p:sp>
+      <p:sp>
+        <p:nvSpPr>
+          <p:cNvPr id="19" name="Rounded Rectangle 18"/>
+          <p:cNvSpPr/>
+          <p:nvPr/>
+        </p:nvSpPr>
+        <p:spPr>
+          <a:xfrm>
+            <a:off x="6192000" y="1584000"/>
+            <a:ext cx="2628000" cy="576000"/>
+          </a:xfrm>
+          <a:prstGeom prst="roundRect">
+            <a:avLst/>
+          </a:prstGeom>
+          <a:solidFill>
+            <a:srgbClr val="FD8103"/>
+          </a:solidFill>
+          <a:ln>
+            <a:noFill/>
+          </a:ln>
+          <a:effectLst/>
+        </p:spPr>
+        <p:style>
+          <a:lnRef idx="1">
+            <a:schemeClr val="accent1"/>
+          </a:lnRef>
+          <a:fillRef idx="3">
+            <a:schemeClr val="accent1"/>
+          </a:fillRef>
+          <a:effectRef idx="2">
+            <a:schemeClr val="accent1"/>
+          </a:effectRef>
+          <a:fontRef idx="minor">
+            <a:schemeClr val="lt1"/>
+          </a:fontRef>
+        </p:style>
+        <p:txBody>
+          <a:bodyPr rtlCol="0" anchor="ctr"/>
+          <a:lstStyle/>
+          <a:p>
+            <a:pPr algn="ctr"/>
+          </a:p>
+        </p:txBody>
+      </p:sp>
+      <p:pic>
+        <p:nvPicPr>
+          <p:cNvPr id="20" name="Picture 19" descr="video_bl.png"/>
+          <p:cNvPicPr>
+            <a:picLocks noChangeAspect="1"/>
+          </p:cNvPicPr>
+          <p:nvPr/>
+        </p:nvPicPr>
+        <p:blipFill>
+          <a:blip r:embed="rId5"/>
+          <a:stretch>
+            <a:fillRect/>
+          </a:stretch>
+        </p:blipFill>
+        <p:spPr>
+          <a:xfrm>
+            <a:off x="6336000" y="1710000"/>
+            <a:ext cx="324000" cy="324000"/>
+          </a:xfrm>
+          <a:prstGeom prst="rect">
+            <a:avLst/>
+          </a:prstGeom>
+        </p:spPr>
+      </p:pic>
+      <p:sp>
+        <p:nvSpPr>
+          <p:cNvPr id="21" name="TextBox 20"/>
+          <p:cNvSpPr txBox="1"/>
+          <p:nvPr/>
+        </p:nvSpPr>
+        <p:spPr>
+          <a:xfrm>
+            <a:off x="6732000" y="1584000"/>
+            <a:ext cx="2015999" cy="576000"/>
+          </a:xfrm>
+          <a:prstGeom prst="rect">
+            <a:avLst/>
+          </a:prstGeom>
+          <a:noFill/>
+        </p:spPr>
+        <p:txBody>
+          <a:bodyPr wrap="square" lIns="36000" rIns="36000" tIns="18000" bIns="18000" anchor="ctr">
+            <a:spAutoFit/>
+          </a:bodyPr>
+          <a:lstStyle/>
+          <a:p>
+            <a:pPr algn="l">
+              <a:lnSpc>
+                <a:spcPct val="110000"/>
+              </a:lnSpc>
+            </a:pPr>
+            <a:r>
+              <a:rPr sz="1500" b="1">
+                <a:solidFill>
+                  <a:srgbClr val="FFFFFF"/>
+                </a:solidFill>
+                <a:latin typeface="Poppins"/>
+              </a:rPr>
+              <a:t>Semaine 3</a:t>
+            </a:r>
+          </a:p>
+        </p:txBody>
+      </p:sp>
+      <p:sp>
+        <p:nvSpPr>
+          <p:cNvPr id="22" name="Rounded Rectangle 21"/>
+          <p:cNvSpPr/>
+          <p:nvPr/>
+        </p:nvSpPr>
+        <p:spPr>
+          <a:xfrm>
+            <a:off x="6192000" y="2304000"/>
+            <a:ext cx="2628000" cy="2880000"/>
+          </a:xfrm>
+          <a:prstGeom prst="roundRect">
+            <a:avLst>
+              <a:gd name="adj" fmla="val 6000"/>
+            </a:avLst>
+          </a:prstGeom>
+          <a:solidFill>
+            <a:srgbClr val="F4F4F2"/>
+          </a:solidFill>
+          <a:ln>
+            <a:noFill/>
+          </a:ln>
+          <a:effectLst/>
+        </p:spPr>
+        <p:style>
+          <a:lnRef idx="1">
+            <a:schemeClr val="accent1"/>
+          </a:lnRef>
+          <a:fillRef idx="3">
+            <a:schemeClr val="accent1"/>
+          </a:fillRef>
+          <a:effectRef idx="2">
+            <a:schemeClr val="accent1"/>
+          </a:effectRef>
+          <a:fontRef idx="minor">
+            <a:schemeClr val="lt1"/>
+          </a:fontRef>
+        </p:style>
+        <p:txBody>
+          <a:bodyPr rtlCol="0" anchor="ctr"/>
+          <a:lstStyle/>
+          <a:p>
+            <a:pPr algn="ctr"/>
+          </a:p>
+        </p:txBody>
+      </p:sp>
+      <p:sp>
+        <p:nvSpPr>
+          <p:cNvPr id="23" name="TextBox 22"/>
+          <p:cNvSpPr txBox="1"/>
+          <p:nvPr/>
+        </p:nvSpPr>
+        <p:spPr>
+          <a:xfrm>
+            <a:off x="6336000" y="2448000"/>
+            <a:ext cx="2376000" cy="2664000"/>
+          </a:xfrm>
+          <a:prstGeom prst="rect">
+            <a:avLst/>
+          </a:prstGeom>
+          <a:noFill/>
+        </p:spPr>
+        <p:txBody>
+          <a:bodyPr wrap="square">
+            <a:spAutoFit/>
+          </a:bodyPr>
+          <a:lstStyle/>
+          <a:p>
+            <a:pPr>
+              <a:spcAft>
+                <a:spcPts val="700"/>
+              </a:spcAft>
+            </a:pPr>
+            <a:r>
+              <a:rPr sz="800">
+                <a:solidFill>
+                  <a:srgbClr val="FD8103"/>
+                </a:solidFill>
+                <a:latin typeface="Poppins"/>
+              </a:rPr>
+              <a:t>■  </a:t>
+            </a:r>
+            <a:r>
+              <a:rPr sz="1200">
+                <a:solidFill>
+                  <a:srgbClr val="111111"/>
+                </a:solidFill>
+                <a:latin typeface="Poppins"/>
+              </a:rPr>
+              <a:t>Tourner 2 vidéos à l’usine</a:t>
+            </a:r>
+          </a:p>
+          <a:p>
+            <a:pPr>
+              <a:spcAft>
+                <a:spcPts val="700"/>
+              </a:spcAft>
+            </a:pPr>
+            <a:r>
+              <a:rPr sz="800">
+                <a:solidFill>
+                  <a:srgbClr val="FD8103"/>
+                </a:solidFill>
+                <a:latin typeface="Poppins"/>
+              </a:rPr>
+              <a:t>■  </a:t>
+            </a:r>
+            <a:r>
+              <a:rPr sz="1200">
+                <a:solidFill>
+                  <a:srgbClr val="111111"/>
+                </a:solidFill>
+                <a:latin typeface="Poppins"/>
+              </a:rPr>
+              <a:t>Publier la réponse du sondage</a:t>
+            </a:r>
+          </a:p>
+          <a:p>
+            <a:pPr>
+              <a:spcAft>
+                <a:spcPts val="700"/>
+              </a:spcAft>
+            </a:pPr>
+            <a:r>
+              <a:rPr sz="800">
+                <a:solidFill>
+                  <a:srgbClr val="FD8103"/>
+                </a:solidFill>
+                <a:latin typeface="Poppins"/>
+              </a:rPr>
+              <a:t>■  </a:t>
+            </a:r>
+            <a:r>
+              <a:rPr sz="1200">
+                <a:solidFill>
+                  <a:srgbClr val="111111"/>
+                </a:solidFill>
+                <a:latin typeface="Poppins"/>
+              </a:rPr>
+              <a:t>Publier 2 avant / après</a:t>
+            </a:r>
+          </a:p>
+        </p:txBody>
+      </p:sp>
+      <p:sp>
+        <p:nvSpPr>
+          <p:cNvPr id="24" name="Rounded Rectangle 23"/>
+          <p:cNvSpPr/>
+          <p:nvPr/>
+        </p:nvSpPr>
+        <p:spPr>
+          <a:xfrm>
+            <a:off x="9000000" y="1584000"/>
+            <a:ext cx="2628000" cy="576000"/>
+          </a:xfrm>
+          <a:prstGeom prst="roundRect">
+            <a:avLst/>
+          </a:prstGeom>
+          <a:solidFill>
+            <a:srgbClr val="4FB58B"/>
+          </a:solidFill>
+          <a:ln>
+            <a:noFill/>
+          </a:ln>
+          <a:effectLst/>
+        </p:spPr>
+        <p:style>
+          <a:lnRef idx="1">
+            <a:schemeClr val="accent1"/>
+          </a:lnRef>
+          <a:fillRef idx="3">
+            <a:schemeClr val="accent1"/>
+          </a:fillRef>
+          <a:effectRef idx="2">
+            <a:schemeClr val="accent1"/>
+          </a:effectRef>
+          <a:fontRef idx="minor">
+            <a:schemeClr val="lt1"/>
+          </a:fontRef>
+        </p:style>
+        <p:txBody>
+          <a:bodyPr rtlCol="0" anchor="ctr"/>
+          <a:lstStyle/>
+          <a:p>
+            <a:pPr algn="ctr"/>
+          </a:p>
+        </p:txBody>
+      </p:sp>
+      <p:pic>
+        <p:nvPicPr>
+          <p:cNvPr id="25" name="Picture 24" descr="trending-up_bl.png"/>
+          <p:cNvPicPr>
+            <a:picLocks noChangeAspect="1"/>
+          </p:cNvPicPr>
+          <p:nvPr/>
+        </p:nvPicPr>
+        <p:blipFill>
+          <a:blip r:embed="rId6"/>
+          <a:stretch>
+            <a:fillRect/>
+          </a:stretch>
+        </p:blipFill>
+        <p:spPr>
+          <a:xfrm>
+            <a:off x="9144000" y="1710000"/>
+            <a:ext cx="324000" cy="324000"/>
+          </a:xfrm>
+          <a:prstGeom prst="rect">
+            <a:avLst/>
+          </a:prstGeom>
+        </p:spPr>
+      </p:pic>
+      <p:sp>
+        <p:nvSpPr>
+          <p:cNvPr id="26" name="TextBox 25"/>
+          <p:cNvSpPr txBox="1"/>
+          <p:nvPr/>
+        </p:nvSpPr>
+        <p:spPr>
+          <a:xfrm>
+            <a:off x="9540000" y="1584000"/>
+            <a:ext cx="2015999" cy="576000"/>
+          </a:xfrm>
+          <a:prstGeom prst="rect">
+            <a:avLst/>
+          </a:prstGeom>
+          <a:noFill/>
+        </p:spPr>
+        <p:txBody>
+          <a:bodyPr wrap="square" lIns="36000" rIns="36000" tIns="18000" bIns="18000" anchor="ctr">
+            <a:spAutoFit/>
+          </a:bodyPr>
+          <a:lstStyle/>
+          <a:p>
+            <a:pPr algn="l">
+              <a:lnSpc>
+                <a:spcPct val="110000"/>
+              </a:lnSpc>
+            </a:pPr>
+            <a:r>
+              <a:rPr sz="1500" b="1">
+                <a:solidFill>
+                  <a:srgbClr val="FFFFFF"/>
+                </a:solidFill>
+                <a:latin typeface="Poppins"/>
+              </a:rPr>
+              <a:t>Semaine 4</a:t>
+            </a:r>
+          </a:p>
+        </p:txBody>
+      </p:sp>
+      <p:sp>
+        <p:nvSpPr>
+          <p:cNvPr id="27" name="Rounded Rectangle 26"/>
+          <p:cNvSpPr/>
+          <p:nvPr/>
+        </p:nvSpPr>
+        <p:spPr>
+          <a:xfrm>
+            <a:off x="9000000" y="2304000"/>
+            <a:ext cx="2628000" cy="2880000"/>
+          </a:xfrm>
+          <a:prstGeom prst="roundRect">
+            <a:avLst>
+              <a:gd name="adj" fmla="val 6000"/>
+            </a:avLst>
+          </a:prstGeom>
+          <a:solidFill>
+            <a:srgbClr val="F4F4F2"/>
+          </a:solidFill>
+          <a:ln>
+            <a:noFill/>
+          </a:ln>
+          <a:effectLst/>
+        </p:spPr>
+        <p:style>
+          <a:lnRef idx="1">
+            <a:schemeClr val="accent1"/>
+          </a:lnRef>
+          <a:fillRef idx="3">
+            <a:schemeClr val="accent1"/>
+          </a:fillRef>
+          <a:effectRef idx="2">
+            <a:schemeClr val="accent1"/>
+          </a:effectRef>
+          <a:fontRef idx="minor">
+            <a:schemeClr val="lt1"/>
+          </a:fontRef>
+        </p:style>
+        <p:txBody>
+          <a:bodyPr rtlCol="0" anchor="ctr"/>
+          <a:lstStyle/>
+          <a:p>
+            <a:pPr algn="ctr"/>
+          </a:p>
+        </p:txBody>
+      </p:sp>
+      <p:sp>
+        <p:nvSpPr>
+          <p:cNvPr id="28" name="TextBox 27"/>
+          <p:cNvSpPr txBox="1"/>
+          <p:nvPr/>
+        </p:nvSpPr>
+        <p:spPr>
+          <a:xfrm>
+            <a:off x="9144000" y="2448000"/>
+            <a:ext cx="2376000" cy="2664000"/>
+          </a:xfrm>
+          <a:prstGeom prst="rect">
+            <a:avLst/>
+          </a:prstGeom>
+          <a:noFill/>
+        </p:spPr>
+        <p:txBody>
+          <a:bodyPr wrap="square">
+            <a:spAutoFit/>
+          </a:bodyPr>
+          <a:lstStyle/>
+          <a:p>
+            <a:pPr>
+              <a:spcAft>
+                <a:spcPts val="700"/>
+              </a:spcAft>
+            </a:pPr>
+            <a:r>
+              <a:rPr sz="800">
+                <a:solidFill>
+                  <a:srgbClr val="FD8103"/>
+                </a:solidFill>
+                <a:latin typeface="Poppins"/>
+              </a:rPr>
+              <a:t>■  </a:t>
+            </a:r>
+            <a:r>
+              <a:rPr sz="1200">
+                <a:solidFill>
+                  <a:srgbClr val="111111"/>
+                </a:solidFill>
+                <a:latin typeface="Poppins"/>
+              </a:rPr>
+              <a:t>Comparer aux 8 J’aime de départ</a:t>
+            </a:r>
+          </a:p>
+          <a:p>
+            <a:pPr>
+              <a:spcAft>
+                <a:spcPts val="700"/>
+              </a:spcAft>
+            </a:pPr>
+            <a:r>
+              <a:rPr sz="800">
+                <a:solidFill>
+                  <a:srgbClr val="FD8103"/>
+                </a:solidFill>
+                <a:latin typeface="Poppins"/>
+              </a:rPr>
+              <a:t>■  </a:t>
+            </a:r>
+            <a:r>
+              <a:rPr sz="1200">
+                <a:solidFill>
+                  <a:srgbClr val="111111"/>
+                </a:solidFill>
+                <a:latin typeface="Poppins"/>
+              </a:rPr>
+              <a:t>Compter les demandes de devis</a:t>
+            </a:r>
+          </a:p>
+          <a:p>
+            <a:pPr>
+              <a:spcAft>
+                <a:spcPts val="700"/>
+              </a:spcAft>
+            </a:pPr>
+            <a:r>
+              <a:rPr sz="800">
+                <a:solidFill>
+                  <a:srgbClr val="FD8103"/>
+                </a:solidFill>
+                <a:latin typeface="Poppins"/>
+              </a:rPr>
+              <a:t>■  </a:t>
+            </a:r>
+            <a:r>
+              <a:rPr sz="1200">
+                <a:solidFill>
+                  <a:srgbClr val="111111"/>
+                </a:solidFill>
+                <a:latin typeface="Poppins"/>
+              </a:rPr>
+              <a:t>Préparer décembre</a:t>
+            </a:r>
+          </a:p>
+        </p:txBody>
+      </p:sp>
+      <p:sp>
+        <p:nvSpPr>
+          <p:cNvPr id="29" name="Rounded Rectangle 28"/>
+          <p:cNvSpPr/>
+          <p:nvPr/>
+        </p:nvSpPr>
+        <p:spPr>
+          <a:xfrm>
+            <a:off x="576000" y="5364000"/>
+            <a:ext cx="11052000" cy="864000"/>
+          </a:xfrm>
+          <a:prstGeom prst="roundRect">
+            <a:avLst>
+              <a:gd name="adj" fmla="val 6000"/>
+            </a:avLst>
+          </a:prstGeom>
+          <a:solidFill>
+            <a:srgbClr val="14251C"/>
+          </a:solidFill>
+          <a:ln>
+            <a:noFill/>
+          </a:ln>
+          <a:effectLst/>
+        </p:spPr>
+        <p:style>
+          <a:lnRef idx="1">
+            <a:schemeClr val="accent1"/>
+          </a:lnRef>
+          <a:fillRef idx="3">
+            <a:schemeClr val="accent1"/>
+          </a:fillRef>
+          <a:effectRef idx="2">
+            <a:schemeClr val="accent1"/>
+          </a:effectRef>
+          <a:fontRef idx="minor">
+            <a:schemeClr val="lt1"/>
+          </a:fontRef>
+        </p:style>
+        <p:txBody>
+          <a:bodyPr rtlCol="0" anchor="ctr"/>
+          <a:lstStyle/>
+          <a:p>
+            <a:pPr algn="ctr"/>
+          </a:p>
+        </p:txBody>
+      </p:sp>
+      <p:pic>
+        <p:nvPicPr>
+          <p:cNvPr id="30" name="Picture 29" descr="target-arrow_bl.png"/>
+          <p:cNvPicPr>
+            <a:picLocks noChangeAspect="1"/>
+          </p:cNvPicPr>
+          <p:nvPr/>
+        </p:nvPicPr>
+        <p:blipFill>
+          <a:blip r:embed="rId7"/>
+          <a:stretch>
+            <a:fillRect/>
+          </a:stretch>
+        </p:blipFill>
+        <p:spPr>
+          <a:xfrm>
+            <a:off x="792000" y="5544000"/>
+            <a:ext cx="503999" cy="503999"/>
+          </a:xfrm>
+          <a:prstGeom prst="rect">
+            <a:avLst/>
+          </a:prstGeom>
+        </p:spPr>
+      </p:pic>
+      <p:sp>
+        <p:nvSpPr>
+          <p:cNvPr id="31" name="TextBox 30"/>
+          <p:cNvSpPr txBox="1"/>
+          <p:nvPr/>
+        </p:nvSpPr>
+        <p:spPr>
+          <a:xfrm>
+            <a:off x="1440000" y="5364000"/>
+            <a:ext cx="10008000" cy="864000"/>
+          </a:xfrm>
+          <a:prstGeom prst="rect">
+            <a:avLst/>
+          </a:prstGeom>
+          <a:noFill/>
+        </p:spPr>
+        <p:txBody>
+          <a:bodyPr wrap="square" lIns="36000" rIns="36000" tIns="18000" bIns="18000" anchor="ctr">
+            <a:spAutoFit/>
+          </a:bodyPr>
+          <a:lstStyle/>
+          <a:p>
+            <a:pPr algn="l">
+              <a:lnSpc>
+                <a:spcPct val="110000"/>
+              </a:lnSpc>
+            </a:pPr>
+            <a:r>
+              <a:rPr sz="1300" b="1">
+                <a:solidFill>
+                  <a:srgbClr val="FFFFFF"/>
+                </a:solidFill>
+                <a:latin typeface="Poppins"/>
+              </a:rPr>
+              <a:t>Objectif proposé à 30 jours : passer de 8 à 20 J’aime médians sur LinkedIn, et compter chaque demande de devis venue des réseaux.</a:t>
+            </a:r>
+          </a:p>
+        </p:txBody>
+      </p:sp>
+    </p:spTree>
+  </p:cSld>
+  <p:clrMapOvr>
+    <a:masterClrMapping/>
+  </p:clrMapOvr>
+</p:sld>
+</file>
+
+<file path=ppt/slides/slide24.xml><?xml version="1.0" encoding="utf-8"?>
+<p:sld xmlns:a="http://schemas.openxmlformats.org/drawingml/2006/main" xmlns:p="http://schemas.openxmlformats.org/presentationml/2006/main" xmlns:r="http://schemas.openxmlformats.org/officeDocument/2006/relationships">
+  <p:cSld>
+    <p:spTree>
+      <p:nvGrpSpPr>
+        <p:cNvPr id="1" name=""/>
+        <p:cNvGrpSpPr/>
+        <p:nvPr/>
+      </p:nvGrpSpPr>
+      <p:grpSpPr/>
+      <p:sp>
+        <p:nvSpPr>
+          <p:cNvPr id="2" name="Rectangle 1"/>
+          <p:cNvSpPr/>
+          <p:nvPr/>
+        </p:nvSpPr>
+        <p:spPr>
+          <a:xfrm>
+            <a:off x="0" y="0"/>
+            <a:ext cx="180000" cy="6858000"/>
+          </a:xfrm>
+          <a:prstGeom prst="rect">
+            <a:avLst/>
+          </a:prstGeom>
+          <a:solidFill>
+            <a:srgbClr val="FD8103"/>
+          </a:solidFill>
+          <a:ln>
+            <a:noFill/>
+          </a:ln>
+          <a:effectLst/>
+        </p:spPr>
+        <p:style>
+          <a:lnRef idx="1">
+            <a:schemeClr val="accent1"/>
+          </a:lnRef>
+          <a:fillRef idx="3">
+            <a:schemeClr val="accent1"/>
+          </a:fillRef>
+          <a:effectRef idx="2">
+            <a:schemeClr val="accent1"/>
+          </a:effectRef>
+          <a:fontRef idx="minor">
+            <a:schemeClr val="lt1"/>
+          </a:fontRef>
+        </p:style>
+        <p:txBody>
+          <a:bodyPr rtlCol="0" anchor="ctr"/>
+          <a:lstStyle/>
+          <a:p>
+            <a:pPr algn="ctr"/>
+          </a:p>
+        </p:txBody>
+      </p:sp>
+      <p:pic>
+        <p:nvPicPr>
+          <p:cNvPr id="3" name="Picture 2" descr="logo-cotiplast.png"/>
+          <p:cNvPicPr>
+            <a:picLocks noChangeAspect="1"/>
+          </p:cNvPicPr>
+          <p:nvPr/>
+        </p:nvPicPr>
+        <p:blipFill>
+          <a:blip r:embed="rId2"/>
+          <a:stretch>
+            <a:fillRect/>
+          </a:stretch>
+        </p:blipFill>
+        <p:spPr>
+          <a:xfrm>
+            <a:off x="10593875" y="216000"/>
+            <a:ext cx="820489" cy="576000"/>
+          </a:xfrm>
+          <a:prstGeom prst="rect">
+            <a:avLst/>
+          </a:prstGeom>
+        </p:spPr>
+      </p:pic>
+      <p:sp>
+        <p:nvSpPr>
+          <p:cNvPr id="4" name="TextBox 3"/>
+          <p:cNvSpPr txBox="1"/>
+          <p:nvPr/>
+        </p:nvSpPr>
+        <p:spPr>
+          <a:xfrm>
+            <a:off x="576000" y="324000"/>
+            <a:ext cx="8640000" cy="288000"/>
+          </a:xfrm>
+          <a:prstGeom prst="rect">
+            <a:avLst/>
+          </a:prstGeom>
+          <a:noFill/>
+        </p:spPr>
+        <p:txBody>
+          <a:bodyPr wrap="square" lIns="36000" rIns="36000" tIns="18000" bIns="18000" anchor="t">
+            <a:spAutoFit/>
+          </a:bodyPr>
+          <a:lstStyle/>
+          <a:p>
+            <a:pPr algn="l">
+              <a:lnSpc>
+                <a:spcPct val="110000"/>
+              </a:lnSpc>
+            </a:pPr>
+            <a:r>
+              <a:rPr sz="1100" b="1">
+                <a:solidFill>
+                  <a:srgbClr val="FD8103"/>
+                </a:solidFill>
+                <a:latin typeface="Poppins"/>
+              </a:rPr>
+              <a:t>TABLEAU DE BORD</a:t>
+            </a:r>
+          </a:p>
+        </p:txBody>
+      </p:sp>
+      <p:sp>
+        <p:nvSpPr>
+          <p:cNvPr id="5" name="TextBox 4"/>
+          <p:cNvSpPr txBox="1"/>
+          <p:nvPr/>
+        </p:nvSpPr>
+        <p:spPr>
+          <a:xfrm>
+            <a:off x="576000" y="576000"/>
+            <a:ext cx="9180000" cy="720000"/>
+          </a:xfrm>
+          <a:prstGeom prst="rect">
+            <a:avLst/>
+          </a:prstGeom>
+          <a:noFill/>
+        </p:spPr>
+        <p:txBody>
+          <a:bodyPr wrap="square" lIns="36000" rIns="36000" tIns="18000" bIns="18000" anchor="t">
+            <a:spAutoFit/>
+          </a:bodyPr>
+          <a:lstStyle/>
+          <a:p>
+            <a:pPr algn="l">
+              <a:lnSpc>
+                <a:spcPct val="110000"/>
+              </a:lnSpc>
+            </a:pPr>
+            <a:r>
+              <a:rPr sz="2500" b="1">
+                <a:solidFill>
+                  <a:srgbClr val="111111"/>
+                </a:solidFill>
+                <a:latin typeface="Poppins"/>
+              </a:rPr>
+              <a:t>Les chiffres à suivre chaque semaine</a:t>
+            </a:r>
+          </a:p>
+        </p:txBody>
+      </p:sp>
+      <p:sp>
+        <p:nvSpPr>
+          <p:cNvPr id="6" name="Rectangle 5"/>
+          <p:cNvSpPr/>
+          <p:nvPr/>
+        </p:nvSpPr>
+        <p:spPr>
+          <a:xfrm>
+            <a:off x="576000" y="1278000"/>
+            <a:ext cx="792000" cy="50400"/>
+          </a:xfrm>
+          <a:prstGeom prst="rect">
+            <a:avLst/>
+          </a:prstGeom>
+          <a:solidFill>
+            <a:srgbClr val="4FB58B"/>
+          </a:solidFill>
+          <a:ln>
+            <a:noFill/>
+          </a:ln>
+          <a:effectLst/>
+        </p:spPr>
+        <p:style>
+          <a:lnRef idx="1">
+            <a:schemeClr val="accent1"/>
+          </a:lnRef>
+          <a:fillRef idx="3">
+            <a:schemeClr val="accent1"/>
+          </a:fillRef>
+          <a:effectRef idx="2">
+            <a:schemeClr val="accent1"/>
+          </a:effectRef>
+          <a:fontRef idx="minor">
+            <a:schemeClr val="lt1"/>
+          </a:fontRef>
+        </p:style>
+        <p:txBody>
+          <a:bodyPr rtlCol="0" anchor="ctr"/>
+          <a:lstStyle/>
+          <a:p>
+            <a:pPr algn="ctr"/>
+          </a:p>
+        </p:txBody>
+      </p:sp>
+      <p:sp>
+        <p:nvSpPr>
+          <p:cNvPr id="7" name="TextBox 6"/>
+          <p:cNvSpPr txBox="1"/>
+          <p:nvPr/>
+        </p:nvSpPr>
+        <p:spPr>
+          <a:xfrm>
+            <a:off x="10572119" y="6498000"/>
+            <a:ext cx="1296000" cy="216000"/>
+          </a:xfrm>
+          <a:prstGeom prst="rect">
+            <a:avLst/>
+          </a:prstGeom>
+          <a:noFill/>
+        </p:spPr>
+        <p:txBody>
+          <a:bodyPr wrap="square" lIns="36000" rIns="36000" tIns="18000" bIns="18000" anchor="t">
+            <a:spAutoFit/>
+          </a:bodyPr>
+          <a:lstStyle/>
+          <a:p>
+            <a:pPr algn="r">
+              <a:lnSpc>
+                <a:spcPct val="110000"/>
+              </a:lnSpc>
+            </a:pPr>
+            <a:r>
+              <a:rPr sz="900" b="0">
+                <a:solidFill>
+                  <a:srgbClr val="5A5A5A"/>
+                </a:solidFill>
+                <a:latin typeface="Poppins"/>
+              </a:rPr>
+              <a:t>24 / 23</a:t>
             </a:r>
           </a:p>
         </p:txBody>
@@ -20447,7 +21663,7 @@
 </p:sld>
 </file>
 
-<file path=ppt/slides/slide23.xml><?xml version="1.0" encoding="utf-8"?>
+<file path=ppt/slides/slide25.xml><?xml version="1.0" encoding="utf-8"?>
 <p:sld xmlns:a="http://schemas.openxmlformats.org/drawingml/2006/main" xmlns:p="http://schemas.openxmlformats.org/presentationml/2006/main" xmlns:r="http://schemas.openxmlformats.org/officeDocument/2006/relationships">
   <p:cSld>
     <p:spTree>
@@ -20681,7 +21897,7 @@
                 </a:solidFill>
                 <a:latin typeface="Poppins"/>
               </a:rPr>
-              <a:t>23 / 23</a:t>
+              <a:t>25 / 23</a:t>
             </a:r>
           </a:p>
         </p:txBody>
